--- a/Salesteq-Raiffeisen-Scenario.pptx
+++ b/Salesteq-Raiffeisen-Scenario.pptx
@@ -9,6 +9,8 @@
     <p:sldId id="257" r:id="rId8"/>
     <p:sldId id="258" r:id="rId9"/>
     <p:sldId id="259" r:id="rId10"/>
+    <p:sldId id="260" r:id="rId11"/>
+    <p:sldId id="261" r:id="rId12"/>
   </p:sldIdLst>
   <p:sldSz cx="14630400" cy="8229600" type="screen4x3"/>
   <p:notesSz cx="6858000" cy="9144000"/>
@@ -4120,7 +4122,7 @@
               </a:defRPr>
             </a:pPr>
             <a:r>
-              <a:t>1 / 4</a:t>
+              <a:t>1 / 6</a:t>
             </a:r>
           </a:p>
         </p:txBody>
@@ -4139,7 +4141,7 @@
     <p:bg>
       <p:bgPr>
         <a:solidFill>
-          <a:srgbClr val="FFFFFF"/>
+          <a:srgbClr val="1A1A2E"/>
         </a:solidFill>
         <a:effectLst/>
       </p:bgPr>
@@ -4185,7 +4187,7 @@
               </a:defRPr>
             </a:pPr>
             <a:r>
-              <a:t>SZENARIO</a:t>
+              <a:t>VISION</a:t>
             </a:r>
           </a:p>
         </p:txBody>
@@ -4199,7 +4201,7 @@
         <p:spPr>
           <a:xfrm>
             <a:off x="731520" y="822960"/>
-            <a:ext cx="12801600" cy="548640"/>
+            <a:ext cx="12801600" cy="731520"/>
           </a:xfrm>
           <a:prstGeom prst="rect">
             <a:avLst/>
@@ -4218,27 +4220,66 @@
               </a:spcAft>
               <a:defRPr sz="3400" b="0">
                 <a:solidFill>
-                  <a:srgbClr val="1A1A2E"/>
-                </a:solidFill>
-                <a:latin typeface="Inter"/>
-              </a:defRPr>
-            </a:pPr>
-            <a:r>
-              <a:t>Ein Tag im Leben eines Kundenberaters</a:t>
-            </a:r>
-          </a:p>
-        </p:txBody>
-      </p:sp>
-      <p:sp>
-        <p:nvSpPr>
-          <p:cNvPr id="4" name="Rounded Rectangle 3"/>
+                  <a:srgbClr val="FFFFFF"/>
+                </a:solidFill>
+                <a:latin typeface="Inter"/>
+              </a:defRPr>
+            </a:pPr>
+            <a:r>
+              <a:t>AI im Vertrieb: Das Gesamtbild</a:t>
+            </a:r>
+          </a:p>
+        </p:txBody>
+      </p:sp>
+      <p:sp>
+        <p:nvSpPr>
+          <p:cNvPr id="4" name="TextBox 3"/>
+          <p:cNvSpPr txBox="1"/>
+          <p:nvPr/>
+        </p:nvSpPr>
+        <p:spPr>
+          <a:xfrm>
+            <a:off x="731520" y="1417320"/>
+            <a:ext cx="12801600" cy="365760"/>
+          </a:xfrm>
+          <a:prstGeom prst="rect">
+            <a:avLst/>
+          </a:prstGeom>
+          <a:noFill/>
+        </p:spPr>
+        <p:txBody>
+          <a:bodyPr wrap="square" anchor="t">
+            <a:spAutoFit/>
+          </a:bodyPr>
+          <a:lstStyle/>
+          <a:p>
+            <a:pPr algn="l">
+              <a:spcAft>
+                <a:spcPts val="0"/>
+              </a:spcAft>
+              <a:defRPr sz="1400" b="0">
+                <a:solidFill>
+                  <a:srgbClr val="9CA3AF"/>
+                </a:solidFill>
+                <a:latin typeface="Inter"/>
+              </a:defRPr>
+            </a:pPr>
+            <a:r>
+              <a:t>Was heute schon möglich ist, was kommt — und wo Raiffeisen sich positionieren kann.</a:t>
+            </a:r>
+          </a:p>
+        </p:txBody>
+      </p:sp>
+      <p:sp>
+        <p:nvSpPr>
+          <p:cNvPr id="5" name="Rounded Rectangle 4"/>
           <p:cNvSpPr/>
           <p:nvPr/>
         </p:nvSpPr>
         <p:spPr>
           <a:xfrm>
-            <a:off x="731520" y="1645920"/>
-            <a:ext cx="6400800" cy="5943600"/>
+            <a:off x="731520" y="2011680"/>
+            <a:ext cx="4297680" cy="5486400"/>
           </a:xfrm>
           <a:prstGeom prst="roundRect">
             <a:avLst>
@@ -4246,7 +4287,7 @@
             </a:avLst>
           </a:prstGeom>
           <a:solidFill>
-            <a:srgbClr val="F0EFE8"/>
+            <a:srgbClr val="222238"/>
           </a:solidFill>
           <a:ln>
             <a:noFill/>
@@ -4276,436 +4317,14 @@
       </p:sp>
       <p:sp>
         <p:nvSpPr>
-          <p:cNvPr id="5" name="TextBox 4"/>
-          <p:cNvSpPr txBox="1"/>
-          <p:nvPr/>
-        </p:nvSpPr>
-        <p:spPr>
-          <a:xfrm>
-            <a:off x="1005840" y="1783080"/>
-            <a:ext cx="2743200" cy="228600"/>
-          </a:xfrm>
-          <a:prstGeom prst="rect">
-            <a:avLst/>
-          </a:prstGeom>
-          <a:noFill/>
-        </p:spPr>
-        <p:txBody>
-          <a:bodyPr wrap="square" anchor="t">
-            <a:spAutoFit/>
-          </a:bodyPr>
-          <a:lstStyle/>
-          <a:p>
-            <a:pPr algn="l">
-              <a:spcAft>
-                <a:spcPts val="0"/>
-              </a:spcAft>
-              <a:defRPr sz="1000" b="1">
-                <a:solidFill>
-                  <a:srgbClr val="6B7280"/>
-                </a:solidFill>
-                <a:latin typeface="JetBrains Mono"/>
-              </a:defRPr>
-            </a:pPr>
-            <a:r>
-              <a:t>HEUTE</a:t>
-            </a:r>
-          </a:p>
-        </p:txBody>
-      </p:sp>
-      <p:sp>
-        <p:nvSpPr>
-          <p:cNvPr id="6" name="TextBox 5"/>
-          <p:cNvSpPr txBox="1"/>
-          <p:nvPr/>
-        </p:nvSpPr>
-        <p:spPr>
-          <a:xfrm>
-            <a:off x="1005840" y="2057400"/>
-            <a:ext cx="5486400" cy="320040"/>
-          </a:xfrm>
-          <a:prstGeom prst="rect">
-            <a:avLst/>
-          </a:prstGeom>
-          <a:noFill/>
-        </p:spPr>
-        <p:txBody>
-          <a:bodyPr wrap="square" anchor="t">
-            <a:spAutoFit/>
-          </a:bodyPr>
-          <a:lstStyle/>
-          <a:p>
-            <a:pPr algn="l">
-              <a:spcAft>
-                <a:spcPts val="0"/>
-              </a:spcAft>
-              <a:defRPr sz="1400" b="1">
-                <a:solidFill>
-                  <a:srgbClr val="1A1A2E"/>
-                </a:solidFill>
-                <a:latin typeface="Inter"/>
-              </a:defRPr>
-            </a:pPr>
-            <a:r>
-              <a:t>Dienstag, 9. April — Filiale Winterthur</a:t>
-            </a:r>
-          </a:p>
-        </p:txBody>
-      </p:sp>
-      <p:sp>
-        <p:nvSpPr>
-          <p:cNvPr id="7" name="TextBox 6"/>
-          <p:cNvSpPr txBox="1"/>
-          <p:nvPr/>
-        </p:nvSpPr>
-        <p:spPr>
-          <a:xfrm>
-            <a:off x="1005840" y="2514600"/>
-            <a:ext cx="914400" cy="182880"/>
-          </a:xfrm>
-          <a:prstGeom prst="rect">
-            <a:avLst/>
-          </a:prstGeom>
-          <a:noFill/>
-        </p:spPr>
-        <p:txBody>
-          <a:bodyPr wrap="square" anchor="t">
-            <a:spAutoFit/>
-          </a:bodyPr>
-          <a:lstStyle/>
-          <a:p>
-            <a:pPr algn="l">
-              <a:spcAft>
-                <a:spcPts val="0"/>
-              </a:spcAft>
-              <a:defRPr sz="1100" b="1">
-                <a:solidFill>
-                  <a:srgbClr val="E8A838"/>
-                </a:solidFill>
-                <a:latin typeface="JetBrains Mono"/>
-              </a:defRPr>
-            </a:pPr>
-            <a:r>
-              <a:t>07:45</a:t>
-            </a:r>
-          </a:p>
-        </p:txBody>
-      </p:sp>
-      <p:sp>
-        <p:nvSpPr>
-          <p:cNvPr id="8" name="TextBox 7"/>
-          <p:cNvSpPr txBox="1"/>
-          <p:nvPr/>
-        </p:nvSpPr>
-        <p:spPr>
-          <a:xfrm>
-            <a:off x="1828800" y="2514600"/>
-            <a:ext cx="5029200" cy="1005840"/>
-          </a:xfrm>
-          <a:prstGeom prst="rect">
-            <a:avLst/>
-          </a:prstGeom>
-          <a:noFill/>
-        </p:spPr>
-        <p:txBody>
-          <a:bodyPr wrap="square" anchor="t">
-            <a:spAutoFit/>
-          </a:bodyPr>
-          <a:lstStyle/>
-          <a:p>
-            <a:pPr algn="l">
-              <a:spcAft>
-                <a:spcPts val="0"/>
-              </a:spcAft>
-              <a:defRPr sz="1100" b="0">
-                <a:solidFill>
-                  <a:srgbClr val="6B7280"/>
-                </a:solidFill>
-                <a:latin typeface="Inter"/>
-              </a:defRPr>
-            </a:pPr>
-            <a:r>
-              <a:t>Lukas kommt in die Filiale. 3 Kundentermine.</a:t>
-            </a:r>
-            <a:br/>
-            <a:r>
-              <a:t>Er stellt Dossiers zusammen, prüft Portfolios.</a:t>
-            </a:r>
-            <a:br/>
-            <a:r>
-              <a:t>30–40 Min. Vorbereitung pro Termin.</a:t>
-            </a:r>
-          </a:p>
-        </p:txBody>
-      </p:sp>
-      <p:sp>
-        <p:nvSpPr>
-          <p:cNvPr id="9" name="TextBox 8"/>
-          <p:cNvSpPr txBox="1"/>
-          <p:nvPr/>
-        </p:nvSpPr>
-        <p:spPr>
-          <a:xfrm>
-            <a:off x="1005840" y="3657600"/>
-            <a:ext cx="914400" cy="182880"/>
-          </a:xfrm>
-          <a:prstGeom prst="rect">
-            <a:avLst/>
-          </a:prstGeom>
-          <a:noFill/>
-        </p:spPr>
-        <p:txBody>
-          <a:bodyPr wrap="square" anchor="t">
-            <a:spAutoFit/>
-          </a:bodyPr>
-          <a:lstStyle/>
-          <a:p>
-            <a:pPr algn="l">
-              <a:spcAft>
-                <a:spcPts val="0"/>
-              </a:spcAft>
-              <a:defRPr sz="1100" b="1">
-                <a:solidFill>
-                  <a:srgbClr val="E8A838"/>
-                </a:solidFill>
-                <a:latin typeface="JetBrains Mono"/>
-              </a:defRPr>
-            </a:pPr>
-            <a:r>
-              <a:t>10:00</a:t>
-            </a:r>
-          </a:p>
-        </p:txBody>
-      </p:sp>
-      <p:sp>
-        <p:nvSpPr>
-          <p:cNvPr id="10" name="TextBox 9"/>
-          <p:cNvSpPr txBox="1"/>
-          <p:nvPr/>
-        </p:nvSpPr>
-        <p:spPr>
-          <a:xfrm>
-            <a:off x="1828800" y="3657600"/>
-            <a:ext cx="5029200" cy="1005840"/>
-          </a:xfrm>
-          <a:prstGeom prst="rect">
-            <a:avLst/>
-          </a:prstGeom>
-          <a:noFill/>
-        </p:spPr>
-        <p:txBody>
-          <a:bodyPr wrap="square" anchor="t">
-            <a:spAutoFit/>
-          </a:bodyPr>
-          <a:lstStyle/>
-          <a:p>
-            <a:pPr algn="l">
-              <a:spcAft>
-                <a:spcPts val="0"/>
-              </a:spcAft>
-              <a:defRPr sz="1100" b="0">
-                <a:solidFill>
-                  <a:srgbClr val="6B7280"/>
-                </a:solidFill>
-                <a:latin typeface="Inter"/>
-              </a:defRPr>
-            </a:pPr>
-            <a:r>
-              <a:t>Hypothekenberatung Ehepaar Brunner.</a:t>
-            </a:r>
-            <a:br/>
-            <a:r>
-              <a:t>Erst im Gespräch erfährt er: sie denken</a:t>
-            </a:r>
-            <a:br/>
-            <a:r>
-              <a:t>auch über Vorsorge nach. Nicht vorbereitet.</a:t>
-            </a:r>
-          </a:p>
-        </p:txBody>
-      </p:sp>
-      <p:sp>
-        <p:nvSpPr>
-          <p:cNvPr id="11" name="TextBox 10"/>
-          <p:cNvSpPr txBox="1"/>
-          <p:nvPr/>
-        </p:nvSpPr>
-        <p:spPr>
-          <a:xfrm>
-            <a:off x="1005840" y="4800600"/>
-            <a:ext cx="914400" cy="182880"/>
-          </a:xfrm>
-          <a:prstGeom prst="rect">
-            <a:avLst/>
-          </a:prstGeom>
-          <a:noFill/>
-        </p:spPr>
-        <p:txBody>
-          <a:bodyPr wrap="square" anchor="t">
-            <a:spAutoFit/>
-          </a:bodyPr>
-          <a:lstStyle/>
-          <a:p>
-            <a:pPr algn="l">
-              <a:spcAft>
-                <a:spcPts val="0"/>
-              </a:spcAft>
-              <a:defRPr sz="1100" b="1">
-                <a:solidFill>
-                  <a:srgbClr val="E8A838"/>
-                </a:solidFill>
-                <a:latin typeface="JetBrains Mono"/>
-              </a:defRPr>
-            </a:pPr>
-            <a:r>
-              <a:t>14:00</a:t>
-            </a:r>
-          </a:p>
-        </p:txBody>
-      </p:sp>
-      <p:sp>
-        <p:nvSpPr>
-          <p:cNvPr id="12" name="TextBox 11"/>
-          <p:cNvSpPr txBox="1"/>
-          <p:nvPr/>
-        </p:nvSpPr>
-        <p:spPr>
-          <a:xfrm>
-            <a:off x="1828800" y="4800600"/>
-            <a:ext cx="5029200" cy="1005840"/>
-          </a:xfrm>
-          <a:prstGeom prst="rect">
-            <a:avLst/>
-          </a:prstGeom>
-          <a:noFill/>
-        </p:spPr>
-        <p:txBody>
-          <a:bodyPr wrap="square" anchor="t">
-            <a:spAutoFit/>
-          </a:bodyPr>
-          <a:lstStyle/>
-          <a:p>
-            <a:pPr algn="l">
-              <a:spcAft>
-                <a:spcPts val="0"/>
-              </a:spcAft>
-              <a:defRPr sz="1100" b="0">
-                <a:solidFill>
-                  <a:srgbClr val="6B7280"/>
-                </a:solidFill>
-                <a:latin typeface="Inter"/>
-              </a:defRPr>
-            </a:pPr>
-            <a:r>
-              <a:t>Zwischen den Terminen: 6 verpasste Anrufe.</a:t>
-            </a:r>
-            <a:br/>
-            <a:r>
-              <a:t>Kontoeröffnung, Karten, Zinsen.</a:t>
-            </a:r>
-            <a:br/>
-            <a:r>
-              <a:t>Lukas kann nicht rangehen — er berät.</a:t>
-            </a:r>
-          </a:p>
-        </p:txBody>
-      </p:sp>
-      <p:sp>
-        <p:nvSpPr>
-          <p:cNvPr id="13" name="TextBox 12"/>
-          <p:cNvSpPr txBox="1"/>
-          <p:nvPr/>
-        </p:nvSpPr>
-        <p:spPr>
-          <a:xfrm>
-            <a:off x="1005840" y="5943600"/>
-            <a:ext cx="914400" cy="182880"/>
-          </a:xfrm>
-          <a:prstGeom prst="rect">
-            <a:avLst/>
-          </a:prstGeom>
-          <a:noFill/>
-        </p:spPr>
-        <p:txBody>
-          <a:bodyPr wrap="square" anchor="t">
-            <a:spAutoFit/>
-          </a:bodyPr>
-          <a:lstStyle/>
-          <a:p>
-            <a:pPr algn="l">
-              <a:spcAft>
-                <a:spcPts val="0"/>
-              </a:spcAft>
-              <a:defRPr sz="1100" b="1">
-                <a:solidFill>
-                  <a:srgbClr val="E8A838"/>
-                </a:solidFill>
-                <a:latin typeface="JetBrains Mono"/>
-              </a:defRPr>
-            </a:pPr>
-            <a:r>
-              <a:t>17:00</a:t>
-            </a:r>
-          </a:p>
-        </p:txBody>
-      </p:sp>
-      <p:sp>
-        <p:nvSpPr>
-          <p:cNvPr id="14" name="TextBox 13"/>
-          <p:cNvSpPr txBox="1"/>
-          <p:nvPr/>
-        </p:nvSpPr>
-        <p:spPr>
-          <a:xfrm>
-            <a:off x="1828800" y="5943600"/>
-            <a:ext cx="5029200" cy="1005840"/>
-          </a:xfrm>
-          <a:prstGeom prst="rect">
-            <a:avLst/>
-          </a:prstGeom>
-          <a:noFill/>
-        </p:spPr>
-        <p:txBody>
-          <a:bodyPr wrap="square" anchor="t">
-            <a:spAutoFit/>
-          </a:bodyPr>
-          <a:lstStyle/>
-          <a:p>
-            <a:pPr algn="l">
-              <a:spcAft>
-                <a:spcPts val="0"/>
-              </a:spcAft>
-              <a:defRPr sz="1100" b="0">
-                <a:solidFill>
-                  <a:srgbClr val="6B7280"/>
-                </a:solidFill>
-                <a:latin typeface="Inter"/>
-              </a:defRPr>
-            </a:pPr>
-            <a:r>
-              <a:t>20+ Kunden von der Zinssenkung betroffen.</a:t>
-            </a:r>
-            <a:br/>
-            <a:r>
-              <a:t>Keine Zeit, alle anzurufen.</a:t>
-            </a:r>
-            <a:br/>
-            <a:r>
-              <a:t>Die Gelegenheit verstreicht.</a:t>
-            </a:r>
-          </a:p>
-        </p:txBody>
-      </p:sp>
-      <p:sp>
-        <p:nvSpPr>
-          <p:cNvPr id="15" name="Rounded Rectangle 14"/>
+          <p:cNvPr id="6" name="Rounded Rectangle 5"/>
           <p:cNvSpPr/>
           <p:nvPr/>
         </p:nvSpPr>
         <p:spPr>
           <a:xfrm>
-            <a:off x="1005840" y="7178040"/>
-            <a:ext cx="5852160" cy="320040"/>
+            <a:off x="914400" y="2148840"/>
+            <a:ext cx="3931920" cy="594360"/>
           </a:xfrm>
           <a:prstGeom prst="roundRect">
             <a:avLst>
@@ -4713,7 +4332,7 @@
             </a:avLst>
           </a:prstGeom>
           <a:solidFill>
-            <a:srgbClr val="FFFFFF"/>
+            <a:srgbClr val="1E2A1E"/>
           </a:solidFill>
           <a:ln>
             <a:noFill/>
@@ -4743,92 +4362,354 @@
       </p:sp>
       <p:sp>
         <p:nvSpPr>
-          <p:cNvPr id="16" name="TextBox 15"/>
-          <p:cNvSpPr txBox="1"/>
-          <p:nvPr/>
-        </p:nvSpPr>
-        <p:spPr>
-          <a:xfrm>
-            <a:off x="1188720" y="7196328"/>
-            <a:ext cx="5486400" cy="274320"/>
-          </a:xfrm>
-          <a:prstGeom prst="rect">
-            <a:avLst/>
-          </a:prstGeom>
-          <a:noFill/>
-        </p:spPr>
-        <p:txBody>
-          <a:bodyPr wrap="square" anchor="t">
-            <a:spAutoFit/>
-          </a:bodyPr>
-          <a:lstStyle/>
-          <a:p>
-            <a:pPr algn="l">
-              <a:spcAft>
-                <a:spcPts val="0"/>
-              </a:spcAft>
-              <a:defRPr sz="1000" b="1">
-                <a:solidFill>
-                  <a:srgbClr val="1A1A2E"/>
-                </a:solidFill>
-                <a:latin typeface="Inter"/>
-              </a:defRPr>
-            </a:pPr>
-            <a:r>
-              <a:t>Das Problem ist nicht die Qualität — es ist die Kapazität.</a:t>
-            </a:r>
-          </a:p>
-        </p:txBody>
-      </p:sp>
-      <p:sp>
-        <p:nvSpPr>
-          <p:cNvPr id="17" name="TextBox 16"/>
-          <p:cNvSpPr txBox="1"/>
-          <p:nvPr/>
-        </p:nvSpPr>
-        <p:spPr>
-          <a:xfrm>
-            <a:off x="7223760" y="4114800"/>
-            <a:ext cx="457200" cy="457200"/>
-          </a:xfrm>
-          <a:prstGeom prst="rect">
-            <a:avLst/>
-          </a:prstGeom>
-          <a:noFill/>
-        </p:spPr>
-        <p:txBody>
-          <a:bodyPr wrap="square" anchor="t">
-            <a:spAutoFit/>
-          </a:bodyPr>
-          <a:lstStyle/>
-          <a:p>
-            <a:pPr algn="ctr">
-              <a:spcAft>
-                <a:spcPts val="0"/>
-              </a:spcAft>
-              <a:defRPr sz="2800" b="1">
+          <p:cNvPr id="7" name="TextBox 6"/>
+          <p:cNvSpPr txBox="1"/>
+          <p:nvPr/>
+        </p:nvSpPr>
+        <p:spPr>
+          <a:xfrm>
+            <a:off x="1097280" y="2176272"/>
+            <a:ext cx="3657600" cy="182880"/>
+          </a:xfrm>
+          <a:prstGeom prst="rect">
+            <a:avLst/>
+          </a:prstGeom>
+          <a:noFill/>
+        </p:spPr>
+        <p:txBody>
+          <a:bodyPr wrap="square" anchor="t">
+            <a:spAutoFit/>
+          </a:bodyPr>
+          <a:lstStyle/>
+          <a:p>
+            <a:pPr algn="l">
+              <a:spcAft>
+                <a:spcPts val="0"/>
+              </a:spcAft>
+              <a:defRPr sz="900" b="1">
                 <a:solidFill>
                   <a:srgbClr val="E8A838"/>
                 </a:solidFill>
-                <a:latin typeface="Inter"/>
-              </a:defRPr>
-            </a:pPr>
-            <a:r>
-              <a:t>→</a:t>
-            </a:r>
-          </a:p>
-        </p:txBody>
-      </p:sp>
-      <p:sp>
-        <p:nvSpPr>
-          <p:cNvPr id="18" name="Rounded Rectangle 17"/>
+                <a:latin typeface="JetBrains Mono"/>
+              </a:defRPr>
+            </a:pPr>
+            <a:r>
+              <a:t>BEREITS VERBREITET</a:t>
+            </a:r>
+          </a:p>
+        </p:txBody>
+      </p:sp>
+      <p:sp>
+        <p:nvSpPr>
+          <p:cNvPr id="8" name="TextBox 7"/>
+          <p:cNvSpPr txBox="1"/>
+          <p:nvPr/>
+        </p:nvSpPr>
+        <p:spPr>
+          <a:xfrm>
+            <a:off x="1097280" y="2377440"/>
+            <a:ext cx="3657600" cy="274320"/>
+          </a:xfrm>
+          <a:prstGeom prst="rect">
+            <a:avLst/>
+          </a:prstGeom>
+          <a:noFill/>
+        </p:spPr>
+        <p:txBody>
+          <a:bodyPr wrap="square" anchor="t">
+            <a:spAutoFit/>
+          </a:bodyPr>
+          <a:lstStyle/>
+          <a:p>
+            <a:pPr algn="l">
+              <a:spcAft>
+                <a:spcPts val="0"/>
+              </a:spcAft>
+              <a:defRPr sz="1100" b="0">
+                <a:solidFill>
+                  <a:srgbClr val="9CA3AF"/>
+                </a:solidFill>
+                <a:latin typeface="Inter"/>
+              </a:defRPr>
+            </a:pPr>
+            <a:r>
+              <a:t>Was viele Banken heute tun</a:t>
+            </a:r>
+          </a:p>
+        </p:txBody>
+      </p:sp>
+      <p:sp>
+        <p:nvSpPr>
+          <p:cNvPr id="9" name="TextBox 8"/>
+          <p:cNvSpPr txBox="1"/>
+          <p:nvPr/>
+        </p:nvSpPr>
+        <p:spPr>
+          <a:xfrm>
+            <a:off x="1005840" y="2926080"/>
+            <a:ext cx="3657600" cy="228600"/>
+          </a:xfrm>
+          <a:prstGeom prst="rect">
+            <a:avLst/>
+          </a:prstGeom>
+          <a:noFill/>
+        </p:spPr>
+        <p:txBody>
+          <a:bodyPr wrap="square" anchor="t">
+            <a:spAutoFit/>
+          </a:bodyPr>
+          <a:lstStyle/>
+          <a:p>
+            <a:pPr algn="l">
+              <a:spcAft>
+                <a:spcPts val="0"/>
+              </a:spcAft>
+              <a:defRPr sz="1200" b="1">
+                <a:solidFill>
+                  <a:srgbClr val="FFFFFF"/>
+                </a:solidFill>
+                <a:latin typeface="Inter"/>
+              </a:defRPr>
+            </a:pPr>
+            <a:r>
+              <a:t>Meeting-Vorbereitung</a:t>
+            </a:r>
+          </a:p>
+        </p:txBody>
+      </p:sp>
+      <p:sp>
+        <p:nvSpPr>
+          <p:cNvPr id="10" name="TextBox 9"/>
+          <p:cNvSpPr txBox="1"/>
+          <p:nvPr/>
+        </p:nvSpPr>
+        <p:spPr>
+          <a:xfrm>
+            <a:off x="1005840" y="3200400"/>
+            <a:ext cx="3840480" cy="1097280"/>
+          </a:xfrm>
+          <a:prstGeom prst="rect">
+            <a:avLst/>
+          </a:prstGeom>
+          <a:noFill/>
+        </p:spPr>
+        <p:txBody>
+          <a:bodyPr wrap="square" anchor="t">
+            <a:spAutoFit/>
+          </a:bodyPr>
+          <a:lstStyle/>
+          <a:p>
+            <a:pPr algn="l">
+              <a:spcAft>
+                <a:spcPts val="0"/>
+              </a:spcAft>
+              <a:defRPr sz="1000" b="0">
+                <a:solidFill>
+                  <a:srgbClr val="9CA3AF"/>
+                </a:solidFill>
+                <a:latin typeface="Inter"/>
+              </a:defRPr>
+            </a:pPr>
+            <a:r>
+              <a:t>Kundendossiers automatisch</a:t>
+            </a:r>
+            <a:br/>
+            <a:r>
+              <a:t>zusammengestellt (Copilot, interne</a:t>
+            </a:r>
+            <a:br/>
+            <a:r>
+              <a:t>Prototypen). Raiffeisen arbeitet</a:t>
+            </a:r>
+            <a:br/>
+            <a:r>
+              <a:t>hier bereits.</a:t>
+            </a:r>
+          </a:p>
+        </p:txBody>
+      </p:sp>
+      <p:sp>
+        <p:nvSpPr>
+          <p:cNvPr id="11" name="TextBox 10"/>
+          <p:cNvSpPr txBox="1"/>
+          <p:nvPr/>
+        </p:nvSpPr>
+        <p:spPr>
+          <a:xfrm>
+            <a:off x="1005840" y="4480560"/>
+            <a:ext cx="3657600" cy="228600"/>
+          </a:xfrm>
+          <a:prstGeom prst="rect">
+            <a:avLst/>
+          </a:prstGeom>
+          <a:noFill/>
+        </p:spPr>
+        <p:txBody>
+          <a:bodyPr wrap="square" anchor="t">
+            <a:spAutoFit/>
+          </a:bodyPr>
+          <a:lstStyle/>
+          <a:p>
+            <a:pPr algn="l">
+              <a:spcAft>
+                <a:spcPts val="0"/>
+              </a:spcAft>
+              <a:defRPr sz="1200" b="1">
+                <a:solidFill>
+                  <a:srgbClr val="FFFFFF"/>
+                </a:solidFill>
+                <a:latin typeface="Inter"/>
+              </a:defRPr>
+            </a:pPr>
+            <a:r>
+              <a:t>Chatbots für FAQ</a:t>
+            </a:r>
+          </a:p>
+        </p:txBody>
+      </p:sp>
+      <p:sp>
+        <p:nvSpPr>
+          <p:cNvPr id="12" name="TextBox 11"/>
+          <p:cNvSpPr txBox="1"/>
+          <p:nvPr/>
+        </p:nvSpPr>
+        <p:spPr>
+          <a:xfrm>
+            <a:off x="1005840" y="4754880"/>
+            <a:ext cx="3840480" cy="1097280"/>
+          </a:xfrm>
+          <a:prstGeom prst="rect">
+            <a:avLst/>
+          </a:prstGeom>
+          <a:noFill/>
+        </p:spPr>
+        <p:txBody>
+          <a:bodyPr wrap="square" anchor="t">
+            <a:spAutoFit/>
+          </a:bodyPr>
+          <a:lstStyle/>
+          <a:p>
+            <a:pPr algn="l">
+              <a:spcAft>
+                <a:spcPts val="0"/>
+              </a:spcAft>
+              <a:defRPr sz="1000" b="0">
+                <a:solidFill>
+                  <a:srgbClr val="9CA3AF"/>
+                </a:solidFill>
+                <a:latin typeface="Inter"/>
+              </a:defRPr>
+            </a:pPr>
+            <a:r>
+              <a:t>Einfache Fragen auf der Website</a:t>
+            </a:r>
+            <a:br/>
+            <a:r>
+              <a:t>beantwortet (Raiffeisen: «Tina» via</a:t>
+            </a:r>
+            <a:br/>
+            <a:r>
+              <a:t>Rasa). Begrenzt auf Q&amp;A.</a:t>
+            </a:r>
+          </a:p>
+        </p:txBody>
+      </p:sp>
+      <p:sp>
+        <p:nvSpPr>
+          <p:cNvPr id="13" name="TextBox 12"/>
+          <p:cNvSpPr txBox="1"/>
+          <p:nvPr/>
+        </p:nvSpPr>
+        <p:spPr>
+          <a:xfrm>
+            <a:off x="1005840" y="6035040"/>
+            <a:ext cx="3657600" cy="228600"/>
+          </a:xfrm>
+          <a:prstGeom prst="rect">
+            <a:avLst/>
+          </a:prstGeom>
+          <a:noFill/>
+        </p:spPr>
+        <p:txBody>
+          <a:bodyPr wrap="square" anchor="t">
+            <a:spAutoFit/>
+          </a:bodyPr>
+          <a:lstStyle/>
+          <a:p>
+            <a:pPr algn="l">
+              <a:spcAft>
+                <a:spcPts val="0"/>
+              </a:spcAft>
+              <a:defRPr sz="1200" b="1">
+                <a:solidFill>
+                  <a:srgbClr val="FFFFFF"/>
+                </a:solidFill>
+                <a:latin typeface="Inter"/>
+              </a:defRPr>
+            </a:pPr>
+            <a:r>
+              <a:t>Dokumenten-Analyse</a:t>
+            </a:r>
+          </a:p>
+        </p:txBody>
+      </p:sp>
+      <p:sp>
+        <p:nvSpPr>
+          <p:cNvPr id="14" name="TextBox 13"/>
+          <p:cNvSpPr txBox="1"/>
+          <p:nvPr/>
+        </p:nvSpPr>
+        <p:spPr>
+          <a:xfrm>
+            <a:off x="1005840" y="6309359"/>
+            <a:ext cx="3840480" cy="1097280"/>
+          </a:xfrm>
+          <a:prstGeom prst="rect">
+            <a:avLst/>
+          </a:prstGeom>
+          <a:noFill/>
+        </p:spPr>
+        <p:txBody>
+          <a:bodyPr wrap="square" anchor="t">
+            <a:spAutoFit/>
+          </a:bodyPr>
+          <a:lstStyle/>
+          <a:p>
+            <a:pPr algn="l">
+              <a:spcAft>
+                <a:spcPts val="0"/>
+              </a:spcAft>
+              <a:defRPr sz="1000" b="0">
+                <a:solidFill>
+                  <a:srgbClr val="9CA3AF"/>
+                </a:solidFill>
+                <a:latin typeface="Inter"/>
+              </a:defRPr>
+            </a:pPr>
+            <a:r>
+              <a:t>KYC, Compliance-Prüfung,</a:t>
+            </a:r>
+            <a:br/>
+            <a:r>
+              <a:t>Vertragserkennung. Meist</a:t>
+            </a:r>
+            <a:br/>
+            <a:r>
+              <a:t>Backoffice-getrieben.</a:t>
+            </a:r>
+          </a:p>
+        </p:txBody>
+      </p:sp>
+      <p:sp>
+        <p:nvSpPr>
+          <p:cNvPr id="15" name="Rounded Rectangle 14"/>
           <p:cNvSpPr/>
           <p:nvPr/>
         </p:nvSpPr>
         <p:spPr>
           <a:xfrm>
-            <a:off x="7589520" y="1645920"/>
-            <a:ext cx="6400800" cy="5943600"/>
+            <a:off x="5303520" y="2011680"/>
+            <a:ext cx="4297680" cy="5486400"/>
           </a:xfrm>
           <a:prstGeom prst="roundRect">
             <a:avLst>
@@ -4836,7 +4717,7 @@
             </a:avLst>
           </a:prstGeom>
           <a:solidFill>
-            <a:srgbClr val="1A1A2E"/>
+            <a:srgbClr val="222238"/>
           </a:solidFill>
           <a:ln>
             <a:noFill/>
@@ -4866,436 +4747,14 @@
       </p:sp>
       <p:sp>
         <p:nvSpPr>
-          <p:cNvPr id="19" name="TextBox 18"/>
-          <p:cNvSpPr txBox="1"/>
-          <p:nvPr/>
-        </p:nvSpPr>
-        <p:spPr>
-          <a:xfrm>
-            <a:off x="7863840" y="1783080"/>
-            <a:ext cx="2743200" cy="228600"/>
-          </a:xfrm>
-          <a:prstGeom prst="rect">
-            <a:avLst/>
-          </a:prstGeom>
-          <a:noFill/>
-        </p:spPr>
-        <p:txBody>
-          <a:bodyPr wrap="square" anchor="t">
-            <a:spAutoFit/>
-          </a:bodyPr>
-          <a:lstStyle/>
-          <a:p>
-            <a:pPr algn="l">
-              <a:spcAft>
-                <a:spcPts val="0"/>
-              </a:spcAft>
-              <a:defRPr sz="1000" b="1">
-                <a:solidFill>
-                  <a:srgbClr val="E8A838"/>
-                </a:solidFill>
-                <a:latin typeface="JetBrains Mono"/>
-              </a:defRPr>
-            </a:pPr>
-            <a:r>
-              <a:t>MORGEN</a:t>
-            </a:r>
-          </a:p>
-        </p:txBody>
-      </p:sp>
-      <p:sp>
-        <p:nvSpPr>
-          <p:cNvPr id="20" name="TextBox 19"/>
-          <p:cNvSpPr txBox="1"/>
-          <p:nvPr/>
-        </p:nvSpPr>
-        <p:spPr>
-          <a:xfrm>
-            <a:off x="7863840" y="2057400"/>
-            <a:ext cx="5486400" cy="320040"/>
-          </a:xfrm>
-          <a:prstGeom prst="rect">
-            <a:avLst/>
-          </a:prstGeom>
-          <a:noFill/>
-        </p:spPr>
-        <p:txBody>
-          <a:bodyPr wrap="square" anchor="t">
-            <a:spAutoFit/>
-          </a:bodyPr>
-          <a:lstStyle/>
-          <a:p>
-            <a:pPr algn="l">
-              <a:spcAft>
-                <a:spcPts val="0"/>
-              </a:spcAft>
-              <a:defRPr sz="1400" b="1">
-                <a:solidFill>
-                  <a:srgbClr val="FFFFFF"/>
-                </a:solidFill>
-                <a:latin typeface="Inter"/>
-              </a:defRPr>
-            </a:pPr>
-            <a:r>
-              <a:t>Derselbe Dienstag — mit AI-Unterstützung</a:t>
-            </a:r>
-          </a:p>
-        </p:txBody>
-      </p:sp>
-      <p:sp>
-        <p:nvSpPr>
-          <p:cNvPr id="21" name="TextBox 20"/>
-          <p:cNvSpPr txBox="1"/>
-          <p:nvPr/>
-        </p:nvSpPr>
-        <p:spPr>
-          <a:xfrm>
-            <a:off x="7863840" y="2514600"/>
-            <a:ext cx="914400" cy="182880"/>
-          </a:xfrm>
-          <a:prstGeom prst="rect">
-            <a:avLst/>
-          </a:prstGeom>
-          <a:noFill/>
-        </p:spPr>
-        <p:txBody>
-          <a:bodyPr wrap="square" anchor="t">
-            <a:spAutoFit/>
-          </a:bodyPr>
-          <a:lstStyle/>
-          <a:p>
-            <a:pPr algn="l">
-              <a:spcAft>
-                <a:spcPts val="0"/>
-              </a:spcAft>
-              <a:defRPr sz="1100" b="1">
-                <a:solidFill>
-                  <a:srgbClr val="E8A838"/>
-                </a:solidFill>
-                <a:latin typeface="JetBrains Mono"/>
-              </a:defRPr>
-            </a:pPr>
-            <a:r>
-              <a:t>07:45</a:t>
-            </a:r>
-          </a:p>
-        </p:txBody>
-      </p:sp>
-      <p:sp>
-        <p:nvSpPr>
-          <p:cNvPr id="22" name="TextBox 21"/>
-          <p:cNvSpPr txBox="1"/>
-          <p:nvPr/>
-        </p:nvSpPr>
-        <p:spPr>
-          <a:xfrm>
-            <a:off x="8686800" y="2514600"/>
-            <a:ext cx="5029200" cy="1005840"/>
-          </a:xfrm>
-          <a:prstGeom prst="rect">
-            <a:avLst/>
-          </a:prstGeom>
-          <a:noFill/>
-        </p:spPr>
-        <p:txBody>
-          <a:bodyPr wrap="square" anchor="t">
-            <a:spAutoFit/>
-          </a:bodyPr>
-          <a:lstStyle/>
-          <a:p>
-            <a:pPr algn="l">
-              <a:spcAft>
-                <a:spcPts val="0"/>
-              </a:spcAft>
-              <a:defRPr sz="1100" b="0">
-                <a:solidFill>
-                  <a:srgbClr val="9CA3AF"/>
-                </a:solidFill>
-                <a:latin typeface="Inter"/>
-              </a:defRPr>
-            </a:pPr>
-            <a:r>
-              <a:t>Drei Briefings liegen bereit — automatisch.</a:t>
-            </a:r>
-            <a:br/>
-            <a:r>
-              <a:t>Kundenhistorie, Portfolio, Cross-Selling.</a:t>
-            </a:r>
-            <a:br/>
-            <a:r>
-              <a:t>Brunners: «Vorsorgelücke, 3a nicht ausgeschöpft.»</a:t>
-            </a:r>
-          </a:p>
-        </p:txBody>
-      </p:sp>
-      <p:sp>
-        <p:nvSpPr>
-          <p:cNvPr id="23" name="TextBox 22"/>
-          <p:cNvSpPr txBox="1"/>
-          <p:nvPr/>
-        </p:nvSpPr>
-        <p:spPr>
-          <a:xfrm>
-            <a:off x="7863840" y="3657600"/>
-            <a:ext cx="914400" cy="182880"/>
-          </a:xfrm>
-          <a:prstGeom prst="rect">
-            <a:avLst/>
-          </a:prstGeom>
-          <a:noFill/>
-        </p:spPr>
-        <p:txBody>
-          <a:bodyPr wrap="square" anchor="t">
-            <a:spAutoFit/>
-          </a:bodyPr>
-          <a:lstStyle/>
-          <a:p>
-            <a:pPr algn="l">
-              <a:spcAft>
-                <a:spcPts val="0"/>
-              </a:spcAft>
-              <a:defRPr sz="1100" b="1">
-                <a:solidFill>
-                  <a:srgbClr val="E8A838"/>
-                </a:solidFill>
-                <a:latin typeface="JetBrains Mono"/>
-              </a:defRPr>
-            </a:pPr>
-            <a:r>
-              <a:t>10:00</a:t>
-            </a:r>
-          </a:p>
-        </p:txBody>
-      </p:sp>
-      <p:sp>
-        <p:nvSpPr>
-          <p:cNvPr id="24" name="TextBox 23"/>
-          <p:cNvSpPr txBox="1"/>
-          <p:nvPr/>
-        </p:nvSpPr>
-        <p:spPr>
-          <a:xfrm>
-            <a:off x="8686800" y="3657600"/>
-            <a:ext cx="5029200" cy="1005840"/>
-          </a:xfrm>
-          <a:prstGeom prst="rect">
-            <a:avLst/>
-          </a:prstGeom>
-          <a:noFill/>
-        </p:spPr>
-        <p:txBody>
-          <a:bodyPr wrap="square" anchor="t">
-            <a:spAutoFit/>
-          </a:bodyPr>
-          <a:lstStyle/>
-          <a:p>
-            <a:pPr algn="l">
-              <a:spcAft>
-                <a:spcPts val="0"/>
-              </a:spcAft>
-              <a:defRPr sz="1100" b="0">
-                <a:solidFill>
-                  <a:srgbClr val="9CA3AF"/>
-                </a:solidFill>
-                <a:latin typeface="Inter"/>
-              </a:defRPr>
-            </a:pPr>
-            <a:r>
-              <a:t>Lukas bringt die Vorsorge selbst aufs Tapet.</a:t>
-            </a:r>
-            <a:br/>
-            <a:r>
-              <a:t>«Sie kennen uns besser als wir selbst.»</a:t>
-            </a:r>
-            <a:br/>
-            <a:r>
-              <a:t>Hypothek und Vorsorge in einem Termin.</a:t>
-            </a:r>
-          </a:p>
-        </p:txBody>
-      </p:sp>
-      <p:sp>
-        <p:nvSpPr>
-          <p:cNvPr id="25" name="TextBox 24"/>
-          <p:cNvSpPr txBox="1"/>
-          <p:nvPr/>
-        </p:nvSpPr>
-        <p:spPr>
-          <a:xfrm>
-            <a:off x="7863840" y="4800600"/>
-            <a:ext cx="914400" cy="182880"/>
-          </a:xfrm>
-          <a:prstGeom prst="rect">
-            <a:avLst/>
-          </a:prstGeom>
-          <a:noFill/>
-        </p:spPr>
-        <p:txBody>
-          <a:bodyPr wrap="square" anchor="t">
-            <a:spAutoFit/>
-          </a:bodyPr>
-          <a:lstStyle/>
-          <a:p>
-            <a:pPr algn="l">
-              <a:spcAft>
-                <a:spcPts val="0"/>
-              </a:spcAft>
-              <a:defRPr sz="1100" b="1">
-                <a:solidFill>
-                  <a:srgbClr val="E8A838"/>
-                </a:solidFill>
-                <a:latin typeface="JetBrains Mono"/>
-              </a:defRPr>
-            </a:pPr>
-            <a:r>
-              <a:t>14:00</a:t>
-            </a:r>
-          </a:p>
-        </p:txBody>
-      </p:sp>
-      <p:sp>
-        <p:nvSpPr>
-          <p:cNvPr id="26" name="TextBox 25"/>
-          <p:cNvSpPr txBox="1"/>
-          <p:nvPr/>
-        </p:nvSpPr>
-        <p:spPr>
-          <a:xfrm>
-            <a:off x="8686800" y="4800600"/>
-            <a:ext cx="5029200" cy="1005840"/>
-          </a:xfrm>
-          <a:prstGeom prst="rect">
-            <a:avLst/>
-          </a:prstGeom>
-          <a:noFill/>
-        </p:spPr>
-        <p:txBody>
-          <a:bodyPr wrap="square" anchor="t">
-            <a:spAutoFit/>
-          </a:bodyPr>
-          <a:lstStyle/>
-          <a:p>
-            <a:pPr algn="l">
-              <a:spcAft>
-                <a:spcPts val="0"/>
-              </a:spcAft>
-              <a:defRPr sz="1100" b="0">
-                <a:solidFill>
-                  <a:srgbClr val="9CA3AF"/>
-                </a:solidFill>
-                <a:latin typeface="Inter"/>
-              </a:defRPr>
-            </a:pPr>
-            <a:r>
-              <a:t>Routineanfragen auf der Website automatisch</a:t>
-            </a:r>
-            <a:br/>
-            <a:r>
-              <a:t>beantwortet — DE/FR/IT. Komplexes wird</a:t>
-            </a:r>
-            <a:br/>
-            <a:r>
-              <a:t>weitergeleitet. 0 verpasste Anrufe.</a:t>
-            </a:r>
-          </a:p>
-        </p:txBody>
-      </p:sp>
-      <p:sp>
-        <p:nvSpPr>
-          <p:cNvPr id="27" name="TextBox 26"/>
-          <p:cNvSpPr txBox="1"/>
-          <p:nvPr/>
-        </p:nvSpPr>
-        <p:spPr>
-          <a:xfrm>
-            <a:off x="7863840" y="5943600"/>
-            <a:ext cx="914400" cy="182880"/>
-          </a:xfrm>
-          <a:prstGeom prst="rect">
-            <a:avLst/>
-          </a:prstGeom>
-          <a:noFill/>
-        </p:spPr>
-        <p:txBody>
-          <a:bodyPr wrap="square" anchor="t">
-            <a:spAutoFit/>
-          </a:bodyPr>
-          <a:lstStyle/>
-          <a:p>
-            <a:pPr algn="l">
-              <a:spcAft>
-                <a:spcPts val="0"/>
-              </a:spcAft>
-              <a:defRPr sz="1100" b="1">
-                <a:solidFill>
-                  <a:srgbClr val="E8A838"/>
-                </a:solidFill>
-                <a:latin typeface="JetBrains Mono"/>
-              </a:defRPr>
-            </a:pPr>
-            <a:r>
-              <a:t>17:00</a:t>
-            </a:r>
-          </a:p>
-        </p:txBody>
-      </p:sp>
-      <p:sp>
-        <p:nvSpPr>
-          <p:cNvPr id="28" name="TextBox 27"/>
-          <p:cNvSpPr txBox="1"/>
-          <p:nvPr/>
-        </p:nvSpPr>
-        <p:spPr>
-          <a:xfrm>
-            <a:off x="8686800" y="5943600"/>
-            <a:ext cx="5029200" cy="1005840"/>
-          </a:xfrm>
-          <a:prstGeom prst="rect">
-            <a:avLst/>
-          </a:prstGeom>
-          <a:noFill/>
-        </p:spPr>
-        <p:txBody>
-          <a:bodyPr wrap="square" anchor="t">
-            <a:spAutoFit/>
-          </a:bodyPr>
-          <a:lstStyle/>
-          <a:p>
-            <a:pPr algn="l">
-              <a:spcAft>
-                <a:spcPts val="0"/>
-              </a:spcAft>
-              <a:defRPr sz="1100" b="0">
-                <a:solidFill>
-                  <a:srgbClr val="9CA3AF"/>
-                </a:solidFill>
-                <a:latin typeface="Inter"/>
-              </a:defRPr>
-            </a:pPr>
-            <a:r>
-              <a:t>20 betroffene Kunden haben bereits eine</a:t>
-            </a:r>
-            <a:br/>
-            <a:r>
-              <a:t>personalisierte Nachricht erhalten.</a:t>
-            </a:r>
-            <a:br/>
-            <a:r>
-              <a:t>3 haben heute Nachmittag zurückgerufen.</a:t>
-            </a:r>
-          </a:p>
-        </p:txBody>
-      </p:sp>
-      <p:sp>
-        <p:nvSpPr>
-          <p:cNvPr id="29" name="Rounded Rectangle 28"/>
+          <p:cNvPr id="16" name="Rounded Rectangle 15"/>
           <p:cNvSpPr/>
           <p:nvPr/>
         </p:nvSpPr>
         <p:spPr>
           <a:xfrm>
-            <a:off x="7863840" y="7178040"/>
-            <a:ext cx="5852160" cy="320040"/>
+            <a:off x="5486400" y="2148840"/>
+            <a:ext cx="3931920" cy="594360"/>
           </a:xfrm>
           <a:prstGeom prst="roundRect">
             <a:avLst>
@@ -5303,7 +4762,7 @@
             </a:avLst>
           </a:prstGeom>
           <a:solidFill>
-            <a:srgbClr val="222238"/>
+            <a:srgbClr val="2A2010"/>
           </a:solidFill>
           <a:ln>
             <a:noFill/>
@@ -5333,31 +4792,862 @@
       </p:sp>
       <p:sp>
         <p:nvSpPr>
+          <p:cNvPr id="17" name="TextBox 16"/>
+          <p:cNvSpPr txBox="1"/>
+          <p:nvPr/>
+        </p:nvSpPr>
+        <p:spPr>
+          <a:xfrm>
+            <a:off x="5669280" y="2176272"/>
+            <a:ext cx="3657600" cy="182880"/>
+          </a:xfrm>
+          <a:prstGeom prst="rect">
+            <a:avLst/>
+          </a:prstGeom>
+          <a:noFill/>
+        </p:spPr>
+        <p:txBody>
+          <a:bodyPr wrap="square" anchor="t">
+            <a:spAutoFit/>
+          </a:bodyPr>
+          <a:lstStyle/>
+          <a:p>
+            <a:pPr algn="l">
+              <a:spcAft>
+                <a:spcPts val="0"/>
+              </a:spcAft>
+              <a:defRPr sz="900" b="1">
+                <a:solidFill>
+                  <a:srgbClr val="E8A838"/>
+                </a:solidFill>
+                <a:latin typeface="JetBrains Mono"/>
+              </a:defRPr>
+            </a:pPr>
+            <a:r>
+              <a:t>NÄCHSTE WELLE</a:t>
+            </a:r>
+          </a:p>
+        </p:txBody>
+      </p:sp>
+      <p:sp>
+        <p:nvSpPr>
+          <p:cNvPr id="18" name="TextBox 17"/>
+          <p:cNvSpPr txBox="1"/>
+          <p:nvPr/>
+        </p:nvSpPr>
+        <p:spPr>
+          <a:xfrm>
+            <a:off x="5669280" y="2377440"/>
+            <a:ext cx="3657600" cy="274320"/>
+          </a:xfrm>
+          <a:prstGeom prst="rect">
+            <a:avLst/>
+          </a:prstGeom>
+          <a:noFill/>
+        </p:spPr>
+        <p:txBody>
+          <a:bodyPr wrap="square" anchor="t">
+            <a:spAutoFit/>
+          </a:bodyPr>
+          <a:lstStyle/>
+          <a:p>
+            <a:pPr algn="l">
+              <a:spcAft>
+                <a:spcPts val="0"/>
+              </a:spcAft>
+              <a:defRPr sz="1100" b="0">
+                <a:solidFill>
+                  <a:srgbClr val="9CA3AF"/>
+                </a:solidFill>
+                <a:latin typeface="Inter"/>
+              </a:defRPr>
+            </a:pPr>
+            <a:r>
+              <a:t>Wo der Wettbewerbsvorsprung entsteht</a:t>
+            </a:r>
+          </a:p>
+        </p:txBody>
+      </p:sp>
+      <p:sp>
+        <p:nvSpPr>
+          <p:cNvPr id="19" name="TextBox 18"/>
+          <p:cNvSpPr txBox="1"/>
+          <p:nvPr/>
+        </p:nvSpPr>
+        <p:spPr>
+          <a:xfrm>
+            <a:off x="5577840" y="2926080"/>
+            <a:ext cx="3657600" cy="228600"/>
+          </a:xfrm>
+          <a:prstGeom prst="rect">
+            <a:avLst/>
+          </a:prstGeom>
+          <a:noFill/>
+        </p:spPr>
+        <p:txBody>
+          <a:bodyPr wrap="square" anchor="t">
+            <a:spAutoFit/>
+          </a:bodyPr>
+          <a:lstStyle/>
+          <a:p>
+            <a:pPr algn="l">
+              <a:spcAft>
+                <a:spcPts val="0"/>
+              </a:spcAft>
+              <a:defRPr sz="1200" b="1">
+                <a:solidFill>
+                  <a:srgbClr val="FFFFFF"/>
+                </a:solidFill>
+                <a:latin typeface="Inter"/>
+              </a:defRPr>
+            </a:pPr>
+            <a:r>
+              <a:t>Proaktive Kundenansprache</a:t>
+            </a:r>
+          </a:p>
+        </p:txBody>
+      </p:sp>
+      <p:sp>
+        <p:nvSpPr>
+          <p:cNvPr id="20" name="TextBox 19"/>
+          <p:cNvSpPr txBox="1"/>
+          <p:nvPr/>
+        </p:nvSpPr>
+        <p:spPr>
+          <a:xfrm>
+            <a:off x="5577840" y="3200400"/>
+            <a:ext cx="3840480" cy="1097280"/>
+          </a:xfrm>
+          <a:prstGeom prst="rect">
+            <a:avLst/>
+          </a:prstGeom>
+          <a:noFill/>
+        </p:spPr>
+        <p:txBody>
+          <a:bodyPr wrap="square" anchor="t">
+            <a:spAutoFit/>
+          </a:bodyPr>
+          <a:lstStyle/>
+          <a:p>
+            <a:pPr algn="l">
+              <a:spcAft>
+                <a:spcPts val="0"/>
+              </a:spcAft>
+              <a:defRPr sz="1000" b="0">
+                <a:solidFill>
+                  <a:srgbClr val="9CA3AF"/>
+                </a:solidFill>
+                <a:latin typeface="Inter"/>
+              </a:defRPr>
+            </a:pPr>
+            <a:r>
+              <a:t>AI erkennt Trigger (Zinsänderung,</a:t>
+            </a:r>
+            <a:br/>
+            <a:r>
+              <a:t>Ablauf Festhypothek, Lebensereignis)</a:t>
+            </a:r>
+            <a:br/>
+            <a:r>
+              <a:t>und bereitet personalisierte</a:t>
+            </a:r>
+            <a:br/>
+            <a:r>
+              <a:t>Ansprache vor — RM gibt frei.</a:t>
+            </a:r>
+          </a:p>
+        </p:txBody>
+      </p:sp>
+      <p:sp>
+        <p:nvSpPr>
+          <p:cNvPr id="21" name="TextBox 20"/>
+          <p:cNvSpPr txBox="1"/>
+          <p:nvPr/>
+        </p:nvSpPr>
+        <p:spPr>
+          <a:xfrm>
+            <a:off x="5577840" y="4480560"/>
+            <a:ext cx="3657600" cy="228600"/>
+          </a:xfrm>
+          <a:prstGeom prst="rect">
+            <a:avLst/>
+          </a:prstGeom>
+          <a:noFill/>
+        </p:spPr>
+        <p:txBody>
+          <a:bodyPr wrap="square" anchor="t">
+            <a:spAutoFit/>
+          </a:bodyPr>
+          <a:lstStyle/>
+          <a:p>
+            <a:pPr algn="l">
+              <a:spcAft>
+                <a:spcPts val="0"/>
+              </a:spcAft>
+              <a:defRPr sz="1200" b="1">
+                <a:solidFill>
+                  <a:srgbClr val="FFFFFF"/>
+                </a:solidFill>
+                <a:latin typeface="Inter"/>
+              </a:defRPr>
+            </a:pPr>
+            <a:r>
+              <a:t>Training &amp; Produktwissen</a:t>
+            </a:r>
+          </a:p>
+        </p:txBody>
+      </p:sp>
+      <p:sp>
+        <p:nvSpPr>
+          <p:cNvPr id="22" name="TextBox 21"/>
+          <p:cNvSpPr txBox="1"/>
+          <p:nvPr/>
+        </p:nvSpPr>
+        <p:spPr>
+          <a:xfrm>
+            <a:off x="5577840" y="4754880"/>
+            <a:ext cx="3840480" cy="1097280"/>
+          </a:xfrm>
+          <a:prstGeom prst="rect">
+            <a:avLst/>
+          </a:prstGeom>
+          <a:noFill/>
+        </p:spPr>
+        <p:txBody>
+          <a:bodyPr wrap="square" anchor="t">
+            <a:spAutoFit/>
+          </a:bodyPr>
+          <a:lstStyle/>
+          <a:p>
+            <a:pPr algn="l">
+              <a:spcAft>
+                <a:spcPts val="0"/>
+              </a:spcAft>
+              <a:defRPr sz="1000" b="0">
+                <a:solidFill>
+                  <a:srgbClr val="9CA3AF"/>
+                </a:solidFill>
+                <a:latin typeface="Inter"/>
+              </a:defRPr>
+            </a:pPr>
+            <a:r>
+              <a:t>AI als Sparringspartner für neue</a:t>
+            </a:r>
+            <a:br/>
+            <a:r>
+              <a:t>und erfahrene Berater. Übt</a:t>
+            </a:r>
+            <a:br/>
+            <a:r>
+              <a:t>Gespräche, testet Produktwissen,</a:t>
+            </a:r>
+            <a:br/>
+            <a:r>
+              <a:t>skaliert über 212 Banken.</a:t>
+            </a:r>
+          </a:p>
+        </p:txBody>
+      </p:sp>
+      <p:sp>
+        <p:nvSpPr>
+          <p:cNvPr id="23" name="TextBox 22"/>
+          <p:cNvSpPr txBox="1"/>
+          <p:nvPr/>
+        </p:nvSpPr>
+        <p:spPr>
+          <a:xfrm>
+            <a:off x="5577840" y="6035040"/>
+            <a:ext cx="3657600" cy="228600"/>
+          </a:xfrm>
+          <a:prstGeom prst="rect">
+            <a:avLst/>
+          </a:prstGeom>
+          <a:noFill/>
+        </p:spPr>
+        <p:txBody>
+          <a:bodyPr wrap="square" anchor="t">
+            <a:spAutoFit/>
+          </a:bodyPr>
+          <a:lstStyle/>
+          <a:p>
+            <a:pPr algn="l">
+              <a:spcAft>
+                <a:spcPts val="0"/>
+              </a:spcAft>
+              <a:defRPr sz="1200" b="1">
+                <a:solidFill>
+                  <a:srgbClr val="FFFFFF"/>
+                </a:solidFill>
+                <a:latin typeface="Inter"/>
+              </a:defRPr>
+            </a:pPr>
+            <a:r>
+              <a:t>Cross-Selling-Intelligenz</a:t>
+            </a:r>
+          </a:p>
+        </p:txBody>
+      </p:sp>
+      <p:sp>
+        <p:nvSpPr>
+          <p:cNvPr id="24" name="TextBox 23"/>
+          <p:cNvSpPr txBox="1"/>
+          <p:nvPr/>
+        </p:nvSpPr>
+        <p:spPr>
+          <a:xfrm>
+            <a:off x="5577840" y="6309359"/>
+            <a:ext cx="3840480" cy="1097280"/>
+          </a:xfrm>
+          <a:prstGeom prst="rect">
+            <a:avLst/>
+          </a:prstGeom>
+          <a:noFill/>
+        </p:spPr>
+        <p:txBody>
+          <a:bodyPr wrap="square" anchor="t">
+            <a:spAutoFit/>
+          </a:bodyPr>
+          <a:lstStyle/>
+          <a:p>
+            <a:pPr algn="l">
+              <a:spcAft>
+                <a:spcPts val="0"/>
+              </a:spcAft>
+              <a:defRPr sz="1000" b="0">
+                <a:solidFill>
+                  <a:srgbClr val="9CA3AF"/>
+                </a:solidFill>
+                <a:latin typeface="Inter"/>
+              </a:defRPr>
+            </a:pPr>
+            <a:r>
+              <a:t>Portfolio-Analyse gegen Produkt-</a:t>
+            </a:r>
+            <a:br/>
+            <a:r>
+              <a:t>angebot. Erkennt Lücken (Vorsorge,</a:t>
+            </a:r>
+            <a:br/>
+            <a:r>
+              <a:t>Anlagen) und schlägt dem RM die</a:t>
+            </a:r>
+            <a:br/>
+            <a:r>
+              <a:t>nächstbeste Aktion vor.</a:t>
+            </a:r>
+          </a:p>
+        </p:txBody>
+      </p:sp>
+      <p:sp>
+        <p:nvSpPr>
+          <p:cNvPr id="25" name="Rounded Rectangle 24"/>
+          <p:cNvSpPr/>
+          <p:nvPr/>
+        </p:nvSpPr>
+        <p:spPr>
+          <a:xfrm>
+            <a:off x="9875520" y="2011680"/>
+            <a:ext cx="4297680" cy="5486400"/>
+          </a:xfrm>
+          <a:prstGeom prst="roundRect">
+            <a:avLst>
+              <a:gd name="adj" fmla="val 4000"/>
+            </a:avLst>
+          </a:prstGeom>
+          <a:solidFill>
+            <a:srgbClr val="222238"/>
+          </a:solidFill>
+          <a:ln>
+            <a:noFill/>
+          </a:ln>
+        </p:spPr>
+        <p:style>
+          <a:lnRef idx="1">
+            <a:schemeClr val="accent1"/>
+          </a:lnRef>
+          <a:fillRef idx="3">
+            <a:schemeClr val="accent1"/>
+          </a:fillRef>
+          <a:effectRef idx="2">
+            <a:schemeClr val="accent1"/>
+          </a:effectRef>
+          <a:fontRef idx="minor">
+            <a:schemeClr val="lt1"/>
+          </a:fontRef>
+        </p:style>
+        <p:txBody>
+          <a:bodyPr rtlCol="0" anchor="ctr"/>
+          <a:lstStyle/>
+          <a:p>
+            <a:pPr algn="ctr"/>
+          </a:p>
+        </p:txBody>
+      </p:sp>
+      <p:sp>
+        <p:nvSpPr>
+          <p:cNvPr id="26" name="Rounded Rectangle 25"/>
+          <p:cNvSpPr/>
+          <p:nvPr/>
+        </p:nvSpPr>
+        <p:spPr>
+          <a:xfrm>
+            <a:off x="10058400" y="2148840"/>
+            <a:ext cx="3931920" cy="594360"/>
+          </a:xfrm>
+          <a:prstGeom prst="roundRect">
+            <a:avLst>
+              <a:gd name="adj" fmla="val 4000"/>
+            </a:avLst>
+          </a:prstGeom>
+          <a:solidFill>
+            <a:srgbClr val="20182A"/>
+          </a:solidFill>
+          <a:ln>
+            <a:noFill/>
+          </a:ln>
+        </p:spPr>
+        <p:style>
+          <a:lnRef idx="1">
+            <a:schemeClr val="accent1"/>
+          </a:lnRef>
+          <a:fillRef idx="3">
+            <a:schemeClr val="accent1"/>
+          </a:fillRef>
+          <a:effectRef idx="2">
+            <a:schemeClr val="accent1"/>
+          </a:effectRef>
+          <a:fontRef idx="minor">
+            <a:schemeClr val="lt1"/>
+          </a:fontRef>
+        </p:style>
+        <p:txBody>
+          <a:bodyPr rtlCol="0" anchor="ctr"/>
+          <a:lstStyle/>
+          <a:p>
+            <a:pPr algn="ctr"/>
+          </a:p>
+        </p:txBody>
+      </p:sp>
+      <p:sp>
+        <p:nvSpPr>
+          <p:cNvPr id="27" name="TextBox 26"/>
+          <p:cNvSpPr txBox="1"/>
+          <p:nvPr/>
+        </p:nvSpPr>
+        <p:spPr>
+          <a:xfrm>
+            <a:off x="10241280" y="2176272"/>
+            <a:ext cx="3657600" cy="182880"/>
+          </a:xfrm>
+          <a:prstGeom prst="rect">
+            <a:avLst/>
+          </a:prstGeom>
+          <a:noFill/>
+        </p:spPr>
+        <p:txBody>
+          <a:bodyPr wrap="square" anchor="t">
+            <a:spAutoFit/>
+          </a:bodyPr>
+          <a:lstStyle/>
+          <a:p>
+            <a:pPr algn="l">
+              <a:spcAft>
+                <a:spcPts val="0"/>
+              </a:spcAft>
+              <a:defRPr sz="900" b="1">
+                <a:solidFill>
+                  <a:srgbClr val="E8A838"/>
+                </a:solidFill>
+                <a:latin typeface="JetBrains Mono"/>
+              </a:defRPr>
+            </a:pPr>
+            <a:r>
+              <a:t>ZUKUNFT</a:t>
+            </a:r>
+          </a:p>
+        </p:txBody>
+      </p:sp>
+      <p:sp>
+        <p:nvSpPr>
+          <p:cNvPr id="28" name="TextBox 27"/>
+          <p:cNvSpPr txBox="1"/>
+          <p:nvPr/>
+        </p:nvSpPr>
+        <p:spPr>
+          <a:xfrm>
+            <a:off x="10241280" y="2377440"/>
+            <a:ext cx="3657600" cy="274320"/>
+          </a:xfrm>
+          <a:prstGeom prst="rect">
+            <a:avLst/>
+          </a:prstGeom>
+          <a:noFill/>
+        </p:spPr>
+        <p:txBody>
+          <a:bodyPr wrap="square" anchor="t">
+            <a:spAutoFit/>
+          </a:bodyPr>
+          <a:lstStyle/>
+          <a:p>
+            <a:pPr algn="l">
+              <a:spcAft>
+                <a:spcPts val="0"/>
+              </a:spcAft>
+              <a:defRPr sz="1100" b="0">
+                <a:solidFill>
+                  <a:srgbClr val="9CA3AF"/>
+                </a:solidFill>
+                <a:latin typeface="Inter"/>
+              </a:defRPr>
+            </a:pPr>
+            <a:r>
+              <a:t>Was in 2–3 Jahren Standard sein wird</a:t>
+            </a:r>
+          </a:p>
+        </p:txBody>
+      </p:sp>
+      <p:sp>
+        <p:nvSpPr>
+          <p:cNvPr id="29" name="TextBox 28"/>
+          <p:cNvSpPr txBox="1"/>
+          <p:nvPr/>
+        </p:nvSpPr>
+        <p:spPr>
+          <a:xfrm>
+            <a:off x="10149840" y="2926080"/>
+            <a:ext cx="3657600" cy="228600"/>
+          </a:xfrm>
+          <a:prstGeom prst="rect">
+            <a:avLst/>
+          </a:prstGeom>
+          <a:noFill/>
+        </p:spPr>
+        <p:txBody>
+          <a:bodyPr wrap="square" anchor="t">
+            <a:spAutoFit/>
+          </a:bodyPr>
+          <a:lstStyle/>
+          <a:p>
+            <a:pPr algn="l">
+              <a:spcAft>
+                <a:spcPts val="0"/>
+              </a:spcAft>
+              <a:defRPr sz="1200" b="1">
+                <a:solidFill>
+                  <a:srgbClr val="FFFFFF"/>
+                </a:solidFill>
+                <a:latin typeface="Inter"/>
+              </a:defRPr>
+            </a:pPr>
+            <a:r>
+              <a:t>Voice AI im Kundenkontakt</a:t>
+            </a:r>
+          </a:p>
+        </p:txBody>
+      </p:sp>
+      <p:sp>
+        <p:nvSpPr>
           <p:cNvPr id="30" name="TextBox 29"/>
           <p:cNvSpPr txBox="1"/>
           <p:nvPr/>
         </p:nvSpPr>
         <p:spPr>
           <a:xfrm>
-            <a:off x="8046720" y="7196328"/>
-            <a:ext cx="5486400" cy="274320"/>
-          </a:xfrm>
-          <a:prstGeom prst="rect">
-            <a:avLst/>
-          </a:prstGeom>
-          <a:noFill/>
-        </p:spPr>
-        <p:txBody>
-          <a:bodyPr wrap="square" anchor="t">
-            <a:spAutoFit/>
-          </a:bodyPr>
-          <a:lstStyle/>
-          <a:p>
-            <a:pPr algn="l">
-              <a:spcAft>
-                <a:spcPts val="0"/>
-              </a:spcAft>
-              <a:defRPr sz="1000" b="1">
+            <a:off x="10149840" y="3200400"/>
+            <a:ext cx="3840480" cy="1097280"/>
+          </a:xfrm>
+          <a:prstGeom prst="rect">
+            <a:avLst/>
+          </a:prstGeom>
+          <a:noFill/>
+        </p:spPr>
+        <p:txBody>
+          <a:bodyPr wrap="square" anchor="t">
+            <a:spAutoFit/>
+          </a:bodyPr>
+          <a:lstStyle/>
+          <a:p>
+            <a:pPr algn="l">
+              <a:spcAft>
+                <a:spcPts val="0"/>
+              </a:spcAft>
+              <a:defRPr sz="1000" b="0">
+                <a:solidFill>
+                  <a:srgbClr val="9CA3AF"/>
+                </a:solidFill>
+                <a:latin typeface="Inter"/>
+              </a:defRPr>
+            </a:pPr>
+            <a:r>
+              <a:t>Telefonische Erstberatung durch AI.</a:t>
+            </a:r>
+            <a:br/>
+            <a:r>
+              <a:t>DE/FR/IT, natürliche Stimme.</a:t>
+            </a:r>
+            <a:br/>
+            <a:r>
+              <a:t>Komplexes wird nahtlos an den</a:t>
+            </a:r>
+            <a:br/>
+            <a:r>
+              <a:t>menschlichen Berater übergeben.</a:t>
+            </a:r>
+          </a:p>
+        </p:txBody>
+      </p:sp>
+      <p:sp>
+        <p:nvSpPr>
+          <p:cNvPr id="31" name="TextBox 30"/>
+          <p:cNvSpPr txBox="1"/>
+          <p:nvPr/>
+        </p:nvSpPr>
+        <p:spPr>
+          <a:xfrm>
+            <a:off x="10149840" y="4480560"/>
+            <a:ext cx="3657600" cy="228600"/>
+          </a:xfrm>
+          <a:prstGeom prst="rect">
+            <a:avLst/>
+          </a:prstGeom>
+          <a:noFill/>
+        </p:spPr>
+        <p:txBody>
+          <a:bodyPr wrap="square" anchor="t">
+            <a:spAutoFit/>
+          </a:bodyPr>
+          <a:lstStyle/>
+          <a:p>
+            <a:pPr algn="l">
+              <a:spcAft>
+                <a:spcPts val="0"/>
+              </a:spcAft>
+              <a:defRPr sz="1200" b="1">
+                <a:solidFill>
+                  <a:srgbClr val="FFFFFF"/>
+                </a:solidFill>
+                <a:latin typeface="Inter"/>
+              </a:defRPr>
+            </a:pPr>
+            <a:r>
+              <a:t>Autonome Kampagnen</a:t>
+            </a:r>
+          </a:p>
+        </p:txBody>
+      </p:sp>
+      <p:sp>
+        <p:nvSpPr>
+          <p:cNvPr id="32" name="TextBox 31"/>
+          <p:cNvSpPr txBox="1"/>
+          <p:nvPr/>
+        </p:nvSpPr>
+        <p:spPr>
+          <a:xfrm>
+            <a:off x="10149840" y="4754880"/>
+            <a:ext cx="3840480" cy="1097280"/>
+          </a:xfrm>
+          <a:prstGeom prst="rect">
+            <a:avLst/>
+          </a:prstGeom>
+          <a:noFill/>
+        </p:spPr>
+        <p:txBody>
+          <a:bodyPr wrap="square" anchor="t">
+            <a:spAutoFit/>
+          </a:bodyPr>
+          <a:lstStyle/>
+          <a:p>
+            <a:pPr algn="l">
+              <a:spcAft>
+                <a:spcPts val="0"/>
+              </a:spcAft>
+              <a:defRPr sz="1000" b="0">
+                <a:solidFill>
+                  <a:srgbClr val="9CA3AF"/>
+                </a:solidFill>
+                <a:latin typeface="Inter"/>
+              </a:defRPr>
+            </a:pPr>
+            <a:r>
+              <a:t>AI plant, erstellt und führt</a:t>
+            </a:r>
+            <a:br/>
+            <a:r>
+              <a:t>personalisierte Kampagnen durch —</a:t>
+            </a:r>
+            <a:br/>
+            <a:r>
+              <a:t>mit menschlicher Aufsicht.</a:t>
+            </a:r>
+            <a:br/>
+            <a:r>
+              <a:t>Von der Zielgruppe bis zur Ansprache.</a:t>
+            </a:r>
+          </a:p>
+        </p:txBody>
+      </p:sp>
+      <p:sp>
+        <p:nvSpPr>
+          <p:cNvPr id="33" name="TextBox 32"/>
+          <p:cNvSpPr txBox="1"/>
+          <p:nvPr/>
+        </p:nvSpPr>
+        <p:spPr>
+          <a:xfrm>
+            <a:off x="10149840" y="6035040"/>
+            <a:ext cx="3657600" cy="228600"/>
+          </a:xfrm>
+          <a:prstGeom prst="rect">
+            <a:avLst/>
+          </a:prstGeom>
+          <a:noFill/>
+        </p:spPr>
+        <p:txBody>
+          <a:bodyPr wrap="square" anchor="t">
+            <a:spAutoFit/>
+          </a:bodyPr>
+          <a:lstStyle/>
+          <a:p>
+            <a:pPr algn="l">
+              <a:spcAft>
+                <a:spcPts val="0"/>
+              </a:spcAft>
+              <a:defRPr sz="1200" b="1">
+                <a:solidFill>
+                  <a:srgbClr val="FFFFFF"/>
+                </a:solidFill>
+                <a:latin typeface="Inter"/>
+              </a:defRPr>
+            </a:pPr>
+            <a:r>
+              <a:t>RM-Copilot im Gespräch</a:t>
+            </a:r>
+          </a:p>
+        </p:txBody>
+      </p:sp>
+      <p:sp>
+        <p:nvSpPr>
+          <p:cNvPr id="34" name="TextBox 33"/>
+          <p:cNvSpPr txBox="1"/>
+          <p:nvPr/>
+        </p:nvSpPr>
+        <p:spPr>
+          <a:xfrm>
+            <a:off x="10149840" y="6309359"/>
+            <a:ext cx="3840480" cy="1097280"/>
+          </a:xfrm>
+          <a:prstGeom prst="rect">
+            <a:avLst/>
+          </a:prstGeom>
+          <a:noFill/>
+        </p:spPr>
+        <p:txBody>
+          <a:bodyPr wrap="square" anchor="t">
+            <a:spAutoFit/>
+          </a:bodyPr>
+          <a:lstStyle/>
+          <a:p>
+            <a:pPr algn="l">
+              <a:spcAft>
+                <a:spcPts val="0"/>
+              </a:spcAft>
+              <a:defRPr sz="1000" b="0">
+                <a:solidFill>
+                  <a:srgbClr val="9CA3AF"/>
+                </a:solidFill>
+                <a:latin typeface="Inter"/>
+              </a:defRPr>
+            </a:pPr>
+            <a:r>
+              <a:t>Echtzeit-Unterstützung während</a:t>
+            </a:r>
+            <a:br/>
+            <a:r>
+              <a:t>der Beratung: Produktvorschläge,</a:t>
+            </a:r>
+            <a:br/>
+            <a:r>
+              <a:t>regulatorische Hinweise,</a:t>
+            </a:r>
+            <a:br/>
+            <a:r>
+              <a:t>Next-Best-Action.</a:t>
+            </a:r>
+          </a:p>
+        </p:txBody>
+      </p:sp>
+      <p:sp>
+        <p:nvSpPr>
+          <p:cNvPr id="35" name="Rounded Rectangle 34"/>
+          <p:cNvSpPr/>
+          <p:nvPr/>
+        </p:nvSpPr>
+        <p:spPr>
+          <a:xfrm>
+            <a:off x="731520" y="7543800"/>
+            <a:ext cx="13167360" cy="182880"/>
+          </a:xfrm>
+          <a:prstGeom prst="roundRect">
+            <a:avLst>
+              <a:gd name="adj" fmla="val 4000"/>
+            </a:avLst>
+          </a:prstGeom>
+          <a:solidFill>
+            <a:srgbClr val="2D2D45"/>
+          </a:solidFill>
+          <a:ln>
+            <a:noFill/>
+          </a:ln>
+        </p:spPr>
+        <p:style>
+          <a:lnRef idx="1">
+            <a:schemeClr val="accent1"/>
+          </a:lnRef>
+          <a:fillRef idx="3">
+            <a:schemeClr val="accent1"/>
+          </a:fillRef>
+          <a:effectRef idx="2">
+            <a:schemeClr val="accent1"/>
+          </a:effectRef>
+          <a:fontRef idx="minor">
+            <a:schemeClr val="lt1"/>
+          </a:fontRef>
+        </p:style>
+        <p:txBody>
+          <a:bodyPr rtlCol="0" anchor="ctr"/>
+          <a:lstStyle/>
+          <a:p>
+            <a:pPr algn="ctr"/>
+          </a:p>
+        </p:txBody>
+      </p:sp>
+      <p:sp>
+        <p:nvSpPr>
+          <p:cNvPr id="36" name="TextBox 35"/>
+          <p:cNvSpPr txBox="1"/>
+          <p:nvPr/>
+        </p:nvSpPr>
+        <p:spPr>
+          <a:xfrm>
+            <a:off x="1005840" y="7543800"/>
+            <a:ext cx="12801600" cy="182880"/>
+          </a:xfrm>
+          <a:prstGeom prst="rect">
+            <a:avLst/>
+          </a:prstGeom>
+          <a:noFill/>
+        </p:spPr>
+        <p:txBody>
+          <a:bodyPr wrap="square" anchor="t">
+            <a:spAutoFit/>
+          </a:bodyPr>
+          <a:lstStyle/>
+          <a:p>
+            <a:pPr algn="l">
+              <a:spcAft>
+                <a:spcPts val="0"/>
+              </a:spcAft>
+              <a:defRPr sz="900" b="1">
                 <a:solidFill>
                   <a:srgbClr val="E8A838"/>
                 </a:solidFill>
@@ -5365,14 +5655,14 @@
               </a:defRPr>
             </a:pPr>
             <a:r>
-              <a:t>Lukas berät nicht anders. Er berät besser vorbereitet, für mehr Kunden.</a:t>
-            </a:r>
-          </a:p>
-        </p:txBody>
-      </p:sp>
-      <p:sp>
-        <p:nvSpPr>
-          <p:cNvPr id="31" name="TextBox 30"/>
+              <a:t>Salesteq positioniert sich in der «nächsten Welle» — mit Produktionserfahrung, die andere noch nicht haben.</a:t>
+            </a:r>
+          </a:p>
+        </p:txBody>
+      </p:sp>
+      <p:sp>
+        <p:nvSpPr>
+          <p:cNvPr id="37" name="TextBox 36"/>
           <p:cNvSpPr txBox="1"/>
           <p:nvPr/>
         </p:nvSpPr>
@@ -5398,7 +5688,7 @@
               </a:spcAft>
               <a:defRPr sz="900" b="0">
                 <a:solidFill>
-                  <a:srgbClr val="6B7280"/>
+                  <a:srgbClr val="505060"/>
                 </a:solidFill>
                 <a:latin typeface="JetBrains Mono"/>
               </a:defRPr>
@@ -5411,7 +5701,7 @@
       </p:sp>
       <p:sp>
         <p:nvSpPr>
-          <p:cNvPr id="32" name="TextBox 31"/>
+          <p:cNvPr id="38" name="TextBox 37"/>
           <p:cNvSpPr txBox="1"/>
           <p:nvPr/>
         </p:nvSpPr>
@@ -5437,13 +5727,13 @@
               </a:spcAft>
               <a:defRPr sz="900" b="0">
                 <a:solidFill>
-                  <a:srgbClr val="6B7280"/>
+                  <a:srgbClr val="505060"/>
                 </a:solidFill>
                 <a:latin typeface="JetBrains Mono"/>
               </a:defRPr>
             </a:pPr>
             <a:r>
-              <a:t>2 / 4</a:t>
+              <a:t>2 / 6</a:t>
             </a:r>
           </a:p>
         </p:txBody>
@@ -5508,7 +5798,7 @@
               </a:defRPr>
             </a:pPr>
             <a:r>
-              <a:t>VORGEHEN</a:t>
+              <a:t>SZENARIEN</a:t>
             </a:r>
           </a:p>
         </p:txBody>
@@ -5547,7 +5837,7 @@
               </a:defRPr>
             </a:pPr>
             <a:r>
-              <a:t>Klein anfangen. Gemeinsam lernen.</a:t>
+              <a:t>Mögliche Use Cases für den Vertrieb</a:t>
             </a:r>
           </a:p>
         </p:txBody>
@@ -5560,8 +5850,8 @@
         </p:nvSpPr>
         <p:spPr>
           <a:xfrm>
-            <a:off x="731520" y="1463040"/>
-            <a:ext cx="9144000" cy="365760"/>
+            <a:off x="731520" y="1417320"/>
+            <a:ext cx="12801600" cy="365760"/>
           </a:xfrm>
           <a:prstGeom prst="rect">
             <a:avLst/>
@@ -5586,7 +5876,7 @@
               </a:defRPr>
             </a:pPr>
             <a:r>
-              <a:t>Kein grosses Projekt. Kein aufwändiger Beschaffungsprozess. Ein kleines, begrenztes Experiment mit klaren Zielen.</a:t>
+              <a:t>Diese Optionen basieren auf unserer Erfahrung. Welche relevant sind, entscheiden Sie.</a:t>
             </a:r>
           </a:p>
         </p:txBody>
@@ -5599,8 +5889,8 @@
         </p:nvSpPr>
         <p:spPr>
           <a:xfrm>
-            <a:off x="731520" y="2103120"/>
-            <a:ext cx="6400800" cy="2103120"/>
+            <a:off x="731520" y="1920240"/>
+            <a:ext cx="6492240" cy="2880360"/>
           </a:xfrm>
           <a:prstGeom prst="roundRect">
             <a:avLst>
@@ -5608,7 +5898,7 @@
             </a:avLst>
           </a:prstGeom>
           <a:solidFill>
-            <a:srgbClr val="F0EFE8"/>
+            <a:srgbClr val="1A1A2E"/>
           </a:solidFill>
           <a:ln>
             <a:noFill/>
@@ -5638,178 +5928,20 @@
       </p:sp>
       <p:sp>
         <p:nvSpPr>
-          <p:cNvPr id="6" name="TextBox 5"/>
-          <p:cNvSpPr txBox="1"/>
-          <p:nvPr/>
-        </p:nvSpPr>
-        <p:spPr>
-          <a:xfrm>
-            <a:off x="1005840" y="2240280"/>
-            <a:ext cx="5486400" cy="228600"/>
-          </a:xfrm>
-          <a:prstGeom prst="rect">
-            <a:avLst/>
-          </a:prstGeom>
-          <a:noFill/>
-        </p:spPr>
-        <p:txBody>
-          <a:bodyPr wrap="square" anchor="t">
-            <a:spAutoFit/>
-          </a:bodyPr>
-          <a:lstStyle/>
-          <a:p>
-            <a:pPr algn="l">
-              <a:spcAft>
-                <a:spcPts val="0"/>
-              </a:spcAft>
-              <a:defRPr sz="1000" b="1">
-                <a:solidFill>
-                  <a:srgbClr val="22C55E"/>
-                </a:solidFill>
-                <a:latin typeface="JetBrains Mono"/>
-              </a:defRPr>
-            </a:pPr>
-            <a:r>
-              <a:t>✓  WAS WIR BRAUCHEN</a:t>
-            </a:r>
-          </a:p>
-        </p:txBody>
-      </p:sp>
-      <p:sp>
-        <p:nvSpPr>
-          <p:cNvPr id="7" name="TextBox 6"/>
-          <p:cNvSpPr txBox="1"/>
-          <p:nvPr/>
-        </p:nvSpPr>
-        <p:spPr>
-          <a:xfrm>
-            <a:off x="1188720" y="2606040"/>
-            <a:ext cx="5669280" cy="320040"/>
-          </a:xfrm>
-          <a:prstGeom prst="rect">
-            <a:avLst/>
-          </a:prstGeom>
-          <a:noFill/>
-        </p:spPr>
-        <p:txBody>
-          <a:bodyPr wrap="square" anchor="t">
-            <a:spAutoFit/>
-          </a:bodyPr>
-          <a:lstStyle/>
-          <a:p>
-            <a:pPr algn="l">
-              <a:spcAft>
-                <a:spcPts val="0"/>
-              </a:spcAft>
-              <a:defRPr sz="1200" b="0">
-                <a:solidFill>
-                  <a:srgbClr val="2D2D2D"/>
-                </a:solidFill>
-                <a:latin typeface="Inter"/>
-              </a:defRPr>
-            </a:pPr>
-            <a:r>
-              <a:t>·  Einen Ansprechpartner im Vertrieb (kein IT-Team nötig)</a:t>
-            </a:r>
-          </a:p>
-        </p:txBody>
-      </p:sp>
-      <p:sp>
-        <p:nvSpPr>
-          <p:cNvPr id="8" name="TextBox 7"/>
-          <p:cNvSpPr txBox="1"/>
-          <p:nvPr/>
-        </p:nvSpPr>
-        <p:spPr>
-          <a:xfrm>
-            <a:off x="1188720" y="2971800"/>
-            <a:ext cx="5669280" cy="320040"/>
-          </a:xfrm>
-          <a:prstGeom prst="rect">
-            <a:avLst/>
-          </a:prstGeom>
-          <a:noFill/>
-        </p:spPr>
-        <p:txBody>
-          <a:bodyPr wrap="square" anchor="t">
-            <a:spAutoFit/>
-          </a:bodyPr>
-          <a:lstStyle/>
-          <a:p>
-            <a:pPr algn="l">
-              <a:spcAft>
-                <a:spcPts val="0"/>
-              </a:spcAft>
-              <a:defRPr sz="1200" b="0">
-                <a:solidFill>
-                  <a:srgbClr val="2D2D2D"/>
-                </a:solidFill>
-                <a:latin typeface="Inter"/>
-              </a:defRPr>
-            </a:pPr>
-            <a:r>
-              <a:t>·  Zugang zu einem typischen Kundenberater-Alltag (1 Tag, 1 Filiale)</a:t>
-            </a:r>
-          </a:p>
-        </p:txBody>
-      </p:sp>
-      <p:sp>
-        <p:nvSpPr>
-          <p:cNvPr id="9" name="TextBox 8"/>
-          <p:cNvSpPr txBox="1"/>
-          <p:nvPr/>
-        </p:nvSpPr>
-        <p:spPr>
-          <a:xfrm>
-            <a:off x="1188720" y="3337560"/>
-            <a:ext cx="5669280" cy="320040"/>
-          </a:xfrm>
-          <a:prstGeom prst="rect">
-            <a:avLst/>
-          </a:prstGeom>
-          <a:noFill/>
-        </p:spPr>
-        <p:txBody>
-          <a:bodyPr wrap="square" anchor="t">
-            <a:spAutoFit/>
-          </a:bodyPr>
-          <a:lstStyle/>
-          <a:p>
-            <a:pPr algn="l">
-              <a:spcAft>
-                <a:spcPts val="0"/>
-              </a:spcAft>
-              <a:defRPr sz="1200" b="0">
-                <a:solidFill>
-                  <a:srgbClr val="2D2D2D"/>
-                </a:solidFill>
-                <a:latin typeface="Inter"/>
-              </a:defRPr>
-            </a:pPr>
-            <a:r>
-              <a:t>·  Bereitschaft, ein kleines Experiment zu starten</a:t>
-            </a:r>
-          </a:p>
-        </p:txBody>
-      </p:sp>
-      <p:sp>
-        <p:nvSpPr>
-          <p:cNvPr id="10" name="Rounded Rectangle 9"/>
+          <p:cNvPr id="6" name="Oval 5"/>
           <p:cNvSpPr/>
           <p:nvPr/>
         </p:nvSpPr>
         <p:spPr>
           <a:xfrm>
-            <a:off x="7589520" y="2103120"/>
-            <a:ext cx="6400800" cy="2103120"/>
-          </a:xfrm>
-          <a:prstGeom prst="roundRect">
-            <a:avLst>
-              <a:gd name="adj" fmla="val 4000"/>
-            </a:avLst>
+            <a:off x="960120" y="2103120"/>
+            <a:ext cx="320040" cy="320040"/>
+          </a:xfrm>
+          <a:prstGeom prst="ellipse">
+            <a:avLst/>
           </a:prstGeom>
           <a:solidFill>
-            <a:srgbClr val="F0EFE8"/>
+            <a:srgbClr val="E8A838"/>
           </a:solidFill>
           <a:ln>
             <a:noFill/>
@@ -5830,10 +5962,192 @@
           </a:fontRef>
         </p:style>
         <p:txBody>
-          <a:bodyPr rtlCol="0" anchor="ctr"/>
-          <a:lstStyle/>
-          <a:p>
-            <a:pPr algn="ctr"/>
+          <a:bodyPr rtlCol="0" anchor="ctr" wrap="none"/>
+          <a:lstStyle/>
+          <a:p>
+            <a:pPr algn="ctr">
+              <a:defRPr sz="1300" b="1">
+                <a:solidFill>
+                  <a:srgbClr val="1A1A2E"/>
+                </a:solidFill>
+                <a:latin typeface="Inter"/>
+              </a:defRPr>
+            </a:pPr>
+            <a:r>
+              <a:t>A</a:t>
+            </a:r>
+          </a:p>
+        </p:txBody>
+      </p:sp>
+      <p:sp>
+        <p:nvSpPr>
+          <p:cNvPr id="7" name="TextBox 6"/>
+          <p:cNvSpPr txBox="1"/>
+          <p:nvPr/>
+        </p:nvSpPr>
+        <p:spPr>
+          <a:xfrm>
+            <a:off x="1417320" y="2084832"/>
+            <a:ext cx="5303520" cy="274320"/>
+          </a:xfrm>
+          <a:prstGeom prst="rect">
+            <a:avLst/>
+          </a:prstGeom>
+          <a:noFill/>
+        </p:spPr>
+        <p:txBody>
+          <a:bodyPr wrap="square" anchor="t">
+            <a:spAutoFit/>
+          </a:bodyPr>
+          <a:lstStyle/>
+          <a:p>
+            <a:pPr algn="l">
+              <a:spcAft>
+                <a:spcPts val="0"/>
+              </a:spcAft>
+              <a:defRPr sz="1400" b="1">
+                <a:solidFill>
+                  <a:srgbClr val="FFFFFF"/>
+                </a:solidFill>
+                <a:latin typeface="Inter"/>
+              </a:defRPr>
+            </a:pPr>
+            <a:r>
+              <a:t>Training &amp; Onboarding neuer Berater</a:t>
+            </a:r>
+          </a:p>
+        </p:txBody>
+      </p:sp>
+      <p:sp>
+        <p:nvSpPr>
+          <p:cNvPr id="8" name="TextBox 7"/>
+          <p:cNvSpPr txBox="1"/>
+          <p:nvPr/>
+        </p:nvSpPr>
+        <p:spPr>
+          <a:xfrm>
+            <a:off x="1005840" y="2468880"/>
+            <a:ext cx="5943600" cy="640080"/>
+          </a:xfrm>
+          <a:prstGeom prst="rect">
+            <a:avLst/>
+          </a:prstGeom>
+          <a:noFill/>
+        </p:spPr>
+        <p:txBody>
+          <a:bodyPr wrap="square" anchor="t">
+            <a:spAutoFit/>
+          </a:bodyPr>
+          <a:lstStyle/>
+          <a:p>
+            <a:pPr algn="l">
+              <a:spcAft>
+                <a:spcPts val="0"/>
+              </a:spcAft>
+              <a:defRPr sz="1000" b="0">
+                <a:solidFill>
+                  <a:srgbClr val="9CA3AF"/>
+                </a:solidFill>
+                <a:latin typeface="Inter"/>
+              </a:defRPr>
+            </a:pPr>
+            <a:r>
+              <a:t>Das «Neustart»-Programm bildet Quereinsteiger in</a:t>
+            </a:r>
+            <a:br/>
+            <a:r>
+              <a:t>12–24 Monaten zum Kundenberater aus. AI kann</a:t>
+            </a:r>
+            <a:br/>
+            <a:r>
+              <a:t>diesen Prozess beschleunigen:</a:t>
+            </a:r>
+          </a:p>
+        </p:txBody>
+      </p:sp>
+      <p:sp>
+        <p:nvSpPr>
+          <p:cNvPr id="9" name="TextBox 8"/>
+          <p:cNvSpPr txBox="1"/>
+          <p:nvPr/>
+        </p:nvSpPr>
+        <p:spPr>
+          <a:xfrm>
+            <a:off x="1005840" y="3063240"/>
+            <a:ext cx="5943600" cy="411480"/>
+          </a:xfrm>
+          <a:prstGeom prst="rect">
+            <a:avLst/>
+          </a:prstGeom>
+          <a:noFill/>
+        </p:spPr>
+        <p:txBody>
+          <a:bodyPr wrap="square" anchor="t">
+            <a:spAutoFit/>
+          </a:bodyPr>
+          <a:lstStyle/>
+          <a:p>
+            <a:pPr algn="l">
+              <a:spcAft>
+                <a:spcPts val="0"/>
+              </a:spcAft>
+              <a:defRPr sz="900" b="0">
+                <a:solidFill>
+                  <a:srgbClr val="9CA3AF"/>
+                </a:solidFill>
+                <a:latin typeface="Inter"/>
+              </a:defRPr>
+            </a:pPr>
+            <a:r>
+              <a:t>→  AI-Sparringspartner für Produktwissen (Hypotheken,</a:t>
+            </a:r>
+            <a:br/>
+            <a:r>
+              <a:t>Vorsorge, Anlagen) — übt Beratungsgespräche</a:t>
+            </a:r>
+          </a:p>
+        </p:txBody>
+      </p:sp>
+      <p:sp>
+        <p:nvSpPr>
+          <p:cNvPr id="10" name="TextBox 9"/>
+          <p:cNvSpPr txBox="1"/>
+          <p:nvPr/>
+        </p:nvSpPr>
+        <p:spPr>
+          <a:xfrm>
+            <a:off x="1005840" y="3474720"/>
+            <a:ext cx="5943600" cy="411480"/>
+          </a:xfrm>
+          <a:prstGeom prst="rect">
+            <a:avLst/>
+          </a:prstGeom>
+          <a:noFill/>
+        </p:spPr>
+        <p:txBody>
+          <a:bodyPr wrap="square" anchor="t">
+            <a:spAutoFit/>
+          </a:bodyPr>
+          <a:lstStyle/>
+          <a:p>
+            <a:pPr algn="l">
+              <a:spcAft>
+                <a:spcPts val="0"/>
+              </a:spcAft>
+              <a:defRPr sz="900" b="0">
+                <a:solidFill>
+                  <a:srgbClr val="9CA3AF"/>
+                </a:solidFill>
+                <a:latin typeface="Inter"/>
+              </a:defRPr>
+            </a:pPr>
+            <a:r>
+              <a:t>→  Simulierte Kundensituationen mit Feedback —</a:t>
+            </a:r>
+            <a:br/>
+            <a:r>
+              <a:t>wie ein erfahrener Kollege, jederzeit verfügbar</a:t>
+            </a:r>
           </a:p>
         </p:txBody>
       </p:sp>
@@ -5845,203 +6159,51 @@
         </p:nvSpPr>
         <p:spPr>
           <a:xfrm>
-            <a:off x="7863840" y="2240280"/>
-            <a:ext cx="5486400" cy="228600"/>
-          </a:xfrm>
-          <a:prstGeom prst="rect">
-            <a:avLst/>
-          </a:prstGeom>
-          <a:noFill/>
-        </p:spPr>
-        <p:txBody>
-          <a:bodyPr wrap="square" anchor="t">
-            <a:spAutoFit/>
-          </a:bodyPr>
-          <a:lstStyle/>
-          <a:p>
-            <a:pPr algn="l">
-              <a:spcAft>
-                <a:spcPts val="0"/>
-              </a:spcAft>
-              <a:defRPr sz="1000" b="1">
-                <a:solidFill>
-                  <a:srgbClr val="EF4444"/>
-                </a:solidFill>
-                <a:latin typeface="JetBrains Mono"/>
-              </a:defRPr>
-            </a:pPr>
-            <a:r>
-              <a:t>✗  WAS WIR NICHT BRAUCHEN</a:t>
-            </a:r>
-          </a:p>
-        </p:txBody>
-      </p:sp>
-      <p:sp>
-        <p:nvSpPr>
-          <p:cNvPr id="12" name="TextBox 11"/>
-          <p:cNvSpPr txBox="1"/>
-          <p:nvPr/>
-        </p:nvSpPr>
-        <p:spPr>
-          <a:xfrm>
-            <a:off x="8046720" y="2606040"/>
-            <a:ext cx="5669280" cy="320040"/>
-          </a:xfrm>
-          <a:prstGeom prst="rect">
-            <a:avLst/>
-          </a:prstGeom>
-          <a:noFill/>
-        </p:spPr>
-        <p:txBody>
-          <a:bodyPr wrap="square" anchor="t">
-            <a:spAutoFit/>
-          </a:bodyPr>
-          <a:lstStyle/>
-          <a:p>
-            <a:pPr algn="l">
-              <a:spcAft>
-                <a:spcPts val="0"/>
-              </a:spcAft>
-              <a:defRPr sz="1200" b="0">
-                <a:solidFill>
-                  <a:srgbClr val="2D2D2D"/>
-                </a:solidFill>
-                <a:latin typeface="Inter"/>
-              </a:defRPr>
-            </a:pPr>
-            <a:r>
-              <a:t>·  Kein grosses Budget</a:t>
-            </a:r>
-          </a:p>
-        </p:txBody>
-      </p:sp>
-      <p:sp>
-        <p:nvSpPr>
-          <p:cNvPr id="13" name="TextBox 12"/>
-          <p:cNvSpPr txBox="1"/>
-          <p:nvPr/>
-        </p:nvSpPr>
-        <p:spPr>
-          <a:xfrm>
-            <a:off x="8046720" y="2971800"/>
-            <a:ext cx="5669280" cy="320040"/>
-          </a:xfrm>
-          <a:prstGeom prst="rect">
-            <a:avLst/>
-          </a:prstGeom>
-          <a:noFill/>
-        </p:spPr>
-        <p:txBody>
-          <a:bodyPr wrap="square" anchor="t">
-            <a:spAutoFit/>
-          </a:bodyPr>
-          <a:lstStyle/>
-          <a:p>
-            <a:pPr algn="l">
-              <a:spcAft>
-                <a:spcPts val="0"/>
-              </a:spcAft>
-              <a:defRPr sz="1200" b="0">
-                <a:solidFill>
-                  <a:srgbClr val="2D2D2D"/>
-                </a:solidFill>
-                <a:latin typeface="Inter"/>
-              </a:defRPr>
-            </a:pPr>
-            <a:r>
-              <a:t>·  Kein grosses IT-Involvement</a:t>
-            </a:r>
-          </a:p>
-        </p:txBody>
-      </p:sp>
-      <p:sp>
-        <p:nvSpPr>
-          <p:cNvPr id="14" name="TextBox 13"/>
-          <p:cNvSpPr txBox="1"/>
-          <p:nvPr/>
-        </p:nvSpPr>
-        <p:spPr>
-          <a:xfrm>
-            <a:off x="8046720" y="3337560"/>
-            <a:ext cx="5669280" cy="320040"/>
-          </a:xfrm>
-          <a:prstGeom prst="rect">
-            <a:avLst/>
-          </a:prstGeom>
-          <a:noFill/>
-        </p:spPr>
-        <p:txBody>
-          <a:bodyPr wrap="square" anchor="t">
-            <a:spAutoFit/>
-          </a:bodyPr>
-          <a:lstStyle/>
-          <a:p>
-            <a:pPr algn="l">
-              <a:spcAft>
-                <a:spcPts val="0"/>
-              </a:spcAft>
-              <a:defRPr sz="1200" b="0">
-                <a:solidFill>
-                  <a:srgbClr val="2D2D2D"/>
-                </a:solidFill>
-                <a:latin typeface="Inter"/>
-              </a:defRPr>
-            </a:pPr>
-            <a:r>
-              <a:t>·  Keine langfristigen Commitments</a:t>
-            </a:r>
-          </a:p>
-        </p:txBody>
-      </p:sp>
-      <p:sp>
-        <p:nvSpPr>
-          <p:cNvPr id="15" name="TextBox 14"/>
-          <p:cNvSpPr txBox="1"/>
-          <p:nvPr/>
-        </p:nvSpPr>
-        <p:spPr>
-          <a:xfrm>
-            <a:off x="8046720" y="3703320"/>
-            <a:ext cx="5669280" cy="320040"/>
-          </a:xfrm>
-          <a:prstGeom prst="rect">
-            <a:avLst/>
-          </a:prstGeom>
-          <a:noFill/>
-        </p:spPr>
-        <p:txBody>
-          <a:bodyPr wrap="square" anchor="t">
-            <a:spAutoFit/>
-          </a:bodyPr>
-          <a:lstStyle/>
-          <a:p>
-            <a:pPr algn="l">
-              <a:spcAft>
-                <a:spcPts val="0"/>
-              </a:spcAft>
-              <a:defRPr sz="1200" b="0">
-                <a:solidFill>
-                  <a:srgbClr val="2D2D2D"/>
-                </a:solidFill>
-                <a:latin typeface="Inter"/>
-              </a:defRPr>
-            </a:pPr>
-            <a:r>
-              <a:t>·  Keinen Zugang zu Kernbanksystemen</a:t>
-            </a:r>
-          </a:p>
-        </p:txBody>
-      </p:sp>
-      <p:sp>
-        <p:nvSpPr>
-          <p:cNvPr id="16" name="Rounded Rectangle 15"/>
+            <a:off x="1005840" y="3886200"/>
+            <a:ext cx="5943600" cy="411480"/>
+          </a:xfrm>
+          <a:prstGeom prst="rect">
+            <a:avLst/>
+          </a:prstGeom>
+          <a:noFill/>
+        </p:spPr>
+        <p:txBody>
+          <a:bodyPr wrap="square" anchor="t">
+            <a:spAutoFit/>
+          </a:bodyPr>
+          <a:lstStyle/>
+          <a:p>
+            <a:pPr algn="l">
+              <a:spcAft>
+                <a:spcPts val="0"/>
+              </a:spcAft>
+              <a:defRPr sz="900" b="0">
+                <a:solidFill>
+                  <a:srgbClr val="9CA3AF"/>
+                </a:solidFill>
+                <a:latin typeface="Inter"/>
+              </a:defRPr>
+            </a:pPr>
+            <a:r>
+              <a:t>→  Neue RMs werden schneller produktiv,</a:t>
+            </a:r>
+            <a:br/>
+            <a:r>
+              <a:t>SAQ-Zertifizierung besser vorbereitet</a:t>
+            </a:r>
+          </a:p>
+        </p:txBody>
+      </p:sp>
+      <p:sp>
+        <p:nvSpPr>
+          <p:cNvPr id="12" name="Rounded Rectangle 11"/>
           <p:cNvSpPr/>
           <p:nvPr/>
         </p:nvSpPr>
         <p:spPr>
           <a:xfrm>
-            <a:off x="731520" y="4572000"/>
-            <a:ext cx="4297680" cy="3200400"/>
+            <a:off x="960120" y="4389120"/>
+            <a:ext cx="6035040" cy="274320"/>
           </a:xfrm>
           <a:prstGeom prst="roundRect">
             <a:avLst>
@@ -6049,7 +6211,7 @@
             </a:avLst>
           </a:prstGeom>
           <a:solidFill>
-            <a:srgbClr val="1A1A2E"/>
+            <a:srgbClr val="2D2D45"/>
           </a:solidFill>
           <a:ln>
             <a:noFill/>
@@ -6079,31 +6241,31 @@
       </p:sp>
       <p:sp>
         <p:nvSpPr>
-          <p:cNvPr id="17" name="TextBox 16"/>
-          <p:cNvSpPr txBox="1"/>
-          <p:nvPr/>
-        </p:nvSpPr>
-        <p:spPr>
-          <a:xfrm>
-            <a:off x="1005840" y="4709160"/>
-            <a:ext cx="914400" cy="457200"/>
-          </a:xfrm>
-          <a:prstGeom prst="rect">
-            <a:avLst/>
-          </a:prstGeom>
-          <a:noFill/>
-        </p:spPr>
-        <p:txBody>
-          <a:bodyPr wrap="square" anchor="t">
-            <a:spAutoFit/>
-          </a:bodyPr>
-          <a:lstStyle/>
-          <a:p>
-            <a:pPr algn="l">
-              <a:spcAft>
-                <a:spcPts val="0"/>
-              </a:spcAft>
-              <a:defRPr sz="3600" b="0">
+          <p:cNvPr id="13" name="TextBox 12"/>
+          <p:cNvSpPr txBox="1"/>
+          <p:nvPr/>
+        </p:nvSpPr>
+        <p:spPr>
+          <a:xfrm>
+            <a:off x="1143000" y="4407408"/>
+            <a:ext cx="5669280" cy="228600"/>
+          </a:xfrm>
+          <a:prstGeom prst="rect">
+            <a:avLst/>
+          </a:prstGeom>
+          <a:noFill/>
+        </p:spPr>
+        <p:txBody>
+          <a:bodyPr wrap="square" anchor="t">
+            <a:spAutoFit/>
+          </a:bodyPr>
+          <a:lstStyle/>
+          <a:p>
+            <a:pPr algn="l">
+              <a:spcAft>
+                <a:spcPts val="0"/>
+              </a:spcAft>
+              <a:defRPr sz="900" b="1">
                 <a:solidFill>
                   <a:srgbClr val="E8A838"/>
                 </a:solidFill>
@@ -6111,158 +6273,21 @@
               </a:defRPr>
             </a:pPr>
             <a:r>
-              <a:t>1</a:t>
-            </a:r>
-          </a:p>
-        </p:txBody>
-      </p:sp>
-      <p:sp>
-        <p:nvSpPr>
-          <p:cNvPr id="18" name="TextBox 17"/>
-          <p:cNvSpPr txBox="1"/>
-          <p:nvPr/>
-        </p:nvSpPr>
-        <p:spPr>
-          <a:xfrm>
-            <a:off x="1005840" y="5303520"/>
-            <a:ext cx="3657600" cy="320040"/>
-          </a:xfrm>
-          <a:prstGeom prst="rect">
-            <a:avLst/>
-          </a:prstGeom>
-          <a:noFill/>
-        </p:spPr>
-        <p:txBody>
-          <a:bodyPr wrap="square" anchor="t">
-            <a:spAutoFit/>
-          </a:bodyPr>
-          <a:lstStyle/>
-          <a:p>
-            <a:pPr algn="l">
-              <a:spcAft>
-                <a:spcPts val="0"/>
-              </a:spcAft>
-              <a:defRPr sz="1600" b="1">
-                <a:solidFill>
-                  <a:srgbClr val="FFFFFF"/>
-                </a:solidFill>
-                <a:latin typeface="Inter"/>
-              </a:defRPr>
-            </a:pPr>
-            <a:r>
-              <a:t>Big Picture</a:t>
-            </a:r>
-          </a:p>
-        </p:txBody>
-      </p:sp>
-      <p:sp>
-        <p:nvSpPr>
-          <p:cNvPr id="19" name="TextBox 18"/>
-          <p:cNvSpPr txBox="1"/>
-          <p:nvPr/>
-        </p:nvSpPr>
-        <p:spPr>
-          <a:xfrm>
-            <a:off x="1005840" y="5760720"/>
-            <a:ext cx="3657600" cy="1828800"/>
-          </a:xfrm>
-          <a:prstGeom prst="rect">
-            <a:avLst/>
-          </a:prstGeom>
-          <a:noFill/>
-        </p:spPr>
-        <p:txBody>
-          <a:bodyPr wrap="square" anchor="t">
-            <a:spAutoFit/>
-          </a:bodyPr>
-          <a:lstStyle/>
-          <a:p>
-            <a:pPr algn="l">
-              <a:spcAft>
-                <a:spcPts val="0"/>
-              </a:spcAft>
-              <a:defRPr sz="1100" b="0">
-                <a:solidFill>
-                  <a:srgbClr val="9CA3AF"/>
-                </a:solidFill>
-                <a:latin typeface="Inter"/>
-              </a:defRPr>
-            </a:pPr>
-            <a:r>
-              <a:t>Gemeinsam erarbeiten:</a:t>
-            </a:r>
-            <a:br/>
-            <a:r>
-              <a:t>«Zukunft des Vertriebs mit AI.»</a:t>
-            </a:r>
-            <a:br/>
-            <a:r>
-              <a:t>Wo liegt das Potenzial?</a:t>
-            </a:r>
-            <a:br/>
-            <a:r>
-              <a:t>Welche Low-Hanging Fruits?</a:t>
-            </a:r>
-            <a:br/>
-            <a:r>
-              <a:t>Ein halber Tag Workshop.</a:t>
-            </a:r>
-            <a:br/>
-            <a:r>
-              <a:t>Ergebnis: priorisierte Use Cases.</a:t>
-            </a:r>
-          </a:p>
-        </p:txBody>
-      </p:sp>
-      <p:sp>
-        <p:nvSpPr>
-          <p:cNvPr id="20" name="TextBox 19"/>
-          <p:cNvSpPr txBox="1"/>
-          <p:nvPr/>
-        </p:nvSpPr>
-        <p:spPr>
-          <a:xfrm>
-            <a:off x="1005840" y="7178040"/>
-            <a:ext cx="2743200" cy="274320"/>
-          </a:xfrm>
-          <a:prstGeom prst="rect">
-            <a:avLst/>
-          </a:prstGeom>
-          <a:noFill/>
-        </p:spPr>
-        <p:txBody>
-          <a:bodyPr wrap="square" anchor="t">
-            <a:spAutoFit/>
-          </a:bodyPr>
-          <a:lstStyle/>
-          <a:p>
-            <a:pPr algn="l">
-              <a:spcAft>
-                <a:spcPts val="0"/>
-              </a:spcAft>
-              <a:defRPr sz="1100" b="1">
-                <a:solidFill>
-                  <a:srgbClr val="E8A838"/>
-                </a:solidFill>
-                <a:latin typeface="JetBrains Mono"/>
-              </a:defRPr>
-            </a:pPr>
-            <a:r>
-              <a:t>Woche 1–2</a:t>
-            </a:r>
-          </a:p>
-        </p:txBody>
-      </p:sp>
-      <p:sp>
-        <p:nvSpPr>
-          <p:cNvPr id="21" name="Rounded Rectangle 20"/>
+              <a:t>Wirkung: Einarbeitungszeit verkürzen, Qualität sichern</a:t>
+            </a:r>
+          </a:p>
+        </p:txBody>
+      </p:sp>
+      <p:sp>
+        <p:nvSpPr>
+          <p:cNvPr id="14" name="Rounded Rectangle 13"/>
           <p:cNvSpPr/>
           <p:nvPr/>
         </p:nvSpPr>
         <p:spPr>
           <a:xfrm>
-            <a:off x="5303520" y="4572000"/>
-            <a:ext cx="4297680" cy="3200400"/>
+            <a:off x="7589520" y="1920240"/>
+            <a:ext cx="6492240" cy="2880360"/>
           </a:xfrm>
           <a:prstGeom prst="roundRect">
             <a:avLst>
@@ -6300,198 +6325,20 @@
       </p:sp>
       <p:sp>
         <p:nvSpPr>
-          <p:cNvPr id="22" name="TextBox 21"/>
-          <p:cNvSpPr txBox="1"/>
-          <p:nvPr/>
-        </p:nvSpPr>
-        <p:spPr>
-          <a:xfrm>
-            <a:off x="5577840" y="4709160"/>
-            <a:ext cx="914400" cy="457200"/>
-          </a:xfrm>
-          <a:prstGeom prst="rect">
-            <a:avLst/>
-          </a:prstGeom>
-          <a:noFill/>
-        </p:spPr>
-        <p:txBody>
-          <a:bodyPr wrap="square" anchor="t">
-            <a:spAutoFit/>
-          </a:bodyPr>
-          <a:lstStyle/>
-          <a:p>
-            <a:pPr algn="l">
-              <a:spcAft>
-                <a:spcPts val="0"/>
-              </a:spcAft>
-              <a:defRPr sz="3600" b="0">
-                <a:solidFill>
-                  <a:srgbClr val="E8A838"/>
-                </a:solidFill>
-                <a:latin typeface="Inter"/>
-              </a:defRPr>
-            </a:pPr>
-            <a:r>
-              <a:t>2</a:t>
-            </a:r>
-          </a:p>
-        </p:txBody>
-      </p:sp>
-      <p:sp>
-        <p:nvSpPr>
-          <p:cNvPr id="23" name="TextBox 22"/>
-          <p:cNvSpPr txBox="1"/>
-          <p:nvPr/>
-        </p:nvSpPr>
-        <p:spPr>
-          <a:xfrm>
-            <a:off x="5577840" y="5303520"/>
-            <a:ext cx="3657600" cy="320040"/>
-          </a:xfrm>
-          <a:prstGeom prst="rect">
-            <a:avLst/>
-          </a:prstGeom>
-          <a:noFill/>
-        </p:spPr>
-        <p:txBody>
-          <a:bodyPr wrap="square" anchor="t">
-            <a:spAutoFit/>
-          </a:bodyPr>
-          <a:lstStyle/>
-          <a:p>
-            <a:pPr algn="l">
-              <a:spcAft>
-                <a:spcPts val="0"/>
-              </a:spcAft>
-              <a:defRPr sz="1600" b="1">
-                <a:solidFill>
-                  <a:srgbClr val="FFFFFF"/>
-                </a:solidFill>
-                <a:latin typeface="Inter"/>
-              </a:defRPr>
-            </a:pPr>
-            <a:r>
-              <a:t>Konkreter Use Case</a:t>
-            </a:r>
-          </a:p>
-        </p:txBody>
-      </p:sp>
-      <p:sp>
-        <p:nvSpPr>
-          <p:cNvPr id="24" name="TextBox 23"/>
-          <p:cNvSpPr txBox="1"/>
-          <p:nvPr/>
-        </p:nvSpPr>
-        <p:spPr>
-          <a:xfrm>
-            <a:off x="5577840" y="5760720"/>
-            <a:ext cx="3657600" cy="1828800"/>
-          </a:xfrm>
-          <a:prstGeom prst="rect">
-            <a:avLst/>
-          </a:prstGeom>
-          <a:noFill/>
-        </p:spPr>
-        <p:txBody>
-          <a:bodyPr wrap="square" anchor="t">
-            <a:spAutoFit/>
-          </a:bodyPr>
-          <a:lstStyle/>
-          <a:p>
-            <a:pPr algn="l">
-              <a:spcAft>
-                <a:spcPts val="0"/>
-              </a:spcAft>
-              <a:defRPr sz="1100" b="0">
-                <a:solidFill>
-                  <a:srgbClr val="9CA3AF"/>
-                </a:solidFill>
-                <a:latin typeface="Inter"/>
-              </a:defRPr>
-            </a:pPr>
-            <a:r>
-              <a:t>Ausarbeitung eines Use Case</a:t>
-            </a:r>
-            <a:br/>
-            <a:r>
-              <a:t>für eine Raiffeisenbank.</a:t>
-            </a:r>
-            <a:br/>
-            <a:r>
-              <a:t>Z.B. RM-Briefings oder proaktive</a:t>
-            </a:r>
-            <a:br/>
-            <a:r>
-              <a:t>Kundenansprache bei Zinsänderungen.</a:t>
-            </a:r>
-            <a:br/>
-            <a:r>
-              <a:t>Funktionierender Prototyp,</a:t>
-            </a:r>
-            <a:br/>
-            <a:r>
-              <a:t>keine Slides.</a:t>
-            </a:r>
-          </a:p>
-        </p:txBody>
-      </p:sp>
-      <p:sp>
-        <p:nvSpPr>
-          <p:cNvPr id="25" name="TextBox 24"/>
-          <p:cNvSpPr txBox="1"/>
-          <p:nvPr/>
-        </p:nvSpPr>
-        <p:spPr>
-          <a:xfrm>
-            <a:off x="5577840" y="7178040"/>
-            <a:ext cx="2743200" cy="274320"/>
-          </a:xfrm>
-          <a:prstGeom prst="rect">
-            <a:avLst/>
-          </a:prstGeom>
-          <a:noFill/>
-        </p:spPr>
-        <p:txBody>
-          <a:bodyPr wrap="square" anchor="t">
-            <a:spAutoFit/>
-          </a:bodyPr>
-          <a:lstStyle/>
-          <a:p>
-            <a:pPr algn="l">
-              <a:spcAft>
-                <a:spcPts val="0"/>
-              </a:spcAft>
-              <a:defRPr sz="1100" b="1">
-                <a:solidFill>
-                  <a:srgbClr val="E8A838"/>
-                </a:solidFill>
-                <a:latin typeface="JetBrains Mono"/>
-              </a:defRPr>
-            </a:pPr>
-            <a:r>
-              <a:t>Woche 3–8</a:t>
-            </a:r>
-          </a:p>
-        </p:txBody>
-      </p:sp>
-      <p:sp>
-        <p:nvSpPr>
-          <p:cNvPr id="26" name="Rounded Rectangle 25"/>
+          <p:cNvPr id="15" name="Oval 14"/>
           <p:cNvSpPr/>
           <p:nvPr/>
         </p:nvSpPr>
         <p:spPr>
           <a:xfrm>
-            <a:off x="9875520" y="4572000"/>
-            <a:ext cx="4297680" cy="3200400"/>
-          </a:xfrm>
-          <a:prstGeom prst="roundRect">
-            <a:avLst>
-              <a:gd name="adj" fmla="val 4000"/>
-            </a:avLst>
+            <a:off x="7818120" y="2103120"/>
+            <a:ext cx="320040" cy="320040"/>
+          </a:xfrm>
+          <a:prstGeom prst="ellipse">
+            <a:avLst/>
           </a:prstGeom>
           <a:solidFill>
-            <a:srgbClr val="1A1A2E"/>
+            <a:srgbClr val="E8A838"/>
           </a:solidFill>
           <a:ln>
             <a:noFill/>
@@ -6512,6 +6359,276 @@
           </a:fontRef>
         </p:style>
         <p:txBody>
+          <a:bodyPr rtlCol="0" anchor="ctr" wrap="none"/>
+          <a:lstStyle/>
+          <a:p>
+            <a:pPr algn="ctr">
+              <a:defRPr sz="1300" b="1">
+                <a:solidFill>
+                  <a:srgbClr val="1A1A2E"/>
+                </a:solidFill>
+                <a:latin typeface="Inter"/>
+              </a:defRPr>
+            </a:pPr>
+            <a:r>
+              <a:t>B</a:t>
+            </a:r>
+          </a:p>
+        </p:txBody>
+      </p:sp>
+      <p:sp>
+        <p:nvSpPr>
+          <p:cNvPr id="16" name="TextBox 15"/>
+          <p:cNvSpPr txBox="1"/>
+          <p:nvPr/>
+        </p:nvSpPr>
+        <p:spPr>
+          <a:xfrm>
+            <a:off x="8275320" y="2084832"/>
+            <a:ext cx="5303520" cy="274320"/>
+          </a:xfrm>
+          <a:prstGeom prst="rect">
+            <a:avLst/>
+          </a:prstGeom>
+          <a:noFill/>
+        </p:spPr>
+        <p:txBody>
+          <a:bodyPr wrap="square" anchor="t">
+            <a:spAutoFit/>
+          </a:bodyPr>
+          <a:lstStyle/>
+          <a:p>
+            <a:pPr algn="l">
+              <a:spcAft>
+                <a:spcPts val="0"/>
+              </a:spcAft>
+              <a:defRPr sz="1400" b="1">
+                <a:solidFill>
+                  <a:srgbClr val="FFFFFF"/>
+                </a:solidFill>
+                <a:latin typeface="Inter"/>
+              </a:defRPr>
+            </a:pPr>
+            <a:r>
+              <a:t>Proaktive Kundenansprache</a:t>
+            </a:r>
+          </a:p>
+        </p:txBody>
+      </p:sp>
+      <p:sp>
+        <p:nvSpPr>
+          <p:cNvPr id="17" name="TextBox 16"/>
+          <p:cNvSpPr txBox="1"/>
+          <p:nvPr/>
+        </p:nvSpPr>
+        <p:spPr>
+          <a:xfrm>
+            <a:off x="7863840" y="2468880"/>
+            <a:ext cx="5943600" cy="640080"/>
+          </a:xfrm>
+          <a:prstGeom prst="rect">
+            <a:avLst/>
+          </a:prstGeom>
+          <a:noFill/>
+        </p:spPr>
+        <p:txBody>
+          <a:bodyPr wrap="square" anchor="t">
+            <a:spAutoFit/>
+          </a:bodyPr>
+          <a:lstStyle/>
+          <a:p>
+            <a:pPr algn="l">
+              <a:spcAft>
+                <a:spcPts val="0"/>
+              </a:spcAft>
+              <a:defRPr sz="1000" b="0">
+                <a:solidFill>
+                  <a:srgbClr val="9CA3AF"/>
+                </a:solidFill>
+                <a:latin typeface="Inter"/>
+              </a:defRPr>
+            </a:pPr>
+            <a:r>
+              <a:t>Bei Zinssenkungen, Lebensereignissen oder</a:t>
+            </a:r>
+            <a:br/>
+            <a:r>
+              <a:t>Marktveränderungen: AI identifiziert betroffene</a:t>
+            </a:r>
+            <a:br/>
+            <a:r>
+              <a:t>Kunden und bereitet die Ansprache vor.</a:t>
+            </a:r>
+          </a:p>
+        </p:txBody>
+      </p:sp>
+      <p:sp>
+        <p:nvSpPr>
+          <p:cNvPr id="18" name="TextBox 17"/>
+          <p:cNvSpPr txBox="1"/>
+          <p:nvPr/>
+        </p:nvSpPr>
+        <p:spPr>
+          <a:xfrm>
+            <a:off x="7863840" y="3063240"/>
+            <a:ext cx="5943600" cy="411480"/>
+          </a:xfrm>
+          <a:prstGeom prst="rect">
+            <a:avLst/>
+          </a:prstGeom>
+          <a:noFill/>
+        </p:spPr>
+        <p:txBody>
+          <a:bodyPr wrap="square" anchor="t">
+            <a:spAutoFit/>
+          </a:bodyPr>
+          <a:lstStyle/>
+          <a:p>
+            <a:pPr algn="l">
+              <a:spcAft>
+                <a:spcPts val="0"/>
+              </a:spcAft>
+              <a:defRPr sz="900" b="0">
+                <a:solidFill>
+                  <a:srgbClr val="9CA3AF"/>
+                </a:solidFill>
+                <a:latin typeface="Inter"/>
+              </a:defRPr>
+            </a:pPr>
+            <a:r>
+              <a:t>→  Personalisierte Nachrichten (DE/FR/IT)</a:t>
+            </a:r>
+            <a:br/>
+            <a:r>
+              <a:t>dem RM zur Freigabe vorgelegt</a:t>
+            </a:r>
+          </a:p>
+        </p:txBody>
+      </p:sp>
+      <p:sp>
+        <p:nvSpPr>
+          <p:cNvPr id="19" name="TextBox 18"/>
+          <p:cNvSpPr txBox="1"/>
+          <p:nvPr/>
+        </p:nvSpPr>
+        <p:spPr>
+          <a:xfrm>
+            <a:off x="7863840" y="3474720"/>
+            <a:ext cx="5943600" cy="411480"/>
+          </a:xfrm>
+          <a:prstGeom prst="rect">
+            <a:avLst/>
+          </a:prstGeom>
+          <a:noFill/>
+        </p:spPr>
+        <p:txBody>
+          <a:bodyPr wrap="square" anchor="t">
+            <a:spAutoFit/>
+          </a:bodyPr>
+          <a:lstStyle/>
+          <a:p>
+            <a:pPr algn="l">
+              <a:spcAft>
+                <a:spcPts val="0"/>
+              </a:spcAft>
+              <a:defRPr sz="900" b="0">
+                <a:solidFill>
+                  <a:srgbClr val="9CA3AF"/>
+                </a:solidFill>
+                <a:latin typeface="Inter"/>
+              </a:defRPr>
+            </a:pPr>
+            <a:r>
+              <a:t>→  Trigger-basiert: Zinsänderungen, Ablauf Festhypothek,</a:t>
+            </a:r>
+            <a:br/>
+            <a:r>
+              <a:t>Geburtstag, Pensionierung in 5 Jahren</a:t>
+            </a:r>
+          </a:p>
+        </p:txBody>
+      </p:sp>
+      <p:sp>
+        <p:nvSpPr>
+          <p:cNvPr id="20" name="TextBox 19"/>
+          <p:cNvSpPr txBox="1"/>
+          <p:nvPr/>
+        </p:nvSpPr>
+        <p:spPr>
+          <a:xfrm>
+            <a:off x="7863840" y="3886200"/>
+            <a:ext cx="5943600" cy="411480"/>
+          </a:xfrm>
+          <a:prstGeom prst="rect">
+            <a:avLst/>
+          </a:prstGeom>
+          <a:noFill/>
+        </p:spPr>
+        <p:txBody>
+          <a:bodyPr wrap="square" anchor="t">
+            <a:spAutoFit/>
+          </a:bodyPr>
+          <a:lstStyle/>
+          <a:p>
+            <a:pPr algn="l">
+              <a:spcAft>
+                <a:spcPts val="0"/>
+              </a:spcAft>
+              <a:defRPr sz="900" b="0">
+                <a:solidFill>
+                  <a:srgbClr val="9CA3AF"/>
+                </a:solidFill>
+                <a:latin typeface="Inter"/>
+              </a:defRPr>
+            </a:pPr>
+            <a:r>
+              <a:t>→  Systematische Betreuung statt Zufall —</a:t>
+            </a:r>
+            <a:br/>
+            <a:r>
+              <a:t>auch für das lange Ende des Kundenstamms</a:t>
+            </a:r>
+          </a:p>
+        </p:txBody>
+      </p:sp>
+      <p:sp>
+        <p:nvSpPr>
+          <p:cNvPr id="21" name="Rounded Rectangle 20"/>
+          <p:cNvSpPr/>
+          <p:nvPr/>
+        </p:nvSpPr>
+        <p:spPr>
+          <a:xfrm>
+            <a:off x="7818120" y="4389120"/>
+            <a:ext cx="6035040" cy="274320"/>
+          </a:xfrm>
+          <a:prstGeom prst="roundRect">
+            <a:avLst>
+              <a:gd name="adj" fmla="val 4000"/>
+            </a:avLst>
+          </a:prstGeom>
+          <a:solidFill>
+            <a:srgbClr val="2D2D45"/>
+          </a:solidFill>
+          <a:ln>
+            <a:noFill/>
+          </a:ln>
+        </p:spPr>
+        <p:style>
+          <a:lnRef idx="1">
+            <a:schemeClr val="accent1"/>
+          </a:lnRef>
+          <a:fillRef idx="3">
+            <a:schemeClr val="accent1"/>
+          </a:fillRef>
+          <a:effectRef idx="2">
+            <a:schemeClr val="accent1"/>
+          </a:effectRef>
+          <a:fontRef idx="minor">
+            <a:schemeClr val="lt1"/>
+          </a:fontRef>
+        </p:style>
+        <p:txBody>
           <a:bodyPr rtlCol="0" anchor="ctr"/>
           <a:lstStyle/>
           <a:p>
@@ -6521,31 +6638,428 @@
       </p:sp>
       <p:sp>
         <p:nvSpPr>
+          <p:cNvPr id="22" name="TextBox 21"/>
+          <p:cNvSpPr txBox="1"/>
+          <p:nvPr/>
+        </p:nvSpPr>
+        <p:spPr>
+          <a:xfrm>
+            <a:off x="8001000" y="4407408"/>
+            <a:ext cx="5669280" cy="228600"/>
+          </a:xfrm>
+          <a:prstGeom prst="rect">
+            <a:avLst/>
+          </a:prstGeom>
+          <a:noFill/>
+        </p:spPr>
+        <p:txBody>
+          <a:bodyPr wrap="square" anchor="t">
+            <a:spAutoFit/>
+          </a:bodyPr>
+          <a:lstStyle/>
+          <a:p>
+            <a:pPr algn="l">
+              <a:spcAft>
+                <a:spcPts val="0"/>
+              </a:spcAft>
+              <a:defRPr sz="900" b="1">
+                <a:solidFill>
+                  <a:srgbClr val="E8A838"/>
+                </a:solidFill>
+                <a:latin typeface="Inter"/>
+              </a:defRPr>
+            </a:pPr>
+            <a:r>
+              <a:t>Wirkung: Cross-Selling-Potenzial systematisch nutzen</a:t>
+            </a:r>
+          </a:p>
+        </p:txBody>
+      </p:sp>
+      <p:sp>
+        <p:nvSpPr>
+          <p:cNvPr id="23" name="Rounded Rectangle 22"/>
+          <p:cNvSpPr/>
+          <p:nvPr/>
+        </p:nvSpPr>
+        <p:spPr>
+          <a:xfrm>
+            <a:off x="731520" y="4983480"/>
+            <a:ext cx="6492240" cy="2880360"/>
+          </a:xfrm>
+          <a:prstGeom prst="roundRect">
+            <a:avLst>
+              <a:gd name="adj" fmla="val 4000"/>
+            </a:avLst>
+          </a:prstGeom>
+          <a:solidFill>
+            <a:srgbClr val="1A1A2E"/>
+          </a:solidFill>
+          <a:ln>
+            <a:noFill/>
+          </a:ln>
+        </p:spPr>
+        <p:style>
+          <a:lnRef idx="1">
+            <a:schemeClr val="accent1"/>
+          </a:lnRef>
+          <a:fillRef idx="3">
+            <a:schemeClr val="accent1"/>
+          </a:fillRef>
+          <a:effectRef idx="2">
+            <a:schemeClr val="accent1"/>
+          </a:effectRef>
+          <a:fontRef idx="minor">
+            <a:schemeClr val="lt1"/>
+          </a:fontRef>
+        </p:style>
+        <p:txBody>
+          <a:bodyPr rtlCol="0" anchor="ctr"/>
+          <a:lstStyle/>
+          <a:p>
+            <a:pPr algn="ctr"/>
+          </a:p>
+        </p:txBody>
+      </p:sp>
+      <p:sp>
+        <p:nvSpPr>
+          <p:cNvPr id="24" name="Oval 23"/>
+          <p:cNvSpPr/>
+          <p:nvPr/>
+        </p:nvSpPr>
+        <p:spPr>
+          <a:xfrm>
+            <a:off x="960120" y="5166360"/>
+            <a:ext cx="320040" cy="320040"/>
+          </a:xfrm>
+          <a:prstGeom prst="ellipse">
+            <a:avLst/>
+          </a:prstGeom>
+          <a:solidFill>
+            <a:srgbClr val="E8A838"/>
+          </a:solidFill>
+          <a:ln>
+            <a:noFill/>
+          </a:ln>
+        </p:spPr>
+        <p:style>
+          <a:lnRef idx="1">
+            <a:schemeClr val="accent1"/>
+          </a:lnRef>
+          <a:fillRef idx="3">
+            <a:schemeClr val="accent1"/>
+          </a:fillRef>
+          <a:effectRef idx="2">
+            <a:schemeClr val="accent1"/>
+          </a:effectRef>
+          <a:fontRef idx="minor">
+            <a:schemeClr val="lt1"/>
+          </a:fontRef>
+        </p:style>
+        <p:txBody>
+          <a:bodyPr rtlCol="0" anchor="ctr" wrap="none"/>
+          <a:lstStyle/>
+          <a:p>
+            <a:pPr algn="ctr">
+              <a:defRPr sz="1300" b="1">
+                <a:solidFill>
+                  <a:srgbClr val="1A1A2E"/>
+                </a:solidFill>
+                <a:latin typeface="Inter"/>
+              </a:defRPr>
+            </a:pPr>
+            <a:r>
+              <a:t>C</a:t>
+            </a:r>
+          </a:p>
+        </p:txBody>
+      </p:sp>
+      <p:sp>
+        <p:nvSpPr>
+          <p:cNvPr id="25" name="TextBox 24"/>
+          <p:cNvSpPr txBox="1"/>
+          <p:nvPr/>
+        </p:nvSpPr>
+        <p:spPr>
+          <a:xfrm>
+            <a:off x="1417320" y="5148072"/>
+            <a:ext cx="5303520" cy="274320"/>
+          </a:xfrm>
+          <a:prstGeom prst="rect">
+            <a:avLst/>
+          </a:prstGeom>
+          <a:noFill/>
+        </p:spPr>
+        <p:txBody>
+          <a:bodyPr wrap="square" anchor="t">
+            <a:spAutoFit/>
+          </a:bodyPr>
+          <a:lstStyle/>
+          <a:p>
+            <a:pPr algn="l">
+              <a:spcAft>
+                <a:spcPts val="0"/>
+              </a:spcAft>
+              <a:defRPr sz="1400" b="1">
+                <a:solidFill>
+                  <a:srgbClr val="FFFFFF"/>
+                </a:solidFill>
+                <a:latin typeface="Inter"/>
+              </a:defRPr>
+            </a:pPr>
+            <a:r>
+              <a:t>Produktwissen &amp; Beratungsqualität</a:t>
+            </a:r>
+          </a:p>
+        </p:txBody>
+      </p:sp>
+      <p:sp>
+        <p:nvSpPr>
+          <p:cNvPr id="26" name="TextBox 25"/>
+          <p:cNvSpPr txBox="1"/>
+          <p:nvPr/>
+        </p:nvSpPr>
+        <p:spPr>
+          <a:xfrm>
+            <a:off x="1005840" y="5532120"/>
+            <a:ext cx="5943600" cy="640080"/>
+          </a:xfrm>
+          <a:prstGeom prst="rect">
+            <a:avLst/>
+          </a:prstGeom>
+          <a:noFill/>
+        </p:spPr>
+        <p:txBody>
+          <a:bodyPr wrap="square" anchor="t">
+            <a:spAutoFit/>
+          </a:bodyPr>
+          <a:lstStyle/>
+          <a:p>
+            <a:pPr algn="l">
+              <a:spcAft>
+                <a:spcPts val="0"/>
+              </a:spcAft>
+              <a:defRPr sz="1000" b="0">
+                <a:solidFill>
+                  <a:srgbClr val="9CA3AF"/>
+                </a:solidFill>
+                <a:latin typeface="Inter"/>
+              </a:defRPr>
+            </a:pPr>
+            <a:r>
+              <a:t>212 Banken, tausende Berater, laufend neue Produkte</a:t>
+            </a:r>
+            <a:br/>
+            <a:r>
+              <a:t>und regulatorische Änderungen. Wissen konsistent</a:t>
+            </a:r>
+            <a:br/>
+            <a:r>
+              <a:t>zu halten ist eine Herausforderung.</a:t>
+            </a:r>
+          </a:p>
+        </p:txBody>
+      </p:sp>
+      <p:sp>
+        <p:nvSpPr>
           <p:cNvPr id="27" name="TextBox 26"/>
           <p:cNvSpPr txBox="1"/>
           <p:nvPr/>
         </p:nvSpPr>
         <p:spPr>
           <a:xfrm>
-            <a:off x="10149840" y="4709160"/>
-            <a:ext cx="914400" cy="457200"/>
-          </a:xfrm>
-          <a:prstGeom prst="rect">
-            <a:avLst/>
-          </a:prstGeom>
-          <a:noFill/>
-        </p:spPr>
-        <p:txBody>
-          <a:bodyPr wrap="square" anchor="t">
-            <a:spAutoFit/>
-          </a:bodyPr>
-          <a:lstStyle/>
-          <a:p>
-            <a:pPr algn="l">
-              <a:spcAft>
-                <a:spcPts val="0"/>
-              </a:spcAft>
-              <a:defRPr sz="3600" b="0">
+            <a:off x="1005840" y="6126480"/>
+            <a:ext cx="5943600" cy="411480"/>
+          </a:xfrm>
+          <a:prstGeom prst="rect">
+            <a:avLst/>
+          </a:prstGeom>
+          <a:noFill/>
+        </p:spPr>
+        <p:txBody>
+          <a:bodyPr wrap="square" anchor="t">
+            <a:spAutoFit/>
+          </a:bodyPr>
+          <a:lstStyle/>
+          <a:p>
+            <a:pPr algn="l">
+              <a:spcAft>
+                <a:spcPts val="0"/>
+              </a:spcAft>
+              <a:defRPr sz="900" b="0">
+                <a:solidFill>
+                  <a:srgbClr val="9CA3AF"/>
+                </a:solidFill>
+                <a:latin typeface="Inter"/>
+              </a:defRPr>
+            </a:pPr>
+            <a:r>
+              <a:t>→  AI-Assistent beantwortet Produktfragen in Echtzeit —</a:t>
+            </a:r>
+            <a:br/>
+            <a:r>
+              <a:t>Hypothekenmodelle, Vorsorge 3a/3b, Anlagestrategien</a:t>
+            </a:r>
+          </a:p>
+        </p:txBody>
+      </p:sp>
+      <p:sp>
+        <p:nvSpPr>
+          <p:cNvPr id="28" name="TextBox 27"/>
+          <p:cNvSpPr txBox="1"/>
+          <p:nvPr/>
+        </p:nvSpPr>
+        <p:spPr>
+          <a:xfrm>
+            <a:off x="1005840" y="6537960"/>
+            <a:ext cx="5943600" cy="411480"/>
+          </a:xfrm>
+          <a:prstGeom prst="rect">
+            <a:avLst/>
+          </a:prstGeom>
+          <a:noFill/>
+        </p:spPr>
+        <p:txBody>
+          <a:bodyPr wrap="square" anchor="t">
+            <a:spAutoFit/>
+          </a:bodyPr>
+          <a:lstStyle/>
+          <a:p>
+            <a:pPr algn="l">
+              <a:spcAft>
+                <a:spcPts val="0"/>
+              </a:spcAft>
+              <a:defRPr sz="900" b="0">
+                <a:solidFill>
+                  <a:srgbClr val="9CA3AF"/>
+                </a:solidFill>
+                <a:latin typeface="Inter"/>
+              </a:defRPr>
+            </a:pPr>
+            <a:r>
+              <a:t>→  Immer aktuell: neue Konditionen, regulatorische</a:t>
+            </a:r>
+            <a:br/>
+            <a:r>
+              <a:t>Änderungen (nDSG, FINMA) automatisch integriert</a:t>
+            </a:r>
+          </a:p>
+        </p:txBody>
+      </p:sp>
+      <p:sp>
+        <p:nvSpPr>
+          <p:cNvPr id="29" name="TextBox 28"/>
+          <p:cNvSpPr txBox="1"/>
+          <p:nvPr/>
+        </p:nvSpPr>
+        <p:spPr>
+          <a:xfrm>
+            <a:off x="1005840" y="6949440"/>
+            <a:ext cx="5943600" cy="411480"/>
+          </a:xfrm>
+          <a:prstGeom prst="rect">
+            <a:avLst/>
+          </a:prstGeom>
+          <a:noFill/>
+        </p:spPr>
+        <p:txBody>
+          <a:bodyPr wrap="square" anchor="t">
+            <a:spAutoFit/>
+          </a:bodyPr>
+          <a:lstStyle/>
+          <a:p>
+            <a:pPr algn="l">
+              <a:spcAft>
+                <a:spcPts val="0"/>
+              </a:spcAft>
+              <a:defRPr sz="900" b="0">
+                <a:solidFill>
+                  <a:srgbClr val="9CA3AF"/>
+                </a:solidFill>
+                <a:latin typeface="Inter"/>
+              </a:defRPr>
+            </a:pPr>
+            <a:r>
+              <a:t>→  Funktioniert wie ein internes Nachschlagewerk,</a:t>
+            </a:r>
+            <a:br/>
+            <a:r>
+              <a:t>aber in natürlicher Sprache</a:t>
+            </a:r>
+          </a:p>
+        </p:txBody>
+      </p:sp>
+      <p:sp>
+        <p:nvSpPr>
+          <p:cNvPr id="30" name="Rounded Rectangle 29"/>
+          <p:cNvSpPr/>
+          <p:nvPr/>
+        </p:nvSpPr>
+        <p:spPr>
+          <a:xfrm>
+            <a:off x="960120" y="7452360"/>
+            <a:ext cx="6035040" cy="274320"/>
+          </a:xfrm>
+          <a:prstGeom prst="roundRect">
+            <a:avLst>
+              <a:gd name="adj" fmla="val 4000"/>
+            </a:avLst>
+          </a:prstGeom>
+          <a:solidFill>
+            <a:srgbClr val="2D2D45"/>
+          </a:solidFill>
+          <a:ln>
+            <a:noFill/>
+          </a:ln>
+        </p:spPr>
+        <p:style>
+          <a:lnRef idx="1">
+            <a:schemeClr val="accent1"/>
+          </a:lnRef>
+          <a:fillRef idx="3">
+            <a:schemeClr val="accent1"/>
+          </a:fillRef>
+          <a:effectRef idx="2">
+            <a:schemeClr val="accent1"/>
+          </a:effectRef>
+          <a:fontRef idx="minor">
+            <a:schemeClr val="lt1"/>
+          </a:fontRef>
+        </p:style>
+        <p:txBody>
+          <a:bodyPr rtlCol="0" anchor="ctr"/>
+          <a:lstStyle/>
+          <a:p>
+            <a:pPr algn="ctr"/>
+          </a:p>
+        </p:txBody>
+      </p:sp>
+      <p:sp>
+        <p:nvSpPr>
+          <p:cNvPr id="31" name="TextBox 30"/>
+          <p:cNvSpPr txBox="1"/>
+          <p:nvPr/>
+        </p:nvSpPr>
+        <p:spPr>
+          <a:xfrm>
+            <a:off x="1143000" y="7470648"/>
+            <a:ext cx="5669280" cy="228600"/>
+          </a:xfrm>
+          <a:prstGeom prst="rect">
+            <a:avLst/>
+          </a:prstGeom>
+          <a:noFill/>
+        </p:spPr>
+        <p:txBody>
+          <a:bodyPr wrap="square" anchor="t">
+            <a:spAutoFit/>
+          </a:bodyPr>
+          <a:lstStyle/>
+          <a:p>
+            <a:pPr algn="l">
+              <a:spcAft>
+                <a:spcPts val="0"/>
+              </a:spcAft>
+              <a:defRPr sz="900" b="1">
                 <a:solidFill>
                   <a:srgbClr val="E8A838"/>
                 </a:solidFill>
@@ -6553,38 +7067,136 @@
               </a:defRPr>
             </a:pPr>
             <a:r>
-              <a:t>3</a:t>
-            </a:r>
-          </a:p>
-        </p:txBody>
-      </p:sp>
-      <p:sp>
-        <p:nvSpPr>
-          <p:cNvPr id="28" name="TextBox 27"/>
-          <p:cNvSpPr txBox="1"/>
-          <p:nvPr/>
-        </p:nvSpPr>
-        <p:spPr>
-          <a:xfrm>
-            <a:off x="10149840" y="5303520"/>
-            <a:ext cx="3657600" cy="320040"/>
-          </a:xfrm>
-          <a:prstGeom prst="rect">
-            <a:avLst/>
-          </a:prstGeom>
-          <a:noFill/>
-        </p:spPr>
-        <p:txBody>
-          <a:bodyPr wrap="square" anchor="t">
-            <a:spAutoFit/>
-          </a:bodyPr>
-          <a:lstStyle/>
-          <a:p>
-            <a:pPr algn="l">
-              <a:spcAft>
-                <a:spcPts val="0"/>
-              </a:spcAft>
-              <a:defRPr sz="1600" b="1">
+              <a:t>Wirkung: Beratungsqualität über alle 212 Banken sichern</a:t>
+            </a:r>
+          </a:p>
+        </p:txBody>
+      </p:sp>
+      <p:sp>
+        <p:nvSpPr>
+          <p:cNvPr id="32" name="Rounded Rectangle 31"/>
+          <p:cNvSpPr/>
+          <p:nvPr/>
+        </p:nvSpPr>
+        <p:spPr>
+          <a:xfrm>
+            <a:off x="7589520" y="4983480"/>
+            <a:ext cx="6492240" cy="2880360"/>
+          </a:xfrm>
+          <a:prstGeom prst="roundRect">
+            <a:avLst>
+              <a:gd name="adj" fmla="val 4000"/>
+            </a:avLst>
+          </a:prstGeom>
+          <a:solidFill>
+            <a:srgbClr val="1A1A2E"/>
+          </a:solidFill>
+          <a:ln>
+            <a:noFill/>
+          </a:ln>
+        </p:spPr>
+        <p:style>
+          <a:lnRef idx="1">
+            <a:schemeClr val="accent1"/>
+          </a:lnRef>
+          <a:fillRef idx="3">
+            <a:schemeClr val="accent1"/>
+          </a:fillRef>
+          <a:effectRef idx="2">
+            <a:schemeClr val="accent1"/>
+          </a:effectRef>
+          <a:fontRef idx="minor">
+            <a:schemeClr val="lt1"/>
+          </a:fontRef>
+        </p:style>
+        <p:txBody>
+          <a:bodyPr rtlCol="0" anchor="ctr"/>
+          <a:lstStyle/>
+          <a:p>
+            <a:pPr algn="ctr"/>
+          </a:p>
+        </p:txBody>
+      </p:sp>
+      <p:sp>
+        <p:nvSpPr>
+          <p:cNvPr id="33" name="Oval 32"/>
+          <p:cNvSpPr/>
+          <p:nvPr/>
+        </p:nvSpPr>
+        <p:spPr>
+          <a:xfrm>
+            <a:off x="7818120" y="5166360"/>
+            <a:ext cx="320040" cy="320040"/>
+          </a:xfrm>
+          <a:prstGeom prst="ellipse">
+            <a:avLst/>
+          </a:prstGeom>
+          <a:solidFill>
+            <a:srgbClr val="E8A838"/>
+          </a:solidFill>
+          <a:ln>
+            <a:noFill/>
+          </a:ln>
+        </p:spPr>
+        <p:style>
+          <a:lnRef idx="1">
+            <a:schemeClr val="accent1"/>
+          </a:lnRef>
+          <a:fillRef idx="3">
+            <a:schemeClr val="accent1"/>
+          </a:fillRef>
+          <a:effectRef idx="2">
+            <a:schemeClr val="accent1"/>
+          </a:effectRef>
+          <a:fontRef idx="minor">
+            <a:schemeClr val="lt1"/>
+          </a:fontRef>
+        </p:style>
+        <p:txBody>
+          <a:bodyPr rtlCol="0" anchor="ctr" wrap="none"/>
+          <a:lstStyle/>
+          <a:p>
+            <a:pPr algn="ctr">
+              <a:defRPr sz="1300" b="1">
+                <a:solidFill>
+                  <a:srgbClr val="1A1A2E"/>
+                </a:solidFill>
+                <a:latin typeface="Inter"/>
+              </a:defRPr>
+            </a:pPr>
+            <a:r>
+              <a:t>D</a:t>
+            </a:r>
+          </a:p>
+        </p:txBody>
+      </p:sp>
+      <p:sp>
+        <p:nvSpPr>
+          <p:cNvPr id="34" name="TextBox 33"/>
+          <p:cNvSpPr txBox="1"/>
+          <p:nvPr/>
+        </p:nvSpPr>
+        <p:spPr>
+          <a:xfrm>
+            <a:off x="8275320" y="5148072"/>
+            <a:ext cx="5303520" cy="274320"/>
+          </a:xfrm>
+          <a:prstGeom prst="rect">
+            <a:avLst/>
+          </a:prstGeom>
+          <a:noFill/>
+        </p:spPr>
+        <p:txBody>
+          <a:bodyPr wrap="square" anchor="t">
+            <a:spAutoFit/>
+          </a:bodyPr>
+          <a:lstStyle/>
+          <a:p>
+            <a:pPr algn="l">
+              <a:spcAft>
+                <a:spcPts val="0"/>
+              </a:spcAft>
+              <a:defRPr sz="1400" b="1">
                 <a:solidFill>
                   <a:srgbClr val="FFFFFF"/>
                 </a:solidFill>
@@ -6592,38 +7204,38 @@
               </a:defRPr>
             </a:pPr>
             <a:r>
-              <a:t>Entscheiden</a:t>
-            </a:r>
-          </a:p>
-        </p:txBody>
-      </p:sp>
-      <p:sp>
-        <p:nvSpPr>
-          <p:cNvPr id="29" name="TextBox 28"/>
-          <p:cNvSpPr txBox="1"/>
-          <p:nvPr/>
-        </p:nvSpPr>
-        <p:spPr>
-          <a:xfrm>
-            <a:off x="10149840" y="5760720"/>
-            <a:ext cx="3657600" cy="1828800"/>
-          </a:xfrm>
-          <a:prstGeom prst="rect">
-            <a:avLst/>
-          </a:prstGeom>
-          <a:noFill/>
-        </p:spPr>
-        <p:txBody>
-          <a:bodyPr wrap="square" anchor="t">
-            <a:spAutoFit/>
-          </a:bodyPr>
-          <a:lstStyle/>
-          <a:p>
-            <a:pPr algn="l">
-              <a:spcAft>
-                <a:spcPts val="0"/>
-              </a:spcAft>
-              <a:defRPr sz="1100" b="0">
+              <a:t>Erster Kundenkontakt (Website &amp; Telefon)</a:t>
+            </a:r>
+          </a:p>
+        </p:txBody>
+      </p:sp>
+      <p:sp>
+        <p:nvSpPr>
+          <p:cNvPr id="35" name="TextBox 34"/>
+          <p:cNvSpPr txBox="1"/>
+          <p:nvPr/>
+        </p:nvSpPr>
+        <p:spPr>
+          <a:xfrm>
+            <a:off x="7863840" y="5532120"/>
+            <a:ext cx="5943600" cy="640080"/>
+          </a:xfrm>
+          <a:prstGeom prst="rect">
+            <a:avLst/>
+          </a:prstGeom>
+          <a:noFill/>
+        </p:spPr>
+        <p:txBody>
+          <a:bodyPr wrap="square" anchor="t">
+            <a:spAutoFit/>
+          </a:bodyPr>
+          <a:lstStyle/>
+          <a:p>
+            <a:pPr algn="l">
+              <a:spcAft>
+                <a:spcPts val="0"/>
+              </a:spcAft>
+              <a:defRPr sz="1000" b="0">
                 <a:solidFill>
                   <a:srgbClr val="9CA3AF"/>
                 </a:solidFill>
@@ -6631,73 +7243,235 @@
               </a:defRPr>
             </a:pPr>
             <a:r>
-              <a:t>Ergebnisse gemeinsam bewerten.</a:t>
+              <a:t>Routineanfragen binden Beraterkapazität.</a:t>
             </a:r>
             <a:br/>
             <a:r>
-              <a:t>Feedback der Berater einholen.</a:t>
+              <a:t>AI kann den ersten Kontakt übernehmen</a:t>
             </a:r>
             <a:br/>
             <a:r>
-              <a:t>Wenn es funktioniert: skalieren.</a:t>
+              <a:t>und qualifiziert weiterleiten.</a:t>
+            </a:r>
+          </a:p>
+        </p:txBody>
+      </p:sp>
+      <p:sp>
+        <p:nvSpPr>
+          <p:cNvPr id="36" name="TextBox 35"/>
+          <p:cNvSpPr txBox="1"/>
+          <p:nvPr/>
+        </p:nvSpPr>
+        <p:spPr>
+          <a:xfrm>
+            <a:off x="7863840" y="6126480"/>
+            <a:ext cx="5943600" cy="411480"/>
+          </a:xfrm>
+          <a:prstGeom prst="rect">
+            <a:avLst/>
+          </a:prstGeom>
+          <a:noFill/>
+        </p:spPr>
+        <p:txBody>
+          <a:bodyPr wrap="square" anchor="t">
+            <a:spAutoFit/>
+          </a:bodyPr>
+          <a:lstStyle/>
+          <a:p>
+            <a:pPr algn="l">
+              <a:spcAft>
+                <a:spcPts val="0"/>
+              </a:spcAft>
+              <a:defRPr sz="900" b="0">
+                <a:solidFill>
+                  <a:srgbClr val="9CA3AF"/>
+                </a:solidFill>
+                <a:latin typeface="Inter"/>
+              </a:defRPr>
+            </a:pPr>
+            <a:r>
+              <a:t>→  Konto, Karten, Zinsen, Öffnungszeiten —</a:t>
             </a:r>
             <a:br/>
             <a:r>
-              <a:t>Wenn nicht: kein Schaden,</a:t>
+              <a:t>automatisch beantwortet, in drei Sprachen</a:t>
+            </a:r>
+          </a:p>
+        </p:txBody>
+      </p:sp>
+      <p:sp>
+        <p:nvSpPr>
+          <p:cNvPr id="37" name="TextBox 36"/>
+          <p:cNvSpPr txBox="1"/>
+          <p:nvPr/>
+        </p:nvSpPr>
+        <p:spPr>
+          <a:xfrm>
+            <a:off x="7863840" y="6537960"/>
+            <a:ext cx="5943600" cy="411480"/>
+          </a:xfrm>
+          <a:prstGeom prst="rect">
+            <a:avLst/>
+          </a:prstGeom>
+          <a:noFill/>
+        </p:spPr>
+        <p:txBody>
+          <a:bodyPr wrap="square" anchor="t">
+            <a:spAutoFit/>
+          </a:bodyPr>
+          <a:lstStyle/>
+          <a:p>
+            <a:pPr algn="l">
+              <a:spcAft>
+                <a:spcPts val="0"/>
+              </a:spcAft>
+              <a:defRPr sz="900" b="0">
+                <a:solidFill>
+                  <a:srgbClr val="9CA3AF"/>
+                </a:solidFill>
+                <a:latin typeface="Inter"/>
+              </a:defRPr>
+            </a:pPr>
+            <a:r>
+              <a:t>→  Komplexe Anliegen (Hypothek, Vorsorge)</a:t>
             </a:r>
             <a:br/>
             <a:r>
-              <a:t>viel gelernt.</a:t>
+              <a:t>werden erkannt und an den RM weitergeleitet</a:t>
+            </a:r>
+          </a:p>
+        </p:txBody>
+      </p:sp>
+      <p:sp>
+        <p:nvSpPr>
+          <p:cNvPr id="38" name="TextBox 37"/>
+          <p:cNvSpPr txBox="1"/>
+          <p:nvPr/>
+        </p:nvSpPr>
+        <p:spPr>
+          <a:xfrm>
+            <a:off x="7863840" y="6949440"/>
+            <a:ext cx="5943600" cy="411480"/>
+          </a:xfrm>
+          <a:prstGeom prst="rect">
+            <a:avLst/>
+          </a:prstGeom>
+          <a:noFill/>
+        </p:spPr>
+        <p:txBody>
+          <a:bodyPr wrap="square" anchor="t">
+            <a:spAutoFit/>
+          </a:bodyPr>
+          <a:lstStyle/>
+          <a:p>
+            <a:pPr algn="l">
+              <a:spcAft>
+                <a:spcPts val="0"/>
+              </a:spcAft>
+              <a:defRPr sz="900" b="0">
+                <a:solidFill>
+                  <a:srgbClr val="9CA3AF"/>
+                </a:solidFill>
+                <a:latin typeface="Inter"/>
+              </a:defRPr>
+            </a:pPr>
+            <a:r>
+              <a:t>→  Eigene Sprach-Engine: auch per Telefon,</a:t>
             </a:r>
             <a:br/>
             <a:r>
-              <a:t>Die Resultate sprechen für sich.</a:t>
-            </a:r>
-          </a:p>
-        </p:txBody>
-      </p:sp>
-      <p:sp>
-        <p:nvSpPr>
-          <p:cNvPr id="30" name="TextBox 29"/>
-          <p:cNvSpPr txBox="1"/>
-          <p:nvPr/>
-        </p:nvSpPr>
-        <p:spPr>
-          <a:xfrm>
-            <a:off x="10149840" y="7178040"/>
-            <a:ext cx="2743200" cy="274320"/>
-          </a:xfrm>
-          <a:prstGeom prst="rect">
-            <a:avLst/>
-          </a:prstGeom>
-          <a:noFill/>
-        </p:spPr>
-        <p:txBody>
-          <a:bodyPr wrap="square" anchor="t">
-            <a:spAutoFit/>
-          </a:bodyPr>
-          <a:lstStyle/>
-          <a:p>
-            <a:pPr algn="l">
-              <a:spcAft>
-                <a:spcPts val="0"/>
-              </a:spcAft>
-              <a:defRPr sz="1100" b="1">
+              <a:t>nicht nur Chat — DE/FR/IT</a:t>
+            </a:r>
+          </a:p>
+        </p:txBody>
+      </p:sp>
+      <p:sp>
+        <p:nvSpPr>
+          <p:cNvPr id="39" name="Rounded Rectangle 38"/>
+          <p:cNvSpPr/>
+          <p:nvPr/>
+        </p:nvSpPr>
+        <p:spPr>
+          <a:xfrm>
+            <a:off x="7818120" y="7452360"/>
+            <a:ext cx="6035040" cy="274320"/>
+          </a:xfrm>
+          <a:prstGeom prst="roundRect">
+            <a:avLst>
+              <a:gd name="adj" fmla="val 4000"/>
+            </a:avLst>
+          </a:prstGeom>
+          <a:solidFill>
+            <a:srgbClr val="2D2D45"/>
+          </a:solidFill>
+          <a:ln>
+            <a:noFill/>
+          </a:ln>
+        </p:spPr>
+        <p:style>
+          <a:lnRef idx="1">
+            <a:schemeClr val="accent1"/>
+          </a:lnRef>
+          <a:fillRef idx="3">
+            <a:schemeClr val="accent1"/>
+          </a:fillRef>
+          <a:effectRef idx="2">
+            <a:schemeClr val="accent1"/>
+          </a:effectRef>
+          <a:fontRef idx="minor">
+            <a:schemeClr val="lt1"/>
+          </a:fontRef>
+        </p:style>
+        <p:txBody>
+          <a:bodyPr rtlCol="0" anchor="ctr"/>
+          <a:lstStyle/>
+          <a:p>
+            <a:pPr algn="ctr"/>
+          </a:p>
+        </p:txBody>
+      </p:sp>
+      <p:sp>
+        <p:nvSpPr>
+          <p:cNvPr id="40" name="TextBox 39"/>
+          <p:cNvSpPr txBox="1"/>
+          <p:nvPr/>
+        </p:nvSpPr>
+        <p:spPr>
+          <a:xfrm>
+            <a:off x="8001000" y="7470648"/>
+            <a:ext cx="5669280" cy="228600"/>
+          </a:xfrm>
+          <a:prstGeom prst="rect">
+            <a:avLst/>
+          </a:prstGeom>
+          <a:noFill/>
+        </p:spPr>
+        <p:txBody>
+          <a:bodyPr wrap="square" anchor="t">
+            <a:spAutoFit/>
+          </a:bodyPr>
+          <a:lstStyle/>
+          <a:p>
+            <a:pPr algn="l">
+              <a:spcAft>
+                <a:spcPts val="0"/>
+              </a:spcAft>
+              <a:defRPr sz="900" b="1">
                 <a:solidFill>
                   <a:srgbClr val="E8A838"/>
                 </a:solidFill>
-                <a:latin typeface="JetBrains Mono"/>
-              </a:defRPr>
-            </a:pPr>
-            <a:r>
-              <a:t>Woche 9–12</a:t>
-            </a:r>
-          </a:p>
-        </p:txBody>
-      </p:sp>
-      <p:sp>
-        <p:nvSpPr>
-          <p:cNvPr id="31" name="TextBox 30"/>
+                <a:latin typeface="Inter"/>
+              </a:defRPr>
+            </a:pPr>
+            <a:r>
+              <a:t>Wirkung: RM-Kapazität für echte Beratung freisetzen</a:t>
+            </a:r>
+          </a:p>
+        </p:txBody>
+      </p:sp>
+      <p:sp>
+        <p:nvSpPr>
+          <p:cNvPr id="41" name="TextBox 40"/>
           <p:cNvSpPr txBox="1"/>
           <p:nvPr/>
         </p:nvSpPr>
@@ -6736,7 +7510,7 @@
       </p:sp>
       <p:sp>
         <p:nvSpPr>
-          <p:cNvPr id="32" name="TextBox 31"/>
+          <p:cNvPr id="42" name="TextBox 41"/>
           <p:cNvSpPr txBox="1"/>
           <p:nvPr/>
         </p:nvSpPr>
@@ -6768,7 +7542,7 @@
               </a:defRPr>
             </a:pPr>
             <a:r>
-              <a:t>3 / 4</a:t>
+              <a:t>3 / 6</a:t>
             </a:r>
           </a:p>
         </p:txBody>
@@ -6782,6 +7556,1015 @@
 </file>
 
 <file path=ppt/slides/slide4.xml><?xml version="1.0" encoding="utf-8"?>
+<p:sld xmlns:a="http://schemas.openxmlformats.org/drawingml/2006/main" xmlns:p="http://schemas.openxmlformats.org/presentationml/2006/main" xmlns:r="http://schemas.openxmlformats.org/officeDocument/2006/relationships">
+  <p:cSld>
+    <p:bg>
+      <p:bgPr>
+        <a:solidFill>
+          <a:srgbClr val="1A1A2E"/>
+        </a:solidFill>
+        <a:effectLst/>
+      </p:bgPr>
+    </p:bg>
+    <p:spTree>
+      <p:nvGrpSpPr>
+        <p:cNvPr id="1" name=""/>
+        <p:cNvGrpSpPr/>
+        <p:nvPr/>
+      </p:nvGrpSpPr>
+      <p:grpSpPr/>
+      <p:sp>
+        <p:nvSpPr>
+          <p:cNvPr id="2" name="TextBox 1"/>
+          <p:cNvSpPr txBox="1"/>
+          <p:nvPr/>
+        </p:nvSpPr>
+        <p:spPr>
+          <a:xfrm>
+            <a:off x="731520" y="457200"/>
+            <a:ext cx="5486400" cy="274320"/>
+          </a:xfrm>
+          <a:prstGeom prst="rect">
+            <a:avLst/>
+          </a:prstGeom>
+          <a:noFill/>
+        </p:spPr>
+        <p:txBody>
+          <a:bodyPr wrap="square" anchor="t">
+            <a:spAutoFit/>
+          </a:bodyPr>
+          <a:lstStyle/>
+          <a:p>
+            <a:pPr algn="l">
+              <a:spcAft>
+                <a:spcPts val="0"/>
+              </a:spcAft>
+              <a:defRPr sz="1000" b="1">
+                <a:solidFill>
+                  <a:srgbClr val="E8A838"/>
+                </a:solidFill>
+                <a:latin typeface="JetBrains Mono"/>
+              </a:defRPr>
+            </a:pPr>
+            <a:r>
+              <a:t>FOKUS: TRAINING</a:t>
+            </a:r>
+          </a:p>
+        </p:txBody>
+      </p:sp>
+      <p:sp>
+        <p:nvSpPr>
+          <p:cNvPr id="3" name="TextBox 2"/>
+          <p:cNvSpPr txBox="1"/>
+          <p:nvPr/>
+        </p:nvSpPr>
+        <p:spPr>
+          <a:xfrm>
+            <a:off x="731520" y="822960"/>
+            <a:ext cx="12801600" cy="548640"/>
+          </a:xfrm>
+          <a:prstGeom prst="rect">
+            <a:avLst/>
+          </a:prstGeom>
+          <a:noFill/>
+        </p:spPr>
+        <p:txBody>
+          <a:bodyPr wrap="square" anchor="t">
+            <a:spAutoFit/>
+          </a:bodyPr>
+          <a:lstStyle/>
+          <a:p>
+            <a:pPr algn="l">
+              <a:spcAft>
+                <a:spcPts val="0"/>
+              </a:spcAft>
+              <a:defRPr sz="3400" b="0">
+                <a:solidFill>
+                  <a:srgbClr val="FFFFFF"/>
+                </a:solidFill>
+                <a:latin typeface="Inter"/>
+              </a:defRPr>
+            </a:pPr>
+            <a:r>
+              <a:t>AI als Sparringspartner für Kundenberater</a:t>
+            </a:r>
+          </a:p>
+        </p:txBody>
+      </p:sp>
+      <p:sp>
+        <p:nvSpPr>
+          <p:cNvPr id="4" name="TextBox 3"/>
+          <p:cNvSpPr txBox="1"/>
+          <p:nvPr/>
+        </p:nvSpPr>
+        <p:spPr>
+          <a:xfrm>
+            <a:off x="731520" y="1417320"/>
+            <a:ext cx="10972800" cy="365760"/>
+          </a:xfrm>
+          <a:prstGeom prst="rect">
+            <a:avLst/>
+          </a:prstGeom>
+          <a:noFill/>
+        </p:spPr>
+        <p:txBody>
+          <a:bodyPr wrap="square" anchor="t">
+            <a:spAutoFit/>
+          </a:bodyPr>
+          <a:lstStyle/>
+          <a:p>
+            <a:pPr algn="l">
+              <a:spcAft>
+                <a:spcPts val="0"/>
+              </a:spcAft>
+              <a:defRPr sz="1400" b="0">
+                <a:solidFill>
+                  <a:srgbClr val="9CA3AF"/>
+                </a:solidFill>
+                <a:latin typeface="Inter"/>
+              </a:defRPr>
+            </a:pPr>
+            <a:r>
+              <a:t>Ob neue Berater im «Neustart»-Programm oder erfahrene RMs bei neuen Produkten — die Herausforderung ist dieselbe.</a:t>
+            </a:r>
+          </a:p>
+        </p:txBody>
+      </p:sp>
+      <p:sp>
+        <p:nvSpPr>
+          <p:cNvPr id="5" name="Rounded Rectangle 4"/>
+          <p:cNvSpPr/>
+          <p:nvPr/>
+        </p:nvSpPr>
+        <p:spPr>
+          <a:xfrm>
+            <a:off x="731520" y="2103120"/>
+            <a:ext cx="6400800" cy="5303520"/>
+          </a:xfrm>
+          <a:prstGeom prst="roundRect">
+            <a:avLst>
+              <a:gd name="adj" fmla="val 4000"/>
+            </a:avLst>
+          </a:prstGeom>
+          <a:solidFill>
+            <a:srgbClr val="222238"/>
+          </a:solidFill>
+          <a:ln>
+            <a:noFill/>
+          </a:ln>
+        </p:spPr>
+        <p:style>
+          <a:lnRef idx="1">
+            <a:schemeClr val="accent1"/>
+          </a:lnRef>
+          <a:fillRef idx="3">
+            <a:schemeClr val="accent1"/>
+          </a:fillRef>
+          <a:effectRef idx="2">
+            <a:schemeClr val="accent1"/>
+          </a:effectRef>
+          <a:fontRef idx="minor">
+            <a:schemeClr val="lt1"/>
+          </a:fontRef>
+        </p:style>
+        <p:txBody>
+          <a:bodyPr rtlCol="0" anchor="ctr"/>
+          <a:lstStyle/>
+          <a:p>
+            <a:pPr algn="ctr"/>
+          </a:p>
+        </p:txBody>
+      </p:sp>
+      <p:sp>
+        <p:nvSpPr>
+          <p:cNvPr id="6" name="TextBox 5"/>
+          <p:cNvSpPr txBox="1"/>
+          <p:nvPr/>
+        </p:nvSpPr>
+        <p:spPr>
+          <a:xfrm>
+            <a:off x="1005840" y="2240280"/>
+            <a:ext cx="5486400" cy="228600"/>
+          </a:xfrm>
+          <a:prstGeom prst="rect">
+            <a:avLst/>
+          </a:prstGeom>
+          <a:noFill/>
+        </p:spPr>
+        <p:txBody>
+          <a:bodyPr wrap="square" anchor="t">
+            <a:spAutoFit/>
+          </a:bodyPr>
+          <a:lstStyle/>
+          <a:p>
+            <a:pPr algn="l">
+              <a:spcAft>
+                <a:spcPts val="0"/>
+              </a:spcAft>
+              <a:defRPr sz="1000" b="1">
+                <a:solidFill>
+                  <a:srgbClr val="6B7280"/>
+                </a:solidFill>
+                <a:latin typeface="JetBrains Mono"/>
+              </a:defRPr>
+            </a:pPr>
+            <a:r>
+              <a:t>DIE HERAUSFORDERUNG</a:t>
+            </a:r>
+          </a:p>
+        </p:txBody>
+      </p:sp>
+      <p:sp>
+        <p:nvSpPr>
+          <p:cNvPr id="7" name="TextBox 6"/>
+          <p:cNvSpPr txBox="1"/>
+          <p:nvPr/>
+        </p:nvSpPr>
+        <p:spPr>
+          <a:xfrm>
+            <a:off x="1005840" y="2651760"/>
+            <a:ext cx="5486400" cy="274320"/>
+          </a:xfrm>
+          <a:prstGeom prst="rect">
+            <a:avLst/>
+          </a:prstGeom>
+          <a:noFill/>
+        </p:spPr>
+        <p:txBody>
+          <a:bodyPr wrap="square" anchor="t">
+            <a:spAutoFit/>
+          </a:bodyPr>
+          <a:lstStyle/>
+          <a:p>
+            <a:pPr algn="l">
+              <a:spcAft>
+                <a:spcPts val="0"/>
+              </a:spcAft>
+              <a:defRPr sz="1400" b="1">
+                <a:solidFill>
+                  <a:srgbClr val="E8A838"/>
+                </a:solidFill>
+                <a:latin typeface="Inter"/>
+              </a:defRPr>
+            </a:pPr>
+            <a:r>
+              <a:t>12–24 Monate</a:t>
+            </a:r>
+          </a:p>
+        </p:txBody>
+      </p:sp>
+      <p:sp>
+        <p:nvSpPr>
+          <p:cNvPr id="8" name="TextBox 7"/>
+          <p:cNvSpPr txBox="1"/>
+          <p:nvPr/>
+        </p:nvSpPr>
+        <p:spPr>
+          <a:xfrm>
+            <a:off x="1005840" y="2971800"/>
+            <a:ext cx="5669280" cy="1005840"/>
+          </a:xfrm>
+          <a:prstGeom prst="rect">
+            <a:avLst/>
+          </a:prstGeom>
+          <a:noFill/>
+        </p:spPr>
+        <p:txBody>
+          <a:bodyPr wrap="square" anchor="t">
+            <a:spAutoFit/>
+          </a:bodyPr>
+          <a:lstStyle/>
+          <a:p>
+            <a:pPr algn="l">
+              <a:spcAft>
+                <a:spcPts val="0"/>
+              </a:spcAft>
+              <a:defRPr sz="1100" b="0">
+                <a:solidFill>
+                  <a:srgbClr val="9CA3AF"/>
+                </a:solidFill>
+                <a:latin typeface="Inter"/>
+              </a:defRPr>
+            </a:pPr>
+            <a:r>
+              <a:t>Einarbeitungszeit für neue Kundenberater</a:t>
+            </a:r>
+            <a:br/>
+            <a:r>
+              <a:t>im «Neustart»-Quereinsteigerprogramm.</a:t>
+            </a:r>
+            <a:br/>
+            <a:r>
+              <a:t>Das sind 12–24 Monate, in denen ein RM</a:t>
+            </a:r>
+            <a:br/>
+            <a:r>
+              <a:t>noch nicht voll produktiv berät.</a:t>
+            </a:r>
+          </a:p>
+        </p:txBody>
+      </p:sp>
+      <p:sp>
+        <p:nvSpPr>
+          <p:cNvPr id="9" name="TextBox 8"/>
+          <p:cNvSpPr txBox="1"/>
+          <p:nvPr/>
+        </p:nvSpPr>
+        <p:spPr>
+          <a:xfrm>
+            <a:off x="1005840" y="4206240"/>
+            <a:ext cx="5486400" cy="274320"/>
+          </a:xfrm>
+          <a:prstGeom prst="rect">
+            <a:avLst/>
+          </a:prstGeom>
+          <a:noFill/>
+        </p:spPr>
+        <p:txBody>
+          <a:bodyPr wrap="square" anchor="t">
+            <a:spAutoFit/>
+          </a:bodyPr>
+          <a:lstStyle/>
+          <a:p>
+            <a:pPr algn="l">
+              <a:spcAft>
+                <a:spcPts val="0"/>
+              </a:spcAft>
+              <a:defRPr sz="1400" b="1">
+                <a:solidFill>
+                  <a:srgbClr val="E8A838"/>
+                </a:solidFill>
+                <a:latin typeface="Inter"/>
+              </a:defRPr>
+            </a:pPr>
+            <a:r>
+              <a:t>Produktkomplexität</a:t>
+            </a:r>
+          </a:p>
+        </p:txBody>
+      </p:sp>
+      <p:sp>
+        <p:nvSpPr>
+          <p:cNvPr id="10" name="TextBox 9"/>
+          <p:cNvSpPr txBox="1"/>
+          <p:nvPr/>
+        </p:nvSpPr>
+        <p:spPr>
+          <a:xfrm>
+            <a:off x="1005840" y="4526279"/>
+            <a:ext cx="5669280" cy="1005840"/>
+          </a:xfrm>
+          <a:prstGeom prst="rect">
+            <a:avLst/>
+          </a:prstGeom>
+          <a:noFill/>
+        </p:spPr>
+        <p:txBody>
+          <a:bodyPr wrap="square" anchor="t">
+            <a:spAutoFit/>
+          </a:bodyPr>
+          <a:lstStyle/>
+          <a:p>
+            <a:pPr algn="l">
+              <a:spcAft>
+                <a:spcPts val="0"/>
+              </a:spcAft>
+              <a:defRPr sz="1100" b="0">
+                <a:solidFill>
+                  <a:srgbClr val="9CA3AF"/>
+                </a:solidFill>
+                <a:latin typeface="Inter"/>
+              </a:defRPr>
+            </a:pPr>
+            <a:r>
+              <a:t>Hypotheken (SARON, Festhypothek, Libor-Ablösung),</a:t>
+            </a:r>
+            <a:br/>
+            <a:r>
+              <a:t>Vorsorge (3a, 3b, Pensionskasse, Freizügigkeit),</a:t>
+            </a:r>
+            <a:br/>
+            <a:r>
+              <a:t>Anlagen (Fonds, ETF, Vermögensverwaltung) —</a:t>
+            </a:r>
+            <a:br/>
+            <a:r>
+              <a:t>alles muss sitzen, auch regulatorisch.</a:t>
+            </a:r>
+          </a:p>
+        </p:txBody>
+      </p:sp>
+      <p:sp>
+        <p:nvSpPr>
+          <p:cNvPr id="11" name="TextBox 10"/>
+          <p:cNvSpPr txBox="1"/>
+          <p:nvPr/>
+        </p:nvSpPr>
+        <p:spPr>
+          <a:xfrm>
+            <a:off x="1005840" y="5760720"/>
+            <a:ext cx="5486400" cy="274320"/>
+          </a:xfrm>
+          <a:prstGeom prst="rect">
+            <a:avLst/>
+          </a:prstGeom>
+          <a:noFill/>
+        </p:spPr>
+        <p:txBody>
+          <a:bodyPr wrap="square" anchor="t">
+            <a:spAutoFit/>
+          </a:bodyPr>
+          <a:lstStyle/>
+          <a:p>
+            <a:pPr algn="l">
+              <a:spcAft>
+                <a:spcPts val="0"/>
+              </a:spcAft>
+              <a:defRPr sz="1400" b="1">
+                <a:solidFill>
+                  <a:srgbClr val="E8A838"/>
+                </a:solidFill>
+                <a:latin typeface="Inter"/>
+              </a:defRPr>
+            </a:pPr>
+            <a:r>
+              <a:t>212 Banken</a:t>
+            </a:r>
+          </a:p>
+        </p:txBody>
+      </p:sp>
+      <p:sp>
+        <p:nvSpPr>
+          <p:cNvPr id="12" name="TextBox 11"/>
+          <p:cNvSpPr txBox="1"/>
+          <p:nvPr/>
+        </p:nvSpPr>
+        <p:spPr>
+          <a:xfrm>
+            <a:off x="1005840" y="6080759"/>
+            <a:ext cx="5669280" cy="1005840"/>
+          </a:xfrm>
+          <a:prstGeom prst="rect">
+            <a:avLst/>
+          </a:prstGeom>
+          <a:noFill/>
+        </p:spPr>
+        <p:txBody>
+          <a:bodyPr wrap="square" anchor="t">
+            <a:spAutoFit/>
+          </a:bodyPr>
+          <a:lstStyle/>
+          <a:p>
+            <a:pPr algn="l">
+              <a:spcAft>
+                <a:spcPts val="0"/>
+              </a:spcAft>
+              <a:defRPr sz="1100" b="0">
+                <a:solidFill>
+                  <a:srgbClr val="9CA3AF"/>
+                </a:solidFill>
+                <a:latin typeface="Inter"/>
+              </a:defRPr>
+            </a:pPr>
+            <a:r>
+              <a:t>Jede Genossenschaftsbank bildet selbst aus.</a:t>
+            </a:r>
+            <a:br/>
+            <a:r>
+              <a:t>Wissensstand und Beratungsqualität variieren.</a:t>
+            </a:r>
+            <a:br/>
+            <a:r>
+              <a:t>Zentrales Training erreicht nicht jeden.</a:t>
+            </a:r>
+          </a:p>
+        </p:txBody>
+      </p:sp>
+      <p:sp>
+        <p:nvSpPr>
+          <p:cNvPr id="13" name="Rounded Rectangle 12"/>
+          <p:cNvSpPr/>
+          <p:nvPr/>
+        </p:nvSpPr>
+        <p:spPr>
+          <a:xfrm>
+            <a:off x="7589520" y="2103120"/>
+            <a:ext cx="6400800" cy="5303520"/>
+          </a:xfrm>
+          <a:prstGeom prst="roundRect">
+            <a:avLst>
+              <a:gd name="adj" fmla="val 4000"/>
+            </a:avLst>
+          </a:prstGeom>
+          <a:solidFill>
+            <a:srgbClr val="222238"/>
+          </a:solidFill>
+          <a:ln>
+            <a:noFill/>
+          </a:ln>
+        </p:spPr>
+        <p:style>
+          <a:lnRef idx="1">
+            <a:schemeClr val="accent1"/>
+          </a:lnRef>
+          <a:fillRef idx="3">
+            <a:schemeClr val="accent1"/>
+          </a:fillRef>
+          <a:effectRef idx="2">
+            <a:schemeClr val="accent1"/>
+          </a:effectRef>
+          <a:fontRef idx="minor">
+            <a:schemeClr val="lt1"/>
+          </a:fontRef>
+        </p:style>
+        <p:txBody>
+          <a:bodyPr rtlCol="0" anchor="ctr"/>
+          <a:lstStyle/>
+          <a:p>
+            <a:pPr algn="ctr"/>
+          </a:p>
+        </p:txBody>
+      </p:sp>
+      <p:sp>
+        <p:nvSpPr>
+          <p:cNvPr id="14" name="TextBox 13"/>
+          <p:cNvSpPr txBox="1"/>
+          <p:nvPr/>
+        </p:nvSpPr>
+        <p:spPr>
+          <a:xfrm>
+            <a:off x="7863840" y="2240280"/>
+            <a:ext cx="5486400" cy="228600"/>
+          </a:xfrm>
+          <a:prstGeom prst="rect">
+            <a:avLst/>
+          </a:prstGeom>
+          <a:noFill/>
+        </p:spPr>
+        <p:txBody>
+          <a:bodyPr wrap="square" anchor="t">
+            <a:spAutoFit/>
+          </a:bodyPr>
+          <a:lstStyle/>
+          <a:p>
+            <a:pPr algn="l">
+              <a:spcAft>
+                <a:spcPts val="0"/>
+              </a:spcAft>
+              <a:defRPr sz="1000" b="1">
+                <a:solidFill>
+                  <a:srgbClr val="E8A838"/>
+                </a:solidFill>
+                <a:latin typeface="JetBrains Mono"/>
+              </a:defRPr>
+            </a:pPr>
+            <a:r>
+              <a:t>WAS AI VERÄNDERN KANN</a:t>
+            </a:r>
+          </a:p>
+        </p:txBody>
+      </p:sp>
+      <p:sp>
+        <p:nvSpPr>
+          <p:cNvPr id="15" name="TextBox 14"/>
+          <p:cNvSpPr txBox="1"/>
+          <p:nvPr/>
+        </p:nvSpPr>
+        <p:spPr>
+          <a:xfrm>
+            <a:off x="7863840" y="2651760"/>
+            <a:ext cx="5486400" cy="274320"/>
+          </a:xfrm>
+          <a:prstGeom prst="rect">
+            <a:avLst/>
+          </a:prstGeom>
+          <a:noFill/>
+        </p:spPr>
+        <p:txBody>
+          <a:bodyPr wrap="square" anchor="t">
+            <a:spAutoFit/>
+          </a:bodyPr>
+          <a:lstStyle/>
+          <a:p>
+            <a:pPr algn="l">
+              <a:spcAft>
+                <a:spcPts val="0"/>
+              </a:spcAft>
+              <a:defRPr sz="1400" b="1">
+                <a:solidFill>
+                  <a:srgbClr val="FFFFFF"/>
+                </a:solidFill>
+                <a:latin typeface="Inter"/>
+              </a:defRPr>
+            </a:pPr>
+            <a:r>
+              <a:t>Übungsgespräche mit AI</a:t>
+            </a:r>
+          </a:p>
+        </p:txBody>
+      </p:sp>
+      <p:sp>
+        <p:nvSpPr>
+          <p:cNvPr id="16" name="TextBox 15"/>
+          <p:cNvSpPr txBox="1"/>
+          <p:nvPr/>
+        </p:nvSpPr>
+        <p:spPr>
+          <a:xfrm>
+            <a:off x="7863840" y="2971800"/>
+            <a:ext cx="5669280" cy="1005840"/>
+          </a:xfrm>
+          <a:prstGeom prst="rect">
+            <a:avLst/>
+          </a:prstGeom>
+          <a:noFill/>
+        </p:spPr>
+        <p:txBody>
+          <a:bodyPr wrap="square" anchor="t">
+            <a:spAutoFit/>
+          </a:bodyPr>
+          <a:lstStyle/>
+          <a:p>
+            <a:pPr algn="l">
+              <a:spcAft>
+                <a:spcPts val="0"/>
+              </a:spcAft>
+              <a:defRPr sz="1100" b="0">
+                <a:solidFill>
+                  <a:srgbClr val="9CA3AF"/>
+                </a:solidFill>
+                <a:latin typeface="Inter"/>
+              </a:defRPr>
+            </a:pPr>
+            <a:r>
+              <a:t>Neue RMs üben Beratungsgespräche mit einem</a:t>
+            </a:r>
+            <a:br/>
+            <a:r>
+              <a:t>AI-Kunden: Hypothekenberatung, Vorsorgeplanung,</a:t>
+            </a:r>
+            <a:br/>
+            <a:r>
+              <a:t>Reklamation. Die AI gibt strukturiertes Feedback</a:t>
+            </a:r>
+            <a:br/>
+            <a:r>
+              <a:t>nach jedem Gespräch — Stärken und Lücken.</a:t>
+            </a:r>
+          </a:p>
+        </p:txBody>
+      </p:sp>
+      <p:sp>
+        <p:nvSpPr>
+          <p:cNvPr id="17" name="TextBox 16"/>
+          <p:cNvSpPr txBox="1"/>
+          <p:nvPr/>
+        </p:nvSpPr>
+        <p:spPr>
+          <a:xfrm>
+            <a:off x="7863840" y="4206240"/>
+            <a:ext cx="5486400" cy="274320"/>
+          </a:xfrm>
+          <a:prstGeom prst="rect">
+            <a:avLst/>
+          </a:prstGeom>
+          <a:noFill/>
+        </p:spPr>
+        <p:txBody>
+          <a:bodyPr wrap="square" anchor="t">
+            <a:spAutoFit/>
+          </a:bodyPr>
+          <a:lstStyle/>
+          <a:p>
+            <a:pPr algn="l">
+              <a:spcAft>
+                <a:spcPts val="0"/>
+              </a:spcAft>
+              <a:defRPr sz="1400" b="1">
+                <a:solidFill>
+                  <a:srgbClr val="FFFFFF"/>
+                </a:solidFill>
+                <a:latin typeface="Inter"/>
+              </a:defRPr>
+            </a:pPr>
+            <a:r>
+              <a:t>Produktwissen on-demand</a:t>
+            </a:r>
+          </a:p>
+        </p:txBody>
+      </p:sp>
+      <p:sp>
+        <p:nvSpPr>
+          <p:cNvPr id="18" name="TextBox 17"/>
+          <p:cNvSpPr txBox="1"/>
+          <p:nvPr/>
+        </p:nvSpPr>
+        <p:spPr>
+          <a:xfrm>
+            <a:off x="7863840" y="4526279"/>
+            <a:ext cx="5669280" cy="1005840"/>
+          </a:xfrm>
+          <a:prstGeom prst="rect">
+            <a:avLst/>
+          </a:prstGeom>
+          <a:noFill/>
+        </p:spPr>
+        <p:txBody>
+          <a:bodyPr wrap="square" anchor="t">
+            <a:spAutoFit/>
+          </a:bodyPr>
+          <a:lstStyle/>
+          <a:p>
+            <a:pPr algn="l">
+              <a:spcAft>
+                <a:spcPts val="0"/>
+              </a:spcAft>
+              <a:defRPr sz="1100" b="0">
+                <a:solidFill>
+                  <a:srgbClr val="9CA3AF"/>
+                </a:solidFill>
+                <a:latin typeface="Inter"/>
+              </a:defRPr>
+            </a:pPr>
+            <a:r>
+              <a:t>«Was ist der Unterschied zwischen SARON und</a:t>
+            </a:r>
+            <a:br/>
+            <a:r>
+              <a:t>Festhypothek bei aktueller Zinslage?» — AI beantwortet</a:t>
+            </a:r>
+            <a:br/>
+            <a:r>
+              <a:t>Produktfragen sofort, mit aktuellen Konditionen.</a:t>
+            </a:r>
+            <a:br/>
+            <a:r>
+              <a:t>Wie ein erfahrener Kollege, der immer Zeit hat.</a:t>
+            </a:r>
+          </a:p>
+        </p:txBody>
+      </p:sp>
+      <p:sp>
+        <p:nvSpPr>
+          <p:cNvPr id="19" name="TextBox 18"/>
+          <p:cNvSpPr txBox="1"/>
+          <p:nvPr/>
+        </p:nvSpPr>
+        <p:spPr>
+          <a:xfrm>
+            <a:off x="7863840" y="5760720"/>
+            <a:ext cx="5486400" cy="274320"/>
+          </a:xfrm>
+          <a:prstGeom prst="rect">
+            <a:avLst/>
+          </a:prstGeom>
+          <a:noFill/>
+        </p:spPr>
+        <p:txBody>
+          <a:bodyPr wrap="square" anchor="t">
+            <a:spAutoFit/>
+          </a:bodyPr>
+          <a:lstStyle/>
+          <a:p>
+            <a:pPr algn="l">
+              <a:spcAft>
+                <a:spcPts val="0"/>
+              </a:spcAft>
+              <a:defRPr sz="1400" b="1">
+                <a:solidFill>
+                  <a:srgbClr val="FFFFFF"/>
+                </a:solidFill>
+                <a:latin typeface="Inter"/>
+              </a:defRPr>
+            </a:pPr>
+            <a:r>
+              <a:t>Konsistenz über alle Banken</a:t>
+            </a:r>
+          </a:p>
+        </p:txBody>
+      </p:sp>
+      <p:sp>
+        <p:nvSpPr>
+          <p:cNvPr id="20" name="TextBox 19"/>
+          <p:cNvSpPr txBox="1"/>
+          <p:nvPr/>
+        </p:nvSpPr>
+        <p:spPr>
+          <a:xfrm>
+            <a:off x="7863840" y="6080759"/>
+            <a:ext cx="5669280" cy="1005840"/>
+          </a:xfrm>
+          <a:prstGeom prst="rect">
+            <a:avLst/>
+          </a:prstGeom>
+          <a:noFill/>
+        </p:spPr>
+        <p:txBody>
+          <a:bodyPr wrap="square" anchor="t">
+            <a:spAutoFit/>
+          </a:bodyPr>
+          <a:lstStyle/>
+          <a:p>
+            <a:pPr algn="l">
+              <a:spcAft>
+                <a:spcPts val="0"/>
+              </a:spcAft>
+              <a:defRPr sz="1100" b="0">
+                <a:solidFill>
+                  <a:srgbClr val="9CA3AF"/>
+                </a:solidFill>
+                <a:latin typeface="Inter"/>
+              </a:defRPr>
+            </a:pPr>
+            <a:r>
+              <a:t>Dieselbe Wissensquelle für alle 212 Banken.</a:t>
+            </a:r>
+            <a:br/>
+            <a:r>
+              <a:t>Neue Produkte, Konditionsänderungen, regulatorische</a:t>
+            </a:r>
+            <a:br/>
+            <a:r>
+              <a:t>Updates — einmal gepflegt, überall verfügbar.</a:t>
+            </a:r>
+            <a:br/>
+            <a:r>
+              <a:t>Skaliert, ohne zusätzliche Trainer.</a:t>
+            </a:r>
+          </a:p>
+        </p:txBody>
+      </p:sp>
+      <p:sp>
+        <p:nvSpPr>
+          <p:cNvPr id="21" name="Rounded Rectangle 20"/>
+          <p:cNvSpPr/>
+          <p:nvPr/>
+        </p:nvSpPr>
+        <p:spPr>
+          <a:xfrm>
+            <a:off x="731520" y="7498079"/>
+            <a:ext cx="13167360" cy="228600"/>
+          </a:xfrm>
+          <a:prstGeom prst="roundRect">
+            <a:avLst>
+              <a:gd name="adj" fmla="val 4000"/>
+            </a:avLst>
+          </a:prstGeom>
+          <a:solidFill>
+            <a:srgbClr val="2D2D45"/>
+          </a:solidFill>
+          <a:ln>
+            <a:noFill/>
+          </a:ln>
+        </p:spPr>
+        <p:style>
+          <a:lnRef idx="1">
+            <a:schemeClr val="accent1"/>
+          </a:lnRef>
+          <a:fillRef idx="3">
+            <a:schemeClr val="accent1"/>
+          </a:fillRef>
+          <a:effectRef idx="2">
+            <a:schemeClr val="accent1"/>
+          </a:effectRef>
+          <a:fontRef idx="minor">
+            <a:schemeClr val="lt1"/>
+          </a:fontRef>
+        </p:style>
+        <p:txBody>
+          <a:bodyPr rtlCol="0" anchor="ctr"/>
+          <a:lstStyle/>
+          <a:p>
+            <a:pPr algn="ctr"/>
+          </a:p>
+        </p:txBody>
+      </p:sp>
+      <p:sp>
+        <p:nvSpPr>
+          <p:cNvPr id="22" name="TextBox 21"/>
+          <p:cNvSpPr txBox="1"/>
+          <p:nvPr/>
+        </p:nvSpPr>
+        <p:spPr>
+          <a:xfrm>
+            <a:off x="1005840" y="7498079"/>
+            <a:ext cx="12801600" cy="228600"/>
+          </a:xfrm>
+          <a:prstGeom prst="rect">
+            <a:avLst/>
+          </a:prstGeom>
+          <a:noFill/>
+        </p:spPr>
+        <p:txBody>
+          <a:bodyPr wrap="square" anchor="t">
+            <a:spAutoFit/>
+          </a:bodyPr>
+          <a:lstStyle/>
+          <a:p>
+            <a:pPr algn="l">
+              <a:spcAft>
+                <a:spcPts val="0"/>
+              </a:spcAft>
+              <a:defRPr sz="1000" b="1">
+                <a:solidFill>
+                  <a:srgbClr val="E8A838"/>
+                </a:solidFill>
+                <a:latin typeface="Inter"/>
+              </a:defRPr>
+            </a:pPr>
+            <a:r>
+              <a:t>Ein neuer RM, der nach 6 statt 18 Monaten produktiv berät, spart einer Filiale ein halbes Jahr Opportunitätskosten.</a:t>
+            </a:r>
+          </a:p>
+        </p:txBody>
+      </p:sp>
+      <p:sp>
+        <p:nvSpPr>
+          <p:cNvPr id="23" name="TextBox 22"/>
+          <p:cNvSpPr txBox="1"/>
+          <p:nvPr/>
+        </p:nvSpPr>
+        <p:spPr>
+          <a:xfrm>
+            <a:off x="731520" y="7818120"/>
+            <a:ext cx="7315200" cy="274320"/>
+          </a:xfrm>
+          <a:prstGeom prst="rect">
+            <a:avLst/>
+          </a:prstGeom>
+          <a:noFill/>
+        </p:spPr>
+        <p:txBody>
+          <a:bodyPr wrap="square" anchor="t">
+            <a:spAutoFit/>
+          </a:bodyPr>
+          <a:lstStyle/>
+          <a:p>
+            <a:pPr algn="l">
+              <a:spcAft>
+                <a:spcPts val="0"/>
+              </a:spcAft>
+              <a:defRPr sz="900" b="0">
+                <a:solidFill>
+                  <a:srgbClr val="505060"/>
+                </a:solidFill>
+                <a:latin typeface="JetBrains Mono"/>
+              </a:defRPr>
+            </a:pPr>
+            <a:r>
+              <a:t>Vertraulich  ·  Salesteq × Raiffeisen</a:t>
+            </a:r>
+          </a:p>
+        </p:txBody>
+      </p:sp>
+      <p:sp>
+        <p:nvSpPr>
+          <p:cNvPr id="24" name="TextBox 23"/>
+          <p:cNvSpPr txBox="1"/>
+          <p:nvPr/>
+        </p:nvSpPr>
+        <p:spPr>
+          <a:xfrm>
+            <a:off x="12801600" y="7818120"/>
+            <a:ext cx="1097280" cy="274320"/>
+          </a:xfrm>
+          <a:prstGeom prst="rect">
+            <a:avLst/>
+          </a:prstGeom>
+          <a:noFill/>
+        </p:spPr>
+        <p:txBody>
+          <a:bodyPr wrap="square" anchor="t">
+            <a:spAutoFit/>
+          </a:bodyPr>
+          <a:lstStyle/>
+          <a:p>
+            <a:pPr algn="r">
+              <a:spcAft>
+                <a:spcPts val="0"/>
+              </a:spcAft>
+              <a:defRPr sz="900" b="0">
+                <a:solidFill>
+                  <a:srgbClr val="505060"/>
+                </a:solidFill>
+                <a:latin typeface="JetBrains Mono"/>
+              </a:defRPr>
+            </a:pPr>
+            <a:r>
+              <a:t>4 / 6</a:t>
+            </a:r>
+          </a:p>
+        </p:txBody>
+      </p:sp>
+    </p:spTree>
+  </p:cSld>
+  <p:clrMapOvr>
+    <a:masterClrMapping/>
+  </p:clrMapOvr>
+</p:sld>
+</file>
+
+<file path=ppt/slides/slide5.xml><?xml version="1.0" encoding="utf-8"?>
 <p:sld xmlns:a="http://schemas.openxmlformats.org/drawingml/2006/main" xmlns:p="http://schemas.openxmlformats.org/presentationml/2006/main" xmlns:r="http://schemas.openxmlformats.org/officeDocument/2006/relationships">
   <p:cSld>
     <p:bg>
@@ -6833,7 +8616,7 @@
               </a:defRPr>
             </a:pPr>
             <a:r>
-              <a:t>ZUSAMMENARBEIT</a:t>
+              <a:t>VORGEHEN</a:t>
             </a:r>
           </a:p>
         </p:txBody>
@@ -6872,21 +8655,60 @@
               </a:defRPr>
             </a:pPr>
             <a:r>
-              <a:t>Warum Salesteq</a:t>
-            </a:r>
-          </a:p>
-        </p:txBody>
-      </p:sp>
-      <p:sp>
-        <p:nvSpPr>
-          <p:cNvPr id="4" name="Rounded Rectangle 3"/>
+              <a:t>Klein anfangen. Gemeinsam lernen.</a:t>
+            </a:r>
+          </a:p>
+        </p:txBody>
+      </p:sp>
+      <p:sp>
+        <p:nvSpPr>
+          <p:cNvPr id="4" name="TextBox 3"/>
+          <p:cNvSpPr txBox="1"/>
+          <p:nvPr/>
+        </p:nvSpPr>
+        <p:spPr>
+          <a:xfrm>
+            <a:off x="731520" y="1463040"/>
+            <a:ext cx="9144000" cy="365760"/>
+          </a:xfrm>
+          <a:prstGeom prst="rect">
+            <a:avLst/>
+          </a:prstGeom>
+          <a:noFill/>
+        </p:spPr>
+        <p:txBody>
+          <a:bodyPr wrap="square" anchor="t">
+            <a:spAutoFit/>
+          </a:bodyPr>
+          <a:lstStyle/>
+          <a:p>
+            <a:pPr algn="l">
+              <a:spcAft>
+                <a:spcPts val="0"/>
+              </a:spcAft>
+              <a:defRPr sz="1400" b="0">
+                <a:solidFill>
+                  <a:srgbClr val="6B7280"/>
+                </a:solidFill>
+                <a:latin typeface="Inter"/>
+              </a:defRPr>
+            </a:pPr>
+            <a:r>
+              <a:t>Kein grosses Projekt. Kein aufwändiger Beschaffungsprozess. Ein kleines, begrenztes Experiment mit klaren Zielen.</a:t>
+            </a:r>
+          </a:p>
+        </p:txBody>
+      </p:sp>
+      <p:sp>
+        <p:nvSpPr>
+          <p:cNvPr id="5" name="Rounded Rectangle 4"/>
           <p:cNvSpPr/>
           <p:nvPr/>
         </p:nvSpPr>
         <p:spPr>
           <a:xfrm>
-            <a:off x="731520" y="1554480"/>
-            <a:ext cx="13167360" cy="1828800"/>
+            <a:off x="731520" y="2103120"/>
+            <a:ext cx="6400800" cy="2103120"/>
           </a:xfrm>
           <a:prstGeom prst="roundRect">
             <a:avLst>
@@ -6924,192 +8746,148 @@
       </p:sp>
       <p:sp>
         <p:nvSpPr>
-          <p:cNvPr id="5" name="TextBox 4"/>
-          <p:cNvSpPr txBox="1"/>
-          <p:nvPr/>
-        </p:nvSpPr>
-        <p:spPr>
-          <a:xfrm>
-            <a:off x="1005840" y="1691640"/>
-            <a:ext cx="3657600" cy="228600"/>
-          </a:xfrm>
-          <a:prstGeom prst="rect">
-            <a:avLst/>
-          </a:prstGeom>
-          <a:noFill/>
-        </p:spPr>
-        <p:txBody>
-          <a:bodyPr wrap="square" anchor="t">
-            <a:spAutoFit/>
-          </a:bodyPr>
-          <a:lstStyle/>
-          <a:p>
-            <a:pPr algn="l">
-              <a:spcAft>
-                <a:spcPts val="0"/>
-              </a:spcAft>
-              <a:defRPr sz="1100" b="1">
-                <a:solidFill>
-                  <a:srgbClr val="1A1A2E"/>
-                </a:solidFill>
-                <a:latin typeface="Inter"/>
-              </a:defRPr>
-            </a:pPr>
-            <a:r>
-              <a:t>Austausch vom März 2026</a:t>
-            </a:r>
-          </a:p>
-        </p:txBody>
-      </p:sp>
-      <p:sp>
-        <p:nvSpPr>
           <p:cNvPr id="6" name="TextBox 5"/>
           <p:cNvSpPr txBox="1"/>
           <p:nvPr/>
         </p:nvSpPr>
         <p:spPr>
           <a:xfrm>
-            <a:off x="1005840" y="2011680"/>
-            <a:ext cx="12618720" cy="731520"/>
-          </a:xfrm>
-          <a:prstGeom prst="rect">
-            <a:avLst/>
-          </a:prstGeom>
-          <a:noFill/>
-        </p:spPr>
-        <p:txBody>
-          <a:bodyPr wrap="square">
-            <a:spAutoFit/>
-          </a:bodyPr>
-          <a:lstStyle/>
-          <a:p>
-            <a:pPr algn="l">
-              <a:lnSpc>
-                <a:spcPts val="1380"/>
-              </a:lnSpc>
-              <a:spcAft>
-                <a:spcPts val="300"/>
+            <a:off x="1005840" y="2240280"/>
+            <a:ext cx="5486400" cy="228600"/>
+          </a:xfrm>
+          <a:prstGeom prst="rect">
+            <a:avLst/>
+          </a:prstGeom>
+          <a:noFill/>
+        </p:spPr>
+        <p:txBody>
+          <a:bodyPr wrap="square" anchor="t">
+            <a:spAutoFit/>
+          </a:bodyPr>
+          <a:lstStyle/>
+          <a:p>
+            <a:pPr algn="l">
+              <a:spcAft>
+                <a:spcPts val="0"/>
+              </a:spcAft>
+              <a:defRPr sz="1000" b="1">
+                <a:solidFill>
+                  <a:srgbClr val="22C55E"/>
+                </a:solidFill>
+                <a:latin typeface="JetBrains Mono"/>
+              </a:defRPr>
+            </a:pPr>
+            <a:r>
+              <a:t>✓  WAS WIR BRAUCHEN</a:t>
+            </a:r>
+          </a:p>
+        </p:txBody>
+      </p:sp>
+      <p:sp>
+        <p:nvSpPr>
+          <p:cNvPr id="7" name="TextBox 6"/>
+          <p:cNvSpPr txBox="1"/>
+          <p:nvPr/>
+        </p:nvSpPr>
+        <p:spPr>
+          <a:xfrm>
+            <a:off x="1188720" y="2606040"/>
+            <a:ext cx="5669280" cy="320040"/>
+          </a:xfrm>
+          <a:prstGeom prst="rect">
+            <a:avLst/>
+          </a:prstGeom>
+          <a:noFill/>
+        </p:spPr>
+        <p:txBody>
+          <a:bodyPr wrap="square" anchor="t">
+            <a:spAutoFit/>
+          </a:bodyPr>
+          <a:lstStyle/>
+          <a:p>
+            <a:pPr algn="l">
+              <a:spcAft>
+                <a:spcPts val="0"/>
               </a:spcAft>
               <a:defRPr sz="1200" b="0">
                 <a:solidFill>
-                  <a:srgbClr val="6B7280"/>
-                </a:solidFill>
-                <a:latin typeface="Inter"/>
-              </a:defRPr>
-            </a:pPr>
-            <a:r>
-              <a:t>Im Gespräch mit Ivo Schneider und Lukas Seger haben wir vereinbart, ein einfaches Szenario</a:t>
-            </a:r>
-          </a:p>
-          <a:p>
-            <a:pPr algn="l">
-              <a:lnSpc>
-                <a:spcPts val="1380"/>
-              </a:lnSpc>
-              <a:spcAft>
-                <a:spcPts val="300"/>
+                  <a:srgbClr val="2D2D2D"/>
+                </a:solidFill>
+                <a:latin typeface="Inter"/>
+              </a:defRPr>
+            </a:pPr>
+            <a:r>
+              <a:t>·  Einen Ansprechpartner im Vertrieb (kein IT-Team nötig)</a:t>
+            </a:r>
+          </a:p>
+        </p:txBody>
+      </p:sp>
+      <p:sp>
+        <p:nvSpPr>
+          <p:cNvPr id="8" name="TextBox 7"/>
+          <p:cNvSpPr txBox="1"/>
+          <p:nvPr/>
+        </p:nvSpPr>
+        <p:spPr>
+          <a:xfrm>
+            <a:off x="1188720" y="2971800"/>
+            <a:ext cx="5669280" cy="320040"/>
+          </a:xfrm>
+          <a:prstGeom prst="rect">
+            <a:avLst/>
+          </a:prstGeom>
+          <a:noFill/>
+        </p:spPr>
+        <p:txBody>
+          <a:bodyPr wrap="square" anchor="t">
+            <a:spAutoFit/>
+          </a:bodyPr>
+          <a:lstStyle/>
+          <a:p>
+            <a:pPr algn="l">
+              <a:spcAft>
+                <a:spcPts val="0"/>
               </a:spcAft>
               <a:defRPr sz="1200" b="0">
                 <a:solidFill>
-                  <a:srgbClr val="6B7280"/>
-                </a:solidFill>
-                <a:latin typeface="Inter"/>
-              </a:defRPr>
-            </a:pPr>
-            <a:r>
-              <a:t>vorzubereiten — basierend auf unserem Ansatz bei Allianz Suisse.</a:t>
-            </a:r>
-          </a:p>
-        </p:txBody>
-      </p:sp>
-      <p:sp>
-        <p:nvSpPr>
-          <p:cNvPr id="7" name="TextBox 6"/>
-          <p:cNvSpPr txBox="1"/>
-          <p:nvPr/>
-        </p:nvSpPr>
-        <p:spPr>
-          <a:xfrm>
-            <a:off x="1005840" y="2606040"/>
-            <a:ext cx="12801600" cy="182880"/>
-          </a:xfrm>
-          <a:prstGeom prst="rect">
-            <a:avLst/>
-          </a:prstGeom>
-          <a:noFill/>
-        </p:spPr>
-        <p:txBody>
-          <a:bodyPr wrap="square" anchor="t">
-            <a:spAutoFit/>
-          </a:bodyPr>
-          <a:lstStyle/>
-          <a:p>
-            <a:pPr algn="l">
-              <a:spcAft>
-                <a:spcPts val="0"/>
-              </a:spcAft>
-              <a:defRPr sz="1100" b="1">
-                <a:solidFill>
-                  <a:srgbClr val="1A1A2E"/>
-                </a:solidFill>
-                <a:latin typeface="Inter"/>
-              </a:defRPr>
-            </a:pPr>
-            <a:r>
-              <a:t>Vorgehen in 3 Schritten: Salesteq macht einen Vorschlag</a:t>
-            </a:r>
-          </a:p>
-        </p:txBody>
-      </p:sp>
-      <p:sp>
-        <p:nvSpPr>
-          <p:cNvPr id="8" name="TextBox 7"/>
-          <p:cNvSpPr txBox="1"/>
-          <p:nvPr/>
-        </p:nvSpPr>
-        <p:spPr>
-          <a:xfrm>
-            <a:off x="1005840" y="2834640"/>
-            <a:ext cx="12618720" cy="548640"/>
-          </a:xfrm>
-          <a:prstGeom prst="rect">
-            <a:avLst/>
-          </a:prstGeom>
-          <a:noFill/>
-        </p:spPr>
-        <p:txBody>
-          <a:bodyPr wrap="square">
-            <a:spAutoFit/>
-          </a:bodyPr>
-          <a:lstStyle/>
-          <a:p>
-            <a:pPr algn="l">
-              <a:lnSpc>
-                <a:spcPts val="1264"/>
-              </a:lnSpc>
-              <a:spcAft>
-                <a:spcPts val="300"/>
-              </a:spcAft>
-              <a:defRPr sz="1100" b="0">
-                <a:solidFill>
                   <a:srgbClr val="2D2D2D"/>
                 </a:solidFill>
                 <a:latin typeface="Inter"/>
               </a:defRPr>
             </a:pPr>
             <a:r>
-              <a:t>Schritt 1: Big Picture aufzeigen — «Zukunft des Vertriebs mit AI bei Raiffeisen»</a:t>
-            </a:r>
-          </a:p>
-          <a:p>
-            <a:pPr algn="l">
-              <a:lnSpc>
-                <a:spcPts val="1264"/>
-              </a:lnSpc>
-              <a:spcAft>
-                <a:spcPts val="300"/>
-              </a:spcAft>
-              <a:defRPr sz="1100" b="0">
+              <a:t>·  Zugang zu einem typischen Berateralltag (1 Tag, 1 Filiale)</a:t>
+            </a:r>
+          </a:p>
+        </p:txBody>
+      </p:sp>
+      <p:sp>
+        <p:nvSpPr>
+          <p:cNvPr id="9" name="TextBox 8"/>
+          <p:cNvSpPr txBox="1"/>
+          <p:nvPr/>
+        </p:nvSpPr>
+        <p:spPr>
+          <a:xfrm>
+            <a:off x="1188720" y="3337560"/>
+            <a:ext cx="5669280" cy="320040"/>
+          </a:xfrm>
+          <a:prstGeom prst="rect">
+            <a:avLst/>
+          </a:prstGeom>
+          <a:noFill/>
+        </p:spPr>
+        <p:txBody>
+          <a:bodyPr wrap="square" anchor="t">
+            <a:spAutoFit/>
+          </a:bodyPr>
+          <a:lstStyle/>
+          <a:p>
+            <a:pPr algn="l">
+              <a:spcAft>
+                <a:spcPts val="0"/>
+              </a:spcAft>
+              <a:defRPr sz="1200" b="0">
                 <a:solidFill>
                   <a:srgbClr val="2D2D2D"/>
                 </a:solidFill>
@@ -7117,40 +8895,21 @@
               </a:defRPr>
             </a:pPr>
             <a:r>
-              <a:t>Schritt 2: Ausarbeitung eines konkreten Use Case (z.B. RM-Briefings, proaktive Ansprache)</a:t>
-            </a:r>
-          </a:p>
-          <a:p>
-            <a:pPr algn="l">
-              <a:lnSpc>
-                <a:spcPts val="1264"/>
-              </a:lnSpc>
-              <a:spcAft>
-                <a:spcPts val="300"/>
-              </a:spcAft>
-              <a:defRPr sz="1100" b="0">
-                <a:solidFill>
-                  <a:srgbClr val="2D2D2D"/>
-                </a:solidFill>
-                <a:latin typeface="Inter"/>
-              </a:defRPr>
-            </a:pPr>
-            <a:r>
-              <a:t>Schritt 3: Optional — Proof-of-Concept mit einer Raiffeisenbank</a:t>
-            </a:r>
-          </a:p>
-        </p:txBody>
-      </p:sp>
-      <p:sp>
-        <p:nvSpPr>
-          <p:cNvPr id="9" name="Rounded Rectangle 8"/>
+              <a:t>·  Bereitschaft, ein kleines Experiment zu starten</a:t>
+            </a:r>
+          </a:p>
+        </p:txBody>
+      </p:sp>
+      <p:sp>
+        <p:nvSpPr>
+          <p:cNvPr id="10" name="Rounded Rectangle 9"/>
           <p:cNvSpPr/>
           <p:nvPr/>
         </p:nvSpPr>
         <p:spPr>
           <a:xfrm>
-            <a:off x="731520" y="3657600"/>
-            <a:ext cx="6400800" cy="2926080"/>
+            <a:off x="7589520" y="2103120"/>
+            <a:ext cx="6400800" cy="2103120"/>
           </a:xfrm>
           <a:prstGeom prst="roundRect">
             <a:avLst>
@@ -7188,13 +8947,13 @@
       </p:sp>
       <p:sp>
         <p:nvSpPr>
-          <p:cNvPr id="10" name="TextBox 9"/>
-          <p:cNvSpPr txBox="1"/>
-          <p:nvPr/>
-        </p:nvSpPr>
-        <p:spPr>
-          <a:xfrm>
-            <a:off x="1005840" y="3794760"/>
+          <p:cNvPr id="11" name="TextBox 10"/>
+          <p:cNvSpPr txBox="1"/>
+          <p:nvPr/>
+        </p:nvSpPr>
+        <p:spPr>
+          <a:xfrm>
+            <a:off x="7863840" y="2240280"/>
             <a:ext cx="5486400" cy="228600"/>
           </a:xfrm>
           <a:prstGeom prst="rect">
@@ -7212,46 +8971,46 @@
               <a:spcAft>
                 <a:spcPts val="0"/>
               </a:spcAft>
-              <a:defRPr sz="1300" b="1">
-                <a:solidFill>
-                  <a:srgbClr val="1A1A2E"/>
-                </a:solidFill>
-                <a:latin typeface="Inter"/>
-              </a:defRPr>
-            </a:pPr>
-            <a:r>
-              <a:t>Was Salesteq mitbringt</a:t>
-            </a:r>
-          </a:p>
-        </p:txBody>
-      </p:sp>
-      <p:sp>
-        <p:nvSpPr>
-          <p:cNvPr id="11" name="TextBox 10"/>
-          <p:cNvSpPr txBox="1"/>
-          <p:nvPr/>
-        </p:nvSpPr>
-        <p:spPr>
-          <a:xfrm>
-            <a:off x="1188720" y="4160520"/>
-            <a:ext cx="5669280" cy="365760"/>
-          </a:xfrm>
-          <a:prstGeom prst="rect">
-            <a:avLst/>
-          </a:prstGeom>
-          <a:noFill/>
-        </p:spPr>
-        <p:txBody>
-          <a:bodyPr wrap="square" anchor="t">
-            <a:spAutoFit/>
-          </a:bodyPr>
-          <a:lstStyle/>
-          <a:p>
-            <a:pPr algn="l">
-              <a:spcAft>
-                <a:spcPts val="0"/>
-              </a:spcAft>
-              <a:defRPr sz="1100" b="0">
+              <a:defRPr sz="1000" b="1">
+                <a:solidFill>
+                  <a:srgbClr val="EF4444"/>
+                </a:solidFill>
+                <a:latin typeface="JetBrains Mono"/>
+              </a:defRPr>
+            </a:pPr>
+            <a:r>
+              <a:t>✗  WAS WIR NICHT BRAUCHEN</a:t>
+            </a:r>
+          </a:p>
+        </p:txBody>
+      </p:sp>
+      <p:sp>
+        <p:nvSpPr>
+          <p:cNvPr id="12" name="TextBox 11"/>
+          <p:cNvSpPr txBox="1"/>
+          <p:nvPr/>
+        </p:nvSpPr>
+        <p:spPr>
+          <a:xfrm>
+            <a:off x="8046720" y="2606040"/>
+            <a:ext cx="5669280" cy="320040"/>
+          </a:xfrm>
+          <a:prstGeom prst="rect">
+            <a:avLst/>
+          </a:prstGeom>
+          <a:noFill/>
+        </p:spPr>
+        <p:txBody>
+          <a:bodyPr wrap="square" anchor="t">
+            <a:spAutoFit/>
+          </a:bodyPr>
+          <a:lstStyle/>
+          <a:p>
+            <a:pPr algn="l">
+              <a:spcAft>
+                <a:spcPts val="0"/>
+              </a:spcAft>
+              <a:defRPr sz="1200" b="0">
                 <a:solidFill>
                   <a:srgbClr val="2D2D2D"/>
                 </a:solidFill>
@@ -7259,38 +9018,38 @@
               </a:defRPr>
             </a:pPr>
             <a:r>
-              <a:t>✓  Produktionserfahrung: Naghi/BMW (15'000+ MA, Voice AI)</a:t>
-            </a:r>
-          </a:p>
-        </p:txBody>
-      </p:sp>
-      <p:sp>
-        <p:nvSpPr>
-          <p:cNvPr id="12" name="TextBox 11"/>
-          <p:cNvSpPr txBox="1"/>
-          <p:nvPr/>
-        </p:nvSpPr>
-        <p:spPr>
-          <a:xfrm>
-            <a:off x="1188720" y="4572000"/>
-            <a:ext cx="5669280" cy="365760"/>
-          </a:xfrm>
-          <a:prstGeom prst="rect">
-            <a:avLst/>
-          </a:prstGeom>
-          <a:noFill/>
-        </p:spPr>
-        <p:txBody>
-          <a:bodyPr wrap="square" anchor="t">
-            <a:spAutoFit/>
-          </a:bodyPr>
-          <a:lstStyle/>
-          <a:p>
-            <a:pPr algn="l">
-              <a:spcAft>
-                <a:spcPts val="0"/>
-              </a:spcAft>
-              <a:defRPr sz="1100" b="0">
+              <a:t>·  Kein grosses Budget</a:t>
+            </a:r>
+          </a:p>
+        </p:txBody>
+      </p:sp>
+      <p:sp>
+        <p:nvSpPr>
+          <p:cNvPr id="13" name="TextBox 12"/>
+          <p:cNvSpPr txBox="1"/>
+          <p:nvPr/>
+        </p:nvSpPr>
+        <p:spPr>
+          <a:xfrm>
+            <a:off x="8046720" y="2971800"/>
+            <a:ext cx="5669280" cy="320040"/>
+          </a:xfrm>
+          <a:prstGeom prst="rect">
+            <a:avLst/>
+          </a:prstGeom>
+          <a:noFill/>
+        </p:spPr>
+        <p:txBody>
+          <a:bodyPr wrap="square" anchor="t">
+            <a:spAutoFit/>
+          </a:bodyPr>
+          <a:lstStyle/>
+          <a:p>
+            <a:pPr algn="l">
+              <a:spcAft>
+                <a:spcPts val="0"/>
+              </a:spcAft>
+              <a:defRPr sz="1200" b="0">
                 <a:solidFill>
                   <a:srgbClr val="2D2D2D"/>
                 </a:solidFill>
@@ -7298,38 +9057,38 @@
               </a:defRPr>
             </a:pPr>
             <a:r>
-              <a:t>✓  Pilot mit Allianz Suisse (Analytics &amp; Kundenforschung)</a:t>
-            </a:r>
-          </a:p>
-        </p:txBody>
-      </p:sp>
-      <p:sp>
-        <p:nvSpPr>
-          <p:cNvPr id="13" name="TextBox 12"/>
-          <p:cNvSpPr txBox="1"/>
-          <p:nvPr/>
-        </p:nvSpPr>
-        <p:spPr>
-          <a:xfrm>
-            <a:off x="1188720" y="4983480"/>
-            <a:ext cx="5669280" cy="365760"/>
-          </a:xfrm>
-          <a:prstGeom prst="rect">
-            <a:avLst/>
-          </a:prstGeom>
-          <a:noFill/>
-        </p:spPr>
-        <p:txBody>
-          <a:bodyPr wrap="square" anchor="t">
-            <a:spAutoFit/>
-          </a:bodyPr>
-          <a:lstStyle/>
-          <a:p>
-            <a:pPr algn="l">
-              <a:spcAft>
-                <a:spcPts val="0"/>
-              </a:spcAft>
-              <a:defRPr sz="1100" b="0">
+              <a:t>·  Kein grosses IT-Involvement</a:t>
+            </a:r>
+          </a:p>
+        </p:txBody>
+      </p:sp>
+      <p:sp>
+        <p:nvSpPr>
+          <p:cNvPr id="14" name="TextBox 13"/>
+          <p:cNvSpPr txBox="1"/>
+          <p:nvPr/>
+        </p:nvSpPr>
+        <p:spPr>
+          <a:xfrm>
+            <a:off x="8046720" y="3337560"/>
+            <a:ext cx="5669280" cy="320040"/>
+          </a:xfrm>
+          <a:prstGeom prst="rect">
+            <a:avLst/>
+          </a:prstGeom>
+          <a:noFill/>
+        </p:spPr>
+        <p:txBody>
+          <a:bodyPr wrap="square" anchor="t">
+            <a:spAutoFit/>
+          </a:bodyPr>
+          <a:lstStyle/>
+          <a:p>
+            <a:pPr algn="l">
+              <a:spcAft>
+                <a:spcPts val="0"/>
+              </a:spcAft>
+              <a:defRPr sz="1200" b="0">
                 <a:solidFill>
                   <a:srgbClr val="2D2D2D"/>
                 </a:solidFill>
@@ -7337,38 +9096,38 @@
               </a:defRPr>
             </a:pPr>
             <a:r>
-              <a:t>✓  Eigene Sprach-Engine — kein API-Wrapper, eigene Modelle</a:t>
-            </a:r>
-          </a:p>
-        </p:txBody>
-      </p:sp>
-      <p:sp>
-        <p:nvSpPr>
-          <p:cNvPr id="14" name="TextBox 13"/>
-          <p:cNvSpPr txBox="1"/>
-          <p:nvPr/>
-        </p:nvSpPr>
-        <p:spPr>
-          <a:xfrm>
-            <a:off x="1188720" y="5394960"/>
-            <a:ext cx="5669280" cy="365760"/>
-          </a:xfrm>
-          <a:prstGeom prst="rect">
-            <a:avLst/>
-          </a:prstGeom>
-          <a:noFill/>
-        </p:spPr>
-        <p:txBody>
-          <a:bodyPr wrap="square" anchor="t">
-            <a:spAutoFit/>
-          </a:bodyPr>
-          <a:lstStyle/>
-          <a:p>
-            <a:pPr algn="l">
-              <a:spcAft>
-                <a:spcPts val="0"/>
-              </a:spcAft>
-              <a:defRPr sz="1100" b="0">
+              <a:t>·  Keine langfristigen Commitments</a:t>
+            </a:r>
+          </a:p>
+        </p:txBody>
+      </p:sp>
+      <p:sp>
+        <p:nvSpPr>
+          <p:cNvPr id="15" name="TextBox 14"/>
+          <p:cNvSpPr txBox="1"/>
+          <p:nvPr/>
+        </p:nvSpPr>
+        <p:spPr>
+          <a:xfrm>
+            <a:off x="8046720" y="3703320"/>
+            <a:ext cx="5669280" cy="320040"/>
+          </a:xfrm>
+          <a:prstGeom prst="rect">
+            <a:avLst/>
+          </a:prstGeom>
+          <a:noFill/>
+        </p:spPr>
+        <p:txBody>
+          <a:bodyPr wrap="square" anchor="t">
+            <a:spAutoFit/>
+          </a:bodyPr>
+          <a:lstStyle/>
+          <a:p>
+            <a:pPr algn="l">
+              <a:spcAft>
+                <a:spcPts val="0"/>
+              </a:spcAft>
+              <a:defRPr sz="1200" b="0">
                 <a:solidFill>
                   <a:srgbClr val="2D2D2D"/>
                 </a:solidFill>
@@ -7376,46 +9135,7 @@
               </a:defRPr>
             </a:pPr>
             <a:r>
-              <a:t>✓  Mandantenfähig: 212 Banken = 212 isolierte Mandanten</a:t>
-            </a:r>
-          </a:p>
-        </p:txBody>
-      </p:sp>
-      <p:sp>
-        <p:nvSpPr>
-          <p:cNvPr id="15" name="TextBox 14"/>
-          <p:cNvSpPr txBox="1"/>
-          <p:nvPr/>
-        </p:nvSpPr>
-        <p:spPr>
-          <a:xfrm>
-            <a:off x="1188720" y="5806440"/>
-            <a:ext cx="5669280" cy="365760"/>
-          </a:xfrm>
-          <a:prstGeom prst="rect">
-            <a:avLst/>
-          </a:prstGeom>
-          <a:noFill/>
-        </p:spPr>
-        <p:txBody>
-          <a:bodyPr wrap="square" anchor="t">
-            <a:spAutoFit/>
-          </a:bodyPr>
-          <a:lstStyle/>
-          <a:p>
-            <a:pPr algn="l">
-              <a:spcAft>
-                <a:spcPts val="0"/>
-              </a:spcAft>
-              <a:defRPr sz="1100" b="0">
-                <a:solidFill>
-                  <a:srgbClr val="2D2D2D"/>
-                </a:solidFill>
-                <a:latin typeface="Inter"/>
-              </a:defRPr>
-            </a:pPr>
-            <a:r>
-              <a:t>✓  Schweizer Unternehmen (Zug), direkter Zugang zu Gründern</a:t>
+              <a:t>·  Keinen Zugang zu Kernbanksystemen</a:t>
             </a:r>
           </a:p>
         </p:txBody>
@@ -7428,8 +9148,8 @@
         </p:nvSpPr>
         <p:spPr>
           <a:xfrm>
-            <a:off x="7589520" y="3657600"/>
-            <a:ext cx="6400800" cy="2926080"/>
+            <a:off x="731520" y="4572000"/>
+            <a:ext cx="4297680" cy="3200400"/>
           </a:xfrm>
           <a:prstGeom prst="roundRect">
             <a:avLst>
@@ -7437,7 +9157,7 @@
             </a:avLst>
           </a:prstGeom>
           <a:solidFill>
-            <a:srgbClr val="F0EFE8"/>
+            <a:srgbClr val="1A1A2E"/>
           </a:solidFill>
           <a:ln>
             <a:noFill/>
@@ -7473,33 +9193,33 @@
         </p:nvSpPr>
         <p:spPr>
           <a:xfrm>
-            <a:off x="7863840" y="3794760"/>
-            <a:ext cx="5486400" cy="228600"/>
-          </a:xfrm>
-          <a:prstGeom prst="rect">
-            <a:avLst/>
-          </a:prstGeom>
-          <a:noFill/>
-        </p:spPr>
-        <p:txBody>
-          <a:bodyPr wrap="square" anchor="t">
-            <a:spAutoFit/>
-          </a:bodyPr>
-          <a:lstStyle/>
-          <a:p>
-            <a:pPr algn="l">
-              <a:spcAft>
-                <a:spcPts val="0"/>
-              </a:spcAft>
-              <a:defRPr sz="1300" b="1">
-                <a:solidFill>
-                  <a:srgbClr val="1A1A2E"/>
-                </a:solidFill>
-                <a:latin typeface="Inter"/>
-              </a:defRPr>
-            </a:pPr>
-            <a:r>
-              <a:t>Was Salesteq nicht ist</a:t>
+            <a:off x="1005840" y="4709160"/>
+            <a:ext cx="914400" cy="457200"/>
+          </a:xfrm>
+          <a:prstGeom prst="rect">
+            <a:avLst/>
+          </a:prstGeom>
+          <a:noFill/>
+        </p:spPr>
+        <p:txBody>
+          <a:bodyPr wrap="square" anchor="t">
+            <a:spAutoFit/>
+          </a:bodyPr>
+          <a:lstStyle/>
+          <a:p>
+            <a:pPr algn="l">
+              <a:spcAft>
+                <a:spcPts val="0"/>
+              </a:spcAft>
+              <a:defRPr sz="3600" b="0">
+                <a:solidFill>
+                  <a:srgbClr val="E8A838"/>
+                </a:solidFill>
+                <a:latin typeface="Inter"/>
+              </a:defRPr>
+            </a:pPr>
+            <a:r>
+              <a:t>1</a:t>
             </a:r>
           </a:p>
         </p:txBody>
@@ -7512,8 +9232,47 @@
         </p:nvSpPr>
         <p:spPr>
           <a:xfrm>
-            <a:off x="8046720" y="4160520"/>
-            <a:ext cx="5669280" cy="365760"/>
+            <a:off x="1005840" y="5303520"/>
+            <a:ext cx="3657600" cy="320040"/>
+          </a:xfrm>
+          <a:prstGeom prst="rect">
+            <a:avLst/>
+          </a:prstGeom>
+          <a:noFill/>
+        </p:spPr>
+        <p:txBody>
+          <a:bodyPr wrap="square" anchor="t">
+            <a:spAutoFit/>
+          </a:bodyPr>
+          <a:lstStyle/>
+          <a:p>
+            <a:pPr algn="l">
+              <a:spcAft>
+                <a:spcPts val="0"/>
+              </a:spcAft>
+              <a:defRPr sz="1600" b="1">
+                <a:solidFill>
+                  <a:srgbClr val="FFFFFF"/>
+                </a:solidFill>
+                <a:latin typeface="Inter"/>
+              </a:defRPr>
+            </a:pPr>
+            <a:r>
+              <a:t>Big Picture</a:t>
+            </a:r>
+          </a:p>
+        </p:txBody>
+      </p:sp>
+      <p:sp>
+        <p:nvSpPr>
+          <p:cNvPr id="19" name="TextBox 18"/>
+          <p:cNvSpPr txBox="1"/>
+          <p:nvPr/>
+        </p:nvSpPr>
+        <p:spPr>
+          <a:xfrm>
+            <a:off x="1005840" y="5760720"/>
+            <a:ext cx="3657600" cy="1828800"/>
           </a:xfrm>
           <a:prstGeom prst="rect">
             <a:avLst/>
@@ -7532,52 +9291,33 @@
               </a:spcAft>
               <a:defRPr sz="1100" b="0">
                 <a:solidFill>
-                  <a:srgbClr val="2D2D2D"/>
-                </a:solidFill>
-                <a:latin typeface="Inter"/>
-              </a:defRPr>
-            </a:pPr>
-            <a:r>
-              <a:t>✗  Kein CRM-Ersatz (BSI, Salesforce bleiben bestehen)</a:t>
-            </a:r>
-          </a:p>
-        </p:txBody>
-      </p:sp>
-      <p:sp>
-        <p:nvSpPr>
-          <p:cNvPr id="19" name="TextBox 18"/>
-          <p:cNvSpPr txBox="1"/>
-          <p:nvPr/>
-        </p:nvSpPr>
-        <p:spPr>
-          <a:xfrm>
-            <a:off x="8046720" y="4572000"/>
-            <a:ext cx="5669280" cy="365760"/>
-          </a:xfrm>
-          <a:prstGeom prst="rect">
-            <a:avLst/>
-          </a:prstGeom>
-          <a:noFill/>
-        </p:spPr>
-        <p:txBody>
-          <a:bodyPr wrap="square" anchor="t">
-            <a:spAutoFit/>
-          </a:bodyPr>
-          <a:lstStyle/>
-          <a:p>
-            <a:pPr algn="l">
-              <a:spcAft>
-                <a:spcPts val="0"/>
-              </a:spcAft>
-              <a:defRPr sz="1100" b="0">
-                <a:solidFill>
-                  <a:srgbClr val="2D2D2D"/>
-                </a:solidFill>
-                <a:latin typeface="Inter"/>
-              </a:defRPr>
-            </a:pPr>
-            <a:r>
-              <a:t>✗  Kein Copilot-Konkurrent (ergänzt, ersetzt nicht)</a:t>
+                  <a:srgbClr val="9CA3AF"/>
+                </a:solidFill>
+                <a:latin typeface="Inter"/>
+              </a:defRPr>
+            </a:pPr>
+            <a:r>
+              <a:t>Gemeinsam erarbeiten:</a:t>
+            </a:r>
+            <a:br/>
+            <a:r>
+              <a:t>«Zukunft des Vertriebs mit AI.»</a:t>
+            </a:r>
+            <a:br/>
+            <a:r>
+              <a:t>Wo liegt das grösste Potenzial?</a:t>
+            </a:r>
+            <a:br/>
+            <a:r>
+              <a:t>Welcher Use Case zuerst?</a:t>
+            </a:r>
+            <a:br/>
+            <a:r>
+              <a:t>Ein halber Tag Workshop.</a:t>
+            </a:r>
+            <a:br/>
+            <a:r>
+              <a:t>Ergebnis: priorisierte Szenarien.</a:t>
             </a:r>
           </a:p>
         </p:txBody>
@@ -7590,86 +9330,47 @@
         </p:nvSpPr>
         <p:spPr>
           <a:xfrm>
-            <a:off x="8046720" y="4983480"/>
-            <a:ext cx="5669280" cy="365760"/>
-          </a:xfrm>
-          <a:prstGeom prst="rect">
-            <a:avLst/>
-          </a:prstGeom>
-          <a:noFill/>
-        </p:spPr>
-        <p:txBody>
-          <a:bodyPr wrap="square" anchor="t">
-            <a:spAutoFit/>
-          </a:bodyPr>
-          <a:lstStyle/>
-          <a:p>
-            <a:pPr algn="l">
-              <a:spcAft>
-                <a:spcPts val="0"/>
-              </a:spcAft>
-              <a:defRPr sz="1100" b="0">
-                <a:solidFill>
-                  <a:srgbClr val="2D2D2D"/>
-                </a:solidFill>
-                <a:latin typeface="Inter"/>
-              </a:defRPr>
-            </a:pPr>
-            <a:r>
-              <a:t>✗  Kein fertiges Bankenprodukt (wir bauen gemeinsam)</a:t>
-            </a:r>
-          </a:p>
-        </p:txBody>
-      </p:sp>
-      <p:sp>
-        <p:nvSpPr>
-          <p:cNvPr id="21" name="TextBox 20"/>
-          <p:cNvSpPr txBox="1"/>
-          <p:nvPr/>
-        </p:nvSpPr>
-        <p:spPr>
-          <a:xfrm>
-            <a:off x="8046720" y="5394960"/>
-            <a:ext cx="5669280" cy="365760"/>
-          </a:xfrm>
-          <a:prstGeom prst="rect">
-            <a:avLst/>
-          </a:prstGeom>
-          <a:noFill/>
-        </p:spPr>
-        <p:txBody>
-          <a:bodyPr wrap="square" anchor="t">
-            <a:spAutoFit/>
-          </a:bodyPr>
-          <a:lstStyle/>
-          <a:p>
-            <a:pPr algn="l">
-              <a:spcAft>
-                <a:spcPts val="0"/>
-              </a:spcAft>
-              <a:defRPr sz="1100" b="0">
-                <a:solidFill>
-                  <a:srgbClr val="2D2D2D"/>
-                </a:solidFill>
-                <a:latin typeface="Inter"/>
-              </a:defRPr>
-            </a:pPr>
-            <a:r>
-              <a:t>✗  Keine Blackbox — volle Nachvollziehbarkeit aller AI-Aktionen</a:t>
-            </a:r>
-          </a:p>
-        </p:txBody>
-      </p:sp>
-      <p:sp>
-        <p:nvSpPr>
-          <p:cNvPr id="22" name="Rounded Rectangle 21"/>
+            <a:off x="1005840" y="7178040"/>
+            <a:ext cx="2743200" cy="274320"/>
+          </a:xfrm>
+          <a:prstGeom prst="rect">
+            <a:avLst/>
+          </a:prstGeom>
+          <a:noFill/>
+        </p:spPr>
+        <p:txBody>
+          <a:bodyPr wrap="square" anchor="t">
+            <a:spAutoFit/>
+          </a:bodyPr>
+          <a:lstStyle/>
+          <a:p>
+            <a:pPr algn="l">
+              <a:spcAft>
+                <a:spcPts val="0"/>
+              </a:spcAft>
+              <a:defRPr sz="1100" b="1">
+                <a:solidFill>
+                  <a:srgbClr val="E8A838"/>
+                </a:solidFill>
+                <a:latin typeface="JetBrains Mono"/>
+              </a:defRPr>
+            </a:pPr>
+            <a:r>
+              <a:t>Woche 1–2</a:t>
+            </a:r>
+          </a:p>
+        </p:txBody>
+      </p:sp>
+      <p:sp>
+        <p:nvSpPr>
+          <p:cNvPr id="21" name="Rounded Rectangle 20"/>
           <p:cNvSpPr/>
           <p:nvPr/>
         </p:nvSpPr>
         <p:spPr>
           <a:xfrm>
-            <a:off x="731520" y="6858000"/>
-            <a:ext cx="13167360" cy="914400"/>
+            <a:off x="5303520" y="4572000"/>
+            <a:ext cx="4297680" cy="3200400"/>
           </a:xfrm>
           <a:prstGeom prst="roundRect">
             <a:avLst>
@@ -7707,6 +9408,1413 @@
       </p:sp>
       <p:sp>
         <p:nvSpPr>
+          <p:cNvPr id="22" name="TextBox 21"/>
+          <p:cNvSpPr txBox="1"/>
+          <p:nvPr/>
+        </p:nvSpPr>
+        <p:spPr>
+          <a:xfrm>
+            <a:off x="5577840" y="4709160"/>
+            <a:ext cx="914400" cy="457200"/>
+          </a:xfrm>
+          <a:prstGeom prst="rect">
+            <a:avLst/>
+          </a:prstGeom>
+          <a:noFill/>
+        </p:spPr>
+        <p:txBody>
+          <a:bodyPr wrap="square" anchor="t">
+            <a:spAutoFit/>
+          </a:bodyPr>
+          <a:lstStyle/>
+          <a:p>
+            <a:pPr algn="l">
+              <a:spcAft>
+                <a:spcPts val="0"/>
+              </a:spcAft>
+              <a:defRPr sz="3600" b="0">
+                <a:solidFill>
+                  <a:srgbClr val="E8A838"/>
+                </a:solidFill>
+                <a:latin typeface="Inter"/>
+              </a:defRPr>
+            </a:pPr>
+            <a:r>
+              <a:t>2</a:t>
+            </a:r>
+          </a:p>
+        </p:txBody>
+      </p:sp>
+      <p:sp>
+        <p:nvSpPr>
+          <p:cNvPr id="23" name="TextBox 22"/>
+          <p:cNvSpPr txBox="1"/>
+          <p:nvPr/>
+        </p:nvSpPr>
+        <p:spPr>
+          <a:xfrm>
+            <a:off x="5577840" y="5303520"/>
+            <a:ext cx="3657600" cy="320040"/>
+          </a:xfrm>
+          <a:prstGeom prst="rect">
+            <a:avLst/>
+          </a:prstGeom>
+          <a:noFill/>
+        </p:spPr>
+        <p:txBody>
+          <a:bodyPr wrap="square" anchor="t">
+            <a:spAutoFit/>
+          </a:bodyPr>
+          <a:lstStyle/>
+          <a:p>
+            <a:pPr algn="l">
+              <a:spcAft>
+                <a:spcPts val="0"/>
+              </a:spcAft>
+              <a:defRPr sz="1600" b="1">
+                <a:solidFill>
+                  <a:srgbClr val="FFFFFF"/>
+                </a:solidFill>
+                <a:latin typeface="Inter"/>
+              </a:defRPr>
+            </a:pPr>
+            <a:r>
+              <a:t>Konkreter Use Case</a:t>
+            </a:r>
+          </a:p>
+        </p:txBody>
+      </p:sp>
+      <p:sp>
+        <p:nvSpPr>
+          <p:cNvPr id="24" name="TextBox 23"/>
+          <p:cNvSpPr txBox="1"/>
+          <p:nvPr/>
+        </p:nvSpPr>
+        <p:spPr>
+          <a:xfrm>
+            <a:off x="5577840" y="5760720"/>
+            <a:ext cx="3657600" cy="1828800"/>
+          </a:xfrm>
+          <a:prstGeom prst="rect">
+            <a:avLst/>
+          </a:prstGeom>
+          <a:noFill/>
+        </p:spPr>
+        <p:txBody>
+          <a:bodyPr wrap="square" anchor="t">
+            <a:spAutoFit/>
+          </a:bodyPr>
+          <a:lstStyle/>
+          <a:p>
+            <a:pPr algn="l">
+              <a:spcAft>
+                <a:spcPts val="0"/>
+              </a:spcAft>
+              <a:defRPr sz="1100" b="0">
+                <a:solidFill>
+                  <a:srgbClr val="9CA3AF"/>
+                </a:solidFill>
+                <a:latin typeface="Inter"/>
+              </a:defRPr>
+            </a:pPr>
+            <a:r>
+              <a:t>Ausarbeitung eines Szenarios</a:t>
+            </a:r>
+            <a:br/>
+            <a:r>
+              <a:t>für eine Raiffeisenbank.</a:t>
+            </a:r>
+            <a:br/>
+            <a:r>
+              <a:t>Z.B. Training-Sparringspartner</a:t>
+            </a:r>
+            <a:br/>
+            <a:r>
+              <a:t>oder proaktive Kundenansprache.</a:t>
+            </a:r>
+            <a:br/>
+            <a:r>
+              <a:t>Funktionierender Prototyp,</a:t>
+            </a:r>
+            <a:br/>
+            <a:r>
+              <a:t>keine Slides.</a:t>
+            </a:r>
+          </a:p>
+        </p:txBody>
+      </p:sp>
+      <p:sp>
+        <p:nvSpPr>
+          <p:cNvPr id="25" name="TextBox 24"/>
+          <p:cNvSpPr txBox="1"/>
+          <p:nvPr/>
+        </p:nvSpPr>
+        <p:spPr>
+          <a:xfrm>
+            <a:off x="5577840" y="7178040"/>
+            <a:ext cx="2743200" cy="274320"/>
+          </a:xfrm>
+          <a:prstGeom prst="rect">
+            <a:avLst/>
+          </a:prstGeom>
+          <a:noFill/>
+        </p:spPr>
+        <p:txBody>
+          <a:bodyPr wrap="square" anchor="t">
+            <a:spAutoFit/>
+          </a:bodyPr>
+          <a:lstStyle/>
+          <a:p>
+            <a:pPr algn="l">
+              <a:spcAft>
+                <a:spcPts val="0"/>
+              </a:spcAft>
+              <a:defRPr sz="1100" b="1">
+                <a:solidFill>
+                  <a:srgbClr val="E8A838"/>
+                </a:solidFill>
+                <a:latin typeface="JetBrains Mono"/>
+              </a:defRPr>
+            </a:pPr>
+            <a:r>
+              <a:t>Woche 3–8</a:t>
+            </a:r>
+          </a:p>
+        </p:txBody>
+      </p:sp>
+      <p:sp>
+        <p:nvSpPr>
+          <p:cNvPr id="26" name="Rounded Rectangle 25"/>
+          <p:cNvSpPr/>
+          <p:nvPr/>
+        </p:nvSpPr>
+        <p:spPr>
+          <a:xfrm>
+            <a:off x="9875520" y="4572000"/>
+            <a:ext cx="4297680" cy="3200400"/>
+          </a:xfrm>
+          <a:prstGeom prst="roundRect">
+            <a:avLst>
+              <a:gd name="adj" fmla="val 4000"/>
+            </a:avLst>
+          </a:prstGeom>
+          <a:solidFill>
+            <a:srgbClr val="1A1A2E"/>
+          </a:solidFill>
+          <a:ln>
+            <a:noFill/>
+          </a:ln>
+        </p:spPr>
+        <p:style>
+          <a:lnRef idx="1">
+            <a:schemeClr val="accent1"/>
+          </a:lnRef>
+          <a:fillRef idx="3">
+            <a:schemeClr val="accent1"/>
+          </a:fillRef>
+          <a:effectRef idx="2">
+            <a:schemeClr val="accent1"/>
+          </a:effectRef>
+          <a:fontRef idx="minor">
+            <a:schemeClr val="lt1"/>
+          </a:fontRef>
+        </p:style>
+        <p:txBody>
+          <a:bodyPr rtlCol="0" anchor="ctr"/>
+          <a:lstStyle/>
+          <a:p>
+            <a:pPr algn="ctr"/>
+          </a:p>
+        </p:txBody>
+      </p:sp>
+      <p:sp>
+        <p:nvSpPr>
+          <p:cNvPr id="27" name="TextBox 26"/>
+          <p:cNvSpPr txBox="1"/>
+          <p:nvPr/>
+        </p:nvSpPr>
+        <p:spPr>
+          <a:xfrm>
+            <a:off x="10149840" y="4709160"/>
+            <a:ext cx="914400" cy="457200"/>
+          </a:xfrm>
+          <a:prstGeom prst="rect">
+            <a:avLst/>
+          </a:prstGeom>
+          <a:noFill/>
+        </p:spPr>
+        <p:txBody>
+          <a:bodyPr wrap="square" anchor="t">
+            <a:spAutoFit/>
+          </a:bodyPr>
+          <a:lstStyle/>
+          <a:p>
+            <a:pPr algn="l">
+              <a:spcAft>
+                <a:spcPts val="0"/>
+              </a:spcAft>
+              <a:defRPr sz="3600" b="0">
+                <a:solidFill>
+                  <a:srgbClr val="E8A838"/>
+                </a:solidFill>
+                <a:latin typeface="Inter"/>
+              </a:defRPr>
+            </a:pPr>
+            <a:r>
+              <a:t>3</a:t>
+            </a:r>
+          </a:p>
+        </p:txBody>
+      </p:sp>
+      <p:sp>
+        <p:nvSpPr>
+          <p:cNvPr id="28" name="TextBox 27"/>
+          <p:cNvSpPr txBox="1"/>
+          <p:nvPr/>
+        </p:nvSpPr>
+        <p:spPr>
+          <a:xfrm>
+            <a:off x="10149840" y="5303520"/>
+            <a:ext cx="3657600" cy="320040"/>
+          </a:xfrm>
+          <a:prstGeom prst="rect">
+            <a:avLst/>
+          </a:prstGeom>
+          <a:noFill/>
+        </p:spPr>
+        <p:txBody>
+          <a:bodyPr wrap="square" anchor="t">
+            <a:spAutoFit/>
+          </a:bodyPr>
+          <a:lstStyle/>
+          <a:p>
+            <a:pPr algn="l">
+              <a:spcAft>
+                <a:spcPts val="0"/>
+              </a:spcAft>
+              <a:defRPr sz="1600" b="1">
+                <a:solidFill>
+                  <a:srgbClr val="FFFFFF"/>
+                </a:solidFill>
+                <a:latin typeface="Inter"/>
+              </a:defRPr>
+            </a:pPr>
+            <a:r>
+              <a:t>Entscheiden</a:t>
+            </a:r>
+          </a:p>
+        </p:txBody>
+      </p:sp>
+      <p:sp>
+        <p:nvSpPr>
+          <p:cNvPr id="29" name="TextBox 28"/>
+          <p:cNvSpPr txBox="1"/>
+          <p:nvPr/>
+        </p:nvSpPr>
+        <p:spPr>
+          <a:xfrm>
+            <a:off x="10149840" y="5760720"/>
+            <a:ext cx="3657600" cy="1828800"/>
+          </a:xfrm>
+          <a:prstGeom prst="rect">
+            <a:avLst/>
+          </a:prstGeom>
+          <a:noFill/>
+        </p:spPr>
+        <p:txBody>
+          <a:bodyPr wrap="square" anchor="t">
+            <a:spAutoFit/>
+          </a:bodyPr>
+          <a:lstStyle/>
+          <a:p>
+            <a:pPr algn="l">
+              <a:spcAft>
+                <a:spcPts val="0"/>
+              </a:spcAft>
+              <a:defRPr sz="1100" b="0">
+                <a:solidFill>
+                  <a:srgbClr val="9CA3AF"/>
+                </a:solidFill>
+                <a:latin typeface="Inter"/>
+              </a:defRPr>
+            </a:pPr>
+            <a:r>
+              <a:t>Ergebnisse gemeinsam bewerten.</a:t>
+            </a:r>
+            <a:br/>
+            <a:r>
+              <a:t>Feedback der Berater einholen.</a:t>
+            </a:r>
+            <a:br/>
+            <a:r>
+              <a:t>Wenn es funktioniert: skalieren.</a:t>
+            </a:r>
+            <a:br/>
+            <a:r>
+              <a:t>Wenn nicht: kein Schaden,</a:t>
+            </a:r>
+            <a:br/>
+            <a:r>
+              <a:t>viel gelernt.</a:t>
+            </a:r>
+            <a:br/>
+            <a:r>
+              <a:t>Die Resultate sprechen für sich.</a:t>
+            </a:r>
+          </a:p>
+        </p:txBody>
+      </p:sp>
+      <p:sp>
+        <p:nvSpPr>
+          <p:cNvPr id="30" name="TextBox 29"/>
+          <p:cNvSpPr txBox="1"/>
+          <p:nvPr/>
+        </p:nvSpPr>
+        <p:spPr>
+          <a:xfrm>
+            <a:off x="10149840" y="7178040"/>
+            <a:ext cx="2743200" cy="274320"/>
+          </a:xfrm>
+          <a:prstGeom prst="rect">
+            <a:avLst/>
+          </a:prstGeom>
+          <a:noFill/>
+        </p:spPr>
+        <p:txBody>
+          <a:bodyPr wrap="square" anchor="t">
+            <a:spAutoFit/>
+          </a:bodyPr>
+          <a:lstStyle/>
+          <a:p>
+            <a:pPr algn="l">
+              <a:spcAft>
+                <a:spcPts val="0"/>
+              </a:spcAft>
+              <a:defRPr sz="1100" b="1">
+                <a:solidFill>
+                  <a:srgbClr val="E8A838"/>
+                </a:solidFill>
+                <a:latin typeface="JetBrains Mono"/>
+              </a:defRPr>
+            </a:pPr>
+            <a:r>
+              <a:t>Woche 9–12</a:t>
+            </a:r>
+          </a:p>
+        </p:txBody>
+      </p:sp>
+      <p:sp>
+        <p:nvSpPr>
+          <p:cNvPr id="31" name="TextBox 30"/>
+          <p:cNvSpPr txBox="1"/>
+          <p:nvPr/>
+        </p:nvSpPr>
+        <p:spPr>
+          <a:xfrm>
+            <a:off x="731520" y="7818120"/>
+            <a:ext cx="7315200" cy="274320"/>
+          </a:xfrm>
+          <a:prstGeom prst="rect">
+            <a:avLst/>
+          </a:prstGeom>
+          <a:noFill/>
+        </p:spPr>
+        <p:txBody>
+          <a:bodyPr wrap="square" anchor="t">
+            <a:spAutoFit/>
+          </a:bodyPr>
+          <a:lstStyle/>
+          <a:p>
+            <a:pPr algn="l">
+              <a:spcAft>
+                <a:spcPts val="0"/>
+              </a:spcAft>
+              <a:defRPr sz="900" b="0">
+                <a:solidFill>
+                  <a:srgbClr val="6B7280"/>
+                </a:solidFill>
+                <a:latin typeface="JetBrains Mono"/>
+              </a:defRPr>
+            </a:pPr>
+            <a:r>
+              <a:t>Vertraulich  ·  Salesteq × Raiffeisen</a:t>
+            </a:r>
+          </a:p>
+        </p:txBody>
+      </p:sp>
+      <p:sp>
+        <p:nvSpPr>
+          <p:cNvPr id="32" name="TextBox 31"/>
+          <p:cNvSpPr txBox="1"/>
+          <p:nvPr/>
+        </p:nvSpPr>
+        <p:spPr>
+          <a:xfrm>
+            <a:off x="12801600" y="7818120"/>
+            <a:ext cx="1097280" cy="274320"/>
+          </a:xfrm>
+          <a:prstGeom prst="rect">
+            <a:avLst/>
+          </a:prstGeom>
+          <a:noFill/>
+        </p:spPr>
+        <p:txBody>
+          <a:bodyPr wrap="square" anchor="t">
+            <a:spAutoFit/>
+          </a:bodyPr>
+          <a:lstStyle/>
+          <a:p>
+            <a:pPr algn="r">
+              <a:spcAft>
+                <a:spcPts val="0"/>
+              </a:spcAft>
+              <a:defRPr sz="900" b="0">
+                <a:solidFill>
+                  <a:srgbClr val="6B7280"/>
+                </a:solidFill>
+                <a:latin typeface="JetBrains Mono"/>
+              </a:defRPr>
+            </a:pPr>
+            <a:r>
+              <a:t>5 / 6</a:t>
+            </a:r>
+          </a:p>
+        </p:txBody>
+      </p:sp>
+    </p:spTree>
+  </p:cSld>
+  <p:clrMapOvr>
+    <a:masterClrMapping/>
+  </p:clrMapOvr>
+</p:sld>
+</file>
+
+<file path=ppt/slides/slide6.xml><?xml version="1.0" encoding="utf-8"?>
+<p:sld xmlns:a="http://schemas.openxmlformats.org/drawingml/2006/main" xmlns:p="http://schemas.openxmlformats.org/presentationml/2006/main" xmlns:r="http://schemas.openxmlformats.org/officeDocument/2006/relationships">
+  <p:cSld>
+    <p:bg>
+      <p:bgPr>
+        <a:solidFill>
+          <a:srgbClr val="FFFFFF"/>
+        </a:solidFill>
+        <a:effectLst/>
+      </p:bgPr>
+    </p:bg>
+    <p:spTree>
+      <p:nvGrpSpPr>
+        <p:cNvPr id="1" name=""/>
+        <p:cNvGrpSpPr/>
+        <p:nvPr/>
+      </p:nvGrpSpPr>
+      <p:grpSpPr/>
+      <p:sp>
+        <p:nvSpPr>
+          <p:cNvPr id="2" name="TextBox 1"/>
+          <p:cNvSpPr txBox="1"/>
+          <p:nvPr/>
+        </p:nvSpPr>
+        <p:spPr>
+          <a:xfrm>
+            <a:off x="731520" y="457200"/>
+            <a:ext cx="5486400" cy="274320"/>
+          </a:xfrm>
+          <a:prstGeom prst="rect">
+            <a:avLst/>
+          </a:prstGeom>
+          <a:noFill/>
+        </p:spPr>
+        <p:txBody>
+          <a:bodyPr wrap="square" anchor="t">
+            <a:spAutoFit/>
+          </a:bodyPr>
+          <a:lstStyle/>
+          <a:p>
+            <a:pPr algn="l">
+              <a:spcAft>
+                <a:spcPts val="0"/>
+              </a:spcAft>
+              <a:defRPr sz="1000" b="1">
+                <a:solidFill>
+                  <a:srgbClr val="E8A838"/>
+                </a:solidFill>
+                <a:latin typeface="JetBrains Mono"/>
+              </a:defRPr>
+            </a:pPr>
+            <a:r>
+              <a:t>ZUSAMMENARBEIT</a:t>
+            </a:r>
+          </a:p>
+        </p:txBody>
+      </p:sp>
+      <p:sp>
+        <p:nvSpPr>
+          <p:cNvPr id="3" name="TextBox 2"/>
+          <p:cNvSpPr txBox="1"/>
+          <p:nvPr/>
+        </p:nvSpPr>
+        <p:spPr>
+          <a:xfrm>
+            <a:off x="731520" y="822960"/>
+            <a:ext cx="12801600" cy="548640"/>
+          </a:xfrm>
+          <a:prstGeom prst="rect">
+            <a:avLst/>
+          </a:prstGeom>
+          <a:noFill/>
+        </p:spPr>
+        <p:txBody>
+          <a:bodyPr wrap="square" anchor="t">
+            <a:spAutoFit/>
+          </a:bodyPr>
+          <a:lstStyle/>
+          <a:p>
+            <a:pPr algn="l">
+              <a:spcAft>
+                <a:spcPts val="0"/>
+              </a:spcAft>
+              <a:defRPr sz="3400" b="0">
+                <a:solidFill>
+                  <a:srgbClr val="1A1A2E"/>
+                </a:solidFill>
+                <a:latin typeface="Inter"/>
+              </a:defRPr>
+            </a:pPr>
+            <a:r>
+              <a:t>Warum Salesteq</a:t>
+            </a:r>
+          </a:p>
+        </p:txBody>
+      </p:sp>
+      <p:sp>
+        <p:nvSpPr>
+          <p:cNvPr id="4" name="Rounded Rectangle 3"/>
+          <p:cNvSpPr/>
+          <p:nvPr/>
+        </p:nvSpPr>
+        <p:spPr>
+          <a:xfrm>
+            <a:off x="731520" y="1554480"/>
+            <a:ext cx="13167360" cy="1828800"/>
+          </a:xfrm>
+          <a:prstGeom prst="roundRect">
+            <a:avLst>
+              <a:gd name="adj" fmla="val 4000"/>
+            </a:avLst>
+          </a:prstGeom>
+          <a:solidFill>
+            <a:srgbClr val="F0EFE8"/>
+          </a:solidFill>
+          <a:ln>
+            <a:noFill/>
+          </a:ln>
+        </p:spPr>
+        <p:style>
+          <a:lnRef idx="1">
+            <a:schemeClr val="accent1"/>
+          </a:lnRef>
+          <a:fillRef idx="3">
+            <a:schemeClr val="accent1"/>
+          </a:fillRef>
+          <a:effectRef idx="2">
+            <a:schemeClr val="accent1"/>
+          </a:effectRef>
+          <a:fontRef idx="minor">
+            <a:schemeClr val="lt1"/>
+          </a:fontRef>
+        </p:style>
+        <p:txBody>
+          <a:bodyPr rtlCol="0" anchor="ctr"/>
+          <a:lstStyle/>
+          <a:p>
+            <a:pPr algn="ctr"/>
+          </a:p>
+        </p:txBody>
+      </p:sp>
+      <p:sp>
+        <p:nvSpPr>
+          <p:cNvPr id="5" name="TextBox 4"/>
+          <p:cNvSpPr txBox="1"/>
+          <p:nvPr/>
+        </p:nvSpPr>
+        <p:spPr>
+          <a:xfrm>
+            <a:off x="1005840" y="1691640"/>
+            <a:ext cx="3657600" cy="228600"/>
+          </a:xfrm>
+          <a:prstGeom prst="rect">
+            <a:avLst/>
+          </a:prstGeom>
+          <a:noFill/>
+        </p:spPr>
+        <p:txBody>
+          <a:bodyPr wrap="square" anchor="t">
+            <a:spAutoFit/>
+          </a:bodyPr>
+          <a:lstStyle/>
+          <a:p>
+            <a:pPr algn="l">
+              <a:spcAft>
+                <a:spcPts val="0"/>
+              </a:spcAft>
+              <a:defRPr sz="1100" b="1">
+                <a:solidFill>
+                  <a:srgbClr val="1A1A2E"/>
+                </a:solidFill>
+                <a:latin typeface="Inter"/>
+              </a:defRPr>
+            </a:pPr>
+            <a:r>
+              <a:t>Austausch vom März 2026</a:t>
+            </a:r>
+          </a:p>
+        </p:txBody>
+      </p:sp>
+      <p:sp>
+        <p:nvSpPr>
+          <p:cNvPr id="6" name="TextBox 5"/>
+          <p:cNvSpPr txBox="1"/>
+          <p:nvPr/>
+        </p:nvSpPr>
+        <p:spPr>
+          <a:xfrm>
+            <a:off x="1005840" y="2011680"/>
+            <a:ext cx="12618720" cy="731520"/>
+          </a:xfrm>
+          <a:prstGeom prst="rect">
+            <a:avLst/>
+          </a:prstGeom>
+          <a:noFill/>
+        </p:spPr>
+        <p:txBody>
+          <a:bodyPr wrap="square">
+            <a:spAutoFit/>
+          </a:bodyPr>
+          <a:lstStyle/>
+          <a:p>
+            <a:pPr algn="l">
+              <a:lnSpc>
+                <a:spcPts val="1380"/>
+              </a:lnSpc>
+              <a:spcAft>
+                <a:spcPts val="300"/>
+              </a:spcAft>
+              <a:defRPr sz="1200" b="0">
+                <a:solidFill>
+                  <a:srgbClr val="6B7280"/>
+                </a:solidFill>
+                <a:latin typeface="Inter"/>
+              </a:defRPr>
+            </a:pPr>
+            <a:r>
+              <a:t>Im Gespräch mit Ivo Schneider und Lukas Seger haben wir vereinbart, ein einfaches Szenario</a:t>
+            </a:r>
+          </a:p>
+          <a:p>
+            <a:pPr algn="l">
+              <a:lnSpc>
+                <a:spcPts val="1380"/>
+              </a:lnSpc>
+              <a:spcAft>
+                <a:spcPts val="300"/>
+              </a:spcAft>
+              <a:defRPr sz="1200" b="0">
+                <a:solidFill>
+                  <a:srgbClr val="6B7280"/>
+                </a:solidFill>
+                <a:latin typeface="Inter"/>
+              </a:defRPr>
+            </a:pPr>
+            <a:r>
+              <a:t>vorzubereiten — basierend auf unserem Ansatz bei Allianz Suisse.</a:t>
+            </a:r>
+          </a:p>
+        </p:txBody>
+      </p:sp>
+      <p:sp>
+        <p:nvSpPr>
+          <p:cNvPr id="7" name="TextBox 6"/>
+          <p:cNvSpPr txBox="1"/>
+          <p:nvPr/>
+        </p:nvSpPr>
+        <p:spPr>
+          <a:xfrm>
+            <a:off x="1005840" y="2606040"/>
+            <a:ext cx="12801600" cy="182880"/>
+          </a:xfrm>
+          <a:prstGeom prst="rect">
+            <a:avLst/>
+          </a:prstGeom>
+          <a:noFill/>
+        </p:spPr>
+        <p:txBody>
+          <a:bodyPr wrap="square" anchor="t">
+            <a:spAutoFit/>
+          </a:bodyPr>
+          <a:lstStyle/>
+          <a:p>
+            <a:pPr algn="l">
+              <a:spcAft>
+                <a:spcPts val="0"/>
+              </a:spcAft>
+              <a:defRPr sz="1100" b="1">
+                <a:solidFill>
+                  <a:srgbClr val="1A1A2E"/>
+                </a:solidFill>
+                <a:latin typeface="Inter"/>
+              </a:defRPr>
+            </a:pPr>
+            <a:r>
+              <a:t>Vorgehen in 3 Schritten: Salesteq macht einen Vorschlag</a:t>
+            </a:r>
+          </a:p>
+        </p:txBody>
+      </p:sp>
+      <p:sp>
+        <p:nvSpPr>
+          <p:cNvPr id="8" name="TextBox 7"/>
+          <p:cNvSpPr txBox="1"/>
+          <p:nvPr/>
+        </p:nvSpPr>
+        <p:spPr>
+          <a:xfrm>
+            <a:off x="1005840" y="2834640"/>
+            <a:ext cx="12618720" cy="548640"/>
+          </a:xfrm>
+          <a:prstGeom prst="rect">
+            <a:avLst/>
+          </a:prstGeom>
+          <a:noFill/>
+        </p:spPr>
+        <p:txBody>
+          <a:bodyPr wrap="square">
+            <a:spAutoFit/>
+          </a:bodyPr>
+          <a:lstStyle/>
+          <a:p>
+            <a:pPr algn="l">
+              <a:lnSpc>
+                <a:spcPts val="1264"/>
+              </a:lnSpc>
+              <a:spcAft>
+                <a:spcPts val="300"/>
+              </a:spcAft>
+              <a:defRPr sz="1100" b="0">
+                <a:solidFill>
+                  <a:srgbClr val="2D2D2D"/>
+                </a:solidFill>
+                <a:latin typeface="Inter"/>
+              </a:defRPr>
+            </a:pPr>
+            <a:r>
+              <a:t>Schritt 1: Big Picture aufzeigen — «Zukunft des Vertriebs mit AI bei Raiffeisen»</a:t>
+            </a:r>
+          </a:p>
+          <a:p>
+            <a:pPr algn="l">
+              <a:lnSpc>
+                <a:spcPts val="1264"/>
+              </a:lnSpc>
+              <a:spcAft>
+                <a:spcPts val="300"/>
+              </a:spcAft>
+              <a:defRPr sz="1100" b="0">
+                <a:solidFill>
+                  <a:srgbClr val="2D2D2D"/>
+                </a:solidFill>
+                <a:latin typeface="Inter"/>
+              </a:defRPr>
+            </a:pPr>
+            <a:r>
+              <a:t>Schritt 2: Ausarbeitung eines konkreten Use Case (z.B. RM-Training, proaktive Ansprache)</a:t>
+            </a:r>
+          </a:p>
+          <a:p>
+            <a:pPr algn="l">
+              <a:lnSpc>
+                <a:spcPts val="1264"/>
+              </a:lnSpc>
+              <a:spcAft>
+                <a:spcPts val="300"/>
+              </a:spcAft>
+              <a:defRPr sz="1100" b="0">
+                <a:solidFill>
+                  <a:srgbClr val="2D2D2D"/>
+                </a:solidFill>
+                <a:latin typeface="Inter"/>
+              </a:defRPr>
+            </a:pPr>
+            <a:r>
+              <a:t>Schritt 3: Optional — Proof-of-Concept mit einer Raiffeisenbank</a:t>
+            </a:r>
+          </a:p>
+        </p:txBody>
+      </p:sp>
+      <p:sp>
+        <p:nvSpPr>
+          <p:cNvPr id="9" name="Rounded Rectangle 8"/>
+          <p:cNvSpPr/>
+          <p:nvPr/>
+        </p:nvSpPr>
+        <p:spPr>
+          <a:xfrm>
+            <a:off x="731520" y="3657600"/>
+            <a:ext cx="6400800" cy="2926080"/>
+          </a:xfrm>
+          <a:prstGeom prst="roundRect">
+            <a:avLst>
+              <a:gd name="adj" fmla="val 4000"/>
+            </a:avLst>
+          </a:prstGeom>
+          <a:solidFill>
+            <a:srgbClr val="F0EFE8"/>
+          </a:solidFill>
+          <a:ln>
+            <a:noFill/>
+          </a:ln>
+        </p:spPr>
+        <p:style>
+          <a:lnRef idx="1">
+            <a:schemeClr val="accent1"/>
+          </a:lnRef>
+          <a:fillRef idx="3">
+            <a:schemeClr val="accent1"/>
+          </a:fillRef>
+          <a:effectRef idx="2">
+            <a:schemeClr val="accent1"/>
+          </a:effectRef>
+          <a:fontRef idx="minor">
+            <a:schemeClr val="lt1"/>
+          </a:fontRef>
+        </p:style>
+        <p:txBody>
+          <a:bodyPr rtlCol="0" anchor="ctr"/>
+          <a:lstStyle/>
+          <a:p>
+            <a:pPr algn="ctr"/>
+          </a:p>
+        </p:txBody>
+      </p:sp>
+      <p:sp>
+        <p:nvSpPr>
+          <p:cNvPr id="10" name="TextBox 9"/>
+          <p:cNvSpPr txBox="1"/>
+          <p:nvPr/>
+        </p:nvSpPr>
+        <p:spPr>
+          <a:xfrm>
+            <a:off x="1005840" y="3794760"/>
+            <a:ext cx="5486400" cy="228600"/>
+          </a:xfrm>
+          <a:prstGeom prst="rect">
+            <a:avLst/>
+          </a:prstGeom>
+          <a:noFill/>
+        </p:spPr>
+        <p:txBody>
+          <a:bodyPr wrap="square" anchor="t">
+            <a:spAutoFit/>
+          </a:bodyPr>
+          <a:lstStyle/>
+          <a:p>
+            <a:pPr algn="l">
+              <a:spcAft>
+                <a:spcPts val="0"/>
+              </a:spcAft>
+              <a:defRPr sz="1300" b="1">
+                <a:solidFill>
+                  <a:srgbClr val="1A1A2E"/>
+                </a:solidFill>
+                <a:latin typeface="Inter"/>
+              </a:defRPr>
+            </a:pPr>
+            <a:r>
+              <a:t>Was Salesteq mitbringt</a:t>
+            </a:r>
+          </a:p>
+        </p:txBody>
+      </p:sp>
+      <p:sp>
+        <p:nvSpPr>
+          <p:cNvPr id="11" name="TextBox 10"/>
+          <p:cNvSpPr txBox="1"/>
+          <p:nvPr/>
+        </p:nvSpPr>
+        <p:spPr>
+          <a:xfrm>
+            <a:off x="1188720" y="4160520"/>
+            <a:ext cx="5669280" cy="365760"/>
+          </a:xfrm>
+          <a:prstGeom prst="rect">
+            <a:avLst/>
+          </a:prstGeom>
+          <a:noFill/>
+        </p:spPr>
+        <p:txBody>
+          <a:bodyPr wrap="square" anchor="t">
+            <a:spAutoFit/>
+          </a:bodyPr>
+          <a:lstStyle/>
+          <a:p>
+            <a:pPr algn="l">
+              <a:spcAft>
+                <a:spcPts val="0"/>
+              </a:spcAft>
+              <a:defRPr sz="1100" b="0">
+                <a:solidFill>
+                  <a:srgbClr val="2D2D2D"/>
+                </a:solidFill>
+                <a:latin typeface="Inter"/>
+              </a:defRPr>
+            </a:pPr>
+            <a:r>
+              <a:t>✓  Produktionserfahrung: Naghi/BMW (15'000+ MA, Voice AI)</a:t>
+            </a:r>
+          </a:p>
+        </p:txBody>
+      </p:sp>
+      <p:sp>
+        <p:nvSpPr>
+          <p:cNvPr id="12" name="TextBox 11"/>
+          <p:cNvSpPr txBox="1"/>
+          <p:nvPr/>
+        </p:nvSpPr>
+        <p:spPr>
+          <a:xfrm>
+            <a:off x="1188720" y="4572000"/>
+            <a:ext cx="5669280" cy="365760"/>
+          </a:xfrm>
+          <a:prstGeom prst="rect">
+            <a:avLst/>
+          </a:prstGeom>
+          <a:noFill/>
+        </p:spPr>
+        <p:txBody>
+          <a:bodyPr wrap="square" anchor="t">
+            <a:spAutoFit/>
+          </a:bodyPr>
+          <a:lstStyle/>
+          <a:p>
+            <a:pPr algn="l">
+              <a:spcAft>
+                <a:spcPts val="0"/>
+              </a:spcAft>
+              <a:defRPr sz="1100" b="0">
+                <a:solidFill>
+                  <a:srgbClr val="2D2D2D"/>
+                </a:solidFill>
+                <a:latin typeface="Inter"/>
+              </a:defRPr>
+            </a:pPr>
+            <a:r>
+              <a:t>✓  Pilot mit Allianz Suisse (Analytics &amp; Kundenforschung)</a:t>
+            </a:r>
+          </a:p>
+        </p:txBody>
+      </p:sp>
+      <p:sp>
+        <p:nvSpPr>
+          <p:cNvPr id="13" name="TextBox 12"/>
+          <p:cNvSpPr txBox="1"/>
+          <p:nvPr/>
+        </p:nvSpPr>
+        <p:spPr>
+          <a:xfrm>
+            <a:off x="1188720" y="4983480"/>
+            <a:ext cx="5669280" cy="365760"/>
+          </a:xfrm>
+          <a:prstGeom prst="rect">
+            <a:avLst/>
+          </a:prstGeom>
+          <a:noFill/>
+        </p:spPr>
+        <p:txBody>
+          <a:bodyPr wrap="square" anchor="t">
+            <a:spAutoFit/>
+          </a:bodyPr>
+          <a:lstStyle/>
+          <a:p>
+            <a:pPr algn="l">
+              <a:spcAft>
+                <a:spcPts val="0"/>
+              </a:spcAft>
+              <a:defRPr sz="1100" b="0">
+                <a:solidFill>
+                  <a:srgbClr val="2D2D2D"/>
+                </a:solidFill>
+                <a:latin typeface="Inter"/>
+              </a:defRPr>
+            </a:pPr>
+            <a:r>
+              <a:t>✓  Eigene Sprach-Engine — kein API-Wrapper, eigene Modelle</a:t>
+            </a:r>
+          </a:p>
+        </p:txBody>
+      </p:sp>
+      <p:sp>
+        <p:nvSpPr>
+          <p:cNvPr id="14" name="TextBox 13"/>
+          <p:cNvSpPr txBox="1"/>
+          <p:nvPr/>
+        </p:nvSpPr>
+        <p:spPr>
+          <a:xfrm>
+            <a:off x="1188720" y="5394960"/>
+            <a:ext cx="5669280" cy="365760"/>
+          </a:xfrm>
+          <a:prstGeom prst="rect">
+            <a:avLst/>
+          </a:prstGeom>
+          <a:noFill/>
+        </p:spPr>
+        <p:txBody>
+          <a:bodyPr wrap="square" anchor="t">
+            <a:spAutoFit/>
+          </a:bodyPr>
+          <a:lstStyle/>
+          <a:p>
+            <a:pPr algn="l">
+              <a:spcAft>
+                <a:spcPts val="0"/>
+              </a:spcAft>
+              <a:defRPr sz="1100" b="0">
+                <a:solidFill>
+                  <a:srgbClr val="2D2D2D"/>
+                </a:solidFill>
+                <a:latin typeface="Inter"/>
+              </a:defRPr>
+            </a:pPr>
+            <a:r>
+              <a:t>✓  Mandantenfähig: 212 Banken = 212 isolierte Mandanten</a:t>
+            </a:r>
+          </a:p>
+        </p:txBody>
+      </p:sp>
+      <p:sp>
+        <p:nvSpPr>
+          <p:cNvPr id="15" name="TextBox 14"/>
+          <p:cNvSpPr txBox="1"/>
+          <p:nvPr/>
+        </p:nvSpPr>
+        <p:spPr>
+          <a:xfrm>
+            <a:off x="1188720" y="5806440"/>
+            <a:ext cx="5669280" cy="365760"/>
+          </a:xfrm>
+          <a:prstGeom prst="rect">
+            <a:avLst/>
+          </a:prstGeom>
+          <a:noFill/>
+        </p:spPr>
+        <p:txBody>
+          <a:bodyPr wrap="square" anchor="t">
+            <a:spAutoFit/>
+          </a:bodyPr>
+          <a:lstStyle/>
+          <a:p>
+            <a:pPr algn="l">
+              <a:spcAft>
+                <a:spcPts val="0"/>
+              </a:spcAft>
+              <a:defRPr sz="1100" b="0">
+                <a:solidFill>
+                  <a:srgbClr val="2D2D2D"/>
+                </a:solidFill>
+                <a:latin typeface="Inter"/>
+              </a:defRPr>
+            </a:pPr>
+            <a:r>
+              <a:t>✓  Schweizer Unternehmen (Zug), direkter Zugang zu Gründern</a:t>
+            </a:r>
+          </a:p>
+        </p:txBody>
+      </p:sp>
+      <p:sp>
+        <p:nvSpPr>
+          <p:cNvPr id="16" name="Rounded Rectangle 15"/>
+          <p:cNvSpPr/>
+          <p:nvPr/>
+        </p:nvSpPr>
+        <p:spPr>
+          <a:xfrm>
+            <a:off x="7589520" y="3657600"/>
+            <a:ext cx="6400800" cy="2926080"/>
+          </a:xfrm>
+          <a:prstGeom prst="roundRect">
+            <a:avLst>
+              <a:gd name="adj" fmla="val 4000"/>
+            </a:avLst>
+          </a:prstGeom>
+          <a:solidFill>
+            <a:srgbClr val="F0EFE8"/>
+          </a:solidFill>
+          <a:ln>
+            <a:noFill/>
+          </a:ln>
+        </p:spPr>
+        <p:style>
+          <a:lnRef idx="1">
+            <a:schemeClr val="accent1"/>
+          </a:lnRef>
+          <a:fillRef idx="3">
+            <a:schemeClr val="accent1"/>
+          </a:fillRef>
+          <a:effectRef idx="2">
+            <a:schemeClr val="accent1"/>
+          </a:effectRef>
+          <a:fontRef idx="minor">
+            <a:schemeClr val="lt1"/>
+          </a:fontRef>
+        </p:style>
+        <p:txBody>
+          <a:bodyPr rtlCol="0" anchor="ctr"/>
+          <a:lstStyle/>
+          <a:p>
+            <a:pPr algn="ctr"/>
+          </a:p>
+        </p:txBody>
+      </p:sp>
+      <p:sp>
+        <p:nvSpPr>
+          <p:cNvPr id="17" name="TextBox 16"/>
+          <p:cNvSpPr txBox="1"/>
+          <p:nvPr/>
+        </p:nvSpPr>
+        <p:spPr>
+          <a:xfrm>
+            <a:off x="7863840" y="3794760"/>
+            <a:ext cx="5486400" cy="228600"/>
+          </a:xfrm>
+          <a:prstGeom prst="rect">
+            <a:avLst/>
+          </a:prstGeom>
+          <a:noFill/>
+        </p:spPr>
+        <p:txBody>
+          <a:bodyPr wrap="square" anchor="t">
+            <a:spAutoFit/>
+          </a:bodyPr>
+          <a:lstStyle/>
+          <a:p>
+            <a:pPr algn="l">
+              <a:spcAft>
+                <a:spcPts val="0"/>
+              </a:spcAft>
+              <a:defRPr sz="1300" b="1">
+                <a:solidFill>
+                  <a:srgbClr val="1A1A2E"/>
+                </a:solidFill>
+                <a:latin typeface="Inter"/>
+              </a:defRPr>
+            </a:pPr>
+            <a:r>
+              <a:t>Was Salesteq nicht ist</a:t>
+            </a:r>
+          </a:p>
+        </p:txBody>
+      </p:sp>
+      <p:sp>
+        <p:nvSpPr>
+          <p:cNvPr id="18" name="TextBox 17"/>
+          <p:cNvSpPr txBox="1"/>
+          <p:nvPr/>
+        </p:nvSpPr>
+        <p:spPr>
+          <a:xfrm>
+            <a:off x="8046720" y="4160520"/>
+            <a:ext cx="5669280" cy="365760"/>
+          </a:xfrm>
+          <a:prstGeom prst="rect">
+            <a:avLst/>
+          </a:prstGeom>
+          <a:noFill/>
+        </p:spPr>
+        <p:txBody>
+          <a:bodyPr wrap="square" anchor="t">
+            <a:spAutoFit/>
+          </a:bodyPr>
+          <a:lstStyle/>
+          <a:p>
+            <a:pPr algn="l">
+              <a:spcAft>
+                <a:spcPts val="0"/>
+              </a:spcAft>
+              <a:defRPr sz="1100" b="0">
+                <a:solidFill>
+                  <a:srgbClr val="2D2D2D"/>
+                </a:solidFill>
+                <a:latin typeface="Inter"/>
+              </a:defRPr>
+            </a:pPr>
+            <a:r>
+              <a:t>✗  Kein CRM-Ersatz (BSI, Salesforce bleiben bestehen)</a:t>
+            </a:r>
+          </a:p>
+        </p:txBody>
+      </p:sp>
+      <p:sp>
+        <p:nvSpPr>
+          <p:cNvPr id="19" name="TextBox 18"/>
+          <p:cNvSpPr txBox="1"/>
+          <p:nvPr/>
+        </p:nvSpPr>
+        <p:spPr>
+          <a:xfrm>
+            <a:off x="8046720" y="4572000"/>
+            <a:ext cx="5669280" cy="365760"/>
+          </a:xfrm>
+          <a:prstGeom prst="rect">
+            <a:avLst/>
+          </a:prstGeom>
+          <a:noFill/>
+        </p:spPr>
+        <p:txBody>
+          <a:bodyPr wrap="square" anchor="t">
+            <a:spAutoFit/>
+          </a:bodyPr>
+          <a:lstStyle/>
+          <a:p>
+            <a:pPr algn="l">
+              <a:spcAft>
+                <a:spcPts val="0"/>
+              </a:spcAft>
+              <a:defRPr sz="1100" b="0">
+                <a:solidFill>
+                  <a:srgbClr val="2D2D2D"/>
+                </a:solidFill>
+                <a:latin typeface="Inter"/>
+              </a:defRPr>
+            </a:pPr>
+            <a:r>
+              <a:t>✗  Kein Copilot-Konkurrent (ergänzt, ersetzt nicht)</a:t>
+            </a:r>
+          </a:p>
+        </p:txBody>
+      </p:sp>
+      <p:sp>
+        <p:nvSpPr>
+          <p:cNvPr id="20" name="TextBox 19"/>
+          <p:cNvSpPr txBox="1"/>
+          <p:nvPr/>
+        </p:nvSpPr>
+        <p:spPr>
+          <a:xfrm>
+            <a:off x="8046720" y="4983480"/>
+            <a:ext cx="5669280" cy="365760"/>
+          </a:xfrm>
+          <a:prstGeom prst="rect">
+            <a:avLst/>
+          </a:prstGeom>
+          <a:noFill/>
+        </p:spPr>
+        <p:txBody>
+          <a:bodyPr wrap="square" anchor="t">
+            <a:spAutoFit/>
+          </a:bodyPr>
+          <a:lstStyle/>
+          <a:p>
+            <a:pPr algn="l">
+              <a:spcAft>
+                <a:spcPts val="0"/>
+              </a:spcAft>
+              <a:defRPr sz="1100" b="0">
+                <a:solidFill>
+                  <a:srgbClr val="2D2D2D"/>
+                </a:solidFill>
+                <a:latin typeface="Inter"/>
+              </a:defRPr>
+            </a:pPr>
+            <a:r>
+              <a:t>✗  Kein fertiges Bankenprodukt (wir bauen gemeinsam)</a:t>
+            </a:r>
+          </a:p>
+        </p:txBody>
+      </p:sp>
+      <p:sp>
+        <p:nvSpPr>
+          <p:cNvPr id="21" name="TextBox 20"/>
+          <p:cNvSpPr txBox="1"/>
+          <p:nvPr/>
+        </p:nvSpPr>
+        <p:spPr>
+          <a:xfrm>
+            <a:off x="8046720" y="5394960"/>
+            <a:ext cx="5669280" cy="365760"/>
+          </a:xfrm>
+          <a:prstGeom prst="rect">
+            <a:avLst/>
+          </a:prstGeom>
+          <a:noFill/>
+        </p:spPr>
+        <p:txBody>
+          <a:bodyPr wrap="square" anchor="t">
+            <a:spAutoFit/>
+          </a:bodyPr>
+          <a:lstStyle/>
+          <a:p>
+            <a:pPr algn="l">
+              <a:spcAft>
+                <a:spcPts val="0"/>
+              </a:spcAft>
+              <a:defRPr sz="1100" b="0">
+                <a:solidFill>
+                  <a:srgbClr val="2D2D2D"/>
+                </a:solidFill>
+                <a:latin typeface="Inter"/>
+              </a:defRPr>
+            </a:pPr>
+            <a:r>
+              <a:t>✗  Keine Blackbox — volle Nachvollziehbarkeit aller AI-Aktionen</a:t>
+            </a:r>
+          </a:p>
+        </p:txBody>
+      </p:sp>
+      <p:sp>
+        <p:nvSpPr>
+          <p:cNvPr id="22" name="Rounded Rectangle 21"/>
+          <p:cNvSpPr/>
+          <p:nvPr/>
+        </p:nvSpPr>
+        <p:spPr>
+          <a:xfrm>
+            <a:off x="731520" y="6858000"/>
+            <a:ext cx="13167360" cy="914400"/>
+          </a:xfrm>
+          <a:prstGeom prst="roundRect">
+            <a:avLst>
+              <a:gd name="adj" fmla="val 4000"/>
+            </a:avLst>
+          </a:prstGeom>
+          <a:solidFill>
+            <a:srgbClr val="1A1A2E"/>
+          </a:solidFill>
+          <a:ln>
+            <a:noFill/>
+          </a:ln>
+        </p:spPr>
+        <p:style>
+          <a:lnRef idx="1">
+            <a:schemeClr val="accent1"/>
+          </a:lnRef>
+          <a:fillRef idx="3">
+            <a:schemeClr val="accent1"/>
+          </a:fillRef>
+          <a:effectRef idx="2">
+            <a:schemeClr val="accent1"/>
+          </a:effectRef>
+          <a:fontRef idx="minor">
+            <a:schemeClr val="lt1"/>
+          </a:fontRef>
+        </p:style>
+        <p:txBody>
+          <a:bodyPr rtlCol="0" anchor="ctr"/>
+          <a:lstStyle/>
+          <a:p>
+            <a:pPr algn="ctr"/>
+          </a:p>
+        </p:txBody>
+      </p:sp>
+      <p:sp>
+        <p:nvSpPr>
           <p:cNvPr id="23" name="TextBox 22"/>
           <p:cNvSpPr txBox="1"/>
           <p:nvPr/>
@@ -7903,7 +11011,7 @@
               </a:defRPr>
             </a:pPr>
             <a:r>
-              <a:t>4 / 4</a:t>
+              <a:t>6 / 6</a:t>
             </a:r>
           </a:p>
         </p:txBody>

--- a/Salesteq-Raiffeisen-Scenario.pptx
+++ b/Salesteq-Raiffeisen-Scenario.pptx
@@ -11,6 +11,10 @@
     <p:sldId id="259" r:id="rId10"/>
     <p:sldId id="260" r:id="rId11"/>
     <p:sldId id="261" r:id="rId12"/>
+    <p:sldId id="262" r:id="rId13"/>
+    <p:sldId id="263" r:id="rId14"/>
+    <p:sldId id="264" r:id="rId15"/>
+    <p:sldId id="265" r:id="rId16"/>
   </p:sldIdLst>
   <p:sldSz cx="14630400" cy="8229600" type="screen4x3"/>
   <p:notesSz cx="6858000" cy="9144000"/>
@@ -4122,7 +4126,1142 @@
               </a:defRPr>
             </a:pPr>
             <a:r>
-              <a:t>1 / 6</a:t>
+              <a:t>1 / 10</a:t>
+            </a:r>
+          </a:p>
+        </p:txBody>
+      </p:sp>
+    </p:spTree>
+  </p:cSld>
+  <p:clrMapOvr>
+    <a:masterClrMapping/>
+  </p:clrMapOvr>
+</p:sld>
+</file>
+
+<file path=ppt/slides/slide10.xml><?xml version="1.0" encoding="utf-8"?>
+<p:sld xmlns:a="http://schemas.openxmlformats.org/drawingml/2006/main" xmlns:p="http://schemas.openxmlformats.org/presentationml/2006/main" xmlns:r="http://schemas.openxmlformats.org/officeDocument/2006/relationships">
+  <p:cSld>
+    <p:bg>
+      <p:bgPr>
+        <a:solidFill>
+          <a:srgbClr val="FFFFFF"/>
+        </a:solidFill>
+        <a:effectLst/>
+      </p:bgPr>
+    </p:bg>
+    <p:spTree>
+      <p:nvGrpSpPr>
+        <p:cNvPr id="1" name=""/>
+        <p:cNvGrpSpPr/>
+        <p:nvPr/>
+      </p:nvGrpSpPr>
+      <p:grpSpPr/>
+      <p:sp>
+        <p:nvSpPr>
+          <p:cNvPr id="2" name="TextBox 1"/>
+          <p:cNvSpPr txBox="1"/>
+          <p:nvPr/>
+        </p:nvSpPr>
+        <p:spPr>
+          <a:xfrm>
+            <a:off x="731520" y="457200"/>
+            <a:ext cx="5486400" cy="274320"/>
+          </a:xfrm>
+          <a:prstGeom prst="rect">
+            <a:avLst/>
+          </a:prstGeom>
+          <a:noFill/>
+        </p:spPr>
+        <p:txBody>
+          <a:bodyPr wrap="square" anchor="t">
+            <a:spAutoFit/>
+          </a:bodyPr>
+          <a:lstStyle/>
+          <a:p>
+            <a:pPr algn="l">
+              <a:spcAft>
+                <a:spcPts val="0"/>
+              </a:spcAft>
+              <a:defRPr sz="1000" b="1">
+                <a:solidFill>
+                  <a:srgbClr val="E8A838"/>
+                </a:solidFill>
+                <a:latin typeface="JetBrains Mono"/>
+              </a:defRPr>
+            </a:pPr>
+            <a:r>
+              <a:t>ZUSAMMENARBEIT</a:t>
+            </a:r>
+          </a:p>
+        </p:txBody>
+      </p:sp>
+      <p:sp>
+        <p:nvSpPr>
+          <p:cNvPr id="3" name="TextBox 2"/>
+          <p:cNvSpPr txBox="1"/>
+          <p:nvPr/>
+        </p:nvSpPr>
+        <p:spPr>
+          <a:xfrm>
+            <a:off x="731520" y="822960"/>
+            <a:ext cx="12801600" cy="548640"/>
+          </a:xfrm>
+          <a:prstGeom prst="rect">
+            <a:avLst/>
+          </a:prstGeom>
+          <a:noFill/>
+        </p:spPr>
+        <p:txBody>
+          <a:bodyPr wrap="square" anchor="t">
+            <a:spAutoFit/>
+          </a:bodyPr>
+          <a:lstStyle/>
+          <a:p>
+            <a:pPr algn="l">
+              <a:spcAft>
+                <a:spcPts val="0"/>
+              </a:spcAft>
+              <a:defRPr sz="3400" b="0">
+                <a:solidFill>
+                  <a:srgbClr val="1A1A2E"/>
+                </a:solidFill>
+                <a:latin typeface="Inter"/>
+              </a:defRPr>
+            </a:pPr>
+            <a:r>
+              <a:t>Warum Salesteq</a:t>
+            </a:r>
+          </a:p>
+        </p:txBody>
+      </p:sp>
+      <p:sp>
+        <p:nvSpPr>
+          <p:cNvPr id="4" name="Rounded Rectangle 3"/>
+          <p:cNvSpPr/>
+          <p:nvPr/>
+        </p:nvSpPr>
+        <p:spPr>
+          <a:xfrm>
+            <a:off x="731520" y="1554480"/>
+            <a:ext cx="13167360" cy="1828800"/>
+          </a:xfrm>
+          <a:prstGeom prst="roundRect">
+            <a:avLst>
+              <a:gd name="adj" fmla="val 4000"/>
+            </a:avLst>
+          </a:prstGeom>
+          <a:solidFill>
+            <a:srgbClr val="F0EFE8"/>
+          </a:solidFill>
+          <a:ln>
+            <a:noFill/>
+          </a:ln>
+        </p:spPr>
+        <p:style>
+          <a:lnRef idx="1">
+            <a:schemeClr val="accent1"/>
+          </a:lnRef>
+          <a:fillRef idx="3">
+            <a:schemeClr val="accent1"/>
+          </a:fillRef>
+          <a:effectRef idx="2">
+            <a:schemeClr val="accent1"/>
+          </a:effectRef>
+          <a:fontRef idx="minor">
+            <a:schemeClr val="lt1"/>
+          </a:fontRef>
+        </p:style>
+        <p:txBody>
+          <a:bodyPr rtlCol="0" anchor="ctr"/>
+          <a:lstStyle/>
+          <a:p>
+            <a:pPr algn="ctr"/>
+          </a:p>
+        </p:txBody>
+      </p:sp>
+      <p:sp>
+        <p:nvSpPr>
+          <p:cNvPr id="5" name="TextBox 4"/>
+          <p:cNvSpPr txBox="1"/>
+          <p:nvPr/>
+        </p:nvSpPr>
+        <p:spPr>
+          <a:xfrm>
+            <a:off x="1005840" y="1691640"/>
+            <a:ext cx="3657600" cy="228600"/>
+          </a:xfrm>
+          <a:prstGeom prst="rect">
+            <a:avLst/>
+          </a:prstGeom>
+          <a:noFill/>
+        </p:spPr>
+        <p:txBody>
+          <a:bodyPr wrap="square" anchor="t">
+            <a:spAutoFit/>
+          </a:bodyPr>
+          <a:lstStyle/>
+          <a:p>
+            <a:pPr algn="l">
+              <a:spcAft>
+                <a:spcPts val="0"/>
+              </a:spcAft>
+              <a:defRPr sz="1100" b="1">
+                <a:solidFill>
+                  <a:srgbClr val="1A1A2E"/>
+                </a:solidFill>
+                <a:latin typeface="Inter"/>
+              </a:defRPr>
+            </a:pPr>
+            <a:r>
+              <a:t>Austausch vom März 2026</a:t>
+            </a:r>
+          </a:p>
+        </p:txBody>
+      </p:sp>
+      <p:sp>
+        <p:nvSpPr>
+          <p:cNvPr id="6" name="TextBox 5"/>
+          <p:cNvSpPr txBox="1"/>
+          <p:nvPr/>
+        </p:nvSpPr>
+        <p:spPr>
+          <a:xfrm>
+            <a:off x="1005840" y="2011680"/>
+            <a:ext cx="12618720" cy="731520"/>
+          </a:xfrm>
+          <a:prstGeom prst="rect">
+            <a:avLst/>
+          </a:prstGeom>
+          <a:noFill/>
+        </p:spPr>
+        <p:txBody>
+          <a:bodyPr wrap="square">
+            <a:spAutoFit/>
+          </a:bodyPr>
+          <a:lstStyle/>
+          <a:p>
+            <a:pPr algn="l">
+              <a:lnSpc>
+                <a:spcPts val="1380"/>
+              </a:lnSpc>
+              <a:spcAft>
+                <a:spcPts val="300"/>
+              </a:spcAft>
+              <a:defRPr sz="1200" b="0">
+                <a:solidFill>
+                  <a:srgbClr val="6B7280"/>
+                </a:solidFill>
+                <a:latin typeface="Inter"/>
+              </a:defRPr>
+            </a:pPr>
+            <a:r>
+              <a:t>Im Gespräch mit Ivo Schneider und Lukas Seger haben wir vereinbart, ein einfaches Szenario</a:t>
+            </a:r>
+          </a:p>
+          <a:p>
+            <a:pPr algn="l">
+              <a:lnSpc>
+                <a:spcPts val="1380"/>
+              </a:lnSpc>
+              <a:spcAft>
+                <a:spcPts val="300"/>
+              </a:spcAft>
+              <a:defRPr sz="1200" b="0">
+                <a:solidFill>
+                  <a:srgbClr val="6B7280"/>
+                </a:solidFill>
+                <a:latin typeface="Inter"/>
+              </a:defRPr>
+            </a:pPr>
+            <a:r>
+              <a:t>vorzubereiten — basierend auf unserem Ansatz bei Allianz Suisse.</a:t>
+            </a:r>
+          </a:p>
+        </p:txBody>
+      </p:sp>
+      <p:sp>
+        <p:nvSpPr>
+          <p:cNvPr id="7" name="TextBox 6"/>
+          <p:cNvSpPr txBox="1"/>
+          <p:nvPr/>
+        </p:nvSpPr>
+        <p:spPr>
+          <a:xfrm>
+            <a:off x="1005840" y="2606040"/>
+            <a:ext cx="12801600" cy="182880"/>
+          </a:xfrm>
+          <a:prstGeom prst="rect">
+            <a:avLst/>
+          </a:prstGeom>
+          <a:noFill/>
+        </p:spPr>
+        <p:txBody>
+          <a:bodyPr wrap="square" anchor="t">
+            <a:spAutoFit/>
+          </a:bodyPr>
+          <a:lstStyle/>
+          <a:p>
+            <a:pPr algn="l">
+              <a:spcAft>
+                <a:spcPts val="0"/>
+              </a:spcAft>
+              <a:defRPr sz="1100" b="1">
+                <a:solidFill>
+                  <a:srgbClr val="1A1A2E"/>
+                </a:solidFill>
+                <a:latin typeface="Inter"/>
+              </a:defRPr>
+            </a:pPr>
+            <a:r>
+              <a:t>Vorgehen in 3 Schritten: Salesteq macht einen Vorschlag</a:t>
+            </a:r>
+          </a:p>
+        </p:txBody>
+      </p:sp>
+      <p:sp>
+        <p:nvSpPr>
+          <p:cNvPr id="8" name="TextBox 7"/>
+          <p:cNvSpPr txBox="1"/>
+          <p:nvPr/>
+        </p:nvSpPr>
+        <p:spPr>
+          <a:xfrm>
+            <a:off x="1005840" y="2834640"/>
+            <a:ext cx="12618720" cy="548640"/>
+          </a:xfrm>
+          <a:prstGeom prst="rect">
+            <a:avLst/>
+          </a:prstGeom>
+          <a:noFill/>
+        </p:spPr>
+        <p:txBody>
+          <a:bodyPr wrap="square">
+            <a:spAutoFit/>
+          </a:bodyPr>
+          <a:lstStyle/>
+          <a:p>
+            <a:pPr algn="l">
+              <a:lnSpc>
+                <a:spcPts val="1264"/>
+              </a:lnSpc>
+              <a:spcAft>
+                <a:spcPts val="300"/>
+              </a:spcAft>
+              <a:defRPr sz="1100" b="0">
+                <a:solidFill>
+                  <a:srgbClr val="2D2D2D"/>
+                </a:solidFill>
+                <a:latin typeface="Inter"/>
+              </a:defRPr>
+            </a:pPr>
+            <a:r>
+              <a:t>Schritt 1: Big Picture aufzeigen — «Zukunft des Vertriebs mit AI bei Raiffeisen»</a:t>
+            </a:r>
+          </a:p>
+          <a:p>
+            <a:pPr algn="l">
+              <a:lnSpc>
+                <a:spcPts val="1264"/>
+              </a:lnSpc>
+              <a:spcAft>
+                <a:spcPts val="300"/>
+              </a:spcAft>
+              <a:defRPr sz="1100" b="0">
+                <a:solidFill>
+                  <a:srgbClr val="2D2D2D"/>
+                </a:solidFill>
+                <a:latin typeface="Inter"/>
+              </a:defRPr>
+            </a:pPr>
+            <a:r>
+              <a:t>Schritt 2: Ausarbeitung eines konkreten Use Case (z.B. RM-Training, proaktive Ansprache)</a:t>
+            </a:r>
+          </a:p>
+          <a:p>
+            <a:pPr algn="l">
+              <a:lnSpc>
+                <a:spcPts val="1264"/>
+              </a:lnSpc>
+              <a:spcAft>
+                <a:spcPts val="300"/>
+              </a:spcAft>
+              <a:defRPr sz="1100" b="0">
+                <a:solidFill>
+                  <a:srgbClr val="2D2D2D"/>
+                </a:solidFill>
+                <a:latin typeface="Inter"/>
+              </a:defRPr>
+            </a:pPr>
+            <a:r>
+              <a:t>Schritt 3: Optional — Proof-of-Concept mit einer Raiffeisenbank</a:t>
+            </a:r>
+          </a:p>
+        </p:txBody>
+      </p:sp>
+      <p:sp>
+        <p:nvSpPr>
+          <p:cNvPr id="9" name="Rounded Rectangle 8"/>
+          <p:cNvSpPr/>
+          <p:nvPr/>
+        </p:nvSpPr>
+        <p:spPr>
+          <a:xfrm>
+            <a:off x="731520" y="3657600"/>
+            <a:ext cx="6400800" cy="2926080"/>
+          </a:xfrm>
+          <a:prstGeom prst="roundRect">
+            <a:avLst>
+              <a:gd name="adj" fmla="val 4000"/>
+            </a:avLst>
+          </a:prstGeom>
+          <a:solidFill>
+            <a:srgbClr val="F0EFE8"/>
+          </a:solidFill>
+          <a:ln>
+            <a:noFill/>
+          </a:ln>
+        </p:spPr>
+        <p:style>
+          <a:lnRef idx="1">
+            <a:schemeClr val="accent1"/>
+          </a:lnRef>
+          <a:fillRef idx="3">
+            <a:schemeClr val="accent1"/>
+          </a:fillRef>
+          <a:effectRef idx="2">
+            <a:schemeClr val="accent1"/>
+          </a:effectRef>
+          <a:fontRef idx="minor">
+            <a:schemeClr val="lt1"/>
+          </a:fontRef>
+        </p:style>
+        <p:txBody>
+          <a:bodyPr rtlCol="0" anchor="ctr"/>
+          <a:lstStyle/>
+          <a:p>
+            <a:pPr algn="ctr"/>
+          </a:p>
+        </p:txBody>
+      </p:sp>
+      <p:sp>
+        <p:nvSpPr>
+          <p:cNvPr id="10" name="TextBox 9"/>
+          <p:cNvSpPr txBox="1"/>
+          <p:nvPr/>
+        </p:nvSpPr>
+        <p:spPr>
+          <a:xfrm>
+            <a:off x="1005840" y="3794760"/>
+            <a:ext cx="5486400" cy="228600"/>
+          </a:xfrm>
+          <a:prstGeom prst="rect">
+            <a:avLst/>
+          </a:prstGeom>
+          <a:noFill/>
+        </p:spPr>
+        <p:txBody>
+          <a:bodyPr wrap="square" anchor="t">
+            <a:spAutoFit/>
+          </a:bodyPr>
+          <a:lstStyle/>
+          <a:p>
+            <a:pPr algn="l">
+              <a:spcAft>
+                <a:spcPts val="0"/>
+              </a:spcAft>
+              <a:defRPr sz="1300" b="1">
+                <a:solidFill>
+                  <a:srgbClr val="1A1A2E"/>
+                </a:solidFill>
+                <a:latin typeface="Inter"/>
+              </a:defRPr>
+            </a:pPr>
+            <a:r>
+              <a:t>Was Salesteq mitbringt</a:t>
+            </a:r>
+          </a:p>
+        </p:txBody>
+      </p:sp>
+      <p:sp>
+        <p:nvSpPr>
+          <p:cNvPr id="11" name="TextBox 10"/>
+          <p:cNvSpPr txBox="1"/>
+          <p:nvPr/>
+        </p:nvSpPr>
+        <p:spPr>
+          <a:xfrm>
+            <a:off x="1188720" y="4160520"/>
+            <a:ext cx="5669280" cy="365760"/>
+          </a:xfrm>
+          <a:prstGeom prst="rect">
+            <a:avLst/>
+          </a:prstGeom>
+          <a:noFill/>
+        </p:spPr>
+        <p:txBody>
+          <a:bodyPr wrap="square" anchor="t">
+            <a:spAutoFit/>
+          </a:bodyPr>
+          <a:lstStyle/>
+          <a:p>
+            <a:pPr algn="l">
+              <a:spcAft>
+                <a:spcPts val="0"/>
+              </a:spcAft>
+              <a:defRPr sz="1100" b="0">
+                <a:solidFill>
+                  <a:srgbClr val="2D2D2D"/>
+                </a:solidFill>
+                <a:latin typeface="Inter"/>
+              </a:defRPr>
+            </a:pPr>
+            <a:r>
+              <a:t>✓  Produktionserfahrung: Naghi/BMW (15'000+ MA, Voice AI)</a:t>
+            </a:r>
+          </a:p>
+        </p:txBody>
+      </p:sp>
+      <p:sp>
+        <p:nvSpPr>
+          <p:cNvPr id="12" name="TextBox 11"/>
+          <p:cNvSpPr txBox="1"/>
+          <p:nvPr/>
+        </p:nvSpPr>
+        <p:spPr>
+          <a:xfrm>
+            <a:off x="1188720" y="4572000"/>
+            <a:ext cx="5669280" cy="365760"/>
+          </a:xfrm>
+          <a:prstGeom prst="rect">
+            <a:avLst/>
+          </a:prstGeom>
+          <a:noFill/>
+        </p:spPr>
+        <p:txBody>
+          <a:bodyPr wrap="square" anchor="t">
+            <a:spAutoFit/>
+          </a:bodyPr>
+          <a:lstStyle/>
+          <a:p>
+            <a:pPr algn="l">
+              <a:spcAft>
+                <a:spcPts val="0"/>
+              </a:spcAft>
+              <a:defRPr sz="1100" b="0">
+                <a:solidFill>
+                  <a:srgbClr val="2D2D2D"/>
+                </a:solidFill>
+                <a:latin typeface="Inter"/>
+              </a:defRPr>
+            </a:pPr>
+            <a:r>
+              <a:t>✓  Pilot mit Allianz Suisse (Analytics &amp; Kundenforschung)</a:t>
+            </a:r>
+          </a:p>
+        </p:txBody>
+      </p:sp>
+      <p:sp>
+        <p:nvSpPr>
+          <p:cNvPr id="13" name="TextBox 12"/>
+          <p:cNvSpPr txBox="1"/>
+          <p:nvPr/>
+        </p:nvSpPr>
+        <p:spPr>
+          <a:xfrm>
+            <a:off x="1188720" y="4983480"/>
+            <a:ext cx="5669280" cy="365760"/>
+          </a:xfrm>
+          <a:prstGeom prst="rect">
+            <a:avLst/>
+          </a:prstGeom>
+          <a:noFill/>
+        </p:spPr>
+        <p:txBody>
+          <a:bodyPr wrap="square" anchor="t">
+            <a:spAutoFit/>
+          </a:bodyPr>
+          <a:lstStyle/>
+          <a:p>
+            <a:pPr algn="l">
+              <a:spcAft>
+                <a:spcPts val="0"/>
+              </a:spcAft>
+              <a:defRPr sz="1100" b="0">
+                <a:solidFill>
+                  <a:srgbClr val="2D2D2D"/>
+                </a:solidFill>
+                <a:latin typeface="Inter"/>
+              </a:defRPr>
+            </a:pPr>
+            <a:r>
+              <a:t>✓  Eigene Sprach-Engine — kein API-Wrapper, eigene Modelle</a:t>
+            </a:r>
+          </a:p>
+        </p:txBody>
+      </p:sp>
+      <p:sp>
+        <p:nvSpPr>
+          <p:cNvPr id="14" name="TextBox 13"/>
+          <p:cNvSpPr txBox="1"/>
+          <p:nvPr/>
+        </p:nvSpPr>
+        <p:spPr>
+          <a:xfrm>
+            <a:off x="1188720" y="5394960"/>
+            <a:ext cx="5669280" cy="365760"/>
+          </a:xfrm>
+          <a:prstGeom prst="rect">
+            <a:avLst/>
+          </a:prstGeom>
+          <a:noFill/>
+        </p:spPr>
+        <p:txBody>
+          <a:bodyPr wrap="square" anchor="t">
+            <a:spAutoFit/>
+          </a:bodyPr>
+          <a:lstStyle/>
+          <a:p>
+            <a:pPr algn="l">
+              <a:spcAft>
+                <a:spcPts val="0"/>
+              </a:spcAft>
+              <a:defRPr sz="1100" b="0">
+                <a:solidFill>
+                  <a:srgbClr val="2D2D2D"/>
+                </a:solidFill>
+                <a:latin typeface="Inter"/>
+              </a:defRPr>
+            </a:pPr>
+            <a:r>
+              <a:t>✓  Mandantenfähig: 212 Banken = 212 isolierte Mandanten</a:t>
+            </a:r>
+          </a:p>
+        </p:txBody>
+      </p:sp>
+      <p:sp>
+        <p:nvSpPr>
+          <p:cNvPr id="15" name="TextBox 14"/>
+          <p:cNvSpPr txBox="1"/>
+          <p:nvPr/>
+        </p:nvSpPr>
+        <p:spPr>
+          <a:xfrm>
+            <a:off x="1188720" y="5806440"/>
+            <a:ext cx="5669280" cy="365760"/>
+          </a:xfrm>
+          <a:prstGeom prst="rect">
+            <a:avLst/>
+          </a:prstGeom>
+          <a:noFill/>
+        </p:spPr>
+        <p:txBody>
+          <a:bodyPr wrap="square" anchor="t">
+            <a:spAutoFit/>
+          </a:bodyPr>
+          <a:lstStyle/>
+          <a:p>
+            <a:pPr algn="l">
+              <a:spcAft>
+                <a:spcPts val="0"/>
+              </a:spcAft>
+              <a:defRPr sz="1100" b="0">
+                <a:solidFill>
+                  <a:srgbClr val="2D2D2D"/>
+                </a:solidFill>
+                <a:latin typeface="Inter"/>
+              </a:defRPr>
+            </a:pPr>
+            <a:r>
+              <a:t>✓  Schweizer Unternehmen (Zug), direkter Zugang zu Gründern</a:t>
+            </a:r>
+          </a:p>
+        </p:txBody>
+      </p:sp>
+      <p:sp>
+        <p:nvSpPr>
+          <p:cNvPr id="16" name="Rounded Rectangle 15"/>
+          <p:cNvSpPr/>
+          <p:nvPr/>
+        </p:nvSpPr>
+        <p:spPr>
+          <a:xfrm>
+            <a:off x="7589520" y="3657600"/>
+            <a:ext cx="6400800" cy="2926080"/>
+          </a:xfrm>
+          <a:prstGeom prst="roundRect">
+            <a:avLst>
+              <a:gd name="adj" fmla="val 4000"/>
+            </a:avLst>
+          </a:prstGeom>
+          <a:solidFill>
+            <a:srgbClr val="F0EFE8"/>
+          </a:solidFill>
+          <a:ln>
+            <a:noFill/>
+          </a:ln>
+        </p:spPr>
+        <p:style>
+          <a:lnRef idx="1">
+            <a:schemeClr val="accent1"/>
+          </a:lnRef>
+          <a:fillRef idx="3">
+            <a:schemeClr val="accent1"/>
+          </a:fillRef>
+          <a:effectRef idx="2">
+            <a:schemeClr val="accent1"/>
+          </a:effectRef>
+          <a:fontRef idx="minor">
+            <a:schemeClr val="lt1"/>
+          </a:fontRef>
+        </p:style>
+        <p:txBody>
+          <a:bodyPr rtlCol="0" anchor="ctr"/>
+          <a:lstStyle/>
+          <a:p>
+            <a:pPr algn="ctr"/>
+          </a:p>
+        </p:txBody>
+      </p:sp>
+      <p:sp>
+        <p:nvSpPr>
+          <p:cNvPr id="17" name="TextBox 16"/>
+          <p:cNvSpPr txBox="1"/>
+          <p:nvPr/>
+        </p:nvSpPr>
+        <p:spPr>
+          <a:xfrm>
+            <a:off x="7863840" y="3794760"/>
+            <a:ext cx="5486400" cy="228600"/>
+          </a:xfrm>
+          <a:prstGeom prst="rect">
+            <a:avLst/>
+          </a:prstGeom>
+          <a:noFill/>
+        </p:spPr>
+        <p:txBody>
+          <a:bodyPr wrap="square" anchor="t">
+            <a:spAutoFit/>
+          </a:bodyPr>
+          <a:lstStyle/>
+          <a:p>
+            <a:pPr algn="l">
+              <a:spcAft>
+                <a:spcPts val="0"/>
+              </a:spcAft>
+              <a:defRPr sz="1300" b="1">
+                <a:solidFill>
+                  <a:srgbClr val="1A1A2E"/>
+                </a:solidFill>
+                <a:latin typeface="Inter"/>
+              </a:defRPr>
+            </a:pPr>
+            <a:r>
+              <a:t>Was Salesteq nicht ist</a:t>
+            </a:r>
+          </a:p>
+        </p:txBody>
+      </p:sp>
+      <p:sp>
+        <p:nvSpPr>
+          <p:cNvPr id="18" name="TextBox 17"/>
+          <p:cNvSpPr txBox="1"/>
+          <p:nvPr/>
+        </p:nvSpPr>
+        <p:spPr>
+          <a:xfrm>
+            <a:off x="8046720" y="4160520"/>
+            <a:ext cx="5669280" cy="365760"/>
+          </a:xfrm>
+          <a:prstGeom prst="rect">
+            <a:avLst/>
+          </a:prstGeom>
+          <a:noFill/>
+        </p:spPr>
+        <p:txBody>
+          <a:bodyPr wrap="square" anchor="t">
+            <a:spAutoFit/>
+          </a:bodyPr>
+          <a:lstStyle/>
+          <a:p>
+            <a:pPr algn="l">
+              <a:spcAft>
+                <a:spcPts val="0"/>
+              </a:spcAft>
+              <a:defRPr sz="1100" b="0">
+                <a:solidFill>
+                  <a:srgbClr val="2D2D2D"/>
+                </a:solidFill>
+                <a:latin typeface="Inter"/>
+              </a:defRPr>
+            </a:pPr>
+            <a:r>
+              <a:t>✗  Kein CRM-Ersatz (BSI, Salesforce bleiben bestehen)</a:t>
+            </a:r>
+          </a:p>
+        </p:txBody>
+      </p:sp>
+      <p:sp>
+        <p:nvSpPr>
+          <p:cNvPr id="19" name="TextBox 18"/>
+          <p:cNvSpPr txBox="1"/>
+          <p:nvPr/>
+        </p:nvSpPr>
+        <p:spPr>
+          <a:xfrm>
+            <a:off x="8046720" y="4572000"/>
+            <a:ext cx="5669280" cy="365760"/>
+          </a:xfrm>
+          <a:prstGeom prst="rect">
+            <a:avLst/>
+          </a:prstGeom>
+          <a:noFill/>
+        </p:spPr>
+        <p:txBody>
+          <a:bodyPr wrap="square" anchor="t">
+            <a:spAutoFit/>
+          </a:bodyPr>
+          <a:lstStyle/>
+          <a:p>
+            <a:pPr algn="l">
+              <a:spcAft>
+                <a:spcPts val="0"/>
+              </a:spcAft>
+              <a:defRPr sz="1100" b="0">
+                <a:solidFill>
+                  <a:srgbClr val="2D2D2D"/>
+                </a:solidFill>
+                <a:latin typeface="Inter"/>
+              </a:defRPr>
+            </a:pPr>
+            <a:r>
+              <a:t>✗  Kein Copilot-Konkurrent (ergänzt, ersetzt nicht)</a:t>
+            </a:r>
+          </a:p>
+        </p:txBody>
+      </p:sp>
+      <p:sp>
+        <p:nvSpPr>
+          <p:cNvPr id="20" name="TextBox 19"/>
+          <p:cNvSpPr txBox="1"/>
+          <p:nvPr/>
+        </p:nvSpPr>
+        <p:spPr>
+          <a:xfrm>
+            <a:off x="8046720" y="4983480"/>
+            <a:ext cx="5669280" cy="365760"/>
+          </a:xfrm>
+          <a:prstGeom prst="rect">
+            <a:avLst/>
+          </a:prstGeom>
+          <a:noFill/>
+        </p:spPr>
+        <p:txBody>
+          <a:bodyPr wrap="square" anchor="t">
+            <a:spAutoFit/>
+          </a:bodyPr>
+          <a:lstStyle/>
+          <a:p>
+            <a:pPr algn="l">
+              <a:spcAft>
+                <a:spcPts val="0"/>
+              </a:spcAft>
+              <a:defRPr sz="1100" b="0">
+                <a:solidFill>
+                  <a:srgbClr val="2D2D2D"/>
+                </a:solidFill>
+                <a:latin typeface="Inter"/>
+              </a:defRPr>
+            </a:pPr>
+            <a:r>
+              <a:t>✗  Kein fertiges Bankenprodukt (wir bauen gemeinsam)</a:t>
+            </a:r>
+          </a:p>
+        </p:txBody>
+      </p:sp>
+      <p:sp>
+        <p:nvSpPr>
+          <p:cNvPr id="21" name="TextBox 20"/>
+          <p:cNvSpPr txBox="1"/>
+          <p:nvPr/>
+        </p:nvSpPr>
+        <p:spPr>
+          <a:xfrm>
+            <a:off x="8046720" y="5394960"/>
+            <a:ext cx="5669280" cy="365760"/>
+          </a:xfrm>
+          <a:prstGeom prst="rect">
+            <a:avLst/>
+          </a:prstGeom>
+          <a:noFill/>
+        </p:spPr>
+        <p:txBody>
+          <a:bodyPr wrap="square" anchor="t">
+            <a:spAutoFit/>
+          </a:bodyPr>
+          <a:lstStyle/>
+          <a:p>
+            <a:pPr algn="l">
+              <a:spcAft>
+                <a:spcPts val="0"/>
+              </a:spcAft>
+              <a:defRPr sz="1100" b="0">
+                <a:solidFill>
+                  <a:srgbClr val="2D2D2D"/>
+                </a:solidFill>
+                <a:latin typeface="Inter"/>
+              </a:defRPr>
+            </a:pPr>
+            <a:r>
+              <a:t>✗  Keine Blackbox — volle Nachvollziehbarkeit aller AI-Aktionen</a:t>
+            </a:r>
+          </a:p>
+        </p:txBody>
+      </p:sp>
+      <p:sp>
+        <p:nvSpPr>
+          <p:cNvPr id="22" name="Rounded Rectangle 21"/>
+          <p:cNvSpPr/>
+          <p:nvPr/>
+        </p:nvSpPr>
+        <p:spPr>
+          <a:xfrm>
+            <a:off x="731520" y="6858000"/>
+            <a:ext cx="13167360" cy="914400"/>
+          </a:xfrm>
+          <a:prstGeom prst="roundRect">
+            <a:avLst>
+              <a:gd name="adj" fmla="val 4000"/>
+            </a:avLst>
+          </a:prstGeom>
+          <a:solidFill>
+            <a:srgbClr val="1A1A2E"/>
+          </a:solidFill>
+          <a:ln>
+            <a:noFill/>
+          </a:ln>
+        </p:spPr>
+        <p:style>
+          <a:lnRef idx="1">
+            <a:schemeClr val="accent1"/>
+          </a:lnRef>
+          <a:fillRef idx="3">
+            <a:schemeClr val="accent1"/>
+          </a:fillRef>
+          <a:effectRef idx="2">
+            <a:schemeClr val="accent1"/>
+          </a:effectRef>
+          <a:fontRef idx="minor">
+            <a:schemeClr val="lt1"/>
+          </a:fontRef>
+        </p:style>
+        <p:txBody>
+          <a:bodyPr rtlCol="0" anchor="ctr"/>
+          <a:lstStyle/>
+          <a:p>
+            <a:pPr algn="ctr"/>
+          </a:p>
+        </p:txBody>
+      </p:sp>
+      <p:sp>
+        <p:nvSpPr>
+          <p:cNvPr id="23" name="TextBox 22"/>
+          <p:cNvSpPr txBox="1"/>
+          <p:nvPr/>
+        </p:nvSpPr>
+        <p:spPr>
+          <a:xfrm>
+            <a:off x="1005840" y="6949440"/>
+            <a:ext cx="11887200" cy="320040"/>
+          </a:xfrm>
+          <a:prstGeom prst="rect">
+            <a:avLst/>
+          </a:prstGeom>
+          <a:noFill/>
+        </p:spPr>
+        <p:txBody>
+          <a:bodyPr wrap="square" anchor="t">
+            <a:spAutoFit/>
+          </a:bodyPr>
+          <a:lstStyle/>
+          <a:p>
+            <a:pPr algn="l">
+              <a:spcAft>
+                <a:spcPts val="0"/>
+              </a:spcAft>
+              <a:defRPr sz="1400" b="1">
+                <a:solidFill>
+                  <a:srgbClr val="E8A838"/>
+                </a:solidFill>
+                <a:latin typeface="Inter"/>
+              </a:defRPr>
+            </a:pPr>
+            <a:r>
+              <a:t>Kein Druck, keine Eile.</a:t>
+            </a:r>
+          </a:p>
+        </p:txBody>
+      </p:sp>
+      <p:sp>
+        <p:nvSpPr>
+          <p:cNvPr id="24" name="TextBox 23"/>
+          <p:cNvSpPr txBox="1"/>
+          <p:nvPr/>
+        </p:nvSpPr>
+        <p:spPr>
+          <a:xfrm>
+            <a:off x="1005840" y="7269480"/>
+            <a:ext cx="11887200" cy="320040"/>
+          </a:xfrm>
+          <a:prstGeom prst="rect">
+            <a:avLst/>
+          </a:prstGeom>
+          <a:noFill/>
+        </p:spPr>
+        <p:txBody>
+          <a:bodyPr wrap="square" anchor="t">
+            <a:spAutoFit/>
+          </a:bodyPr>
+          <a:lstStyle/>
+          <a:p>
+            <a:pPr algn="l">
+              <a:spcAft>
+                <a:spcPts val="0"/>
+              </a:spcAft>
+              <a:defRPr sz="1200" b="0">
+                <a:solidFill>
+                  <a:srgbClr val="9CA3AF"/>
+                </a:solidFill>
+                <a:latin typeface="Inter"/>
+              </a:defRPr>
+            </a:pPr>
+            <a:r>
+              <a:t>Wenn das Szenario Sinn macht, finden wir den richtigen Anfang. Wenn nicht, war es ein gutes Gespräch.</a:t>
+            </a:r>
+          </a:p>
+        </p:txBody>
+      </p:sp>
+      <p:sp>
+        <p:nvSpPr>
+          <p:cNvPr id="25" name="TextBox 24"/>
+          <p:cNvSpPr txBox="1"/>
+          <p:nvPr/>
+        </p:nvSpPr>
+        <p:spPr>
+          <a:xfrm>
+            <a:off x="9144000" y="6949440"/>
+            <a:ext cx="4572000" cy="640080"/>
+          </a:xfrm>
+          <a:prstGeom prst="rect">
+            <a:avLst/>
+          </a:prstGeom>
+          <a:noFill/>
+        </p:spPr>
+        <p:txBody>
+          <a:bodyPr wrap="square" anchor="t">
+            <a:spAutoFit/>
+          </a:bodyPr>
+          <a:lstStyle/>
+          <a:p>
+            <a:pPr algn="r">
+              <a:spcAft>
+                <a:spcPts val="0"/>
+              </a:spcAft>
+              <a:defRPr sz="1000" b="0">
+                <a:solidFill>
+                  <a:srgbClr val="9CA3AF"/>
+                </a:solidFill>
+                <a:latin typeface="Inter"/>
+              </a:defRPr>
+            </a:pPr>
+            <a:r>
+              <a:t>Viktor Andreas</a:t>
+            </a:r>
+            <a:br/>
+            <a:r>
+              <a:t>viktor@salesteq.com</a:t>
+            </a:r>
+            <a:br/>
+            <a:r>
+              <a:t>salesteq.com</a:t>
+            </a:r>
+          </a:p>
+        </p:txBody>
+      </p:sp>
+      <p:sp>
+        <p:nvSpPr>
+          <p:cNvPr id="26" name="TextBox 25"/>
+          <p:cNvSpPr txBox="1"/>
+          <p:nvPr/>
+        </p:nvSpPr>
+        <p:spPr>
+          <a:xfrm>
+            <a:off x="731520" y="7818120"/>
+            <a:ext cx="7315200" cy="274320"/>
+          </a:xfrm>
+          <a:prstGeom prst="rect">
+            <a:avLst/>
+          </a:prstGeom>
+          <a:noFill/>
+        </p:spPr>
+        <p:txBody>
+          <a:bodyPr wrap="square" anchor="t">
+            <a:spAutoFit/>
+          </a:bodyPr>
+          <a:lstStyle/>
+          <a:p>
+            <a:pPr algn="l">
+              <a:spcAft>
+                <a:spcPts val="0"/>
+              </a:spcAft>
+              <a:defRPr sz="900" b="0">
+                <a:solidFill>
+                  <a:srgbClr val="6B7280"/>
+                </a:solidFill>
+                <a:latin typeface="JetBrains Mono"/>
+              </a:defRPr>
+            </a:pPr>
+            <a:r>
+              <a:t>Vertraulich  ·  Salesteq × Raiffeisen</a:t>
+            </a:r>
+          </a:p>
+        </p:txBody>
+      </p:sp>
+      <p:sp>
+        <p:nvSpPr>
+          <p:cNvPr id="27" name="TextBox 26"/>
+          <p:cNvSpPr txBox="1"/>
+          <p:nvPr/>
+        </p:nvSpPr>
+        <p:spPr>
+          <a:xfrm>
+            <a:off x="12801600" y="7818120"/>
+            <a:ext cx="1097280" cy="274320"/>
+          </a:xfrm>
+          <a:prstGeom prst="rect">
+            <a:avLst/>
+          </a:prstGeom>
+          <a:noFill/>
+        </p:spPr>
+        <p:txBody>
+          <a:bodyPr wrap="square" anchor="t">
+            <a:spAutoFit/>
+          </a:bodyPr>
+          <a:lstStyle/>
+          <a:p>
+            <a:pPr algn="r">
+              <a:spcAft>
+                <a:spcPts val="0"/>
+              </a:spcAft>
+              <a:defRPr sz="900" b="0">
+                <a:solidFill>
+                  <a:srgbClr val="6B7280"/>
+                </a:solidFill>
+                <a:latin typeface="JetBrains Mono"/>
+              </a:defRPr>
+            </a:pPr>
+            <a:r>
+              <a:t>10 / 10</a:t>
             </a:r>
           </a:p>
         </p:txBody>
@@ -4136,6 +5275,1464 @@
 </file>
 
 <file path=ppt/slides/slide2.xml><?xml version="1.0" encoding="utf-8"?>
+<p:sld xmlns:a="http://schemas.openxmlformats.org/drawingml/2006/main" xmlns:p="http://schemas.openxmlformats.org/presentationml/2006/main" xmlns:r="http://schemas.openxmlformats.org/officeDocument/2006/relationships">
+  <p:cSld>
+    <p:bg>
+      <p:bgPr>
+        <a:solidFill>
+          <a:srgbClr val="FFFFFF"/>
+        </a:solidFill>
+        <a:effectLst/>
+      </p:bgPr>
+    </p:bg>
+    <p:spTree>
+      <p:nvGrpSpPr>
+        <p:cNvPr id="1" name=""/>
+        <p:cNvGrpSpPr/>
+        <p:nvPr/>
+      </p:nvGrpSpPr>
+      <p:grpSpPr/>
+      <p:sp>
+        <p:nvSpPr>
+          <p:cNvPr id="2" name="TextBox 1"/>
+          <p:cNvSpPr txBox="1"/>
+          <p:nvPr/>
+        </p:nvSpPr>
+        <p:spPr>
+          <a:xfrm>
+            <a:off x="731520" y="457200"/>
+            <a:ext cx="5486400" cy="274320"/>
+          </a:xfrm>
+          <a:prstGeom prst="rect">
+            <a:avLst/>
+          </a:prstGeom>
+          <a:noFill/>
+        </p:spPr>
+        <p:txBody>
+          <a:bodyPr wrap="square" anchor="t">
+            <a:spAutoFit/>
+          </a:bodyPr>
+          <a:lstStyle/>
+          <a:p>
+            <a:pPr algn="l">
+              <a:spcAft>
+                <a:spcPts val="0"/>
+              </a:spcAft>
+              <a:defRPr sz="1000" b="1">
+                <a:solidFill>
+                  <a:srgbClr val="E8A838"/>
+                </a:solidFill>
+                <a:latin typeface="JetBrains Mono"/>
+              </a:defRPr>
+            </a:pPr>
+            <a:r>
+              <a:t>ZUSAMMENFASSUNG</a:t>
+            </a:r>
+          </a:p>
+        </p:txBody>
+      </p:sp>
+      <p:sp>
+        <p:nvSpPr>
+          <p:cNvPr id="3" name="TextBox 2"/>
+          <p:cNvSpPr txBox="1"/>
+          <p:nvPr/>
+        </p:nvSpPr>
+        <p:spPr>
+          <a:xfrm>
+            <a:off x="731520" y="822960"/>
+            <a:ext cx="12801600" cy="731520"/>
+          </a:xfrm>
+          <a:prstGeom prst="rect">
+            <a:avLst/>
+          </a:prstGeom>
+          <a:noFill/>
+        </p:spPr>
+        <p:txBody>
+          <a:bodyPr wrap="square" anchor="t">
+            <a:spAutoFit/>
+          </a:bodyPr>
+          <a:lstStyle/>
+          <a:p>
+            <a:pPr algn="l">
+              <a:spcAft>
+                <a:spcPts val="0"/>
+              </a:spcAft>
+              <a:defRPr sz="3800" b="0">
+                <a:solidFill>
+                  <a:srgbClr val="1A1A2E"/>
+                </a:solidFill>
+                <a:latin typeface="Inter"/>
+              </a:defRPr>
+            </a:pPr>
+            <a:r>
+              <a:t>AI kann den Vertrieb stärken —</a:t>
+            </a:r>
+            <a:br/>
+            <a:r>
+              <a:t>ohne IT-Projekt, ohne Risiko.</a:t>
+            </a:r>
+          </a:p>
+        </p:txBody>
+      </p:sp>
+      <p:sp>
+        <p:nvSpPr>
+          <p:cNvPr id="4" name="Rounded Rectangle 3"/>
+          <p:cNvSpPr/>
+          <p:nvPr/>
+        </p:nvSpPr>
+        <p:spPr>
+          <a:xfrm>
+            <a:off x="731520" y="2103120"/>
+            <a:ext cx="13167360" cy="1280160"/>
+          </a:xfrm>
+          <a:prstGeom prst="roundRect">
+            <a:avLst>
+              <a:gd name="adj" fmla="val 4000"/>
+            </a:avLst>
+          </a:prstGeom>
+          <a:solidFill>
+            <a:srgbClr val="F0EFE8"/>
+          </a:solidFill>
+          <a:ln>
+            <a:noFill/>
+          </a:ln>
+        </p:spPr>
+        <p:style>
+          <a:lnRef idx="1">
+            <a:schemeClr val="accent1"/>
+          </a:lnRef>
+          <a:fillRef idx="3">
+            <a:schemeClr val="accent1"/>
+          </a:fillRef>
+          <a:effectRef idx="2">
+            <a:schemeClr val="accent1"/>
+          </a:effectRef>
+          <a:fontRef idx="minor">
+            <a:schemeClr val="lt1"/>
+          </a:fontRef>
+        </p:style>
+        <p:txBody>
+          <a:bodyPr rtlCol="0" anchor="ctr"/>
+          <a:lstStyle/>
+          <a:p>
+            <a:pPr algn="ctr"/>
+          </a:p>
+        </p:txBody>
+      </p:sp>
+      <p:sp>
+        <p:nvSpPr>
+          <p:cNvPr id="5" name="TextBox 4"/>
+          <p:cNvSpPr txBox="1"/>
+          <p:nvPr/>
+        </p:nvSpPr>
+        <p:spPr>
+          <a:xfrm>
+            <a:off x="1005840" y="2194560"/>
+            <a:ext cx="12618720" cy="1097280"/>
+          </a:xfrm>
+          <a:prstGeom prst="rect">
+            <a:avLst/>
+          </a:prstGeom>
+          <a:noFill/>
+        </p:spPr>
+        <p:txBody>
+          <a:bodyPr wrap="square" anchor="t">
+            <a:spAutoFit/>
+          </a:bodyPr>
+          <a:lstStyle/>
+          <a:p>
+            <a:pPr algn="l">
+              <a:spcAft>
+                <a:spcPts val="0"/>
+              </a:spcAft>
+              <a:defRPr sz="1500" b="0">
+                <a:solidFill>
+                  <a:srgbClr val="2D2D2D"/>
+                </a:solidFill>
+                <a:latin typeface="Inter"/>
+              </a:defRPr>
+            </a:pPr>
+            <a:r>
+              <a:t>Raiffeisen investiert bereits in AI (Meeting-Vorbereitung, Chatbot Tina). Aber die nächste Welle — proaktive Kundenansprache, Berater-Training, Cross-Selling-Intelligenz und Voice AI — erfordert keine grossen IT-Projekte. Sie erfordert einen Partner, der es schon in Produktion hat.</a:t>
+            </a:r>
+          </a:p>
+        </p:txBody>
+      </p:sp>
+      <p:sp>
+        <p:nvSpPr>
+          <p:cNvPr id="6" name="TextBox 5"/>
+          <p:cNvSpPr txBox="1"/>
+          <p:nvPr/>
+        </p:nvSpPr>
+        <p:spPr>
+          <a:xfrm>
+            <a:off x="731520" y="3657600"/>
+            <a:ext cx="5486400" cy="274320"/>
+          </a:xfrm>
+          <a:prstGeom prst="rect">
+            <a:avLst/>
+          </a:prstGeom>
+          <a:noFill/>
+        </p:spPr>
+        <p:txBody>
+          <a:bodyPr wrap="square" anchor="t">
+            <a:spAutoFit/>
+          </a:bodyPr>
+          <a:lstStyle/>
+          <a:p>
+            <a:pPr algn="l">
+              <a:spcAft>
+                <a:spcPts val="0"/>
+              </a:spcAft>
+              <a:defRPr sz="1000" b="1">
+                <a:solidFill>
+                  <a:srgbClr val="6B7280"/>
+                </a:solidFill>
+                <a:latin typeface="JetBrains Mono"/>
+              </a:defRPr>
+            </a:pPr>
+            <a:r>
+              <a:t>VIER SZENARIEN ZUR DISKUSSION</a:t>
+            </a:r>
+          </a:p>
+        </p:txBody>
+      </p:sp>
+      <p:sp>
+        <p:nvSpPr>
+          <p:cNvPr id="7" name="Rounded Rectangle 6"/>
+          <p:cNvSpPr/>
+          <p:nvPr/>
+        </p:nvSpPr>
+        <p:spPr>
+          <a:xfrm>
+            <a:off x="731520" y="4023360"/>
+            <a:ext cx="3154680" cy="2834640"/>
+          </a:xfrm>
+          <a:prstGeom prst="roundRect">
+            <a:avLst>
+              <a:gd name="adj" fmla="val 4000"/>
+            </a:avLst>
+          </a:prstGeom>
+          <a:solidFill>
+            <a:srgbClr val="1A1A2E"/>
+          </a:solidFill>
+          <a:ln>
+            <a:noFill/>
+          </a:ln>
+        </p:spPr>
+        <p:style>
+          <a:lnRef idx="1">
+            <a:schemeClr val="accent1"/>
+          </a:lnRef>
+          <a:fillRef idx="3">
+            <a:schemeClr val="accent1"/>
+          </a:fillRef>
+          <a:effectRef idx="2">
+            <a:schemeClr val="accent1"/>
+          </a:effectRef>
+          <a:fontRef idx="minor">
+            <a:schemeClr val="lt1"/>
+          </a:fontRef>
+        </p:style>
+        <p:txBody>
+          <a:bodyPr rtlCol="0" anchor="ctr"/>
+          <a:lstStyle/>
+          <a:p>
+            <a:pPr algn="ctr"/>
+          </a:p>
+        </p:txBody>
+      </p:sp>
+      <p:sp>
+        <p:nvSpPr>
+          <p:cNvPr id="8" name="Oval 7"/>
+          <p:cNvSpPr/>
+          <p:nvPr/>
+        </p:nvSpPr>
+        <p:spPr>
+          <a:xfrm>
+            <a:off x="914400" y="4160520"/>
+            <a:ext cx="320040" cy="320040"/>
+          </a:xfrm>
+          <a:prstGeom prst="ellipse">
+            <a:avLst/>
+          </a:prstGeom>
+          <a:solidFill>
+            <a:srgbClr val="E8A838"/>
+          </a:solidFill>
+          <a:ln>
+            <a:noFill/>
+          </a:ln>
+        </p:spPr>
+        <p:style>
+          <a:lnRef idx="1">
+            <a:schemeClr val="accent1"/>
+          </a:lnRef>
+          <a:fillRef idx="3">
+            <a:schemeClr val="accent1"/>
+          </a:fillRef>
+          <a:effectRef idx="2">
+            <a:schemeClr val="accent1"/>
+          </a:effectRef>
+          <a:fontRef idx="minor">
+            <a:schemeClr val="lt1"/>
+          </a:fontRef>
+        </p:style>
+        <p:txBody>
+          <a:bodyPr rtlCol="0" anchor="ctr" wrap="none"/>
+          <a:lstStyle/>
+          <a:p>
+            <a:pPr algn="ctr">
+              <a:defRPr sz="1300" b="1">
+                <a:solidFill>
+                  <a:srgbClr val="1A1A2E"/>
+                </a:solidFill>
+                <a:latin typeface="Inter"/>
+              </a:defRPr>
+            </a:pPr>
+            <a:r>
+              <a:t>A</a:t>
+            </a:r>
+          </a:p>
+        </p:txBody>
+      </p:sp>
+      <p:sp>
+        <p:nvSpPr>
+          <p:cNvPr id="9" name="TextBox 8"/>
+          <p:cNvSpPr txBox="1"/>
+          <p:nvPr/>
+        </p:nvSpPr>
+        <p:spPr>
+          <a:xfrm>
+            <a:off x="1371600" y="4133087"/>
+            <a:ext cx="2286000" cy="548640"/>
+          </a:xfrm>
+          <a:prstGeom prst="rect">
+            <a:avLst/>
+          </a:prstGeom>
+          <a:noFill/>
+        </p:spPr>
+        <p:txBody>
+          <a:bodyPr wrap="square" anchor="t">
+            <a:spAutoFit/>
+          </a:bodyPr>
+          <a:lstStyle/>
+          <a:p>
+            <a:pPr algn="l">
+              <a:spcAft>
+                <a:spcPts val="0"/>
+              </a:spcAft>
+              <a:defRPr sz="1300" b="1">
+                <a:solidFill>
+                  <a:srgbClr val="FFFFFF"/>
+                </a:solidFill>
+                <a:latin typeface="Inter"/>
+              </a:defRPr>
+            </a:pPr>
+            <a:r>
+              <a:t>Training &amp;</a:t>
+            </a:r>
+            <a:br/>
+            <a:r>
+              <a:t>Onboarding</a:t>
+            </a:r>
+          </a:p>
+        </p:txBody>
+      </p:sp>
+      <p:sp>
+        <p:nvSpPr>
+          <p:cNvPr id="10" name="TextBox 9"/>
+          <p:cNvSpPr txBox="1"/>
+          <p:nvPr/>
+        </p:nvSpPr>
+        <p:spPr>
+          <a:xfrm>
+            <a:off x="960120" y="4846320"/>
+            <a:ext cx="2743200" cy="1645920"/>
+          </a:xfrm>
+          <a:prstGeom prst="rect">
+            <a:avLst/>
+          </a:prstGeom>
+          <a:noFill/>
+        </p:spPr>
+        <p:txBody>
+          <a:bodyPr wrap="square" anchor="t">
+            <a:spAutoFit/>
+          </a:bodyPr>
+          <a:lstStyle/>
+          <a:p>
+            <a:pPr algn="l">
+              <a:spcAft>
+                <a:spcPts val="0"/>
+              </a:spcAft>
+              <a:defRPr sz="1100" b="0">
+                <a:solidFill>
+                  <a:srgbClr val="9CA3AF"/>
+                </a:solidFill>
+                <a:latin typeface="Inter"/>
+              </a:defRPr>
+            </a:pPr>
+            <a:r>
+              <a:t>Neue Berater schneller</a:t>
+            </a:r>
+            <a:br/>
+            <a:r>
+              <a:t>produktiv machen. AI als</a:t>
+            </a:r>
+            <a:br/>
+            <a:r>
+              <a:t>Sparringspartner für</a:t>
+            </a:r>
+            <a:br/>
+            <a:r>
+              <a:t>Produkt- und Beratungswissen.</a:t>
+            </a:r>
+          </a:p>
+        </p:txBody>
+      </p:sp>
+      <p:sp>
+        <p:nvSpPr>
+          <p:cNvPr id="11" name="Rounded Rectangle 10"/>
+          <p:cNvSpPr/>
+          <p:nvPr/>
+        </p:nvSpPr>
+        <p:spPr>
+          <a:xfrm>
+            <a:off x="4114800" y="4023360"/>
+            <a:ext cx="3154680" cy="2834640"/>
+          </a:xfrm>
+          <a:prstGeom prst="roundRect">
+            <a:avLst>
+              <a:gd name="adj" fmla="val 4000"/>
+            </a:avLst>
+          </a:prstGeom>
+          <a:solidFill>
+            <a:srgbClr val="1A1A2E"/>
+          </a:solidFill>
+          <a:ln>
+            <a:noFill/>
+          </a:ln>
+        </p:spPr>
+        <p:style>
+          <a:lnRef idx="1">
+            <a:schemeClr val="accent1"/>
+          </a:lnRef>
+          <a:fillRef idx="3">
+            <a:schemeClr val="accent1"/>
+          </a:fillRef>
+          <a:effectRef idx="2">
+            <a:schemeClr val="accent1"/>
+          </a:effectRef>
+          <a:fontRef idx="minor">
+            <a:schemeClr val="lt1"/>
+          </a:fontRef>
+        </p:style>
+        <p:txBody>
+          <a:bodyPr rtlCol="0" anchor="ctr"/>
+          <a:lstStyle/>
+          <a:p>
+            <a:pPr algn="ctr"/>
+          </a:p>
+        </p:txBody>
+      </p:sp>
+      <p:sp>
+        <p:nvSpPr>
+          <p:cNvPr id="12" name="Oval 11"/>
+          <p:cNvSpPr/>
+          <p:nvPr/>
+        </p:nvSpPr>
+        <p:spPr>
+          <a:xfrm>
+            <a:off x="4297680" y="4160520"/>
+            <a:ext cx="320040" cy="320040"/>
+          </a:xfrm>
+          <a:prstGeom prst="ellipse">
+            <a:avLst/>
+          </a:prstGeom>
+          <a:solidFill>
+            <a:srgbClr val="E8A838"/>
+          </a:solidFill>
+          <a:ln>
+            <a:noFill/>
+          </a:ln>
+        </p:spPr>
+        <p:style>
+          <a:lnRef idx="1">
+            <a:schemeClr val="accent1"/>
+          </a:lnRef>
+          <a:fillRef idx="3">
+            <a:schemeClr val="accent1"/>
+          </a:fillRef>
+          <a:effectRef idx="2">
+            <a:schemeClr val="accent1"/>
+          </a:effectRef>
+          <a:fontRef idx="minor">
+            <a:schemeClr val="lt1"/>
+          </a:fontRef>
+        </p:style>
+        <p:txBody>
+          <a:bodyPr rtlCol="0" anchor="ctr" wrap="none"/>
+          <a:lstStyle/>
+          <a:p>
+            <a:pPr algn="ctr">
+              <a:defRPr sz="1300" b="1">
+                <a:solidFill>
+                  <a:srgbClr val="1A1A2E"/>
+                </a:solidFill>
+                <a:latin typeface="Inter"/>
+              </a:defRPr>
+            </a:pPr>
+            <a:r>
+              <a:t>B</a:t>
+            </a:r>
+          </a:p>
+        </p:txBody>
+      </p:sp>
+      <p:sp>
+        <p:nvSpPr>
+          <p:cNvPr id="13" name="TextBox 12"/>
+          <p:cNvSpPr txBox="1"/>
+          <p:nvPr/>
+        </p:nvSpPr>
+        <p:spPr>
+          <a:xfrm>
+            <a:off x="4754880" y="4133087"/>
+            <a:ext cx="2286000" cy="548640"/>
+          </a:xfrm>
+          <a:prstGeom prst="rect">
+            <a:avLst/>
+          </a:prstGeom>
+          <a:noFill/>
+        </p:spPr>
+        <p:txBody>
+          <a:bodyPr wrap="square" anchor="t">
+            <a:spAutoFit/>
+          </a:bodyPr>
+          <a:lstStyle/>
+          <a:p>
+            <a:pPr algn="l">
+              <a:spcAft>
+                <a:spcPts val="0"/>
+              </a:spcAft>
+              <a:defRPr sz="1300" b="1">
+                <a:solidFill>
+                  <a:srgbClr val="FFFFFF"/>
+                </a:solidFill>
+                <a:latin typeface="Inter"/>
+              </a:defRPr>
+            </a:pPr>
+            <a:r>
+              <a:t>Proaktive</a:t>
+            </a:r>
+            <a:br/>
+            <a:r>
+              <a:t>Kundenansprache</a:t>
+            </a:r>
+          </a:p>
+        </p:txBody>
+      </p:sp>
+      <p:sp>
+        <p:nvSpPr>
+          <p:cNvPr id="14" name="TextBox 13"/>
+          <p:cNvSpPr txBox="1"/>
+          <p:nvPr/>
+        </p:nvSpPr>
+        <p:spPr>
+          <a:xfrm>
+            <a:off x="4343400" y="4846320"/>
+            <a:ext cx="2743200" cy="1645920"/>
+          </a:xfrm>
+          <a:prstGeom prst="rect">
+            <a:avLst/>
+          </a:prstGeom>
+          <a:noFill/>
+        </p:spPr>
+        <p:txBody>
+          <a:bodyPr wrap="square" anchor="t">
+            <a:spAutoFit/>
+          </a:bodyPr>
+          <a:lstStyle/>
+          <a:p>
+            <a:pPr algn="l">
+              <a:spcAft>
+                <a:spcPts val="0"/>
+              </a:spcAft>
+              <a:defRPr sz="1100" b="0">
+                <a:solidFill>
+                  <a:srgbClr val="9CA3AF"/>
+                </a:solidFill>
+                <a:latin typeface="Inter"/>
+              </a:defRPr>
+            </a:pPr>
+            <a:r>
+              <a:t>Trigger-basierte Ansprache</a:t>
+            </a:r>
+            <a:br/>
+            <a:r>
+              <a:t>bei Zinsänderungen, Ablauf</a:t>
+            </a:r>
+            <a:br/>
+            <a:r>
+              <a:t>Festhypothek, Lebensereignissen.</a:t>
+            </a:r>
+            <a:br/>
+            <a:r>
+              <a:t>Personalisiert, RM gibt frei.</a:t>
+            </a:r>
+          </a:p>
+        </p:txBody>
+      </p:sp>
+      <p:sp>
+        <p:nvSpPr>
+          <p:cNvPr id="15" name="Rounded Rectangle 14"/>
+          <p:cNvSpPr/>
+          <p:nvPr/>
+        </p:nvSpPr>
+        <p:spPr>
+          <a:xfrm>
+            <a:off x="7498080" y="4023360"/>
+            <a:ext cx="3154680" cy="2834640"/>
+          </a:xfrm>
+          <a:prstGeom prst="roundRect">
+            <a:avLst>
+              <a:gd name="adj" fmla="val 4000"/>
+            </a:avLst>
+          </a:prstGeom>
+          <a:solidFill>
+            <a:srgbClr val="1A1A2E"/>
+          </a:solidFill>
+          <a:ln>
+            <a:noFill/>
+          </a:ln>
+        </p:spPr>
+        <p:style>
+          <a:lnRef idx="1">
+            <a:schemeClr val="accent1"/>
+          </a:lnRef>
+          <a:fillRef idx="3">
+            <a:schemeClr val="accent1"/>
+          </a:fillRef>
+          <a:effectRef idx="2">
+            <a:schemeClr val="accent1"/>
+          </a:effectRef>
+          <a:fontRef idx="minor">
+            <a:schemeClr val="lt1"/>
+          </a:fontRef>
+        </p:style>
+        <p:txBody>
+          <a:bodyPr rtlCol="0" anchor="ctr"/>
+          <a:lstStyle/>
+          <a:p>
+            <a:pPr algn="ctr"/>
+          </a:p>
+        </p:txBody>
+      </p:sp>
+      <p:sp>
+        <p:nvSpPr>
+          <p:cNvPr id="16" name="Oval 15"/>
+          <p:cNvSpPr/>
+          <p:nvPr/>
+        </p:nvSpPr>
+        <p:spPr>
+          <a:xfrm>
+            <a:off x="7680960" y="4160520"/>
+            <a:ext cx="320040" cy="320040"/>
+          </a:xfrm>
+          <a:prstGeom prst="ellipse">
+            <a:avLst/>
+          </a:prstGeom>
+          <a:solidFill>
+            <a:srgbClr val="E8A838"/>
+          </a:solidFill>
+          <a:ln>
+            <a:noFill/>
+          </a:ln>
+        </p:spPr>
+        <p:style>
+          <a:lnRef idx="1">
+            <a:schemeClr val="accent1"/>
+          </a:lnRef>
+          <a:fillRef idx="3">
+            <a:schemeClr val="accent1"/>
+          </a:fillRef>
+          <a:effectRef idx="2">
+            <a:schemeClr val="accent1"/>
+          </a:effectRef>
+          <a:fontRef idx="minor">
+            <a:schemeClr val="lt1"/>
+          </a:fontRef>
+        </p:style>
+        <p:txBody>
+          <a:bodyPr rtlCol="0" anchor="ctr" wrap="none"/>
+          <a:lstStyle/>
+          <a:p>
+            <a:pPr algn="ctr">
+              <a:defRPr sz="1300" b="1">
+                <a:solidFill>
+                  <a:srgbClr val="1A1A2E"/>
+                </a:solidFill>
+                <a:latin typeface="Inter"/>
+              </a:defRPr>
+            </a:pPr>
+            <a:r>
+              <a:t>C</a:t>
+            </a:r>
+          </a:p>
+        </p:txBody>
+      </p:sp>
+      <p:sp>
+        <p:nvSpPr>
+          <p:cNvPr id="17" name="TextBox 16"/>
+          <p:cNvSpPr txBox="1"/>
+          <p:nvPr/>
+        </p:nvSpPr>
+        <p:spPr>
+          <a:xfrm>
+            <a:off x="8138160" y="4133087"/>
+            <a:ext cx="2286000" cy="548640"/>
+          </a:xfrm>
+          <a:prstGeom prst="rect">
+            <a:avLst/>
+          </a:prstGeom>
+          <a:noFill/>
+        </p:spPr>
+        <p:txBody>
+          <a:bodyPr wrap="square" anchor="t">
+            <a:spAutoFit/>
+          </a:bodyPr>
+          <a:lstStyle/>
+          <a:p>
+            <a:pPr algn="l">
+              <a:spcAft>
+                <a:spcPts val="0"/>
+              </a:spcAft>
+              <a:defRPr sz="1300" b="1">
+                <a:solidFill>
+                  <a:srgbClr val="FFFFFF"/>
+                </a:solidFill>
+                <a:latin typeface="Inter"/>
+              </a:defRPr>
+            </a:pPr>
+            <a:r>
+              <a:t>Produktwissen &amp;</a:t>
+            </a:r>
+            <a:br/>
+            <a:r>
+              <a:t>Beratungsqualität</a:t>
+            </a:r>
+          </a:p>
+        </p:txBody>
+      </p:sp>
+      <p:sp>
+        <p:nvSpPr>
+          <p:cNvPr id="18" name="TextBox 17"/>
+          <p:cNvSpPr txBox="1"/>
+          <p:nvPr/>
+        </p:nvSpPr>
+        <p:spPr>
+          <a:xfrm>
+            <a:off x="7726680" y="4846320"/>
+            <a:ext cx="2743200" cy="1645920"/>
+          </a:xfrm>
+          <a:prstGeom prst="rect">
+            <a:avLst/>
+          </a:prstGeom>
+          <a:noFill/>
+        </p:spPr>
+        <p:txBody>
+          <a:bodyPr wrap="square" anchor="t">
+            <a:spAutoFit/>
+          </a:bodyPr>
+          <a:lstStyle/>
+          <a:p>
+            <a:pPr algn="l">
+              <a:spcAft>
+                <a:spcPts val="0"/>
+              </a:spcAft>
+              <a:defRPr sz="1100" b="0">
+                <a:solidFill>
+                  <a:srgbClr val="9CA3AF"/>
+                </a:solidFill>
+                <a:latin typeface="Inter"/>
+              </a:defRPr>
+            </a:pPr>
+            <a:r>
+              <a:t>Einheitliches, aktuelles</a:t>
+            </a:r>
+            <a:br/>
+            <a:r>
+              <a:t>Produktewissen über alle</a:t>
+            </a:r>
+            <a:br/>
+            <a:r>
+              <a:t>212 Banken. In Echtzeit,</a:t>
+            </a:r>
+            <a:br/>
+            <a:r>
+              <a:t>in natürlicher Sprache.</a:t>
+            </a:r>
+          </a:p>
+        </p:txBody>
+      </p:sp>
+      <p:sp>
+        <p:nvSpPr>
+          <p:cNvPr id="19" name="Rounded Rectangle 18"/>
+          <p:cNvSpPr/>
+          <p:nvPr/>
+        </p:nvSpPr>
+        <p:spPr>
+          <a:xfrm>
+            <a:off x="10881360" y="4023360"/>
+            <a:ext cx="3154680" cy="2834640"/>
+          </a:xfrm>
+          <a:prstGeom prst="roundRect">
+            <a:avLst>
+              <a:gd name="adj" fmla="val 4000"/>
+            </a:avLst>
+          </a:prstGeom>
+          <a:solidFill>
+            <a:srgbClr val="1A1A2E"/>
+          </a:solidFill>
+          <a:ln>
+            <a:noFill/>
+          </a:ln>
+        </p:spPr>
+        <p:style>
+          <a:lnRef idx="1">
+            <a:schemeClr val="accent1"/>
+          </a:lnRef>
+          <a:fillRef idx="3">
+            <a:schemeClr val="accent1"/>
+          </a:fillRef>
+          <a:effectRef idx="2">
+            <a:schemeClr val="accent1"/>
+          </a:effectRef>
+          <a:fontRef idx="minor">
+            <a:schemeClr val="lt1"/>
+          </a:fontRef>
+        </p:style>
+        <p:txBody>
+          <a:bodyPr rtlCol="0" anchor="ctr"/>
+          <a:lstStyle/>
+          <a:p>
+            <a:pPr algn="ctr"/>
+          </a:p>
+        </p:txBody>
+      </p:sp>
+      <p:sp>
+        <p:nvSpPr>
+          <p:cNvPr id="20" name="Oval 19"/>
+          <p:cNvSpPr/>
+          <p:nvPr/>
+        </p:nvSpPr>
+        <p:spPr>
+          <a:xfrm>
+            <a:off x="11064240" y="4160520"/>
+            <a:ext cx="320040" cy="320040"/>
+          </a:xfrm>
+          <a:prstGeom prst="ellipse">
+            <a:avLst/>
+          </a:prstGeom>
+          <a:solidFill>
+            <a:srgbClr val="E8A838"/>
+          </a:solidFill>
+          <a:ln>
+            <a:noFill/>
+          </a:ln>
+        </p:spPr>
+        <p:style>
+          <a:lnRef idx="1">
+            <a:schemeClr val="accent1"/>
+          </a:lnRef>
+          <a:fillRef idx="3">
+            <a:schemeClr val="accent1"/>
+          </a:fillRef>
+          <a:effectRef idx="2">
+            <a:schemeClr val="accent1"/>
+          </a:effectRef>
+          <a:fontRef idx="minor">
+            <a:schemeClr val="lt1"/>
+          </a:fontRef>
+        </p:style>
+        <p:txBody>
+          <a:bodyPr rtlCol="0" anchor="ctr" wrap="none"/>
+          <a:lstStyle/>
+          <a:p>
+            <a:pPr algn="ctr">
+              <a:defRPr sz="1300" b="1">
+                <a:solidFill>
+                  <a:srgbClr val="1A1A2E"/>
+                </a:solidFill>
+                <a:latin typeface="Inter"/>
+              </a:defRPr>
+            </a:pPr>
+            <a:r>
+              <a:t>D</a:t>
+            </a:r>
+          </a:p>
+        </p:txBody>
+      </p:sp>
+      <p:sp>
+        <p:nvSpPr>
+          <p:cNvPr id="21" name="TextBox 20"/>
+          <p:cNvSpPr txBox="1"/>
+          <p:nvPr/>
+        </p:nvSpPr>
+        <p:spPr>
+          <a:xfrm>
+            <a:off x="11521440" y="4133087"/>
+            <a:ext cx="2286000" cy="548640"/>
+          </a:xfrm>
+          <a:prstGeom prst="rect">
+            <a:avLst/>
+          </a:prstGeom>
+          <a:noFill/>
+        </p:spPr>
+        <p:txBody>
+          <a:bodyPr wrap="square" anchor="t">
+            <a:spAutoFit/>
+          </a:bodyPr>
+          <a:lstStyle/>
+          <a:p>
+            <a:pPr algn="l">
+              <a:spcAft>
+                <a:spcPts val="0"/>
+              </a:spcAft>
+              <a:defRPr sz="1300" b="1">
+                <a:solidFill>
+                  <a:srgbClr val="FFFFFF"/>
+                </a:solidFill>
+                <a:latin typeface="Inter"/>
+              </a:defRPr>
+            </a:pPr>
+            <a:r>
+              <a:t>Erster Kunden-</a:t>
+            </a:r>
+            <a:br/>
+            <a:r>
+              <a:t>kontakt</a:t>
+            </a:r>
+          </a:p>
+        </p:txBody>
+      </p:sp>
+      <p:sp>
+        <p:nvSpPr>
+          <p:cNvPr id="22" name="TextBox 21"/>
+          <p:cNvSpPr txBox="1"/>
+          <p:nvPr/>
+        </p:nvSpPr>
+        <p:spPr>
+          <a:xfrm>
+            <a:off x="11109960" y="4846320"/>
+            <a:ext cx="2743200" cy="1645920"/>
+          </a:xfrm>
+          <a:prstGeom prst="rect">
+            <a:avLst/>
+          </a:prstGeom>
+          <a:noFill/>
+        </p:spPr>
+        <p:txBody>
+          <a:bodyPr wrap="square" anchor="t">
+            <a:spAutoFit/>
+          </a:bodyPr>
+          <a:lstStyle/>
+          <a:p>
+            <a:pPr algn="l">
+              <a:spcAft>
+                <a:spcPts val="0"/>
+              </a:spcAft>
+              <a:defRPr sz="1100" b="0">
+                <a:solidFill>
+                  <a:srgbClr val="9CA3AF"/>
+                </a:solidFill>
+                <a:latin typeface="Inter"/>
+              </a:defRPr>
+            </a:pPr>
+            <a:r>
+              <a:t>Routineanfragen automatisch</a:t>
+            </a:r>
+            <a:br/>
+            <a:r>
+              <a:t>beantwortet — Chat und Telefon,</a:t>
+            </a:r>
+            <a:br/>
+            <a:r>
+              <a:t>DE/FR/IT. Berater-Kapazität</a:t>
+            </a:r>
+            <a:br/>
+            <a:r>
+              <a:t>für echte Beratung freisetzen.</a:t>
+            </a:r>
+          </a:p>
+        </p:txBody>
+      </p:sp>
+      <p:sp>
+        <p:nvSpPr>
+          <p:cNvPr id="23" name="Rounded Rectangle 22"/>
+          <p:cNvSpPr/>
+          <p:nvPr/>
+        </p:nvSpPr>
+        <p:spPr>
+          <a:xfrm>
+            <a:off x="731520" y="7040880"/>
+            <a:ext cx="13167360" cy="731520"/>
+          </a:xfrm>
+          <a:prstGeom prst="roundRect">
+            <a:avLst>
+              <a:gd name="adj" fmla="val 4000"/>
+            </a:avLst>
+          </a:prstGeom>
+          <a:solidFill>
+            <a:srgbClr val="1A1A2E"/>
+          </a:solidFill>
+          <a:ln>
+            <a:noFill/>
+          </a:ln>
+        </p:spPr>
+        <p:style>
+          <a:lnRef idx="1">
+            <a:schemeClr val="accent1"/>
+          </a:lnRef>
+          <a:fillRef idx="3">
+            <a:schemeClr val="accent1"/>
+          </a:fillRef>
+          <a:effectRef idx="2">
+            <a:schemeClr val="accent1"/>
+          </a:effectRef>
+          <a:fontRef idx="minor">
+            <a:schemeClr val="lt1"/>
+          </a:fontRef>
+        </p:style>
+        <p:txBody>
+          <a:bodyPr rtlCol="0" anchor="ctr"/>
+          <a:lstStyle/>
+          <a:p>
+            <a:pPr algn="ctr"/>
+          </a:p>
+        </p:txBody>
+      </p:sp>
+      <p:sp>
+        <p:nvSpPr>
+          <p:cNvPr id="24" name="Rounded Rectangle 23"/>
+          <p:cNvSpPr/>
+          <p:nvPr/>
+        </p:nvSpPr>
+        <p:spPr>
+          <a:xfrm>
+            <a:off x="1005840" y="7178040"/>
+            <a:ext cx="2834639" cy="365760"/>
+          </a:xfrm>
+          <a:prstGeom prst="roundRect">
+            <a:avLst>
+              <a:gd name="adj" fmla="val 4000"/>
+            </a:avLst>
+          </a:prstGeom>
+          <a:solidFill>
+            <a:srgbClr val="2D2D45"/>
+          </a:solidFill>
+          <a:ln>
+            <a:noFill/>
+          </a:ln>
+        </p:spPr>
+        <p:style>
+          <a:lnRef idx="1">
+            <a:schemeClr val="accent1"/>
+          </a:lnRef>
+          <a:fillRef idx="3">
+            <a:schemeClr val="accent1"/>
+          </a:fillRef>
+          <a:effectRef idx="2">
+            <a:schemeClr val="accent1"/>
+          </a:effectRef>
+          <a:fontRef idx="minor">
+            <a:schemeClr val="lt1"/>
+          </a:fontRef>
+        </p:style>
+        <p:txBody>
+          <a:bodyPr rtlCol="0" anchor="ctr"/>
+          <a:lstStyle/>
+          <a:p>
+            <a:pPr algn="ctr"/>
+          </a:p>
+        </p:txBody>
+      </p:sp>
+      <p:sp>
+        <p:nvSpPr>
+          <p:cNvPr id="25" name="TextBox 24"/>
+          <p:cNvSpPr txBox="1"/>
+          <p:nvPr/>
+        </p:nvSpPr>
+        <p:spPr>
+          <a:xfrm>
+            <a:off x="1143000" y="7205472"/>
+            <a:ext cx="2560320" cy="320040"/>
+          </a:xfrm>
+          <a:prstGeom prst="rect">
+            <a:avLst/>
+          </a:prstGeom>
+          <a:noFill/>
+        </p:spPr>
+        <p:txBody>
+          <a:bodyPr wrap="square" anchor="t">
+            <a:spAutoFit/>
+          </a:bodyPr>
+          <a:lstStyle/>
+          <a:p>
+            <a:pPr algn="l">
+              <a:spcAft>
+                <a:spcPts val="0"/>
+              </a:spcAft>
+              <a:defRPr sz="1100" b="1">
+                <a:solidFill>
+                  <a:srgbClr val="22C55E"/>
+                </a:solidFill>
+                <a:latin typeface="Inter"/>
+              </a:defRPr>
+            </a:pPr>
+            <a:r>
+              <a:t>✓  Kein IT-Projekt nötig</a:t>
+            </a:r>
+          </a:p>
+        </p:txBody>
+      </p:sp>
+      <p:sp>
+        <p:nvSpPr>
+          <p:cNvPr id="26" name="Rounded Rectangle 25"/>
+          <p:cNvSpPr/>
+          <p:nvPr/>
+        </p:nvSpPr>
+        <p:spPr>
+          <a:xfrm>
+            <a:off x="4023360" y="7178040"/>
+            <a:ext cx="4023359" cy="365760"/>
+          </a:xfrm>
+          <a:prstGeom prst="roundRect">
+            <a:avLst>
+              <a:gd name="adj" fmla="val 4000"/>
+            </a:avLst>
+          </a:prstGeom>
+          <a:solidFill>
+            <a:srgbClr val="2D2D45"/>
+          </a:solidFill>
+          <a:ln>
+            <a:noFill/>
+          </a:ln>
+        </p:spPr>
+        <p:style>
+          <a:lnRef idx="1">
+            <a:schemeClr val="accent1"/>
+          </a:lnRef>
+          <a:fillRef idx="3">
+            <a:schemeClr val="accent1"/>
+          </a:fillRef>
+          <a:effectRef idx="2">
+            <a:schemeClr val="accent1"/>
+          </a:effectRef>
+          <a:fontRef idx="minor">
+            <a:schemeClr val="lt1"/>
+          </a:fontRef>
+        </p:style>
+        <p:txBody>
+          <a:bodyPr rtlCol="0" anchor="ctr"/>
+          <a:lstStyle/>
+          <a:p>
+            <a:pPr algn="ctr"/>
+          </a:p>
+        </p:txBody>
+      </p:sp>
+      <p:sp>
+        <p:nvSpPr>
+          <p:cNvPr id="27" name="TextBox 26"/>
+          <p:cNvSpPr txBox="1"/>
+          <p:nvPr/>
+        </p:nvSpPr>
+        <p:spPr>
+          <a:xfrm>
+            <a:off x="4160520" y="7205472"/>
+            <a:ext cx="3749039" cy="320040"/>
+          </a:xfrm>
+          <a:prstGeom prst="rect">
+            <a:avLst/>
+          </a:prstGeom>
+          <a:noFill/>
+        </p:spPr>
+        <p:txBody>
+          <a:bodyPr wrap="square" anchor="t">
+            <a:spAutoFit/>
+          </a:bodyPr>
+          <a:lstStyle/>
+          <a:p>
+            <a:pPr algn="l">
+              <a:spcAft>
+                <a:spcPts val="0"/>
+              </a:spcAft>
+              <a:defRPr sz="1100" b="1">
+                <a:solidFill>
+                  <a:srgbClr val="22C55E"/>
+                </a:solidFill>
+                <a:latin typeface="Inter"/>
+              </a:defRPr>
+            </a:pPr>
+            <a:r>
+              <a:t>✓  Kein Zugang zu Kernbanksystemen</a:t>
+            </a:r>
+          </a:p>
+        </p:txBody>
+      </p:sp>
+      <p:sp>
+        <p:nvSpPr>
+          <p:cNvPr id="28" name="Rounded Rectangle 27"/>
+          <p:cNvSpPr/>
+          <p:nvPr/>
+        </p:nvSpPr>
+        <p:spPr>
+          <a:xfrm>
+            <a:off x="8229600" y="7178040"/>
+            <a:ext cx="2560320" cy="365760"/>
+          </a:xfrm>
+          <a:prstGeom prst="roundRect">
+            <a:avLst>
+              <a:gd name="adj" fmla="val 4000"/>
+            </a:avLst>
+          </a:prstGeom>
+          <a:solidFill>
+            <a:srgbClr val="2D2D45"/>
+          </a:solidFill>
+          <a:ln>
+            <a:noFill/>
+          </a:ln>
+        </p:spPr>
+        <p:style>
+          <a:lnRef idx="1">
+            <a:schemeClr val="accent1"/>
+          </a:lnRef>
+          <a:fillRef idx="3">
+            <a:schemeClr val="accent1"/>
+          </a:fillRef>
+          <a:effectRef idx="2">
+            <a:schemeClr val="accent1"/>
+          </a:effectRef>
+          <a:fontRef idx="minor">
+            <a:schemeClr val="lt1"/>
+          </a:fontRef>
+        </p:style>
+        <p:txBody>
+          <a:bodyPr rtlCol="0" anchor="ctr"/>
+          <a:lstStyle/>
+          <a:p>
+            <a:pPr algn="ctr"/>
+          </a:p>
+        </p:txBody>
+      </p:sp>
+      <p:sp>
+        <p:nvSpPr>
+          <p:cNvPr id="29" name="TextBox 28"/>
+          <p:cNvSpPr txBox="1"/>
+          <p:nvPr/>
+        </p:nvSpPr>
+        <p:spPr>
+          <a:xfrm>
+            <a:off x="8366760" y="7205472"/>
+            <a:ext cx="2286000" cy="320040"/>
+          </a:xfrm>
+          <a:prstGeom prst="rect">
+            <a:avLst/>
+          </a:prstGeom>
+          <a:noFill/>
+        </p:spPr>
+        <p:txBody>
+          <a:bodyPr wrap="square" anchor="t">
+            <a:spAutoFit/>
+          </a:bodyPr>
+          <a:lstStyle/>
+          <a:p>
+            <a:pPr algn="l">
+              <a:spcAft>
+                <a:spcPts val="0"/>
+              </a:spcAft>
+              <a:defRPr sz="1100" b="1">
+                <a:solidFill>
+                  <a:srgbClr val="22C55E"/>
+                </a:solidFill>
+                <a:latin typeface="Inter"/>
+              </a:defRPr>
+            </a:pPr>
+            <a:r>
+              <a:t>✓  Kein grosses Budget</a:t>
+            </a:r>
+          </a:p>
+        </p:txBody>
+      </p:sp>
+      <p:sp>
+        <p:nvSpPr>
+          <p:cNvPr id="30" name="Rounded Rectangle 29"/>
+          <p:cNvSpPr/>
+          <p:nvPr/>
+        </p:nvSpPr>
+        <p:spPr>
+          <a:xfrm>
+            <a:off x="10972800" y="7178040"/>
+            <a:ext cx="3931920" cy="365760"/>
+          </a:xfrm>
+          <a:prstGeom prst="roundRect">
+            <a:avLst>
+              <a:gd name="adj" fmla="val 4000"/>
+            </a:avLst>
+          </a:prstGeom>
+          <a:solidFill>
+            <a:srgbClr val="2D2D45"/>
+          </a:solidFill>
+          <a:ln>
+            <a:noFill/>
+          </a:ln>
+        </p:spPr>
+        <p:style>
+          <a:lnRef idx="1">
+            <a:schemeClr val="accent1"/>
+          </a:lnRef>
+          <a:fillRef idx="3">
+            <a:schemeClr val="accent1"/>
+          </a:fillRef>
+          <a:effectRef idx="2">
+            <a:schemeClr val="accent1"/>
+          </a:effectRef>
+          <a:fontRef idx="minor">
+            <a:schemeClr val="lt1"/>
+          </a:fontRef>
+        </p:style>
+        <p:txBody>
+          <a:bodyPr rtlCol="0" anchor="ctr"/>
+          <a:lstStyle/>
+          <a:p>
+            <a:pPr algn="ctr"/>
+          </a:p>
+        </p:txBody>
+      </p:sp>
+      <p:sp>
+        <p:nvSpPr>
+          <p:cNvPr id="31" name="TextBox 30"/>
+          <p:cNvSpPr txBox="1"/>
+          <p:nvPr/>
+        </p:nvSpPr>
+        <p:spPr>
+          <a:xfrm>
+            <a:off x="11109960" y="7205472"/>
+            <a:ext cx="3657600" cy="320040"/>
+          </a:xfrm>
+          <a:prstGeom prst="rect">
+            <a:avLst/>
+          </a:prstGeom>
+          <a:noFill/>
+        </p:spPr>
+        <p:txBody>
+          <a:bodyPr wrap="square" anchor="t">
+            <a:spAutoFit/>
+          </a:bodyPr>
+          <a:lstStyle/>
+          <a:p>
+            <a:pPr algn="l">
+              <a:spcAft>
+                <a:spcPts val="0"/>
+              </a:spcAft>
+              <a:defRPr sz="1100" b="1">
+                <a:solidFill>
+                  <a:srgbClr val="22C55E"/>
+                </a:solidFill>
+                <a:latin typeface="Inter"/>
+              </a:defRPr>
+            </a:pPr>
+            <a:r>
+              <a:t>✓  Ergebnisse in Wochen, nicht Jahren</a:t>
+            </a:r>
+          </a:p>
+        </p:txBody>
+      </p:sp>
+      <p:sp>
+        <p:nvSpPr>
+          <p:cNvPr id="32" name="TextBox 31"/>
+          <p:cNvSpPr txBox="1"/>
+          <p:nvPr/>
+        </p:nvSpPr>
+        <p:spPr>
+          <a:xfrm>
+            <a:off x="731520" y="7818120"/>
+            <a:ext cx="7315200" cy="274320"/>
+          </a:xfrm>
+          <a:prstGeom prst="rect">
+            <a:avLst/>
+          </a:prstGeom>
+          <a:noFill/>
+        </p:spPr>
+        <p:txBody>
+          <a:bodyPr wrap="square" anchor="t">
+            <a:spAutoFit/>
+          </a:bodyPr>
+          <a:lstStyle/>
+          <a:p>
+            <a:pPr algn="l">
+              <a:spcAft>
+                <a:spcPts val="0"/>
+              </a:spcAft>
+              <a:defRPr sz="900" b="0">
+                <a:solidFill>
+                  <a:srgbClr val="6B7280"/>
+                </a:solidFill>
+                <a:latin typeface="JetBrains Mono"/>
+              </a:defRPr>
+            </a:pPr>
+            <a:r>
+              <a:t>Vertraulich  ·  Salesteq × Raiffeisen</a:t>
+            </a:r>
+          </a:p>
+        </p:txBody>
+      </p:sp>
+      <p:sp>
+        <p:nvSpPr>
+          <p:cNvPr id="33" name="TextBox 32"/>
+          <p:cNvSpPr txBox="1"/>
+          <p:nvPr/>
+        </p:nvSpPr>
+        <p:spPr>
+          <a:xfrm>
+            <a:off x="12801600" y="7818120"/>
+            <a:ext cx="1097280" cy="274320"/>
+          </a:xfrm>
+          <a:prstGeom prst="rect">
+            <a:avLst/>
+          </a:prstGeom>
+          <a:noFill/>
+        </p:spPr>
+        <p:txBody>
+          <a:bodyPr wrap="square" anchor="t">
+            <a:spAutoFit/>
+          </a:bodyPr>
+          <a:lstStyle/>
+          <a:p>
+            <a:pPr algn="r">
+              <a:spcAft>
+                <a:spcPts val="0"/>
+              </a:spcAft>
+              <a:defRPr sz="900" b="0">
+                <a:solidFill>
+                  <a:srgbClr val="6B7280"/>
+                </a:solidFill>
+                <a:latin typeface="JetBrains Mono"/>
+              </a:defRPr>
+            </a:pPr>
+            <a:r>
+              <a:t>2 / 10</a:t>
+            </a:r>
+          </a:p>
+        </p:txBody>
+      </p:sp>
+    </p:spTree>
+  </p:cSld>
+  <p:clrMapOvr>
+    <a:masterClrMapping/>
+  </p:clrMapOvr>
+</p:sld>
+</file>
+
+<file path=ppt/slides/slide3.xml><?xml version="1.0" encoding="utf-8"?>
 <p:sld xmlns:a="http://schemas.openxmlformats.org/drawingml/2006/main" xmlns:p="http://schemas.openxmlformats.org/presentationml/2006/main" xmlns:r="http://schemas.openxmlformats.org/officeDocument/2006/relationships">
   <p:cSld>
     <p:bg>
@@ -5733,7 +8330,7 @@
               </a:defRPr>
             </a:pPr>
             <a:r>
-              <a:t>2 / 6</a:t>
+              <a:t>3 / 10</a:t>
             </a:r>
           </a:p>
         </p:txBody>
@@ -5746,7 +8343,7 @@
 </p:sld>
 </file>
 
-<file path=ppt/slides/slide3.xml><?xml version="1.0" encoding="utf-8"?>
+<file path=ppt/slides/slide4.xml><?xml version="1.0" encoding="utf-8"?>
 <p:sld xmlns:a="http://schemas.openxmlformats.org/drawingml/2006/main" xmlns:p="http://schemas.openxmlformats.org/presentationml/2006/main" xmlns:r="http://schemas.openxmlformats.org/officeDocument/2006/relationships">
   <p:cSld>
     <p:bg>
@@ -5837,7 +8434,7 @@
               </a:defRPr>
             </a:pPr>
             <a:r>
-              <a:t>Mögliche Use Cases für den Vertrieb</a:t>
+              <a:t>Vier Szenarien für den Vertrieb</a:t>
             </a:r>
           </a:p>
         </p:txBody>
@@ -5876,7 +8473,7 @@
               </a:defRPr>
             </a:pPr>
             <a:r>
-              <a:t>Diese Optionen basieren auf unserer Erfahrung. Welche relevant sind, entscheiden Sie.</a:t>
+              <a:t>Jedes Szenario steht für sich. Wir empfehlen, mit einem zu beginnen — welches, entscheiden Sie.</a:t>
             </a:r>
           </a:p>
         </p:txBody>
@@ -7542,7 +10139,7 @@
               </a:defRPr>
             </a:pPr>
             <a:r>
-              <a:t>3 / 6</a:t>
+              <a:t>4 / 10</a:t>
             </a:r>
           </a:p>
         </p:txBody>
@@ -7555,7 +10152,7 @@
 </p:sld>
 </file>
 
-<file path=ppt/slides/slide4.xml><?xml version="1.0" encoding="utf-8"?>
+<file path=ppt/slides/slide5.xml><?xml version="1.0" encoding="utf-8"?>
 <p:sld xmlns:a="http://schemas.openxmlformats.org/drawingml/2006/main" xmlns:p="http://schemas.openxmlformats.org/presentationml/2006/main" xmlns:r="http://schemas.openxmlformats.org/officeDocument/2006/relationships">
   <p:cSld>
     <p:bg>
@@ -7607,7 +10204,7 @@
               </a:defRPr>
             </a:pPr>
             <a:r>
-              <a:t>FOKUS: TRAINING</a:t>
+              <a:t>USE CASE A</a:t>
             </a:r>
           </a:p>
         </p:txBody>
@@ -7808,7 +10405,7 @@
               </a:defRPr>
             </a:pPr>
             <a:r>
-              <a:t>12–24 Monate</a:t>
+              <a:t>12–24 Monate Einarbeitung</a:t>
             </a:r>
           </a:p>
         </p:txBody>
@@ -7847,19 +10444,19 @@
               </a:defRPr>
             </a:pPr>
             <a:r>
-              <a:t>Einarbeitungszeit für neue Kundenberater</a:t>
+              <a:t>Das «Neustart»-Quereinsteigerprogramm dauert</a:t>
             </a:r>
             <a:br/>
             <a:r>
-              <a:t>im «Neustart»-Quereinsteigerprogramm.</a:t>
+              <a:t>12–24 Monate. In dieser Zeit ist ein RM noch</a:t>
             </a:r>
             <a:br/>
             <a:r>
-              <a:t>Das sind 12–24 Monate, in denen ein RM</a:t>
+              <a:t>nicht voll produktiv — aber die Filiale trägt</a:t>
             </a:r>
             <a:br/>
             <a:r>
-              <a:t>noch nicht voll produktiv berät.</a:t>
+              <a:t>bereits die Kosten.</a:t>
             </a:r>
           </a:p>
         </p:txBody>
@@ -7937,19 +10534,19 @@
               </a:defRPr>
             </a:pPr>
             <a:r>
-              <a:t>Hypotheken (SARON, Festhypothek, Libor-Ablösung),</a:t>
+              <a:t>Hypotheken (SARON, Festhypothek), Vorsorge</a:t>
             </a:r>
             <a:br/>
             <a:r>
-              <a:t>Vorsorge (3a, 3b, Pensionskasse, Freizügigkeit),</a:t>
+              <a:t>(3a, 3b, Pensionskasse, Freizügigkeit), Anlagen</a:t>
             </a:r>
             <a:br/>
             <a:r>
-              <a:t>Anlagen (Fonds, ETF, Vermögensverwaltung) —</a:t>
+              <a:t>(Fonds, ETF, Vermögensverwaltung) — alles muss</a:t>
             </a:r>
             <a:br/>
             <a:r>
-              <a:t>alles muss sitzen, auch regulatorisch.</a:t>
+              <a:t>sitzen, auch regulatorisch. SAQ-Zertifizierung.</a:t>
             </a:r>
           </a:p>
         </p:txBody>
@@ -7988,7 +10585,7 @@
               </a:defRPr>
             </a:pPr>
             <a:r>
-              <a:t>212 Banken</a:t>
+              <a:t>212 Banken, uneinheitlich</a:t>
             </a:r>
           </a:p>
         </p:txBody>
@@ -8035,7 +10632,7 @@
             </a:r>
             <a:br/>
             <a:r>
-              <a:t>Zentrales Training erreicht nicht jeden.</a:t>
+              <a:t>Zentrales Training erreicht nicht alle gleich.</a:t>
             </a:r>
           </a:p>
         </p:txBody>
@@ -8150,7 +10747,7 @@
               <a:spcAft>
                 <a:spcPts val="0"/>
               </a:spcAft>
-              <a:defRPr sz="1400" b="1">
+              <a:defRPr sz="1200" b="1">
                 <a:solidFill>
                   <a:srgbClr val="FFFFFF"/>
                 </a:solidFill>
@@ -8171,7 +10768,7 @@
         </p:nvSpPr>
         <p:spPr>
           <a:xfrm>
-            <a:off x="7863840" y="2971800"/>
+            <a:off x="7863840" y="2926079"/>
             <a:ext cx="5669280" cy="1005840"/>
           </a:xfrm>
           <a:prstGeom prst="rect">
@@ -8205,11 +10802,11 @@
             </a:r>
             <a:br/>
             <a:r>
-              <a:t>Reklamation. Die AI gibt strukturiertes Feedback</a:t>
+              <a:t>Reklamation. Strukturiertes Feedback nach jedem</a:t>
             </a:r>
             <a:br/>
             <a:r>
-              <a:t>nach jedem Gespräch — Stärken und Lücken.</a:t>
+              <a:t>Gespräch — Stärken und Lücken.</a:t>
             </a:r>
           </a:p>
         </p:txBody>
@@ -8240,7 +10837,7 @@
               <a:spcAft>
                 <a:spcPts val="0"/>
               </a:spcAft>
-              <a:defRPr sz="1400" b="1">
+              <a:defRPr sz="1200" b="1">
                 <a:solidFill>
                   <a:srgbClr val="FFFFFF"/>
                 </a:solidFill>
@@ -8261,7 +10858,7 @@
         </p:nvSpPr>
         <p:spPr>
           <a:xfrm>
-            <a:off x="7863840" y="4526279"/>
+            <a:off x="7863840" y="4480559"/>
             <a:ext cx="5669280" cy="1005840"/>
           </a:xfrm>
           <a:prstGeom prst="rect">
@@ -8291,15 +10888,15 @@
             </a:r>
             <a:br/>
             <a:r>
-              <a:t>Festhypothek bei aktueller Zinslage?» — AI beantwortet</a:t>
+              <a:t>Festhypothek bei aktueller Zinslage?» — AI</a:t>
             </a:r>
             <a:br/>
             <a:r>
-              <a:t>Produktfragen sofort, mit aktuellen Konditionen.</a:t>
+              <a:t>beantwortet Produktfragen sofort, mit aktuellen</a:t>
             </a:r>
             <a:br/>
             <a:r>
-              <a:t>Wie ein erfahrener Kollege, der immer Zeit hat.</a:t>
+              <a:t>Konditionen. Wie ein erfahrener Kollege.</a:t>
             </a:r>
           </a:p>
         </p:txBody>
@@ -8330,7 +10927,7 @@
               <a:spcAft>
                 <a:spcPts val="0"/>
               </a:spcAft>
-              <a:defRPr sz="1400" b="1">
+              <a:defRPr sz="1200" b="1">
                 <a:solidFill>
                   <a:srgbClr val="FFFFFF"/>
                 </a:solidFill>
@@ -8351,7 +10948,7 @@
         </p:nvSpPr>
         <p:spPr>
           <a:xfrm>
-            <a:off x="7863840" y="6080759"/>
+            <a:off x="7863840" y="6035040"/>
             <a:ext cx="5669280" cy="1005840"/>
           </a:xfrm>
           <a:prstGeom prst="rect">
@@ -8551,7 +11148,7 @@
               </a:defRPr>
             </a:pPr>
             <a:r>
-              <a:t>4 / 6</a:t>
+              <a:t>5 / 10</a:t>
             </a:r>
           </a:p>
         </p:txBody>
@@ -8564,7 +11161,3042 @@
 </p:sld>
 </file>
 
-<file path=ppt/slides/slide5.xml><?xml version="1.0" encoding="utf-8"?>
+<file path=ppt/slides/slide6.xml><?xml version="1.0" encoding="utf-8"?>
+<p:sld xmlns:a="http://schemas.openxmlformats.org/drawingml/2006/main" xmlns:p="http://schemas.openxmlformats.org/presentationml/2006/main" xmlns:r="http://schemas.openxmlformats.org/officeDocument/2006/relationships">
+  <p:cSld>
+    <p:bg>
+      <p:bgPr>
+        <a:solidFill>
+          <a:srgbClr val="1A1A2E"/>
+        </a:solidFill>
+        <a:effectLst/>
+      </p:bgPr>
+    </p:bg>
+    <p:spTree>
+      <p:nvGrpSpPr>
+        <p:cNvPr id="1" name=""/>
+        <p:cNvGrpSpPr/>
+        <p:nvPr/>
+      </p:nvGrpSpPr>
+      <p:grpSpPr/>
+      <p:sp>
+        <p:nvSpPr>
+          <p:cNvPr id="2" name="TextBox 1"/>
+          <p:cNvSpPr txBox="1"/>
+          <p:nvPr/>
+        </p:nvSpPr>
+        <p:spPr>
+          <a:xfrm>
+            <a:off x="731520" y="457200"/>
+            <a:ext cx="5486400" cy="274320"/>
+          </a:xfrm>
+          <a:prstGeom prst="rect">
+            <a:avLst/>
+          </a:prstGeom>
+          <a:noFill/>
+        </p:spPr>
+        <p:txBody>
+          <a:bodyPr wrap="square" anchor="t">
+            <a:spAutoFit/>
+          </a:bodyPr>
+          <a:lstStyle/>
+          <a:p>
+            <a:pPr algn="l">
+              <a:spcAft>
+                <a:spcPts val="0"/>
+              </a:spcAft>
+              <a:defRPr sz="1000" b="1">
+                <a:solidFill>
+                  <a:srgbClr val="E8A838"/>
+                </a:solidFill>
+                <a:latin typeface="JetBrains Mono"/>
+              </a:defRPr>
+            </a:pPr>
+            <a:r>
+              <a:t>USE CASE B</a:t>
+            </a:r>
+          </a:p>
+        </p:txBody>
+      </p:sp>
+      <p:sp>
+        <p:nvSpPr>
+          <p:cNvPr id="3" name="TextBox 2"/>
+          <p:cNvSpPr txBox="1"/>
+          <p:nvPr/>
+        </p:nvSpPr>
+        <p:spPr>
+          <a:xfrm>
+            <a:off x="731520" y="822960"/>
+            <a:ext cx="12801600" cy="548640"/>
+          </a:xfrm>
+          <a:prstGeom prst="rect">
+            <a:avLst/>
+          </a:prstGeom>
+          <a:noFill/>
+        </p:spPr>
+        <p:txBody>
+          <a:bodyPr wrap="square" anchor="t">
+            <a:spAutoFit/>
+          </a:bodyPr>
+          <a:lstStyle/>
+          <a:p>
+            <a:pPr algn="l">
+              <a:spcAft>
+                <a:spcPts val="0"/>
+              </a:spcAft>
+              <a:defRPr sz="3400" b="0">
+                <a:solidFill>
+                  <a:srgbClr val="FFFFFF"/>
+                </a:solidFill>
+                <a:latin typeface="Inter"/>
+              </a:defRPr>
+            </a:pPr>
+            <a:r>
+              <a:t>Proaktive Ansprache statt verpasste Gelegenheiten</a:t>
+            </a:r>
+          </a:p>
+        </p:txBody>
+      </p:sp>
+      <p:sp>
+        <p:nvSpPr>
+          <p:cNvPr id="4" name="TextBox 3"/>
+          <p:cNvSpPr txBox="1"/>
+          <p:nvPr/>
+        </p:nvSpPr>
+        <p:spPr>
+          <a:xfrm>
+            <a:off x="731520" y="1417320"/>
+            <a:ext cx="10972800" cy="365760"/>
+          </a:xfrm>
+          <a:prstGeom prst="rect">
+            <a:avLst/>
+          </a:prstGeom>
+          <a:noFill/>
+        </p:spPr>
+        <p:txBody>
+          <a:bodyPr wrap="square" anchor="t">
+            <a:spAutoFit/>
+          </a:bodyPr>
+          <a:lstStyle/>
+          <a:p>
+            <a:pPr algn="l">
+              <a:spcAft>
+                <a:spcPts val="0"/>
+              </a:spcAft>
+              <a:defRPr sz="1400" b="0">
+                <a:solidFill>
+                  <a:srgbClr val="9CA3AF"/>
+                </a:solidFill>
+                <a:latin typeface="Inter"/>
+              </a:defRPr>
+            </a:pPr>
+            <a:r>
+              <a:t>Jede Zinssenkung, jeder Hypothekenablauf, jede Pensionierung ist ein Beratungsanlass — aber nur wenn er erkannt und genutzt wird.</a:t>
+            </a:r>
+          </a:p>
+        </p:txBody>
+      </p:sp>
+      <p:sp>
+        <p:nvSpPr>
+          <p:cNvPr id="5" name="Rounded Rectangle 4"/>
+          <p:cNvSpPr/>
+          <p:nvPr/>
+        </p:nvSpPr>
+        <p:spPr>
+          <a:xfrm>
+            <a:off x="731520" y="2103120"/>
+            <a:ext cx="6400800" cy="5303520"/>
+          </a:xfrm>
+          <a:prstGeom prst="roundRect">
+            <a:avLst>
+              <a:gd name="adj" fmla="val 4000"/>
+            </a:avLst>
+          </a:prstGeom>
+          <a:solidFill>
+            <a:srgbClr val="222238"/>
+          </a:solidFill>
+          <a:ln>
+            <a:noFill/>
+          </a:ln>
+        </p:spPr>
+        <p:style>
+          <a:lnRef idx="1">
+            <a:schemeClr val="accent1"/>
+          </a:lnRef>
+          <a:fillRef idx="3">
+            <a:schemeClr val="accent1"/>
+          </a:fillRef>
+          <a:effectRef idx="2">
+            <a:schemeClr val="accent1"/>
+          </a:effectRef>
+          <a:fontRef idx="minor">
+            <a:schemeClr val="lt1"/>
+          </a:fontRef>
+        </p:style>
+        <p:txBody>
+          <a:bodyPr rtlCol="0" anchor="ctr"/>
+          <a:lstStyle/>
+          <a:p>
+            <a:pPr algn="ctr"/>
+          </a:p>
+        </p:txBody>
+      </p:sp>
+      <p:sp>
+        <p:nvSpPr>
+          <p:cNvPr id="6" name="TextBox 5"/>
+          <p:cNvSpPr txBox="1"/>
+          <p:nvPr/>
+        </p:nvSpPr>
+        <p:spPr>
+          <a:xfrm>
+            <a:off x="1005840" y="2240280"/>
+            <a:ext cx="5486400" cy="228600"/>
+          </a:xfrm>
+          <a:prstGeom prst="rect">
+            <a:avLst/>
+          </a:prstGeom>
+          <a:noFill/>
+        </p:spPr>
+        <p:txBody>
+          <a:bodyPr wrap="square" anchor="t">
+            <a:spAutoFit/>
+          </a:bodyPr>
+          <a:lstStyle/>
+          <a:p>
+            <a:pPr algn="l">
+              <a:spcAft>
+                <a:spcPts val="0"/>
+              </a:spcAft>
+              <a:defRPr sz="1000" b="1">
+                <a:solidFill>
+                  <a:srgbClr val="6B7280"/>
+                </a:solidFill>
+                <a:latin typeface="JetBrains Mono"/>
+              </a:defRPr>
+            </a:pPr>
+            <a:r>
+              <a:t>DIE HERAUSFORDERUNG</a:t>
+            </a:r>
+          </a:p>
+        </p:txBody>
+      </p:sp>
+      <p:sp>
+        <p:nvSpPr>
+          <p:cNvPr id="7" name="TextBox 6"/>
+          <p:cNvSpPr txBox="1"/>
+          <p:nvPr/>
+        </p:nvSpPr>
+        <p:spPr>
+          <a:xfrm>
+            <a:off x="1005840" y="2651760"/>
+            <a:ext cx="5486400" cy="274320"/>
+          </a:xfrm>
+          <a:prstGeom prst="rect">
+            <a:avLst/>
+          </a:prstGeom>
+          <a:noFill/>
+        </p:spPr>
+        <p:txBody>
+          <a:bodyPr wrap="square" anchor="t">
+            <a:spAutoFit/>
+          </a:bodyPr>
+          <a:lstStyle/>
+          <a:p>
+            <a:pPr algn="l">
+              <a:spcAft>
+                <a:spcPts val="0"/>
+              </a:spcAft>
+              <a:defRPr sz="1400" b="1">
+                <a:solidFill>
+                  <a:srgbClr val="E8A838"/>
+                </a:solidFill>
+                <a:latin typeface="Inter"/>
+              </a:defRPr>
+            </a:pPr>
+            <a:r>
+              <a:t>Trigger werden nicht erkannt</a:t>
+            </a:r>
+          </a:p>
+        </p:txBody>
+      </p:sp>
+      <p:sp>
+        <p:nvSpPr>
+          <p:cNvPr id="8" name="TextBox 7"/>
+          <p:cNvSpPr txBox="1"/>
+          <p:nvPr/>
+        </p:nvSpPr>
+        <p:spPr>
+          <a:xfrm>
+            <a:off x="1005840" y="2971800"/>
+            <a:ext cx="5669280" cy="1005840"/>
+          </a:xfrm>
+          <a:prstGeom prst="rect">
+            <a:avLst/>
+          </a:prstGeom>
+          <a:noFill/>
+        </p:spPr>
+        <p:txBody>
+          <a:bodyPr wrap="square" anchor="t">
+            <a:spAutoFit/>
+          </a:bodyPr>
+          <a:lstStyle/>
+          <a:p>
+            <a:pPr algn="l">
+              <a:spcAft>
+                <a:spcPts val="0"/>
+              </a:spcAft>
+              <a:defRPr sz="1100" b="0">
+                <a:solidFill>
+                  <a:srgbClr val="9CA3AF"/>
+                </a:solidFill>
+                <a:latin typeface="Inter"/>
+              </a:defRPr>
+            </a:pPr>
+            <a:r>
+              <a:t>Zinssenkungen betreffen hunderte Kunden gleichzeitig.</a:t>
+            </a:r>
+            <a:br/>
+            <a:r>
+              <a:t>Ablaufende Festhypotheken, Pensionierungen in 5 Jahren,</a:t>
+            </a:r>
+            <a:br/>
+            <a:r>
+              <a:t>Geburtstage — die Daten existieren, aber niemand</a:t>
+            </a:r>
+            <a:br/>
+            <a:r>
+              <a:t>handelt systematisch darauf.</a:t>
+            </a:r>
+          </a:p>
+        </p:txBody>
+      </p:sp>
+      <p:sp>
+        <p:nvSpPr>
+          <p:cNvPr id="9" name="TextBox 8"/>
+          <p:cNvSpPr txBox="1"/>
+          <p:nvPr/>
+        </p:nvSpPr>
+        <p:spPr>
+          <a:xfrm>
+            <a:off x="1005840" y="4206240"/>
+            <a:ext cx="5486400" cy="274320"/>
+          </a:xfrm>
+          <a:prstGeom prst="rect">
+            <a:avLst/>
+          </a:prstGeom>
+          <a:noFill/>
+        </p:spPr>
+        <p:txBody>
+          <a:bodyPr wrap="square" anchor="t">
+            <a:spAutoFit/>
+          </a:bodyPr>
+          <a:lstStyle/>
+          <a:p>
+            <a:pPr algn="l">
+              <a:spcAft>
+                <a:spcPts val="0"/>
+              </a:spcAft>
+              <a:defRPr sz="1400" b="1">
+                <a:solidFill>
+                  <a:srgbClr val="E8A838"/>
+                </a:solidFill>
+                <a:latin typeface="Inter"/>
+              </a:defRPr>
+            </a:pPr>
+            <a:r>
+              <a:t>Ansprache ist zeitintensiv</a:t>
+            </a:r>
+          </a:p>
+        </p:txBody>
+      </p:sp>
+      <p:sp>
+        <p:nvSpPr>
+          <p:cNvPr id="10" name="TextBox 9"/>
+          <p:cNvSpPr txBox="1"/>
+          <p:nvPr/>
+        </p:nvSpPr>
+        <p:spPr>
+          <a:xfrm>
+            <a:off x="1005840" y="4526279"/>
+            <a:ext cx="5669280" cy="1005840"/>
+          </a:xfrm>
+          <a:prstGeom prst="rect">
+            <a:avLst/>
+          </a:prstGeom>
+          <a:noFill/>
+        </p:spPr>
+        <p:txBody>
+          <a:bodyPr wrap="square" anchor="t">
+            <a:spAutoFit/>
+          </a:bodyPr>
+          <a:lstStyle/>
+          <a:p>
+            <a:pPr algn="l">
+              <a:spcAft>
+                <a:spcPts val="0"/>
+              </a:spcAft>
+              <a:defRPr sz="1100" b="0">
+                <a:solidFill>
+                  <a:srgbClr val="9CA3AF"/>
+                </a:solidFill>
+                <a:latin typeface="Inter"/>
+              </a:defRPr>
+            </a:pPr>
+            <a:r>
+              <a:t>Jede personalisierte Nachricht erfordert Recherche:</a:t>
+            </a:r>
+            <a:br/>
+            <a:r>
+              <a:t>Welches Produkt passt? Was war die letzte Interaktion?</a:t>
+            </a:r>
+            <a:br/>
+            <a:r>
+              <a:t>In welcher Sprache? Ein RM schafft 5–10 pro Tag —</a:t>
+            </a:r>
+            <a:br/>
+            <a:r>
+              <a:t>aber es bräuchte 50.</a:t>
+            </a:r>
+          </a:p>
+        </p:txBody>
+      </p:sp>
+      <p:sp>
+        <p:nvSpPr>
+          <p:cNvPr id="11" name="TextBox 10"/>
+          <p:cNvSpPr txBox="1"/>
+          <p:nvPr/>
+        </p:nvSpPr>
+        <p:spPr>
+          <a:xfrm>
+            <a:off x="1005840" y="5760720"/>
+            <a:ext cx="5486400" cy="274320"/>
+          </a:xfrm>
+          <a:prstGeom prst="rect">
+            <a:avLst/>
+          </a:prstGeom>
+          <a:noFill/>
+        </p:spPr>
+        <p:txBody>
+          <a:bodyPr wrap="square" anchor="t">
+            <a:spAutoFit/>
+          </a:bodyPr>
+          <a:lstStyle/>
+          <a:p>
+            <a:pPr algn="l">
+              <a:spcAft>
+                <a:spcPts val="0"/>
+              </a:spcAft>
+              <a:defRPr sz="1400" b="1">
+                <a:solidFill>
+                  <a:srgbClr val="E8A838"/>
+                </a:solidFill>
+                <a:latin typeface="Inter"/>
+              </a:defRPr>
+            </a:pPr>
+            <a:r>
+              <a:t>Das lange Ende wird vernachlässigt</a:t>
+            </a:r>
+          </a:p>
+        </p:txBody>
+      </p:sp>
+      <p:sp>
+        <p:nvSpPr>
+          <p:cNvPr id="12" name="TextBox 11"/>
+          <p:cNvSpPr txBox="1"/>
+          <p:nvPr/>
+        </p:nvSpPr>
+        <p:spPr>
+          <a:xfrm>
+            <a:off x="1005840" y="6080759"/>
+            <a:ext cx="5669280" cy="1005840"/>
+          </a:xfrm>
+          <a:prstGeom prst="rect">
+            <a:avLst/>
+          </a:prstGeom>
+          <a:noFill/>
+        </p:spPr>
+        <p:txBody>
+          <a:bodyPr wrap="square" anchor="t">
+            <a:spAutoFit/>
+          </a:bodyPr>
+          <a:lstStyle/>
+          <a:p>
+            <a:pPr algn="l">
+              <a:spcAft>
+                <a:spcPts val="0"/>
+              </a:spcAft>
+              <a:defRPr sz="1100" b="0">
+                <a:solidFill>
+                  <a:srgbClr val="9CA3AF"/>
+                </a:solidFill>
+                <a:latin typeface="Inter"/>
+              </a:defRPr>
+            </a:pPr>
+            <a:r>
+              <a:t>Die Top-Kunden werden betreut. Aber die 80%</a:t>
+            </a:r>
+            <a:br/>
+            <a:r>
+              <a:t>darunter — solide Kunden mit Cross-Selling-Potenzial —</a:t>
+            </a:r>
+            <a:br/>
+            <a:r>
+              <a:t>bekommen nur Kontakt, wenn sie selbst anrufen.</a:t>
+            </a:r>
+          </a:p>
+        </p:txBody>
+      </p:sp>
+      <p:sp>
+        <p:nvSpPr>
+          <p:cNvPr id="13" name="Rounded Rectangle 12"/>
+          <p:cNvSpPr/>
+          <p:nvPr/>
+        </p:nvSpPr>
+        <p:spPr>
+          <a:xfrm>
+            <a:off x="7589520" y="2103120"/>
+            <a:ext cx="6400800" cy="5303520"/>
+          </a:xfrm>
+          <a:prstGeom prst="roundRect">
+            <a:avLst>
+              <a:gd name="adj" fmla="val 4000"/>
+            </a:avLst>
+          </a:prstGeom>
+          <a:solidFill>
+            <a:srgbClr val="222238"/>
+          </a:solidFill>
+          <a:ln>
+            <a:noFill/>
+          </a:ln>
+        </p:spPr>
+        <p:style>
+          <a:lnRef idx="1">
+            <a:schemeClr val="accent1"/>
+          </a:lnRef>
+          <a:fillRef idx="3">
+            <a:schemeClr val="accent1"/>
+          </a:fillRef>
+          <a:effectRef idx="2">
+            <a:schemeClr val="accent1"/>
+          </a:effectRef>
+          <a:fontRef idx="minor">
+            <a:schemeClr val="lt1"/>
+          </a:fontRef>
+        </p:style>
+        <p:txBody>
+          <a:bodyPr rtlCol="0" anchor="ctr"/>
+          <a:lstStyle/>
+          <a:p>
+            <a:pPr algn="ctr"/>
+          </a:p>
+        </p:txBody>
+      </p:sp>
+      <p:sp>
+        <p:nvSpPr>
+          <p:cNvPr id="14" name="TextBox 13"/>
+          <p:cNvSpPr txBox="1"/>
+          <p:nvPr/>
+        </p:nvSpPr>
+        <p:spPr>
+          <a:xfrm>
+            <a:off x="7863840" y="2240280"/>
+            <a:ext cx="5486400" cy="228600"/>
+          </a:xfrm>
+          <a:prstGeom prst="rect">
+            <a:avLst/>
+          </a:prstGeom>
+          <a:noFill/>
+        </p:spPr>
+        <p:txBody>
+          <a:bodyPr wrap="square" anchor="t">
+            <a:spAutoFit/>
+          </a:bodyPr>
+          <a:lstStyle/>
+          <a:p>
+            <a:pPr algn="l">
+              <a:spcAft>
+                <a:spcPts val="0"/>
+              </a:spcAft>
+              <a:defRPr sz="1000" b="1">
+                <a:solidFill>
+                  <a:srgbClr val="E8A838"/>
+                </a:solidFill>
+                <a:latin typeface="JetBrains Mono"/>
+              </a:defRPr>
+            </a:pPr>
+            <a:r>
+              <a:t>WAS AI VERÄNDERN KANN</a:t>
+            </a:r>
+          </a:p>
+        </p:txBody>
+      </p:sp>
+      <p:sp>
+        <p:nvSpPr>
+          <p:cNvPr id="15" name="TextBox 14"/>
+          <p:cNvSpPr txBox="1"/>
+          <p:nvPr/>
+        </p:nvSpPr>
+        <p:spPr>
+          <a:xfrm>
+            <a:off x="7863840" y="2651760"/>
+            <a:ext cx="5486400" cy="274320"/>
+          </a:xfrm>
+          <a:prstGeom prst="rect">
+            <a:avLst/>
+          </a:prstGeom>
+          <a:noFill/>
+        </p:spPr>
+        <p:txBody>
+          <a:bodyPr wrap="square" anchor="t">
+            <a:spAutoFit/>
+          </a:bodyPr>
+          <a:lstStyle/>
+          <a:p>
+            <a:pPr algn="l">
+              <a:spcAft>
+                <a:spcPts val="0"/>
+              </a:spcAft>
+              <a:defRPr sz="1200" b="1">
+                <a:solidFill>
+                  <a:srgbClr val="FFFFFF"/>
+                </a:solidFill>
+                <a:latin typeface="Inter"/>
+              </a:defRPr>
+            </a:pPr>
+            <a:r>
+              <a:t>Trigger-basierte Erkennung</a:t>
+            </a:r>
+          </a:p>
+        </p:txBody>
+      </p:sp>
+      <p:sp>
+        <p:nvSpPr>
+          <p:cNvPr id="16" name="TextBox 15"/>
+          <p:cNvSpPr txBox="1"/>
+          <p:nvPr/>
+        </p:nvSpPr>
+        <p:spPr>
+          <a:xfrm>
+            <a:off x="7863840" y="2926079"/>
+            <a:ext cx="5669280" cy="1005840"/>
+          </a:xfrm>
+          <a:prstGeom prst="rect">
+            <a:avLst/>
+          </a:prstGeom>
+          <a:noFill/>
+        </p:spPr>
+        <p:txBody>
+          <a:bodyPr wrap="square" anchor="t">
+            <a:spAutoFit/>
+          </a:bodyPr>
+          <a:lstStyle/>
+          <a:p>
+            <a:pPr algn="l">
+              <a:spcAft>
+                <a:spcPts val="0"/>
+              </a:spcAft>
+              <a:defRPr sz="1100" b="0">
+                <a:solidFill>
+                  <a:srgbClr val="9CA3AF"/>
+                </a:solidFill>
+                <a:latin typeface="Inter"/>
+              </a:defRPr>
+            </a:pPr>
+            <a:r>
+              <a:t>AI überwacht Ereignisse: Zinsänderung der SNB,</a:t>
+            </a:r>
+            <a:br/>
+            <a:r>
+              <a:t>Ablauf Festhypothek in 6 Monaten, Kunde wird 60.</a:t>
+            </a:r>
+            <a:br/>
+            <a:r>
+              <a:t>Erstellt automatisch eine priorisierte Kontaktliste</a:t>
+            </a:r>
+            <a:br/>
+            <a:r>
+              <a:t>mit empfohlener Ansprache.</a:t>
+            </a:r>
+          </a:p>
+        </p:txBody>
+      </p:sp>
+      <p:sp>
+        <p:nvSpPr>
+          <p:cNvPr id="17" name="TextBox 16"/>
+          <p:cNvSpPr txBox="1"/>
+          <p:nvPr/>
+        </p:nvSpPr>
+        <p:spPr>
+          <a:xfrm>
+            <a:off x="7863840" y="4206240"/>
+            <a:ext cx="5486400" cy="274320"/>
+          </a:xfrm>
+          <a:prstGeom prst="rect">
+            <a:avLst/>
+          </a:prstGeom>
+          <a:noFill/>
+        </p:spPr>
+        <p:txBody>
+          <a:bodyPr wrap="square" anchor="t">
+            <a:spAutoFit/>
+          </a:bodyPr>
+          <a:lstStyle/>
+          <a:p>
+            <a:pPr algn="l">
+              <a:spcAft>
+                <a:spcPts val="0"/>
+              </a:spcAft>
+              <a:defRPr sz="1200" b="1">
+                <a:solidFill>
+                  <a:srgbClr val="FFFFFF"/>
+                </a:solidFill>
+                <a:latin typeface="Inter"/>
+              </a:defRPr>
+            </a:pPr>
+            <a:r>
+              <a:t>Personalisierte Entwürfe</a:t>
+            </a:r>
+          </a:p>
+        </p:txBody>
+      </p:sp>
+      <p:sp>
+        <p:nvSpPr>
+          <p:cNvPr id="18" name="TextBox 17"/>
+          <p:cNvSpPr txBox="1"/>
+          <p:nvPr/>
+        </p:nvSpPr>
+        <p:spPr>
+          <a:xfrm>
+            <a:off x="7863840" y="4480559"/>
+            <a:ext cx="5669280" cy="1005840"/>
+          </a:xfrm>
+          <a:prstGeom prst="rect">
+            <a:avLst/>
+          </a:prstGeom>
+          <a:noFill/>
+        </p:spPr>
+        <p:txBody>
+          <a:bodyPr wrap="square" anchor="t">
+            <a:spAutoFit/>
+          </a:bodyPr>
+          <a:lstStyle/>
+          <a:p>
+            <a:pPr algn="l">
+              <a:spcAft>
+                <a:spcPts val="0"/>
+              </a:spcAft>
+              <a:defRPr sz="1100" b="0">
+                <a:solidFill>
+                  <a:srgbClr val="9CA3AF"/>
+                </a:solidFill>
+                <a:latin typeface="Inter"/>
+              </a:defRPr>
+            </a:pPr>
+            <a:r>
+              <a:t>Für jeden Kunden ein vorformulierter Entwurf —</a:t>
+            </a:r>
+            <a:br/>
+            <a:r>
+              <a:t>in der richtigen Sprache (DE/FR/IT), mit Kontext</a:t>
+            </a:r>
+            <a:br/>
+            <a:r>
+              <a:t>(«Ihr Festzins läuft im September ab, aktuelle</a:t>
+            </a:r>
+            <a:br/>
+            <a:r>
+              <a:t>SARON-Konditionen sind…»). RM gibt frei.</a:t>
+            </a:r>
+          </a:p>
+        </p:txBody>
+      </p:sp>
+      <p:sp>
+        <p:nvSpPr>
+          <p:cNvPr id="19" name="TextBox 18"/>
+          <p:cNvSpPr txBox="1"/>
+          <p:nvPr/>
+        </p:nvSpPr>
+        <p:spPr>
+          <a:xfrm>
+            <a:off x="7863840" y="5760720"/>
+            <a:ext cx="5486400" cy="274320"/>
+          </a:xfrm>
+          <a:prstGeom prst="rect">
+            <a:avLst/>
+          </a:prstGeom>
+          <a:noFill/>
+        </p:spPr>
+        <p:txBody>
+          <a:bodyPr wrap="square" anchor="t">
+            <a:spAutoFit/>
+          </a:bodyPr>
+          <a:lstStyle/>
+          <a:p>
+            <a:pPr algn="l">
+              <a:spcAft>
+                <a:spcPts val="0"/>
+              </a:spcAft>
+              <a:defRPr sz="1200" b="1">
+                <a:solidFill>
+                  <a:srgbClr val="FFFFFF"/>
+                </a:solidFill>
+                <a:latin typeface="Inter"/>
+              </a:defRPr>
+            </a:pPr>
+            <a:r>
+              <a:t>Skalierung ohne Qualitätsverlust</a:t>
+            </a:r>
+          </a:p>
+        </p:txBody>
+      </p:sp>
+      <p:sp>
+        <p:nvSpPr>
+          <p:cNvPr id="20" name="TextBox 19"/>
+          <p:cNvSpPr txBox="1"/>
+          <p:nvPr/>
+        </p:nvSpPr>
+        <p:spPr>
+          <a:xfrm>
+            <a:off x="7863840" y="6035040"/>
+            <a:ext cx="5669280" cy="1005840"/>
+          </a:xfrm>
+          <a:prstGeom prst="rect">
+            <a:avLst/>
+          </a:prstGeom>
+          <a:noFill/>
+        </p:spPr>
+        <p:txBody>
+          <a:bodyPr wrap="square" anchor="t">
+            <a:spAutoFit/>
+          </a:bodyPr>
+          <a:lstStyle/>
+          <a:p>
+            <a:pPr algn="l">
+              <a:spcAft>
+                <a:spcPts val="0"/>
+              </a:spcAft>
+              <a:defRPr sz="1100" b="0">
+                <a:solidFill>
+                  <a:srgbClr val="9CA3AF"/>
+                </a:solidFill>
+                <a:latin typeface="Inter"/>
+              </a:defRPr>
+            </a:pPr>
+            <a:r>
+              <a:t>Statt 5 Anrufe pro Tag: 50 personalisierte</a:t>
+            </a:r>
+            <a:br/>
+            <a:r>
+              <a:t>Nachrichten, alle vom RM freigegeben. Kein</a:t>
+            </a:r>
+            <a:br/>
+            <a:r>
+              <a:t>Massenversand — individuelle Ansprache auf</a:t>
+            </a:r>
+            <a:br/>
+            <a:r>
+              <a:t>Knopfdruck. Auch für das «lange Ende».</a:t>
+            </a:r>
+          </a:p>
+        </p:txBody>
+      </p:sp>
+      <p:sp>
+        <p:nvSpPr>
+          <p:cNvPr id="21" name="Rounded Rectangle 20"/>
+          <p:cNvSpPr/>
+          <p:nvPr/>
+        </p:nvSpPr>
+        <p:spPr>
+          <a:xfrm>
+            <a:off x="731520" y="7498079"/>
+            <a:ext cx="13167360" cy="228600"/>
+          </a:xfrm>
+          <a:prstGeom prst="roundRect">
+            <a:avLst>
+              <a:gd name="adj" fmla="val 4000"/>
+            </a:avLst>
+          </a:prstGeom>
+          <a:solidFill>
+            <a:srgbClr val="2D2D45"/>
+          </a:solidFill>
+          <a:ln>
+            <a:noFill/>
+          </a:ln>
+        </p:spPr>
+        <p:style>
+          <a:lnRef idx="1">
+            <a:schemeClr val="accent1"/>
+          </a:lnRef>
+          <a:fillRef idx="3">
+            <a:schemeClr val="accent1"/>
+          </a:fillRef>
+          <a:effectRef idx="2">
+            <a:schemeClr val="accent1"/>
+          </a:effectRef>
+          <a:fontRef idx="minor">
+            <a:schemeClr val="lt1"/>
+          </a:fontRef>
+        </p:style>
+        <p:txBody>
+          <a:bodyPr rtlCol="0" anchor="ctr"/>
+          <a:lstStyle/>
+          <a:p>
+            <a:pPr algn="ctr"/>
+          </a:p>
+        </p:txBody>
+      </p:sp>
+      <p:sp>
+        <p:nvSpPr>
+          <p:cNvPr id="22" name="TextBox 21"/>
+          <p:cNvSpPr txBox="1"/>
+          <p:nvPr/>
+        </p:nvSpPr>
+        <p:spPr>
+          <a:xfrm>
+            <a:off x="1005840" y="7498079"/>
+            <a:ext cx="12801600" cy="228600"/>
+          </a:xfrm>
+          <a:prstGeom prst="rect">
+            <a:avLst/>
+          </a:prstGeom>
+          <a:noFill/>
+        </p:spPr>
+        <p:txBody>
+          <a:bodyPr wrap="square" anchor="t">
+            <a:spAutoFit/>
+          </a:bodyPr>
+          <a:lstStyle/>
+          <a:p>
+            <a:pPr algn="l">
+              <a:spcAft>
+                <a:spcPts val="0"/>
+              </a:spcAft>
+              <a:defRPr sz="1000" b="1">
+                <a:solidFill>
+                  <a:srgbClr val="E8A838"/>
+                </a:solidFill>
+                <a:latin typeface="Inter"/>
+              </a:defRPr>
+            </a:pPr>
+            <a:r>
+              <a:t>McKinsey: Agentic AI im Banking-Vertrieb steigert den Umsatz pro RM um 3–15% und erhöht Kundengespräche um ~40%.</a:t>
+            </a:r>
+          </a:p>
+        </p:txBody>
+      </p:sp>
+      <p:sp>
+        <p:nvSpPr>
+          <p:cNvPr id="23" name="TextBox 22"/>
+          <p:cNvSpPr txBox="1"/>
+          <p:nvPr/>
+        </p:nvSpPr>
+        <p:spPr>
+          <a:xfrm>
+            <a:off x="731520" y="7818120"/>
+            <a:ext cx="7315200" cy="274320"/>
+          </a:xfrm>
+          <a:prstGeom prst="rect">
+            <a:avLst/>
+          </a:prstGeom>
+          <a:noFill/>
+        </p:spPr>
+        <p:txBody>
+          <a:bodyPr wrap="square" anchor="t">
+            <a:spAutoFit/>
+          </a:bodyPr>
+          <a:lstStyle/>
+          <a:p>
+            <a:pPr algn="l">
+              <a:spcAft>
+                <a:spcPts val="0"/>
+              </a:spcAft>
+              <a:defRPr sz="900" b="0">
+                <a:solidFill>
+                  <a:srgbClr val="505060"/>
+                </a:solidFill>
+                <a:latin typeface="JetBrains Mono"/>
+              </a:defRPr>
+            </a:pPr>
+            <a:r>
+              <a:t>Vertraulich  ·  Salesteq × Raiffeisen</a:t>
+            </a:r>
+          </a:p>
+        </p:txBody>
+      </p:sp>
+      <p:sp>
+        <p:nvSpPr>
+          <p:cNvPr id="24" name="TextBox 23"/>
+          <p:cNvSpPr txBox="1"/>
+          <p:nvPr/>
+        </p:nvSpPr>
+        <p:spPr>
+          <a:xfrm>
+            <a:off x="12801600" y="7818120"/>
+            <a:ext cx="1097280" cy="274320"/>
+          </a:xfrm>
+          <a:prstGeom prst="rect">
+            <a:avLst/>
+          </a:prstGeom>
+          <a:noFill/>
+        </p:spPr>
+        <p:txBody>
+          <a:bodyPr wrap="square" anchor="t">
+            <a:spAutoFit/>
+          </a:bodyPr>
+          <a:lstStyle/>
+          <a:p>
+            <a:pPr algn="r">
+              <a:spcAft>
+                <a:spcPts val="0"/>
+              </a:spcAft>
+              <a:defRPr sz="900" b="0">
+                <a:solidFill>
+                  <a:srgbClr val="505060"/>
+                </a:solidFill>
+                <a:latin typeface="JetBrains Mono"/>
+              </a:defRPr>
+            </a:pPr>
+            <a:r>
+              <a:t>6 / 10</a:t>
+            </a:r>
+          </a:p>
+        </p:txBody>
+      </p:sp>
+    </p:spTree>
+  </p:cSld>
+  <p:clrMapOvr>
+    <a:masterClrMapping/>
+  </p:clrMapOvr>
+</p:sld>
+</file>
+
+<file path=ppt/slides/slide7.xml><?xml version="1.0" encoding="utf-8"?>
+<p:sld xmlns:a="http://schemas.openxmlformats.org/drawingml/2006/main" xmlns:p="http://schemas.openxmlformats.org/presentationml/2006/main" xmlns:r="http://schemas.openxmlformats.org/officeDocument/2006/relationships">
+  <p:cSld>
+    <p:bg>
+      <p:bgPr>
+        <a:solidFill>
+          <a:srgbClr val="1A1A2E"/>
+        </a:solidFill>
+        <a:effectLst/>
+      </p:bgPr>
+    </p:bg>
+    <p:spTree>
+      <p:nvGrpSpPr>
+        <p:cNvPr id="1" name=""/>
+        <p:cNvGrpSpPr/>
+        <p:nvPr/>
+      </p:nvGrpSpPr>
+      <p:grpSpPr/>
+      <p:sp>
+        <p:nvSpPr>
+          <p:cNvPr id="2" name="TextBox 1"/>
+          <p:cNvSpPr txBox="1"/>
+          <p:nvPr/>
+        </p:nvSpPr>
+        <p:spPr>
+          <a:xfrm>
+            <a:off x="731520" y="457200"/>
+            <a:ext cx="5486400" cy="274320"/>
+          </a:xfrm>
+          <a:prstGeom prst="rect">
+            <a:avLst/>
+          </a:prstGeom>
+          <a:noFill/>
+        </p:spPr>
+        <p:txBody>
+          <a:bodyPr wrap="square" anchor="t">
+            <a:spAutoFit/>
+          </a:bodyPr>
+          <a:lstStyle/>
+          <a:p>
+            <a:pPr algn="l">
+              <a:spcAft>
+                <a:spcPts val="0"/>
+              </a:spcAft>
+              <a:defRPr sz="1000" b="1">
+                <a:solidFill>
+                  <a:srgbClr val="E8A838"/>
+                </a:solidFill>
+                <a:latin typeface="JetBrains Mono"/>
+              </a:defRPr>
+            </a:pPr>
+            <a:r>
+              <a:t>USE CASE C</a:t>
+            </a:r>
+          </a:p>
+        </p:txBody>
+      </p:sp>
+      <p:sp>
+        <p:nvSpPr>
+          <p:cNvPr id="3" name="TextBox 2"/>
+          <p:cNvSpPr txBox="1"/>
+          <p:nvPr/>
+        </p:nvSpPr>
+        <p:spPr>
+          <a:xfrm>
+            <a:off x="731520" y="822960"/>
+            <a:ext cx="12801600" cy="548640"/>
+          </a:xfrm>
+          <a:prstGeom prst="rect">
+            <a:avLst/>
+          </a:prstGeom>
+          <a:noFill/>
+        </p:spPr>
+        <p:txBody>
+          <a:bodyPr wrap="square" anchor="t">
+            <a:spAutoFit/>
+          </a:bodyPr>
+          <a:lstStyle/>
+          <a:p>
+            <a:pPr algn="l">
+              <a:spcAft>
+                <a:spcPts val="0"/>
+              </a:spcAft>
+              <a:defRPr sz="3400" b="0">
+                <a:solidFill>
+                  <a:srgbClr val="FFFFFF"/>
+                </a:solidFill>
+                <a:latin typeface="Inter"/>
+              </a:defRPr>
+            </a:pPr>
+            <a:r>
+              <a:t>Einheitliches Produktwissen für 212 Banken</a:t>
+            </a:r>
+          </a:p>
+        </p:txBody>
+      </p:sp>
+      <p:sp>
+        <p:nvSpPr>
+          <p:cNvPr id="4" name="TextBox 3"/>
+          <p:cNvSpPr txBox="1"/>
+          <p:nvPr/>
+        </p:nvSpPr>
+        <p:spPr>
+          <a:xfrm>
+            <a:off x="731520" y="1417320"/>
+            <a:ext cx="10972800" cy="365760"/>
+          </a:xfrm>
+          <a:prstGeom prst="rect">
+            <a:avLst/>
+          </a:prstGeom>
+          <a:noFill/>
+        </p:spPr>
+        <p:txBody>
+          <a:bodyPr wrap="square" anchor="t">
+            <a:spAutoFit/>
+          </a:bodyPr>
+          <a:lstStyle/>
+          <a:p>
+            <a:pPr algn="l">
+              <a:spcAft>
+                <a:spcPts val="0"/>
+              </a:spcAft>
+              <a:defRPr sz="1400" b="0">
+                <a:solidFill>
+                  <a:srgbClr val="9CA3AF"/>
+                </a:solidFill>
+                <a:latin typeface="Inter"/>
+              </a:defRPr>
+            </a:pPr>
+            <a:r>
+              <a:t>Laufend neue Produkte, Konditionsänderungen, regulatorische Updates — wie bleibt jeder Berater aktuell?</a:t>
+            </a:r>
+          </a:p>
+        </p:txBody>
+      </p:sp>
+      <p:sp>
+        <p:nvSpPr>
+          <p:cNvPr id="5" name="Rounded Rectangle 4"/>
+          <p:cNvSpPr/>
+          <p:nvPr/>
+        </p:nvSpPr>
+        <p:spPr>
+          <a:xfrm>
+            <a:off x="731520" y="2103120"/>
+            <a:ext cx="6400800" cy="5303520"/>
+          </a:xfrm>
+          <a:prstGeom prst="roundRect">
+            <a:avLst>
+              <a:gd name="adj" fmla="val 4000"/>
+            </a:avLst>
+          </a:prstGeom>
+          <a:solidFill>
+            <a:srgbClr val="222238"/>
+          </a:solidFill>
+          <a:ln>
+            <a:noFill/>
+          </a:ln>
+        </p:spPr>
+        <p:style>
+          <a:lnRef idx="1">
+            <a:schemeClr val="accent1"/>
+          </a:lnRef>
+          <a:fillRef idx="3">
+            <a:schemeClr val="accent1"/>
+          </a:fillRef>
+          <a:effectRef idx="2">
+            <a:schemeClr val="accent1"/>
+          </a:effectRef>
+          <a:fontRef idx="minor">
+            <a:schemeClr val="lt1"/>
+          </a:fontRef>
+        </p:style>
+        <p:txBody>
+          <a:bodyPr rtlCol="0" anchor="ctr"/>
+          <a:lstStyle/>
+          <a:p>
+            <a:pPr algn="ctr"/>
+          </a:p>
+        </p:txBody>
+      </p:sp>
+      <p:sp>
+        <p:nvSpPr>
+          <p:cNvPr id="6" name="TextBox 5"/>
+          <p:cNvSpPr txBox="1"/>
+          <p:nvPr/>
+        </p:nvSpPr>
+        <p:spPr>
+          <a:xfrm>
+            <a:off x="1005840" y="2240280"/>
+            <a:ext cx="5486400" cy="228600"/>
+          </a:xfrm>
+          <a:prstGeom prst="rect">
+            <a:avLst/>
+          </a:prstGeom>
+          <a:noFill/>
+        </p:spPr>
+        <p:txBody>
+          <a:bodyPr wrap="square" anchor="t">
+            <a:spAutoFit/>
+          </a:bodyPr>
+          <a:lstStyle/>
+          <a:p>
+            <a:pPr algn="l">
+              <a:spcAft>
+                <a:spcPts val="0"/>
+              </a:spcAft>
+              <a:defRPr sz="1000" b="1">
+                <a:solidFill>
+                  <a:srgbClr val="6B7280"/>
+                </a:solidFill>
+                <a:latin typeface="JetBrains Mono"/>
+              </a:defRPr>
+            </a:pPr>
+            <a:r>
+              <a:t>DIE HERAUSFORDERUNG</a:t>
+            </a:r>
+          </a:p>
+        </p:txBody>
+      </p:sp>
+      <p:sp>
+        <p:nvSpPr>
+          <p:cNvPr id="7" name="TextBox 6"/>
+          <p:cNvSpPr txBox="1"/>
+          <p:nvPr/>
+        </p:nvSpPr>
+        <p:spPr>
+          <a:xfrm>
+            <a:off x="1005840" y="2651760"/>
+            <a:ext cx="5486400" cy="274320"/>
+          </a:xfrm>
+          <a:prstGeom prst="rect">
+            <a:avLst/>
+          </a:prstGeom>
+          <a:noFill/>
+        </p:spPr>
+        <p:txBody>
+          <a:bodyPr wrap="square" anchor="t">
+            <a:spAutoFit/>
+          </a:bodyPr>
+          <a:lstStyle/>
+          <a:p>
+            <a:pPr algn="l">
+              <a:spcAft>
+                <a:spcPts val="0"/>
+              </a:spcAft>
+              <a:defRPr sz="1400" b="1">
+                <a:solidFill>
+                  <a:srgbClr val="E8A838"/>
+                </a:solidFill>
+                <a:latin typeface="Inter"/>
+              </a:defRPr>
+            </a:pPr>
+            <a:r>
+              <a:t>Wissen veraltet schnell</a:t>
+            </a:r>
+          </a:p>
+        </p:txBody>
+      </p:sp>
+      <p:sp>
+        <p:nvSpPr>
+          <p:cNvPr id="8" name="TextBox 7"/>
+          <p:cNvSpPr txBox="1"/>
+          <p:nvPr/>
+        </p:nvSpPr>
+        <p:spPr>
+          <a:xfrm>
+            <a:off x="1005840" y="2971800"/>
+            <a:ext cx="5669280" cy="1005840"/>
+          </a:xfrm>
+          <a:prstGeom prst="rect">
+            <a:avLst/>
+          </a:prstGeom>
+          <a:noFill/>
+        </p:spPr>
+        <p:txBody>
+          <a:bodyPr wrap="square" anchor="t">
+            <a:spAutoFit/>
+          </a:bodyPr>
+          <a:lstStyle/>
+          <a:p>
+            <a:pPr algn="l">
+              <a:spcAft>
+                <a:spcPts val="0"/>
+              </a:spcAft>
+              <a:defRPr sz="1100" b="0">
+                <a:solidFill>
+                  <a:srgbClr val="9CA3AF"/>
+                </a:solidFill>
+                <a:latin typeface="Inter"/>
+              </a:defRPr>
+            </a:pPr>
+            <a:r>
+              <a:t>Neue Hypothekenmodelle, geänderte 3a-Maximalbeträge,</a:t>
+            </a:r>
+            <a:br/>
+            <a:r>
+              <a:t>FINMA-Auflagen, nDSG-Anforderungen — das Wissen</a:t>
+            </a:r>
+            <a:br/>
+            <a:r>
+              <a:t>der Berater muss ständig aktualisiert werden.</a:t>
+            </a:r>
+            <a:br/>
+            <a:r>
+              <a:t>Schulungen erreichen nicht alle gleichzeitig.</a:t>
+            </a:r>
+          </a:p>
+        </p:txBody>
+      </p:sp>
+      <p:sp>
+        <p:nvSpPr>
+          <p:cNvPr id="9" name="TextBox 8"/>
+          <p:cNvSpPr txBox="1"/>
+          <p:nvPr/>
+        </p:nvSpPr>
+        <p:spPr>
+          <a:xfrm>
+            <a:off x="1005840" y="4206240"/>
+            <a:ext cx="5486400" cy="274320"/>
+          </a:xfrm>
+          <a:prstGeom prst="rect">
+            <a:avLst/>
+          </a:prstGeom>
+          <a:noFill/>
+        </p:spPr>
+        <p:txBody>
+          <a:bodyPr wrap="square" anchor="t">
+            <a:spAutoFit/>
+          </a:bodyPr>
+          <a:lstStyle/>
+          <a:p>
+            <a:pPr algn="l">
+              <a:spcAft>
+                <a:spcPts val="0"/>
+              </a:spcAft>
+              <a:defRPr sz="1400" b="1">
+                <a:solidFill>
+                  <a:srgbClr val="E8A838"/>
+                </a:solidFill>
+                <a:latin typeface="Inter"/>
+              </a:defRPr>
+            </a:pPr>
+            <a:r>
+              <a:t>Dezentrale Struktur</a:t>
+            </a:r>
+          </a:p>
+        </p:txBody>
+      </p:sp>
+      <p:sp>
+        <p:nvSpPr>
+          <p:cNvPr id="10" name="TextBox 9"/>
+          <p:cNvSpPr txBox="1"/>
+          <p:nvPr/>
+        </p:nvSpPr>
+        <p:spPr>
+          <a:xfrm>
+            <a:off x="1005840" y="4526279"/>
+            <a:ext cx="5669280" cy="1005840"/>
+          </a:xfrm>
+          <a:prstGeom prst="rect">
+            <a:avLst/>
+          </a:prstGeom>
+          <a:noFill/>
+        </p:spPr>
+        <p:txBody>
+          <a:bodyPr wrap="square" anchor="t">
+            <a:spAutoFit/>
+          </a:bodyPr>
+          <a:lstStyle/>
+          <a:p>
+            <a:pPr algn="l">
+              <a:spcAft>
+                <a:spcPts val="0"/>
+              </a:spcAft>
+              <a:defRPr sz="1100" b="0">
+                <a:solidFill>
+                  <a:srgbClr val="9CA3AF"/>
+                </a:solidFill>
+                <a:latin typeface="Inter"/>
+              </a:defRPr>
+            </a:pPr>
+            <a:r>
+              <a:t>212 selbstständige Genossenschaftsbanken bedeuten</a:t>
+            </a:r>
+            <a:br/>
+            <a:r>
+              <a:t>212 unterschiedliche Wissensstände. Was in St. Gallen</a:t>
+            </a:r>
+            <a:br/>
+            <a:r>
+              <a:t>bekannt ist, muss in Winterthur nicht angekommen sein.</a:t>
+            </a:r>
+            <a:br/>
+            <a:r>
+              <a:t>Kein zentrales Nachschlagewerk in Echtzeit.</a:t>
+            </a:r>
+          </a:p>
+        </p:txBody>
+      </p:sp>
+      <p:sp>
+        <p:nvSpPr>
+          <p:cNvPr id="11" name="TextBox 10"/>
+          <p:cNvSpPr txBox="1"/>
+          <p:nvPr/>
+        </p:nvSpPr>
+        <p:spPr>
+          <a:xfrm>
+            <a:off x="1005840" y="5760720"/>
+            <a:ext cx="5486400" cy="274320"/>
+          </a:xfrm>
+          <a:prstGeom prst="rect">
+            <a:avLst/>
+          </a:prstGeom>
+          <a:noFill/>
+        </p:spPr>
+        <p:txBody>
+          <a:bodyPr wrap="square" anchor="t">
+            <a:spAutoFit/>
+          </a:bodyPr>
+          <a:lstStyle/>
+          <a:p>
+            <a:pPr algn="l">
+              <a:spcAft>
+                <a:spcPts val="0"/>
+              </a:spcAft>
+              <a:defRPr sz="1400" b="1">
+                <a:solidFill>
+                  <a:srgbClr val="E8A838"/>
+                </a:solidFill>
+                <a:latin typeface="Inter"/>
+              </a:defRPr>
+            </a:pPr>
+            <a:r>
+              <a:t>Kosten der Inkonsistenz</a:t>
+            </a:r>
+          </a:p>
+        </p:txBody>
+      </p:sp>
+      <p:sp>
+        <p:nvSpPr>
+          <p:cNvPr id="12" name="TextBox 11"/>
+          <p:cNvSpPr txBox="1"/>
+          <p:nvPr/>
+        </p:nvSpPr>
+        <p:spPr>
+          <a:xfrm>
+            <a:off x="1005840" y="6080759"/>
+            <a:ext cx="5669280" cy="1005840"/>
+          </a:xfrm>
+          <a:prstGeom prst="rect">
+            <a:avLst/>
+          </a:prstGeom>
+          <a:noFill/>
+        </p:spPr>
+        <p:txBody>
+          <a:bodyPr wrap="square" anchor="t">
+            <a:spAutoFit/>
+          </a:bodyPr>
+          <a:lstStyle/>
+          <a:p>
+            <a:pPr algn="l">
+              <a:spcAft>
+                <a:spcPts val="0"/>
+              </a:spcAft>
+              <a:defRPr sz="1100" b="0">
+                <a:solidFill>
+                  <a:srgbClr val="9CA3AF"/>
+                </a:solidFill>
+                <a:latin typeface="Inter"/>
+              </a:defRPr>
+            </a:pPr>
+            <a:r>
+              <a:t>Ein Berater, der veraltete Konditionen nennt oder</a:t>
+            </a:r>
+            <a:br/>
+            <a:r>
+              <a:t>ein Produkt nicht kennt, verliert Vertrauen.</a:t>
+            </a:r>
+            <a:br/>
+            <a:r>
+              <a:t>Im schlimmsten Fall: Compliance-Risiko durch</a:t>
+            </a:r>
+            <a:br/>
+            <a:r>
+              <a:t>falsche Beratung.</a:t>
+            </a:r>
+          </a:p>
+        </p:txBody>
+      </p:sp>
+      <p:sp>
+        <p:nvSpPr>
+          <p:cNvPr id="13" name="Rounded Rectangle 12"/>
+          <p:cNvSpPr/>
+          <p:nvPr/>
+        </p:nvSpPr>
+        <p:spPr>
+          <a:xfrm>
+            <a:off x="7589520" y="2103120"/>
+            <a:ext cx="6400800" cy="5303520"/>
+          </a:xfrm>
+          <a:prstGeom prst="roundRect">
+            <a:avLst>
+              <a:gd name="adj" fmla="val 4000"/>
+            </a:avLst>
+          </a:prstGeom>
+          <a:solidFill>
+            <a:srgbClr val="222238"/>
+          </a:solidFill>
+          <a:ln>
+            <a:noFill/>
+          </a:ln>
+        </p:spPr>
+        <p:style>
+          <a:lnRef idx="1">
+            <a:schemeClr val="accent1"/>
+          </a:lnRef>
+          <a:fillRef idx="3">
+            <a:schemeClr val="accent1"/>
+          </a:fillRef>
+          <a:effectRef idx="2">
+            <a:schemeClr val="accent1"/>
+          </a:effectRef>
+          <a:fontRef idx="minor">
+            <a:schemeClr val="lt1"/>
+          </a:fontRef>
+        </p:style>
+        <p:txBody>
+          <a:bodyPr rtlCol="0" anchor="ctr"/>
+          <a:lstStyle/>
+          <a:p>
+            <a:pPr algn="ctr"/>
+          </a:p>
+        </p:txBody>
+      </p:sp>
+      <p:sp>
+        <p:nvSpPr>
+          <p:cNvPr id="14" name="TextBox 13"/>
+          <p:cNvSpPr txBox="1"/>
+          <p:nvPr/>
+        </p:nvSpPr>
+        <p:spPr>
+          <a:xfrm>
+            <a:off x="7863840" y="2240280"/>
+            <a:ext cx="5486400" cy="228600"/>
+          </a:xfrm>
+          <a:prstGeom prst="rect">
+            <a:avLst/>
+          </a:prstGeom>
+          <a:noFill/>
+        </p:spPr>
+        <p:txBody>
+          <a:bodyPr wrap="square" anchor="t">
+            <a:spAutoFit/>
+          </a:bodyPr>
+          <a:lstStyle/>
+          <a:p>
+            <a:pPr algn="l">
+              <a:spcAft>
+                <a:spcPts val="0"/>
+              </a:spcAft>
+              <a:defRPr sz="1000" b="1">
+                <a:solidFill>
+                  <a:srgbClr val="E8A838"/>
+                </a:solidFill>
+                <a:latin typeface="JetBrains Mono"/>
+              </a:defRPr>
+            </a:pPr>
+            <a:r>
+              <a:t>WAS AI VERÄNDERN KANN</a:t>
+            </a:r>
+          </a:p>
+        </p:txBody>
+      </p:sp>
+      <p:sp>
+        <p:nvSpPr>
+          <p:cNvPr id="15" name="TextBox 14"/>
+          <p:cNvSpPr txBox="1"/>
+          <p:nvPr/>
+        </p:nvSpPr>
+        <p:spPr>
+          <a:xfrm>
+            <a:off x="7863840" y="2651760"/>
+            <a:ext cx="5486400" cy="274320"/>
+          </a:xfrm>
+          <a:prstGeom prst="rect">
+            <a:avLst/>
+          </a:prstGeom>
+          <a:noFill/>
+        </p:spPr>
+        <p:txBody>
+          <a:bodyPr wrap="square" anchor="t">
+            <a:spAutoFit/>
+          </a:bodyPr>
+          <a:lstStyle/>
+          <a:p>
+            <a:pPr algn="l">
+              <a:spcAft>
+                <a:spcPts val="0"/>
+              </a:spcAft>
+              <a:defRPr sz="1200" b="1">
+                <a:solidFill>
+                  <a:srgbClr val="FFFFFF"/>
+                </a:solidFill>
+                <a:latin typeface="Inter"/>
+              </a:defRPr>
+            </a:pPr>
+            <a:r>
+              <a:t>AI-Wissensbasis in Echtzeit</a:t>
+            </a:r>
+          </a:p>
+        </p:txBody>
+      </p:sp>
+      <p:sp>
+        <p:nvSpPr>
+          <p:cNvPr id="16" name="TextBox 15"/>
+          <p:cNvSpPr txBox="1"/>
+          <p:nvPr/>
+        </p:nvSpPr>
+        <p:spPr>
+          <a:xfrm>
+            <a:off x="7863840" y="2926079"/>
+            <a:ext cx="5669280" cy="1005840"/>
+          </a:xfrm>
+          <a:prstGeom prst="rect">
+            <a:avLst/>
+          </a:prstGeom>
+          <a:noFill/>
+        </p:spPr>
+        <p:txBody>
+          <a:bodyPr wrap="square" anchor="t">
+            <a:spAutoFit/>
+          </a:bodyPr>
+          <a:lstStyle/>
+          <a:p>
+            <a:pPr algn="l">
+              <a:spcAft>
+                <a:spcPts val="0"/>
+              </a:spcAft>
+              <a:defRPr sz="1100" b="0">
+                <a:solidFill>
+                  <a:srgbClr val="9CA3AF"/>
+                </a:solidFill>
+                <a:latin typeface="Inter"/>
+              </a:defRPr>
+            </a:pPr>
+            <a:r>
+              <a:t>Ein interner AI-Assistent, der alle Produktdokumente,</a:t>
+            </a:r>
+            <a:br/>
+            <a:r>
+              <a:t>Konditionen und regulatorischen Texte kennt.</a:t>
+            </a:r>
+            <a:br/>
+            <a:r>
+              <a:t>Berater stellen Fragen in natürlicher Sprache:</a:t>
+            </a:r>
+            <a:br/>
+            <a:r>
+              <a:t>«Welche Vorsorge-Optionen hat ein 55-Jähriger?»</a:t>
+            </a:r>
+          </a:p>
+        </p:txBody>
+      </p:sp>
+      <p:sp>
+        <p:nvSpPr>
+          <p:cNvPr id="17" name="TextBox 16"/>
+          <p:cNvSpPr txBox="1"/>
+          <p:nvPr/>
+        </p:nvSpPr>
+        <p:spPr>
+          <a:xfrm>
+            <a:off x="7863840" y="4206240"/>
+            <a:ext cx="5486400" cy="274320"/>
+          </a:xfrm>
+          <a:prstGeom prst="rect">
+            <a:avLst/>
+          </a:prstGeom>
+          <a:noFill/>
+        </p:spPr>
+        <p:txBody>
+          <a:bodyPr wrap="square" anchor="t">
+            <a:spAutoFit/>
+          </a:bodyPr>
+          <a:lstStyle/>
+          <a:p>
+            <a:pPr algn="l">
+              <a:spcAft>
+                <a:spcPts val="0"/>
+              </a:spcAft>
+              <a:defRPr sz="1200" b="1">
+                <a:solidFill>
+                  <a:srgbClr val="FFFFFF"/>
+                </a:solidFill>
+                <a:latin typeface="Inter"/>
+              </a:defRPr>
+            </a:pPr>
+            <a:r>
+              <a:t>Immer aktuell, automatisch</a:t>
+            </a:r>
+          </a:p>
+        </p:txBody>
+      </p:sp>
+      <p:sp>
+        <p:nvSpPr>
+          <p:cNvPr id="18" name="TextBox 17"/>
+          <p:cNvSpPr txBox="1"/>
+          <p:nvPr/>
+        </p:nvSpPr>
+        <p:spPr>
+          <a:xfrm>
+            <a:off x="7863840" y="4480559"/>
+            <a:ext cx="5669280" cy="1005840"/>
+          </a:xfrm>
+          <a:prstGeom prst="rect">
+            <a:avLst/>
+          </a:prstGeom>
+          <a:noFill/>
+        </p:spPr>
+        <p:txBody>
+          <a:bodyPr wrap="square" anchor="t">
+            <a:spAutoFit/>
+          </a:bodyPr>
+          <a:lstStyle/>
+          <a:p>
+            <a:pPr algn="l">
+              <a:spcAft>
+                <a:spcPts val="0"/>
+              </a:spcAft>
+              <a:defRPr sz="1100" b="0">
+                <a:solidFill>
+                  <a:srgbClr val="9CA3AF"/>
+                </a:solidFill>
+                <a:latin typeface="Inter"/>
+              </a:defRPr>
+            </a:pPr>
+            <a:r>
+              <a:t>Neue Konditionen oder regulatorische Änderungen</a:t>
+            </a:r>
+            <a:br/>
+            <a:r>
+              <a:t>werden eingepflegt und sind sofort für alle</a:t>
+            </a:r>
+            <a:br/>
+            <a:r>
+              <a:t>212 Banken verfügbar. Kein Schulungsrundlauf,</a:t>
+            </a:r>
+            <a:br/>
+            <a:r>
+              <a:t>kein veraltetes PDF.</a:t>
+            </a:r>
+          </a:p>
+        </p:txBody>
+      </p:sp>
+      <p:sp>
+        <p:nvSpPr>
+          <p:cNvPr id="19" name="TextBox 18"/>
+          <p:cNvSpPr txBox="1"/>
+          <p:nvPr/>
+        </p:nvSpPr>
+        <p:spPr>
+          <a:xfrm>
+            <a:off x="7863840" y="5760720"/>
+            <a:ext cx="5486400" cy="274320"/>
+          </a:xfrm>
+          <a:prstGeom prst="rect">
+            <a:avLst/>
+          </a:prstGeom>
+          <a:noFill/>
+        </p:spPr>
+        <p:txBody>
+          <a:bodyPr wrap="square" anchor="t">
+            <a:spAutoFit/>
+          </a:bodyPr>
+          <a:lstStyle/>
+          <a:p>
+            <a:pPr algn="l">
+              <a:spcAft>
+                <a:spcPts val="0"/>
+              </a:spcAft>
+              <a:defRPr sz="1200" b="1">
+                <a:solidFill>
+                  <a:srgbClr val="FFFFFF"/>
+                </a:solidFill>
+                <a:latin typeface="Inter"/>
+              </a:defRPr>
+            </a:pPr>
+            <a:r>
+              <a:t>Nachvollziehbar &amp; zitierfähig</a:t>
+            </a:r>
+          </a:p>
+        </p:txBody>
+      </p:sp>
+      <p:sp>
+        <p:nvSpPr>
+          <p:cNvPr id="20" name="TextBox 19"/>
+          <p:cNvSpPr txBox="1"/>
+          <p:nvPr/>
+        </p:nvSpPr>
+        <p:spPr>
+          <a:xfrm>
+            <a:off x="7863840" y="6035040"/>
+            <a:ext cx="5669280" cy="1005840"/>
+          </a:xfrm>
+          <a:prstGeom prst="rect">
+            <a:avLst/>
+          </a:prstGeom>
+          <a:noFill/>
+        </p:spPr>
+        <p:txBody>
+          <a:bodyPr wrap="square" anchor="t">
+            <a:spAutoFit/>
+          </a:bodyPr>
+          <a:lstStyle/>
+          <a:p>
+            <a:pPr algn="l">
+              <a:spcAft>
+                <a:spcPts val="0"/>
+              </a:spcAft>
+              <a:defRPr sz="1100" b="0">
+                <a:solidFill>
+                  <a:srgbClr val="9CA3AF"/>
+                </a:solidFill>
+                <a:latin typeface="Inter"/>
+              </a:defRPr>
+            </a:pPr>
+            <a:r>
+              <a:t>Jede Antwort mit Quellenangabe — Berater kann</a:t>
+            </a:r>
+            <a:br/>
+            <a:r>
+              <a:t>prüfen, woher die Information stammt. Keine</a:t>
+            </a:r>
+            <a:br/>
+            <a:r>
+              <a:t>Blackbox. Audit-fähig für Compliance-Prüfungen.</a:t>
+            </a:r>
+            <a:br/>
+            <a:r>
+              <a:t>Drei Sprachen: DE/FR/IT.</a:t>
+            </a:r>
+          </a:p>
+        </p:txBody>
+      </p:sp>
+      <p:sp>
+        <p:nvSpPr>
+          <p:cNvPr id="21" name="Rounded Rectangle 20"/>
+          <p:cNvSpPr/>
+          <p:nvPr/>
+        </p:nvSpPr>
+        <p:spPr>
+          <a:xfrm>
+            <a:off x="731520" y="7498079"/>
+            <a:ext cx="13167360" cy="228600"/>
+          </a:xfrm>
+          <a:prstGeom prst="roundRect">
+            <a:avLst>
+              <a:gd name="adj" fmla="val 4000"/>
+            </a:avLst>
+          </a:prstGeom>
+          <a:solidFill>
+            <a:srgbClr val="2D2D45"/>
+          </a:solidFill>
+          <a:ln>
+            <a:noFill/>
+          </a:ln>
+        </p:spPr>
+        <p:style>
+          <a:lnRef idx="1">
+            <a:schemeClr val="accent1"/>
+          </a:lnRef>
+          <a:fillRef idx="3">
+            <a:schemeClr val="accent1"/>
+          </a:fillRef>
+          <a:effectRef idx="2">
+            <a:schemeClr val="accent1"/>
+          </a:effectRef>
+          <a:fontRef idx="minor">
+            <a:schemeClr val="lt1"/>
+          </a:fontRef>
+        </p:style>
+        <p:txBody>
+          <a:bodyPr rtlCol="0" anchor="ctr"/>
+          <a:lstStyle/>
+          <a:p>
+            <a:pPr algn="ctr"/>
+          </a:p>
+        </p:txBody>
+      </p:sp>
+      <p:sp>
+        <p:nvSpPr>
+          <p:cNvPr id="22" name="TextBox 21"/>
+          <p:cNvSpPr txBox="1"/>
+          <p:nvPr/>
+        </p:nvSpPr>
+        <p:spPr>
+          <a:xfrm>
+            <a:off x="1005840" y="7498079"/>
+            <a:ext cx="12801600" cy="228600"/>
+          </a:xfrm>
+          <a:prstGeom prst="rect">
+            <a:avLst/>
+          </a:prstGeom>
+          <a:noFill/>
+        </p:spPr>
+        <p:txBody>
+          <a:bodyPr wrap="square" anchor="t">
+            <a:spAutoFit/>
+          </a:bodyPr>
+          <a:lstStyle/>
+          <a:p>
+            <a:pPr algn="l">
+              <a:spcAft>
+                <a:spcPts val="0"/>
+              </a:spcAft>
+              <a:defRPr sz="1000" b="1">
+                <a:solidFill>
+                  <a:srgbClr val="E8A838"/>
+                </a:solidFill>
+                <a:latin typeface="Inter"/>
+              </a:defRPr>
+            </a:pPr>
+            <a:r>
+              <a:t>Einheitliches Produktwissen reduziert Beratungsfehler, stärkt das Kundenvertrauen und senkt Compliance-Risiken.</a:t>
+            </a:r>
+          </a:p>
+        </p:txBody>
+      </p:sp>
+      <p:sp>
+        <p:nvSpPr>
+          <p:cNvPr id="23" name="TextBox 22"/>
+          <p:cNvSpPr txBox="1"/>
+          <p:nvPr/>
+        </p:nvSpPr>
+        <p:spPr>
+          <a:xfrm>
+            <a:off x="731520" y="7818120"/>
+            <a:ext cx="7315200" cy="274320"/>
+          </a:xfrm>
+          <a:prstGeom prst="rect">
+            <a:avLst/>
+          </a:prstGeom>
+          <a:noFill/>
+        </p:spPr>
+        <p:txBody>
+          <a:bodyPr wrap="square" anchor="t">
+            <a:spAutoFit/>
+          </a:bodyPr>
+          <a:lstStyle/>
+          <a:p>
+            <a:pPr algn="l">
+              <a:spcAft>
+                <a:spcPts val="0"/>
+              </a:spcAft>
+              <a:defRPr sz="900" b="0">
+                <a:solidFill>
+                  <a:srgbClr val="505060"/>
+                </a:solidFill>
+                <a:latin typeface="JetBrains Mono"/>
+              </a:defRPr>
+            </a:pPr>
+            <a:r>
+              <a:t>Vertraulich  ·  Salesteq × Raiffeisen</a:t>
+            </a:r>
+          </a:p>
+        </p:txBody>
+      </p:sp>
+      <p:sp>
+        <p:nvSpPr>
+          <p:cNvPr id="24" name="TextBox 23"/>
+          <p:cNvSpPr txBox="1"/>
+          <p:nvPr/>
+        </p:nvSpPr>
+        <p:spPr>
+          <a:xfrm>
+            <a:off x="12801600" y="7818120"/>
+            <a:ext cx="1097280" cy="274320"/>
+          </a:xfrm>
+          <a:prstGeom prst="rect">
+            <a:avLst/>
+          </a:prstGeom>
+          <a:noFill/>
+        </p:spPr>
+        <p:txBody>
+          <a:bodyPr wrap="square" anchor="t">
+            <a:spAutoFit/>
+          </a:bodyPr>
+          <a:lstStyle/>
+          <a:p>
+            <a:pPr algn="r">
+              <a:spcAft>
+                <a:spcPts val="0"/>
+              </a:spcAft>
+              <a:defRPr sz="900" b="0">
+                <a:solidFill>
+                  <a:srgbClr val="505060"/>
+                </a:solidFill>
+                <a:latin typeface="JetBrains Mono"/>
+              </a:defRPr>
+            </a:pPr>
+            <a:r>
+              <a:t>7 / 10</a:t>
+            </a:r>
+          </a:p>
+        </p:txBody>
+      </p:sp>
+    </p:spTree>
+  </p:cSld>
+  <p:clrMapOvr>
+    <a:masterClrMapping/>
+  </p:clrMapOvr>
+</p:sld>
+</file>
+
+<file path=ppt/slides/slide8.xml><?xml version="1.0" encoding="utf-8"?>
+<p:sld xmlns:a="http://schemas.openxmlformats.org/drawingml/2006/main" xmlns:p="http://schemas.openxmlformats.org/presentationml/2006/main" xmlns:r="http://schemas.openxmlformats.org/officeDocument/2006/relationships">
+  <p:cSld>
+    <p:bg>
+      <p:bgPr>
+        <a:solidFill>
+          <a:srgbClr val="1A1A2E"/>
+        </a:solidFill>
+        <a:effectLst/>
+      </p:bgPr>
+    </p:bg>
+    <p:spTree>
+      <p:nvGrpSpPr>
+        <p:cNvPr id="1" name=""/>
+        <p:cNvGrpSpPr/>
+        <p:nvPr/>
+      </p:nvGrpSpPr>
+      <p:grpSpPr/>
+      <p:sp>
+        <p:nvSpPr>
+          <p:cNvPr id="2" name="TextBox 1"/>
+          <p:cNvSpPr txBox="1"/>
+          <p:nvPr/>
+        </p:nvSpPr>
+        <p:spPr>
+          <a:xfrm>
+            <a:off x="731520" y="457200"/>
+            <a:ext cx="5486400" cy="274320"/>
+          </a:xfrm>
+          <a:prstGeom prst="rect">
+            <a:avLst/>
+          </a:prstGeom>
+          <a:noFill/>
+        </p:spPr>
+        <p:txBody>
+          <a:bodyPr wrap="square" anchor="t">
+            <a:spAutoFit/>
+          </a:bodyPr>
+          <a:lstStyle/>
+          <a:p>
+            <a:pPr algn="l">
+              <a:spcAft>
+                <a:spcPts val="0"/>
+              </a:spcAft>
+              <a:defRPr sz="1000" b="1">
+                <a:solidFill>
+                  <a:srgbClr val="E8A838"/>
+                </a:solidFill>
+                <a:latin typeface="JetBrains Mono"/>
+              </a:defRPr>
+            </a:pPr>
+            <a:r>
+              <a:t>USE CASE D</a:t>
+            </a:r>
+          </a:p>
+        </p:txBody>
+      </p:sp>
+      <p:sp>
+        <p:nvSpPr>
+          <p:cNvPr id="3" name="TextBox 2"/>
+          <p:cNvSpPr txBox="1"/>
+          <p:nvPr/>
+        </p:nvSpPr>
+        <p:spPr>
+          <a:xfrm>
+            <a:off x="731520" y="822960"/>
+            <a:ext cx="12801600" cy="548640"/>
+          </a:xfrm>
+          <a:prstGeom prst="rect">
+            <a:avLst/>
+          </a:prstGeom>
+          <a:noFill/>
+        </p:spPr>
+        <p:txBody>
+          <a:bodyPr wrap="square" anchor="t">
+            <a:spAutoFit/>
+          </a:bodyPr>
+          <a:lstStyle/>
+          <a:p>
+            <a:pPr algn="l">
+              <a:spcAft>
+                <a:spcPts val="0"/>
+              </a:spcAft>
+              <a:defRPr sz="3400" b="0">
+                <a:solidFill>
+                  <a:srgbClr val="FFFFFF"/>
+                </a:solidFill>
+                <a:latin typeface="Inter"/>
+              </a:defRPr>
+            </a:pPr>
+            <a:r>
+              <a:t>Erster Kundenkontakt: Chat und Telefon</a:t>
+            </a:r>
+          </a:p>
+        </p:txBody>
+      </p:sp>
+      <p:sp>
+        <p:nvSpPr>
+          <p:cNvPr id="4" name="TextBox 3"/>
+          <p:cNvSpPr txBox="1"/>
+          <p:nvPr/>
+        </p:nvSpPr>
+        <p:spPr>
+          <a:xfrm>
+            <a:off x="731520" y="1417320"/>
+            <a:ext cx="10972800" cy="365760"/>
+          </a:xfrm>
+          <a:prstGeom prst="rect">
+            <a:avLst/>
+          </a:prstGeom>
+          <a:noFill/>
+        </p:spPr>
+        <p:txBody>
+          <a:bodyPr wrap="square" anchor="t">
+            <a:spAutoFit/>
+          </a:bodyPr>
+          <a:lstStyle/>
+          <a:p>
+            <a:pPr algn="l">
+              <a:spcAft>
+                <a:spcPts val="0"/>
+              </a:spcAft>
+              <a:defRPr sz="1400" b="0">
+                <a:solidFill>
+                  <a:srgbClr val="9CA3AF"/>
+                </a:solidFill>
+                <a:latin typeface="Inter"/>
+              </a:defRPr>
+            </a:pPr>
+            <a:r>
+              <a:t>Routineanfragen binden Beraterkapazität. AI übernimmt den ersten Kontakt und leitet qualifiziert weiter.</a:t>
+            </a:r>
+          </a:p>
+        </p:txBody>
+      </p:sp>
+      <p:sp>
+        <p:nvSpPr>
+          <p:cNvPr id="5" name="Rounded Rectangle 4"/>
+          <p:cNvSpPr/>
+          <p:nvPr/>
+        </p:nvSpPr>
+        <p:spPr>
+          <a:xfrm>
+            <a:off x="731520" y="2103120"/>
+            <a:ext cx="6400800" cy="5303520"/>
+          </a:xfrm>
+          <a:prstGeom prst="roundRect">
+            <a:avLst>
+              <a:gd name="adj" fmla="val 4000"/>
+            </a:avLst>
+          </a:prstGeom>
+          <a:solidFill>
+            <a:srgbClr val="222238"/>
+          </a:solidFill>
+          <a:ln>
+            <a:noFill/>
+          </a:ln>
+        </p:spPr>
+        <p:style>
+          <a:lnRef idx="1">
+            <a:schemeClr val="accent1"/>
+          </a:lnRef>
+          <a:fillRef idx="3">
+            <a:schemeClr val="accent1"/>
+          </a:fillRef>
+          <a:effectRef idx="2">
+            <a:schemeClr val="accent1"/>
+          </a:effectRef>
+          <a:fontRef idx="minor">
+            <a:schemeClr val="lt1"/>
+          </a:fontRef>
+        </p:style>
+        <p:txBody>
+          <a:bodyPr rtlCol="0" anchor="ctr"/>
+          <a:lstStyle/>
+          <a:p>
+            <a:pPr algn="ctr"/>
+          </a:p>
+        </p:txBody>
+      </p:sp>
+      <p:sp>
+        <p:nvSpPr>
+          <p:cNvPr id="6" name="TextBox 5"/>
+          <p:cNvSpPr txBox="1"/>
+          <p:nvPr/>
+        </p:nvSpPr>
+        <p:spPr>
+          <a:xfrm>
+            <a:off x="1005840" y="2240280"/>
+            <a:ext cx="5486400" cy="228600"/>
+          </a:xfrm>
+          <a:prstGeom prst="rect">
+            <a:avLst/>
+          </a:prstGeom>
+          <a:noFill/>
+        </p:spPr>
+        <p:txBody>
+          <a:bodyPr wrap="square" anchor="t">
+            <a:spAutoFit/>
+          </a:bodyPr>
+          <a:lstStyle/>
+          <a:p>
+            <a:pPr algn="l">
+              <a:spcAft>
+                <a:spcPts val="0"/>
+              </a:spcAft>
+              <a:defRPr sz="1000" b="1">
+                <a:solidFill>
+                  <a:srgbClr val="6B7280"/>
+                </a:solidFill>
+                <a:latin typeface="JetBrains Mono"/>
+              </a:defRPr>
+            </a:pPr>
+            <a:r>
+              <a:t>DIE HERAUSFORDERUNG</a:t>
+            </a:r>
+          </a:p>
+        </p:txBody>
+      </p:sp>
+      <p:sp>
+        <p:nvSpPr>
+          <p:cNvPr id="7" name="TextBox 6"/>
+          <p:cNvSpPr txBox="1"/>
+          <p:nvPr/>
+        </p:nvSpPr>
+        <p:spPr>
+          <a:xfrm>
+            <a:off x="1005840" y="2651760"/>
+            <a:ext cx="5486400" cy="274320"/>
+          </a:xfrm>
+          <a:prstGeom prst="rect">
+            <a:avLst/>
+          </a:prstGeom>
+          <a:noFill/>
+        </p:spPr>
+        <p:txBody>
+          <a:bodyPr wrap="square" anchor="t">
+            <a:spAutoFit/>
+          </a:bodyPr>
+          <a:lstStyle/>
+          <a:p>
+            <a:pPr algn="l">
+              <a:spcAft>
+                <a:spcPts val="0"/>
+              </a:spcAft>
+              <a:defRPr sz="1400" b="1">
+                <a:solidFill>
+                  <a:srgbClr val="E8A838"/>
+                </a:solidFill>
+                <a:latin typeface="Inter"/>
+              </a:defRPr>
+            </a:pPr>
+            <a:r>
+              <a:t>Verpasste Anrufe</a:t>
+            </a:r>
+          </a:p>
+        </p:txBody>
+      </p:sp>
+      <p:sp>
+        <p:nvSpPr>
+          <p:cNvPr id="8" name="TextBox 7"/>
+          <p:cNvSpPr txBox="1"/>
+          <p:nvPr/>
+        </p:nvSpPr>
+        <p:spPr>
+          <a:xfrm>
+            <a:off x="1005840" y="2971800"/>
+            <a:ext cx="5669280" cy="1005840"/>
+          </a:xfrm>
+          <a:prstGeom prst="rect">
+            <a:avLst/>
+          </a:prstGeom>
+          <a:noFill/>
+        </p:spPr>
+        <p:txBody>
+          <a:bodyPr wrap="square" anchor="t">
+            <a:spAutoFit/>
+          </a:bodyPr>
+          <a:lstStyle/>
+          <a:p>
+            <a:pPr algn="l">
+              <a:spcAft>
+                <a:spcPts val="0"/>
+              </a:spcAft>
+              <a:defRPr sz="1100" b="0">
+                <a:solidFill>
+                  <a:srgbClr val="9CA3AF"/>
+                </a:solidFill>
+                <a:latin typeface="Inter"/>
+              </a:defRPr>
+            </a:pPr>
+            <a:r>
+              <a:t>Während ein RM berät, klingelt das Telefon.</a:t>
+            </a:r>
+            <a:br/>
+            <a:r>
+              <a:t>Kontoeröffnung, Kartensperrung, Zinskonditionen,</a:t>
+            </a:r>
+            <a:br/>
+            <a:r>
+              <a:t>Öffnungszeiten — Routinefragen, die sofort</a:t>
+            </a:r>
+            <a:br/>
+            <a:r>
+              <a:t>beantwortet werden könnten.</a:t>
+            </a:r>
+          </a:p>
+        </p:txBody>
+      </p:sp>
+      <p:sp>
+        <p:nvSpPr>
+          <p:cNvPr id="9" name="TextBox 8"/>
+          <p:cNvSpPr txBox="1"/>
+          <p:nvPr/>
+        </p:nvSpPr>
+        <p:spPr>
+          <a:xfrm>
+            <a:off x="1005840" y="4206240"/>
+            <a:ext cx="5486400" cy="274320"/>
+          </a:xfrm>
+          <a:prstGeom prst="rect">
+            <a:avLst/>
+          </a:prstGeom>
+          <a:noFill/>
+        </p:spPr>
+        <p:txBody>
+          <a:bodyPr wrap="square" anchor="t">
+            <a:spAutoFit/>
+          </a:bodyPr>
+          <a:lstStyle/>
+          <a:p>
+            <a:pPr algn="l">
+              <a:spcAft>
+                <a:spcPts val="0"/>
+              </a:spcAft>
+              <a:defRPr sz="1400" b="1">
+                <a:solidFill>
+                  <a:srgbClr val="E8A838"/>
+                </a:solidFill>
+                <a:latin typeface="Inter"/>
+              </a:defRPr>
+            </a:pPr>
+            <a:r>
+              <a:t>Tina reicht nicht mehr</a:t>
+            </a:r>
+          </a:p>
+        </p:txBody>
+      </p:sp>
+      <p:sp>
+        <p:nvSpPr>
+          <p:cNvPr id="10" name="TextBox 9"/>
+          <p:cNvSpPr txBox="1"/>
+          <p:nvPr/>
+        </p:nvSpPr>
+        <p:spPr>
+          <a:xfrm>
+            <a:off x="1005840" y="4526279"/>
+            <a:ext cx="5669280" cy="1005840"/>
+          </a:xfrm>
+          <a:prstGeom prst="rect">
+            <a:avLst/>
+          </a:prstGeom>
+          <a:noFill/>
+        </p:spPr>
+        <p:txBody>
+          <a:bodyPr wrap="square" anchor="t">
+            <a:spAutoFit/>
+          </a:bodyPr>
+          <a:lstStyle/>
+          <a:p>
+            <a:pPr algn="l">
+              <a:spcAft>
+                <a:spcPts val="0"/>
+              </a:spcAft>
+              <a:defRPr sz="1100" b="0">
+                <a:solidFill>
+                  <a:srgbClr val="9CA3AF"/>
+                </a:solidFill>
+                <a:latin typeface="Inter"/>
+              </a:defRPr>
+            </a:pPr>
+            <a:r>
+              <a:t>Der bestehende Chatbot (Rasa) beantwortet</a:t>
+            </a:r>
+            <a:br/>
+            <a:r>
+              <a:t>einfache FAQ. Aber: keine echte Konversation,</a:t>
+            </a:r>
+            <a:br/>
+            <a:r>
+              <a:t>kein Sprachverständnis, keine Weiterleitung</a:t>
+            </a:r>
+            <a:br/>
+            <a:r>
+              <a:t>an den richtigen Berater, kein Telefon.</a:t>
+            </a:r>
+          </a:p>
+        </p:txBody>
+      </p:sp>
+      <p:sp>
+        <p:nvSpPr>
+          <p:cNvPr id="11" name="TextBox 10"/>
+          <p:cNvSpPr txBox="1"/>
+          <p:nvPr/>
+        </p:nvSpPr>
+        <p:spPr>
+          <a:xfrm>
+            <a:off x="1005840" y="5760720"/>
+            <a:ext cx="5486400" cy="274320"/>
+          </a:xfrm>
+          <a:prstGeom prst="rect">
+            <a:avLst/>
+          </a:prstGeom>
+          <a:noFill/>
+        </p:spPr>
+        <p:txBody>
+          <a:bodyPr wrap="square" anchor="t">
+            <a:spAutoFit/>
+          </a:bodyPr>
+          <a:lstStyle/>
+          <a:p>
+            <a:pPr algn="l">
+              <a:spcAft>
+                <a:spcPts val="0"/>
+              </a:spcAft>
+              <a:defRPr sz="1400" b="1">
+                <a:solidFill>
+                  <a:srgbClr val="E8A838"/>
+                </a:solidFill>
+                <a:latin typeface="Inter"/>
+              </a:defRPr>
+            </a:pPr>
+            <a:r>
+              <a:t>Drei Sprachen, 896 Standorte</a:t>
+            </a:r>
+          </a:p>
+        </p:txBody>
+      </p:sp>
+      <p:sp>
+        <p:nvSpPr>
+          <p:cNvPr id="12" name="TextBox 11"/>
+          <p:cNvSpPr txBox="1"/>
+          <p:nvPr/>
+        </p:nvSpPr>
+        <p:spPr>
+          <a:xfrm>
+            <a:off x="1005840" y="6080759"/>
+            <a:ext cx="5669280" cy="1005840"/>
+          </a:xfrm>
+          <a:prstGeom prst="rect">
+            <a:avLst/>
+          </a:prstGeom>
+          <a:noFill/>
+        </p:spPr>
+        <p:txBody>
+          <a:bodyPr wrap="square" anchor="t">
+            <a:spAutoFit/>
+          </a:bodyPr>
+          <a:lstStyle/>
+          <a:p>
+            <a:pPr algn="l">
+              <a:spcAft>
+                <a:spcPts val="0"/>
+              </a:spcAft>
+              <a:defRPr sz="1100" b="0">
+                <a:solidFill>
+                  <a:srgbClr val="9CA3AF"/>
+                </a:solidFill>
+                <a:latin typeface="Inter"/>
+              </a:defRPr>
+            </a:pPr>
+            <a:r>
+              <a:t>Jede Filiale bedient DE-, FR- oder IT-sprachige</a:t>
+            </a:r>
+            <a:br/>
+            <a:r>
+              <a:t>Kunden. Ein AI-Agent muss alle drei Sprachen</a:t>
+            </a:r>
+            <a:br/>
+            <a:r>
+              <a:t>fliessend beherrschen — im Chat und am Telefon.</a:t>
+            </a:r>
+            <a:br/>
+            <a:r>
+              <a:t>Personal für alle Sprachen ist teuer.</a:t>
+            </a:r>
+          </a:p>
+        </p:txBody>
+      </p:sp>
+      <p:sp>
+        <p:nvSpPr>
+          <p:cNvPr id="13" name="Rounded Rectangle 12"/>
+          <p:cNvSpPr/>
+          <p:nvPr/>
+        </p:nvSpPr>
+        <p:spPr>
+          <a:xfrm>
+            <a:off x="7589520" y="2103120"/>
+            <a:ext cx="6400800" cy="5303520"/>
+          </a:xfrm>
+          <a:prstGeom prst="roundRect">
+            <a:avLst>
+              <a:gd name="adj" fmla="val 4000"/>
+            </a:avLst>
+          </a:prstGeom>
+          <a:solidFill>
+            <a:srgbClr val="222238"/>
+          </a:solidFill>
+          <a:ln>
+            <a:noFill/>
+          </a:ln>
+        </p:spPr>
+        <p:style>
+          <a:lnRef idx="1">
+            <a:schemeClr val="accent1"/>
+          </a:lnRef>
+          <a:fillRef idx="3">
+            <a:schemeClr val="accent1"/>
+          </a:fillRef>
+          <a:effectRef idx="2">
+            <a:schemeClr val="accent1"/>
+          </a:effectRef>
+          <a:fontRef idx="minor">
+            <a:schemeClr val="lt1"/>
+          </a:fontRef>
+        </p:style>
+        <p:txBody>
+          <a:bodyPr rtlCol="0" anchor="ctr"/>
+          <a:lstStyle/>
+          <a:p>
+            <a:pPr algn="ctr"/>
+          </a:p>
+        </p:txBody>
+      </p:sp>
+      <p:sp>
+        <p:nvSpPr>
+          <p:cNvPr id="14" name="TextBox 13"/>
+          <p:cNvSpPr txBox="1"/>
+          <p:nvPr/>
+        </p:nvSpPr>
+        <p:spPr>
+          <a:xfrm>
+            <a:off x="7863840" y="2240280"/>
+            <a:ext cx="5486400" cy="228600"/>
+          </a:xfrm>
+          <a:prstGeom prst="rect">
+            <a:avLst/>
+          </a:prstGeom>
+          <a:noFill/>
+        </p:spPr>
+        <p:txBody>
+          <a:bodyPr wrap="square" anchor="t">
+            <a:spAutoFit/>
+          </a:bodyPr>
+          <a:lstStyle/>
+          <a:p>
+            <a:pPr algn="l">
+              <a:spcAft>
+                <a:spcPts val="0"/>
+              </a:spcAft>
+              <a:defRPr sz="1000" b="1">
+                <a:solidFill>
+                  <a:srgbClr val="E8A838"/>
+                </a:solidFill>
+                <a:latin typeface="JetBrains Mono"/>
+              </a:defRPr>
+            </a:pPr>
+            <a:r>
+              <a:t>WAS AI VERÄNDERN KANN</a:t>
+            </a:r>
+          </a:p>
+        </p:txBody>
+      </p:sp>
+      <p:sp>
+        <p:nvSpPr>
+          <p:cNvPr id="15" name="TextBox 14"/>
+          <p:cNvSpPr txBox="1"/>
+          <p:nvPr/>
+        </p:nvSpPr>
+        <p:spPr>
+          <a:xfrm>
+            <a:off x="7863840" y="2651760"/>
+            <a:ext cx="5486400" cy="274320"/>
+          </a:xfrm>
+          <a:prstGeom prst="rect">
+            <a:avLst/>
+          </a:prstGeom>
+          <a:noFill/>
+        </p:spPr>
+        <p:txBody>
+          <a:bodyPr wrap="square" anchor="t">
+            <a:spAutoFit/>
+          </a:bodyPr>
+          <a:lstStyle/>
+          <a:p>
+            <a:pPr algn="l">
+              <a:spcAft>
+                <a:spcPts val="0"/>
+              </a:spcAft>
+              <a:defRPr sz="1200" b="1">
+                <a:solidFill>
+                  <a:srgbClr val="FFFFFF"/>
+                </a:solidFill>
+                <a:latin typeface="Inter"/>
+              </a:defRPr>
+            </a:pPr>
+            <a:r>
+              <a:t>Intelligenter Erstkontakt</a:t>
+            </a:r>
+          </a:p>
+        </p:txBody>
+      </p:sp>
+      <p:sp>
+        <p:nvSpPr>
+          <p:cNvPr id="16" name="TextBox 15"/>
+          <p:cNvSpPr txBox="1"/>
+          <p:nvPr/>
+        </p:nvSpPr>
+        <p:spPr>
+          <a:xfrm>
+            <a:off x="7863840" y="2926079"/>
+            <a:ext cx="5669280" cy="1005840"/>
+          </a:xfrm>
+          <a:prstGeom prst="rect">
+            <a:avLst/>
+          </a:prstGeom>
+          <a:noFill/>
+        </p:spPr>
+        <p:txBody>
+          <a:bodyPr wrap="square" anchor="t">
+            <a:spAutoFit/>
+          </a:bodyPr>
+          <a:lstStyle/>
+          <a:p>
+            <a:pPr algn="l">
+              <a:spcAft>
+                <a:spcPts val="0"/>
+              </a:spcAft>
+              <a:defRPr sz="1100" b="0">
+                <a:solidFill>
+                  <a:srgbClr val="9CA3AF"/>
+                </a:solidFill>
+                <a:latin typeface="Inter"/>
+              </a:defRPr>
+            </a:pPr>
+            <a:r>
+              <a:t>AI beantwortet Routineanfragen auf der Website —</a:t>
+            </a:r>
+            <a:br/>
+            <a:r>
+              <a:t>Konto, Karten, Zinsen, Filialinfo. Erkennt, wenn</a:t>
+            </a:r>
+            <a:br/>
+            <a:r>
+              <a:t>ein Anliegen komplex wird (Hypothek, Vorsorge)</a:t>
+            </a:r>
+            <a:br/>
+            <a:r>
+              <a:t>und leitet an den richtigen RM weiter.</a:t>
+            </a:r>
+          </a:p>
+        </p:txBody>
+      </p:sp>
+      <p:sp>
+        <p:nvSpPr>
+          <p:cNvPr id="17" name="TextBox 16"/>
+          <p:cNvSpPr txBox="1"/>
+          <p:nvPr/>
+        </p:nvSpPr>
+        <p:spPr>
+          <a:xfrm>
+            <a:off x="7863840" y="4206240"/>
+            <a:ext cx="5486400" cy="274320"/>
+          </a:xfrm>
+          <a:prstGeom prst="rect">
+            <a:avLst/>
+          </a:prstGeom>
+          <a:noFill/>
+        </p:spPr>
+        <p:txBody>
+          <a:bodyPr wrap="square" anchor="t">
+            <a:spAutoFit/>
+          </a:bodyPr>
+          <a:lstStyle/>
+          <a:p>
+            <a:pPr algn="l">
+              <a:spcAft>
+                <a:spcPts val="0"/>
+              </a:spcAft>
+              <a:defRPr sz="1200" b="1">
+                <a:solidFill>
+                  <a:srgbClr val="FFFFFF"/>
+                </a:solidFill>
+                <a:latin typeface="Inter"/>
+              </a:defRPr>
+            </a:pPr>
+            <a:r>
+              <a:t>Eigene Voice AI</a:t>
+            </a:r>
+          </a:p>
+        </p:txBody>
+      </p:sp>
+      <p:sp>
+        <p:nvSpPr>
+          <p:cNvPr id="18" name="TextBox 17"/>
+          <p:cNvSpPr txBox="1"/>
+          <p:nvPr/>
+        </p:nvSpPr>
+        <p:spPr>
+          <a:xfrm>
+            <a:off x="7863840" y="4480559"/>
+            <a:ext cx="5669280" cy="1005840"/>
+          </a:xfrm>
+          <a:prstGeom prst="rect">
+            <a:avLst/>
+          </a:prstGeom>
+          <a:noFill/>
+        </p:spPr>
+        <p:txBody>
+          <a:bodyPr wrap="square" anchor="t">
+            <a:spAutoFit/>
+          </a:bodyPr>
+          <a:lstStyle/>
+          <a:p>
+            <a:pPr algn="l">
+              <a:spcAft>
+                <a:spcPts val="0"/>
+              </a:spcAft>
+              <a:defRPr sz="1100" b="0">
+                <a:solidFill>
+                  <a:srgbClr val="9CA3AF"/>
+                </a:solidFill>
+                <a:latin typeface="Inter"/>
+              </a:defRPr>
+            </a:pPr>
+            <a:r>
+              <a:t>Salesteq hat eine eigene Sprach-Engine (nicht</a:t>
+            </a:r>
+            <a:br/>
+            <a:r>
+              <a:t>ElevenLabs/Deepgram). Läuft bereits in Produktion:</a:t>
+            </a:r>
+            <a:br/>
+            <a:r>
+              <a:t>Arabische Dialekte für BMW/Naghi Saudi-Arabien.</a:t>
+            </a:r>
+            <a:br/>
+            <a:r>
+              <a:t>DE/FR/IT ist technisch gelöst.</a:t>
+            </a:r>
+          </a:p>
+        </p:txBody>
+      </p:sp>
+      <p:sp>
+        <p:nvSpPr>
+          <p:cNvPr id="19" name="TextBox 18"/>
+          <p:cNvSpPr txBox="1"/>
+          <p:nvPr/>
+        </p:nvSpPr>
+        <p:spPr>
+          <a:xfrm>
+            <a:off x="7863840" y="5760720"/>
+            <a:ext cx="5486400" cy="274320"/>
+          </a:xfrm>
+          <a:prstGeom prst="rect">
+            <a:avLst/>
+          </a:prstGeom>
+          <a:noFill/>
+        </p:spPr>
+        <p:txBody>
+          <a:bodyPr wrap="square" anchor="t">
+            <a:spAutoFit/>
+          </a:bodyPr>
+          <a:lstStyle/>
+          <a:p>
+            <a:pPr algn="l">
+              <a:spcAft>
+                <a:spcPts val="0"/>
+              </a:spcAft>
+              <a:defRPr sz="1200" b="1">
+                <a:solidFill>
+                  <a:srgbClr val="FFFFFF"/>
+                </a:solidFill>
+                <a:latin typeface="Inter"/>
+              </a:defRPr>
+            </a:pPr>
+            <a:r>
+              <a:t>Qualifizierte Weiterleitung</a:t>
+            </a:r>
+          </a:p>
+        </p:txBody>
+      </p:sp>
+      <p:sp>
+        <p:nvSpPr>
+          <p:cNvPr id="20" name="TextBox 19"/>
+          <p:cNvSpPr txBox="1"/>
+          <p:nvPr/>
+        </p:nvSpPr>
+        <p:spPr>
+          <a:xfrm>
+            <a:off x="7863840" y="6035040"/>
+            <a:ext cx="5669280" cy="1005840"/>
+          </a:xfrm>
+          <a:prstGeom prst="rect">
+            <a:avLst/>
+          </a:prstGeom>
+          <a:noFill/>
+        </p:spPr>
+        <p:txBody>
+          <a:bodyPr wrap="square" anchor="t">
+            <a:spAutoFit/>
+          </a:bodyPr>
+          <a:lstStyle/>
+          <a:p>
+            <a:pPr algn="l">
+              <a:spcAft>
+                <a:spcPts val="0"/>
+              </a:spcAft>
+              <a:defRPr sz="1100" b="0">
+                <a:solidFill>
+                  <a:srgbClr val="9CA3AF"/>
+                </a:solidFill>
+                <a:latin typeface="Inter"/>
+              </a:defRPr>
+            </a:pPr>
+            <a:r>
+              <a:t>Der AI-Agent sammelt Kontext (Name, Anliegen,</a:t>
+            </a:r>
+            <a:br/>
+            <a:r>
+              <a:t>Sprache, Dringlichkeit) und übergibt an den</a:t>
+            </a:r>
+            <a:br/>
+            <a:r>
+              <a:t>Berater — mit Zusammenfassung. Der RM startet</a:t>
+            </a:r>
+            <a:br/>
+            <a:r>
+              <a:t>nicht bei null, sondern informiert.</a:t>
+            </a:r>
+          </a:p>
+        </p:txBody>
+      </p:sp>
+      <p:sp>
+        <p:nvSpPr>
+          <p:cNvPr id="21" name="Rounded Rectangle 20"/>
+          <p:cNvSpPr/>
+          <p:nvPr/>
+        </p:nvSpPr>
+        <p:spPr>
+          <a:xfrm>
+            <a:off x="731520" y="7498079"/>
+            <a:ext cx="13167360" cy="228600"/>
+          </a:xfrm>
+          <a:prstGeom prst="roundRect">
+            <a:avLst>
+              <a:gd name="adj" fmla="val 4000"/>
+            </a:avLst>
+          </a:prstGeom>
+          <a:solidFill>
+            <a:srgbClr val="2D2D45"/>
+          </a:solidFill>
+          <a:ln>
+            <a:noFill/>
+          </a:ln>
+        </p:spPr>
+        <p:style>
+          <a:lnRef idx="1">
+            <a:schemeClr val="accent1"/>
+          </a:lnRef>
+          <a:fillRef idx="3">
+            <a:schemeClr val="accent1"/>
+          </a:fillRef>
+          <a:effectRef idx="2">
+            <a:schemeClr val="accent1"/>
+          </a:effectRef>
+          <a:fontRef idx="minor">
+            <a:schemeClr val="lt1"/>
+          </a:fontRef>
+        </p:style>
+        <p:txBody>
+          <a:bodyPr rtlCol="0" anchor="ctr"/>
+          <a:lstStyle/>
+          <a:p>
+            <a:pPr algn="ctr"/>
+          </a:p>
+        </p:txBody>
+      </p:sp>
+      <p:sp>
+        <p:nvSpPr>
+          <p:cNvPr id="22" name="TextBox 21"/>
+          <p:cNvSpPr txBox="1"/>
+          <p:nvPr/>
+        </p:nvSpPr>
+        <p:spPr>
+          <a:xfrm>
+            <a:off x="1005840" y="7498079"/>
+            <a:ext cx="12801600" cy="228600"/>
+          </a:xfrm>
+          <a:prstGeom prst="rect">
+            <a:avLst/>
+          </a:prstGeom>
+          <a:noFill/>
+        </p:spPr>
+        <p:txBody>
+          <a:bodyPr wrap="square" anchor="t">
+            <a:spAutoFit/>
+          </a:bodyPr>
+          <a:lstStyle/>
+          <a:p>
+            <a:pPr algn="l">
+              <a:spcAft>
+                <a:spcPts val="0"/>
+              </a:spcAft>
+              <a:defRPr sz="1000" b="1">
+                <a:solidFill>
+                  <a:srgbClr val="E8A838"/>
+                </a:solidFill>
+                <a:latin typeface="Inter"/>
+              </a:defRPr>
+            </a:pPr>
+            <a:r>
+              <a:t>Chatbot Tina sparte 10'000 Anrufe in 6 Monaten. Ein AI-Agent mit Voice und Konversationsfähigkeit kann das verzehnfachen.</a:t>
+            </a:r>
+          </a:p>
+        </p:txBody>
+      </p:sp>
+      <p:sp>
+        <p:nvSpPr>
+          <p:cNvPr id="23" name="TextBox 22"/>
+          <p:cNvSpPr txBox="1"/>
+          <p:nvPr/>
+        </p:nvSpPr>
+        <p:spPr>
+          <a:xfrm>
+            <a:off x="731520" y="7818120"/>
+            <a:ext cx="7315200" cy="274320"/>
+          </a:xfrm>
+          <a:prstGeom prst="rect">
+            <a:avLst/>
+          </a:prstGeom>
+          <a:noFill/>
+        </p:spPr>
+        <p:txBody>
+          <a:bodyPr wrap="square" anchor="t">
+            <a:spAutoFit/>
+          </a:bodyPr>
+          <a:lstStyle/>
+          <a:p>
+            <a:pPr algn="l">
+              <a:spcAft>
+                <a:spcPts val="0"/>
+              </a:spcAft>
+              <a:defRPr sz="900" b="0">
+                <a:solidFill>
+                  <a:srgbClr val="505060"/>
+                </a:solidFill>
+                <a:latin typeface="JetBrains Mono"/>
+              </a:defRPr>
+            </a:pPr>
+            <a:r>
+              <a:t>Vertraulich  ·  Salesteq × Raiffeisen</a:t>
+            </a:r>
+          </a:p>
+        </p:txBody>
+      </p:sp>
+      <p:sp>
+        <p:nvSpPr>
+          <p:cNvPr id="24" name="TextBox 23"/>
+          <p:cNvSpPr txBox="1"/>
+          <p:nvPr/>
+        </p:nvSpPr>
+        <p:spPr>
+          <a:xfrm>
+            <a:off x="12801600" y="7818120"/>
+            <a:ext cx="1097280" cy="274320"/>
+          </a:xfrm>
+          <a:prstGeom prst="rect">
+            <a:avLst/>
+          </a:prstGeom>
+          <a:noFill/>
+        </p:spPr>
+        <p:txBody>
+          <a:bodyPr wrap="square" anchor="t">
+            <a:spAutoFit/>
+          </a:bodyPr>
+          <a:lstStyle/>
+          <a:p>
+            <a:pPr algn="r">
+              <a:spcAft>
+                <a:spcPts val="0"/>
+              </a:spcAft>
+              <a:defRPr sz="900" b="0">
+                <a:solidFill>
+                  <a:srgbClr val="505060"/>
+                </a:solidFill>
+                <a:latin typeface="JetBrains Mono"/>
+              </a:defRPr>
+            </a:pPr>
+            <a:r>
+              <a:t>8 / 10</a:t>
+            </a:r>
+          </a:p>
+        </p:txBody>
+      </p:sp>
+    </p:spTree>
+  </p:cSld>
+  <p:clrMapOvr>
+    <a:masterClrMapping/>
+  </p:clrMapOvr>
+</p:sld>
+</file>
+
+<file path=ppt/slides/slide9.xml><?xml version="1.0" encoding="utf-8"?>
 <p:sld xmlns:a="http://schemas.openxmlformats.org/drawingml/2006/main" xmlns:p="http://schemas.openxmlformats.org/presentationml/2006/main" xmlns:r="http://schemas.openxmlformats.org/officeDocument/2006/relationships">
   <p:cSld>
     <p:bg>
@@ -9876,1142 +15508,7 @@
               </a:defRPr>
             </a:pPr>
             <a:r>
-              <a:t>5 / 6</a:t>
-            </a:r>
-          </a:p>
-        </p:txBody>
-      </p:sp>
-    </p:spTree>
-  </p:cSld>
-  <p:clrMapOvr>
-    <a:masterClrMapping/>
-  </p:clrMapOvr>
-</p:sld>
-</file>
-
-<file path=ppt/slides/slide6.xml><?xml version="1.0" encoding="utf-8"?>
-<p:sld xmlns:a="http://schemas.openxmlformats.org/drawingml/2006/main" xmlns:p="http://schemas.openxmlformats.org/presentationml/2006/main" xmlns:r="http://schemas.openxmlformats.org/officeDocument/2006/relationships">
-  <p:cSld>
-    <p:bg>
-      <p:bgPr>
-        <a:solidFill>
-          <a:srgbClr val="FFFFFF"/>
-        </a:solidFill>
-        <a:effectLst/>
-      </p:bgPr>
-    </p:bg>
-    <p:spTree>
-      <p:nvGrpSpPr>
-        <p:cNvPr id="1" name=""/>
-        <p:cNvGrpSpPr/>
-        <p:nvPr/>
-      </p:nvGrpSpPr>
-      <p:grpSpPr/>
-      <p:sp>
-        <p:nvSpPr>
-          <p:cNvPr id="2" name="TextBox 1"/>
-          <p:cNvSpPr txBox="1"/>
-          <p:nvPr/>
-        </p:nvSpPr>
-        <p:spPr>
-          <a:xfrm>
-            <a:off x="731520" y="457200"/>
-            <a:ext cx="5486400" cy="274320"/>
-          </a:xfrm>
-          <a:prstGeom prst="rect">
-            <a:avLst/>
-          </a:prstGeom>
-          <a:noFill/>
-        </p:spPr>
-        <p:txBody>
-          <a:bodyPr wrap="square" anchor="t">
-            <a:spAutoFit/>
-          </a:bodyPr>
-          <a:lstStyle/>
-          <a:p>
-            <a:pPr algn="l">
-              <a:spcAft>
-                <a:spcPts val="0"/>
-              </a:spcAft>
-              <a:defRPr sz="1000" b="1">
-                <a:solidFill>
-                  <a:srgbClr val="E8A838"/>
-                </a:solidFill>
-                <a:latin typeface="JetBrains Mono"/>
-              </a:defRPr>
-            </a:pPr>
-            <a:r>
-              <a:t>ZUSAMMENARBEIT</a:t>
-            </a:r>
-          </a:p>
-        </p:txBody>
-      </p:sp>
-      <p:sp>
-        <p:nvSpPr>
-          <p:cNvPr id="3" name="TextBox 2"/>
-          <p:cNvSpPr txBox="1"/>
-          <p:nvPr/>
-        </p:nvSpPr>
-        <p:spPr>
-          <a:xfrm>
-            <a:off x="731520" y="822960"/>
-            <a:ext cx="12801600" cy="548640"/>
-          </a:xfrm>
-          <a:prstGeom prst="rect">
-            <a:avLst/>
-          </a:prstGeom>
-          <a:noFill/>
-        </p:spPr>
-        <p:txBody>
-          <a:bodyPr wrap="square" anchor="t">
-            <a:spAutoFit/>
-          </a:bodyPr>
-          <a:lstStyle/>
-          <a:p>
-            <a:pPr algn="l">
-              <a:spcAft>
-                <a:spcPts val="0"/>
-              </a:spcAft>
-              <a:defRPr sz="3400" b="0">
-                <a:solidFill>
-                  <a:srgbClr val="1A1A2E"/>
-                </a:solidFill>
-                <a:latin typeface="Inter"/>
-              </a:defRPr>
-            </a:pPr>
-            <a:r>
-              <a:t>Warum Salesteq</a:t>
-            </a:r>
-          </a:p>
-        </p:txBody>
-      </p:sp>
-      <p:sp>
-        <p:nvSpPr>
-          <p:cNvPr id="4" name="Rounded Rectangle 3"/>
-          <p:cNvSpPr/>
-          <p:nvPr/>
-        </p:nvSpPr>
-        <p:spPr>
-          <a:xfrm>
-            <a:off x="731520" y="1554480"/>
-            <a:ext cx="13167360" cy="1828800"/>
-          </a:xfrm>
-          <a:prstGeom prst="roundRect">
-            <a:avLst>
-              <a:gd name="adj" fmla="val 4000"/>
-            </a:avLst>
-          </a:prstGeom>
-          <a:solidFill>
-            <a:srgbClr val="F0EFE8"/>
-          </a:solidFill>
-          <a:ln>
-            <a:noFill/>
-          </a:ln>
-        </p:spPr>
-        <p:style>
-          <a:lnRef idx="1">
-            <a:schemeClr val="accent1"/>
-          </a:lnRef>
-          <a:fillRef idx="3">
-            <a:schemeClr val="accent1"/>
-          </a:fillRef>
-          <a:effectRef idx="2">
-            <a:schemeClr val="accent1"/>
-          </a:effectRef>
-          <a:fontRef idx="minor">
-            <a:schemeClr val="lt1"/>
-          </a:fontRef>
-        </p:style>
-        <p:txBody>
-          <a:bodyPr rtlCol="0" anchor="ctr"/>
-          <a:lstStyle/>
-          <a:p>
-            <a:pPr algn="ctr"/>
-          </a:p>
-        </p:txBody>
-      </p:sp>
-      <p:sp>
-        <p:nvSpPr>
-          <p:cNvPr id="5" name="TextBox 4"/>
-          <p:cNvSpPr txBox="1"/>
-          <p:nvPr/>
-        </p:nvSpPr>
-        <p:spPr>
-          <a:xfrm>
-            <a:off x="1005840" y="1691640"/>
-            <a:ext cx="3657600" cy="228600"/>
-          </a:xfrm>
-          <a:prstGeom prst="rect">
-            <a:avLst/>
-          </a:prstGeom>
-          <a:noFill/>
-        </p:spPr>
-        <p:txBody>
-          <a:bodyPr wrap="square" anchor="t">
-            <a:spAutoFit/>
-          </a:bodyPr>
-          <a:lstStyle/>
-          <a:p>
-            <a:pPr algn="l">
-              <a:spcAft>
-                <a:spcPts val="0"/>
-              </a:spcAft>
-              <a:defRPr sz="1100" b="1">
-                <a:solidFill>
-                  <a:srgbClr val="1A1A2E"/>
-                </a:solidFill>
-                <a:latin typeface="Inter"/>
-              </a:defRPr>
-            </a:pPr>
-            <a:r>
-              <a:t>Austausch vom März 2026</a:t>
-            </a:r>
-          </a:p>
-        </p:txBody>
-      </p:sp>
-      <p:sp>
-        <p:nvSpPr>
-          <p:cNvPr id="6" name="TextBox 5"/>
-          <p:cNvSpPr txBox="1"/>
-          <p:nvPr/>
-        </p:nvSpPr>
-        <p:spPr>
-          <a:xfrm>
-            <a:off x="1005840" y="2011680"/>
-            <a:ext cx="12618720" cy="731520"/>
-          </a:xfrm>
-          <a:prstGeom prst="rect">
-            <a:avLst/>
-          </a:prstGeom>
-          <a:noFill/>
-        </p:spPr>
-        <p:txBody>
-          <a:bodyPr wrap="square">
-            <a:spAutoFit/>
-          </a:bodyPr>
-          <a:lstStyle/>
-          <a:p>
-            <a:pPr algn="l">
-              <a:lnSpc>
-                <a:spcPts val="1380"/>
-              </a:lnSpc>
-              <a:spcAft>
-                <a:spcPts val="300"/>
-              </a:spcAft>
-              <a:defRPr sz="1200" b="0">
-                <a:solidFill>
-                  <a:srgbClr val="6B7280"/>
-                </a:solidFill>
-                <a:latin typeface="Inter"/>
-              </a:defRPr>
-            </a:pPr>
-            <a:r>
-              <a:t>Im Gespräch mit Ivo Schneider und Lukas Seger haben wir vereinbart, ein einfaches Szenario</a:t>
-            </a:r>
-          </a:p>
-          <a:p>
-            <a:pPr algn="l">
-              <a:lnSpc>
-                <a:spcPts val="1380"/>
-              </a:lnSpc>
-              <a:spcAft>
-                <a:spcPts val="300"/>
-              </a:spcAft>
-              <a:defRPr sz="1200" b="0">
-                <a:solidFill>
-                  <a:srgbClr val="6B7280"/>
-                </a:solidFill>
-                <a:latin typeface="Inter"/>
-              </a:defRPr>
-            </a:pPr>
-            <a:r>
-              <a:t>vorzubereiten — basierend auf unserem Ansatz bei Allianz Suisse.</a:t>
-            </a:r>
-          </a:p>
-        </p:txBody>
-      </p:sp>
-      <p:sp>
-        <p:nvSpPr>
-          <p:cNvPr id="7" name="TextBox 6"/>
-          <p:cNvSpPr txBox="1"/>
-          <p:nvPr/>
-        </p:nvSpPr>
-        <p:spPr>
-          <a:xfrm>
-            <a:off x="1005840" y="2606040"/>
-            <a:ext cx="12801600" cy="182880"/>
-          </a:xfrm>
-          <a:prstGeom prst="rect">
-            <a:avLst/>
-          </a:prstGeom>
-          <a:noFill/>
-        </p:spPr>
-        <p:txBody>
-          <a:bodyPr wrap="square" anchor="t">
-            <a:spAutoFit/>
-          </a:bodyPr>
-          <a:lstStyle/>
-          <a:p>
-            <a:pPr algn="l">
-              <a:spcAft>
-                <a:spcPts val="0"/>
-              </a:spcAft>
-              <a:defRPr sz="1100" b="1">
-                <a:solidFill>
-                  <a:srgbClr val="1A1A2E"/>
-                </a:solidFill>
-                <a:latin typeface="Inter"/>
-              </a:defRPr>
-            </a:pPr>
-            <a:r>
-              <a:t>Vorgehen in 3 Schritten: Salesteq macht einen Vorschlag</a:t>
-            </a:r>
-          </a:p>
-        </p:txBody>
-      </p:sp>
-      <p:sp>
-        <p:nvSpPr>
-          <p:cNvPr id="8" name="TextBox 7"/>
-          <p:cNvSpPr txBox="1"/>
-          <p:nvPr/>
-        </p:nvSpPr>
-        <p:spPr>
-          <a:xfrm>
-            <a:off x="1005840" y="2834640"/>
-            <a:ext cx="12618720" cy="548640"/>
-          </a:xfrm>
-          <a:prstGeom prst="rect">
-            <a:avLst/>
-          </a:prstGeom>
-          <a:noFill/>
-        </p:spPr>
-        <p:txBody>
-          <a:bodyPr wrap="square">
-            <a:spAutoFit/>
-          </a:bodyPr>
-          <a:lstStyle/>
-          <a:p>
-            <a:pPr algn="l">
-              <a:lnSpc>
-                <a:spcPts val="1264"/>
-              </a:lnSpc>
-              <a:spcAft>
-                <a:spcPts val="300"/>
-              </a:spcAft>
-              <a:defRPr sz="1100" b="0">
-                <a:solidFill>
-                  <a:srgbClr val="2D2D2D"/>
-                </a:solidFill>
-                <a:latin typeface="Inter"/>
-              </a:defRPr>
-            </a:pPr>
-            <a:r>
-              <a:t>Schritt 1: Big Picture aufzeigen — «Zukunft des Vertriebs mit AI bei Raiffeisen»</a:t>
-            </a:r>
-          </a:p>
-          <a:p>
-            <a:pPr algn="l">
-              <a:lnSpc>
-                <a:spcPts val="1264"/>
-              </a:lnSpc>
-              <a:spcAft>
-                <a:spcPts val="300"/>
-              </a:spcAft>
-              <a:defRPr sz="1100" b="0">
-                <a:solidFill>
-                  <a:srgbClr val="2D2D2D"/>
-                </a:solidFill>
-                <a:latin typeface="Inter"/>
-              </a:defRPr>
-            </a:pPr>
-            <a:r>
-              <a:t>Schritt 2: Ausarbeitung eines konkreten Use Case (z.B. RM-Training, proaktive Ansprache)</a:t>
-            </a:r>
-          </a:p>
-          <a:p>
-            <a:pPr algn="l">
-              <a:lnSpc>
-                <a:spcPts val="1264"/>
-              </a:lnSpc>
-              <a:spcAft>
-                <a:spcPts val="300"/>
-              </a:spcAft>
-              <a:defRPr sz="1100" b="0">
-                <a:solidFill>
-                  <a:srgbClr val="2D2D2D"/>
-                </a:solidFill>
-                <a:latin typeface="Inter"/>
-              </a:defRPr>
-            </a:pPr>
-            <a:r>
-              <a:t>Schritt 3: Optional — Proof-of-Concept mit einer Raiffeisenbank</a:t>
-            </a:r>
-          </a:p>
-        </p:txBody>
-      </p:sp>
-      <p:sp>
-        <p:nvSpPr>
-          <p:cNvPr id="9" name="Rounded Rectangle 8"/>
-          <p:cNvSpPr/>
-          <p:nvPr/>
-        </p:nvSpPr>
-        <p:spPr>
-          <a:xfrm>
-            <a:off x="731520" y="3657600"/>
-            <a:ext cx="6400800" cy="2926080"/>
-          </a:xfrm>
-          <a:prstGeom prst="roundRect">
-            <a:avLst>
-              <a:gd name="adj" fmla="val 4000"/>
-            </a:avLst>
-          </a:prstGeom>
-          <a:solidFill>
-            <a:srgbClr val="F0EFE8"/>
-          </a:solidFill>
-          <a:ln>
-            <a:noFill/>
-          </a:ln>
-        </p:spPr>
-        <p:style>
-          <a:lnRef idx="1">
-            <a:schemeClr val="accent1"/>
-          </a:lnRef>
-          <a:fillRef idx="3">
-            <a:schemeClr val="accent1"/>
-          </a:fillRef>
-          <a:effectRef idx="2">
-            <a:schemeClr val="accent1"/>
-          </a:effectRef>
-          <a:fontRef idx="minor">
-            <a:schemeClr val="lt1"/>
-          </a:fontRef>
-        </p:style>
-        <p:txBody>
-          <a:bodyPr rtlCol="0" anchor="ctr"/>
-          <a:lstStyle/>
-          <a:p>
-            <a:pPr algn="ctr"/>
-          </a:p>
-        </p:txBody>
-      </p:sp>
-      <p:sp>
-        <p:nvSpPr>
-          <p:cNvPr id="10" name="TextBox 9"/>
-          <p:cNvSpPr txBox="1"/>
-          <p:nvPr/>
-        </p:nvSpPr>
-        <p:spPr>
-          <a:xfrm>
-            <a:off x="1005840" y="3794760"/>
-            <a:ext cx="5486400" cy="228600"/>
-          </a:xfrm>
-          <a:prstGeom prst="rect">
-            <a:avLst/>
-          </a:prstGeom>
-          <a:noFill/>
-        </p:spPr>
-        <p:txBody>
-          <a:bodyPr wrap="square" anchor="t">
-            <a:spAutoFit/>
-          </a:bodyPr>
-          <a:lstStyle/>
-          <a:p>
-            <a:pPr algn="l">
-              <a:spcAft>
-                <a:spcPts val="0"/>
-              </a:spcAft>
-              <a:defRPr sz="1300" b="1">
-                <a:solidFill>
-                  <a:srgbClr val="1A1A2E"/>
-                </a:solidFill>
-                <a:latin typeface="Inter"/>
-              </a:defRPr>
-            </a:pPr>
-            <a:r>
-              <a:t>Was Salesteq mitbringt</a:t>
-            </a:r>
-          </a:p>
-        </p:txBody>
-      </p:sp>
-      <p:sp>
-        <p:nvSpPr>
-          <p:cNvPr id="11" name="TextBox 10"/>
-          <p:cNvSpPr txBox="1"/>
-          <p:nvPr/>
-        </p:nvSpPr>
-        <p:spPr>
-          <a:xfrm>
-            <a:off x="1188720" y="4160520"/>
-            <a:ext cx="5669280" cy="365760"/>
-          </a:xfrm>
-          <a:prstGeom prst="rect">
-            <a:avLst/>
-          </a:prstGeom>
-          <a:noFill/>
-        </p:spPr>
-        <p:txBody>
-          <a:bodyPr wrap="square" anchor="t">
-            <a:spAutoFit/>
-          </a:bodyPr>
-          <a:lstStyle/>
-          <a:p>
-            <a:pPr algn="l">
-              <a:spcAft>
-                <a:spcPts val="0"/>
-              </a:spcAft>
-              <a:defRPr sz="1100" b="0">
-                <a:solidFill>
-                  <a:srgbClr val="2D2D2D"/>
-                </a:solidFill>
-                <a:latin typeface="Inter"/>
-              </a:defRPr>
-            </a:pPr>
-            <a:r>
-              <a:t>✓  Produktionserfahrung: Naghi/BMW (15'000+ MA, Voice AI)</a:t>
-            </a:r>
-          </a:p>
-        </p:txBody>
-      </p:sp>
-      <p:sp>
-        <p:nvSpPr>
-          <p:cNvPr id="12" name="TextBox 11"/>
-          <p:cNvSpPr txBox="1"/>
-          <p:nvPr/>
-        </p:nvSpPr>
-        <p:spPr>
-          <a:xfrm>
-            <a:off x="1188720" y="4572000"/>
-            <a:ext cx="5669280" cy="365760"/>
-          </a:xfrm>
-          <a:prstGeom prst="rect">
-            <a:avLst/>
-          </a:prstGeom>
-          <a:noFill/>
-        </p:spPr>
-        <p:txBody>
-          <a:bodyPr wrap="square" anchor="t">
-            <a:spAutoFit/>
-          </a:bodyPr>
-          <a:lstStyle/>
-          <a:p>
-            <a:pPr algn="l">
-              <a:spcAft>
-                <a:spcPts val="0"/>
-              </a:spcAft>
-              <a:defRPr sz="1100" b="0">
-                <a:solidFill>
-                  <a:srgbClr val="2D2D2D"/>
-                </a:solidFill>
-                <a:latin typeface="Inter"/>
-              </a:defRPr>
-            </a:pPr>
-            <a:r>
-              <a:t>✓  Pilot mit Allianz Suisse (Analytics &amp; Kundenforschung)</a:t>
-            </a:r>
-          </a:p>
-        </p:txBody>
-      </p:sp>
-      <p:sp>
-        <p:nvSpPr>
-          <p:cNvPr id="13" name="TextBox 12"/>
-          <p:cNvSpPr txBox="1"/>
-          <p:nvPr/>
-        </p:nvSpPr>
-        <p:spPr>
-          <a:xfrm>
-            <a:off x="1188720" y="4983480"/>
-            <a:ext cx="5669280" cy="365760"/>
-          </a:xfrm>
-          <a:prstGeom prst="rect">
-            <a:avLst/>
-          </a:prstGeom>
-          <a:noFill/>
-        </p:spPr>
-        <p:txBody>
-          <a:bodyPr wrap="square" anchor="t">
-            <a:spAutoFit/>
-          </a:bodyPr>
-          <a:lstStyle/>
-          <a:p>
-            <a:pPr algn="l">
-              <a:spcAft>
-                <a:spcPts val="0"/>
-              </a:spcAft>
-              <a:defRPr sz="1100" b="0">
-                <a:solidFill>
-                  <a:srgbClr val="2D2D2D"/>
-                </a:solidFill>
-                <a:latin typeface="Inter"/>
-              </a:defRPr>
-            </a:pPr>
-            <a:r>
-              <a:t>✓  Eigene Sprach-Engine — kein API-Wrapper, eigene Modelle</a:t>
-            </a:r>
-          </a:p>
-        </p:txBody>
-      </p:sp>
-      <p:sp>
-        <p:nvSpPr>
-          <p:cNvPr id="14" name="TextBox 13"/>
-          <p:cNvSpPr txBox="1"/>
-          <p:nvPr/>
-        </p:nvSpPr>
-        <p:spPr>
-          <a:xfrm>
-            <a:off x="1188720" y="5394960"/>
-            <a:ext cx="5669280" cy="365760"/>
-          </a:xfrm>
-          <a:prstGeom prst="rect">
-            <a:avLst/>
-          </a:prstGeom>
-          <a:noFill/>
-        </p:spPr>
-        <p:txBody>
-          <a:bodyPr wrap="square" anchor="t">
-            <a:spAutoFit/>
-          </a:bodyPr>
-          <a:lstStyle/>
-          <a:p>
-            <a:pPr algn="l">
-              <a:spcAft>
-                <a:spcPts val="0"/>
-              </a:spcAft>
-              <a:defRPr sz="1100" b="0">
-                <a:solidFill>
-                  <a:srgbClr val="2D2D2D"/>
-                </a:solidFill>
-                <a:latin typeface="Inter"/>
-              </a:defRPr>
-            </a:pPr>
-            <a:r>
-              <a:t>✓  Mandantenfähig: 212 Banken = 212 isolierte Mandanten</a:t>
-            </a:r>
-          </a:p>
-        </p:txBody>
-      </p:sp>
-      <p:sp>
-        <p:nvSpPr>
-          <p:cNvPr id="15" name="TextBox 14"/>
-          <p:cNvSpPr txBox="1"/>
-          <p:nvPr/>
-        </p:nvSpPr>
-        <p:spPr>
-          <a:xfrm>
-            <a:off x="1188720" y="5806440"/>
-            <a:ext cx="5669280" cy="365760"/>
-          </a:xfrm>
-          <a:prstGeom prst="rect">
-            <a:avLst/>
-          </a:prstGeom>
-          <a:noFill/>
-        </p:spPr>
-        <p:txBody>
-          <a:bodyPr wrap="square" anchor="t">
-            <a:spAutoFit/>
-          </a:bodyPr>
-          <a:lstStyle/>
-          <a:p>
-            <a:pPr algn="l">
-              <a:spcAft>
-                <a:spcPts val="0"/>
-              </a:spcAft>
-              <a:defRPr sz="1100" b="0">
-                <a:solidFill>
-                  <a:srgbClr val="2D2D2D"/>
-                </a:solidFill>
-                <a:latin typeface="Inter"/>
-              </a:defRPr>
-            </a:pPr>
-            <a:r>
-              <a:t>✓  Schweizer Unternehmen (Zug), direkter Zugang zu Gründern</a:t>
-            </a:r>
-          </a:p>
-        </p:txBody>
-      </p:sp>
-      <p:sp>
-        <p:nvSpPr>
-          <p:cNvPr id="16" name="Rounded Rectangle 15"/>
-          <p:cNvSpPr/>
-          <p:nvPr/>
-        </p:nvSpPr>
-        <p:spPr>
-          <a:xfrm>
-            <a:off x="7589520" y="3657600"/>
-            <a:ext cx="6400800" cy="2926080"/>
-          </a:xfrm>
-          <a:prstGeom prst="roundRect">
-            <a:avLst>
-              <a:gd name="adj" fmla="val 4000"/>
-            </a:avLst>
-          </a:prstGeom>
-          <a:solidFill>
-            <a:srgbClr val="F0EFE8"/>
-          </a:solidFill>
-          <a:ln>
-            <a:noFill/>
-          </a:ln>
-        </p:spPr>
-        <p:style>
-          <a:lnRef idx="1">
-            <a:schemeClr val="accent1"/>
-          </a:lnRef>
-          <a:fillRef idx="3">
-            <a:schemeClr val="accent1"/>
-          </a:fillRef>
-          <a:effectRef idx="2">
-            <a:schemeClr val="accent1"/>
-          </a:effectRef>
-          <a:fontRef idx="minor">
-            <a:schemeClr val="lt1"/>
-          </a:fontRef>
-        </p:style>
-        <p:txBody>
-          <a:bodyPr rtlCol="0" anchor="ctr"/>
-          <a:lstStyle/>
-          <a:p>
-            <a:pPr algn="ctr"/>
-          </a:p>
-        </p:txBody>
-      </p:sp>
-      <p:sp>
-        <p:nvSpPr>
-          <p:cNvPr id="17" name="TextBox 16"/>
-          <p:cNvSpPr txBox="1"/>
-          <p:nvPr/>
-        </p:nvSpPr>
-        <p:spPr>
-          <a:xfrm>
-            <a:off x="7863840" y="3794760"/>
-            <a:ext cx="5486400" cy="228600"/>
-          </a:xfrm>
-          <a:prstGeom prst="rect">
-            <a:avLst/>
-          </a:prstGeom>
-          <a:noFill/>
-        </p:spPr>
-        <p:txBody>
-          <a:bodyPr wrap="square" anchor="t">
-            <a:spAutoFit/>
-          </a:bodyPr>
-          <a:lstStyle/>
-          <a:p>
-            <a:pPr algn="l">
-              <a:spcAft>
-                <a:spcPts val="0"/>
-              </a:spcAft>
-              <a:defRPr sz="1300" b="1">
-                <a:solidFill>
-                  <a:srgbClr val="1A1A2E"/>
-                </a:solidFill>
-                <a:latin typeface="Inter"/>
-              </a:defRPr>
-            </a:pPr>
-            <a:r>
-              <a:t>Was Salesteq nicht ist</a:t>
-            </a:r>
-          </a:p>
-        </p:txBody>
-      </p:sp>
-      <p:sp>
-        <p:nvSpPr>
-          <p:cNvPr id="18" name="TextBox 17"/>
-          <p:cNvSpPr txBox="1"/>
-          <p:nvPr/>
-        </p:nvSpPr>
-        <p:spPr>
-          <a:xfrm>
-            <a:off x="8046720" y="4160520"/>
-            <a:ext cx="5669280" cy="365760"/>
-          </a:xfrm>
-          <a:prstGeom prst="rect">
-            <a:avLst/>
-          </a:prstGeom>
-          <a:noFill/>
-        </p:spPr>
-        <p:txBody>
-          <a:bodyPr wrap="square" anchor="t">
-            <a:spAutoFit/>
-          </a:bodyPr>
-          <a:lstStyle/>
-          <a:p>
-            <a:pPr algn="l">
-              <a:spcAft>
-                <a:spcPts val="0"/>
-              </a:spcAft>
-              <a:defRPr sz="1100" b="0">
-                <a:solidFill>
-                  <a:srgbClr val="2D2D2D"/>
-                </a:solidFill>
-                <a:latin typeface="Inter"/>
-              </a:defRPr>
-            </a:pPr>
-            <a:r>
-              <a:t>✗  Kein CRM-Ersatz (BSI, Salesforce bleiben bestehen)</a:t>
-            </a:r>
-          </a:p>
-        </p:txBody>
-      </p:sp>
-      <p:sp>
-        <p:nvSpPr>
-          <p:cNvPr id="19" name="TextBox 18"/>
-          <p:cNvSpPr txBox="1"/>
-          <p:nvPr/>
-        </p:nvSpPr>
-        <p:spPr>
-          <a:xfrm>
-            <a:off x="8046720" y="4572000"/>
-            <a:ext cx="5669280" cy="365760"/>
-          </a:xfrm>
-          <a:prstGeom prst="rect">
-            <a:avLst/>
-          </a:prstGeom>
-          <a:noFill/>
-        </p:spPr>
-        <p:txBody>
-          <a:bodyPr wrap="square" anchor="t">
-            <a:spAutoFit/>
-          </a:bodyPr>
-          <a:lstStyle/>
-          <a:p>
-            <a:pPr algn="l">
-              <a:spcAft>
-                <a:spcPts val="0"/>
-              </a:spcAft>
-              <a:defRPr sz="1100" b="0">
-                <a:solidFill>
-                  <a:srgbClr val="2D2D2D"/>
-                </a:solidFill>
-                <a:latin typeface="Inter"/>
-              </a:defRPr>
-            </a:pPr>
-            <a:r>
-              <a:t>✗  Kein Copilot-Konkurrent (ergänzt, ersetzt nicht)</a:t>
-            </a:r>
-          </a:p>
-        </p:txBody>
-      </p:sp>
-      <p:sp>
-        <p:nvSpPr>
-          <p:cNvPr id="20" name="TextBox 19"/>
-          <p:cNvSpPr txBox="1"/>
-          <p:nvPr/>
-        </p:nvSpPr>
-        <p:spPr>
-          <a:xfrm>
-            <a:off x="8046720" y="4983480"/>
-            <a:ext cx="5669280" cy="365760"/>
-          </a:xfrm>
-          <a:prstGeom prst="rect">
-            <a:avLst/>
-          </a:prstGeom>
-          <a:noFill/>
-        </p:spPr>
-        <p:txBody>
-          <a:bodyPr wrap="square" anchor="t">
-            <a:spAutoFit/>
-          </a:bodyPr>
-          <a:lstStyle/>
-          <a:p>
-            <a:pPr algn="l">
-              <a:spcAft>
-                <a:spcPts val="0"/>
-              </a:spcAft>
-              <a:defRPr sz="1100" b="0">
-                <a:solidFill>
-                  <a:srgbClr val="2D2D2D"/>
-                </a:solidFill>
-                <a:latin typeface="Inter"/>
-              </a:defRPr>
-            </a:pPr>
-            <a:r>
-              <a:t>✗  Kein fertiges Bankenprodukt (wir bauen gemeinsam)</a:t>
-            </a:r>
-          </a:p>
-        </p:txBody>
-      </p:sp>
-      <p:sp>
-        <p:nvSpPr>
-          <p:cNvPr id="21" name="TextBox 20"/>
-          <p:cNvSpPr txBox="1"/>
-          <p:nvPr/>
-        </p:nvSpPr>
-        <p:spPr>
-          <a:xfrm>
-            <a:off x="8046720" y="5394960"/>
-            <a:ext cx="5669280" cy="365760"/>
-          </a:xfrm>
-          <a:prstGeom prst="rect">
-            <a:avLst/>
-          </a:prstGeom>
-          <a:noFill/>
-        </p:spPr>
-        <p:txBody>
-          <a:bodyPr wrap="square" anchor="t">
-            <a:spAutoFit/>
-          </a:bodyPr>
-          <a:lstStyle/>
-          <a:p>
-            <a:pPr algn="l">
-              <a:spcAft>
-                <a:spcPts val="0"/>
-              </a:spcAft>
-              <a:defRPr sz="1100" b="0">
-                <a:solidFill>
-                  <a:srgbClr val="2D2D2D"/>
-                </a:solidFill>
-                <a:latin typeface="Inter"/>
-              </a:defRPr>
-            </a:pPr>
-            <a:r>
-              <a:t>✗  Keine Blackbox — volle Nachvollziehbarkeit aller AI-Aktionen</a:t>
-            </a:r>
-          </a:p>
-        </p:txBody>
-      </p:sp>
-      <p:sp>
-        <p:nvSpPr>
-          <p:cNvPr id="22" name="Rounded Rectangle 21"/>
-          <p:cNvSpPr/>
-          <p:nvPr/>
-        </p:nvSpPr>
-        <p:spPr>
-          <a:xfrm>
-            <a:off x="731520" y="6858000"/>
-            <a:ext cx="13167360" cy="914400"/>
-          </a:xfrm>
-          <a:prstGeom prst="roundRect">
-            <a:avLst>
-              <a:gd name="adj" fmla="val 4000"/>
-            </a:avLst>
-          </a:prstGeom>
-          <a:solidFill>
-            <a:srgbClr val="1A1A2E"/>
-          </a:solidFill>
-          <a:ln>
-            <a:noFill/>
-          </a:ln>
-        </p:spPr>
-        <p:style>
-          <a:lnRef idx="1">
-            <a:schemeClr val="accent1"/>
-          </a:lnRef>
-          <a:fillRef idx="3">
-            <a:schemeClr val="accent1"/>
-          </a:fillRef>
-          <a:effectRef idx="2">
-            <a:schemeClr val="accent1"/>
-          </a:effectRef>
-          <a:fontRef idx="minor">
-            <a:schemeClr val="lt1"/>
-          </a:fontRef>
-        </p:style>
-        <p:txBody>
-          <a:bodyPr rtlCol="0" anchor="ctr"/>
-          <a:lstStyle/>
-          <a:p>
-            <a:pPr algn="ctr"/>
-          </a:p>
-        </p:txBody>
-      </p:sp>
-      <p:sp>
-        <p:nvSpPr>
-          <p:cNvPr id="23" name="TextBox 22"/>
-          <p:cNvSpPr txBox="1"/>
-          <p:nvPr/>
-        </p:nvSpPr>
-        <p:spPr>
-          <a:xfrm>
-            <a:off x="1005840" y="6949440"/>
-            <a:ext cx="11887200" cy="320040"/>
-          </a:xfrm>
-          <a:prstGeom prst="rect">
-            <a:avLst/>
-          </a:prstGeom>
-          <a:noFill/>
-        </p:spPr>
-        <p:txBody>
-          <a:bodyPr wrap="square" anchor="t">
-            <a:spAutoFit/>
-          </a:bodyPr>
-          <a:lstStyle/>
-          <a:p>
-            <a:pPr algn="l">
-              <a:spcAft>
-                <a:spcPts val="0"/>
-              </a:spcAft>
-              <a:defRPr sz="1400" b="1">
-                <a:solidFill>
-                  <a:srgbClr val="E8A838"/>
-                </a:solidFill>
-                <a:latin typeface="Inter"/>
-              </a:defRPr>
-            </a:pPr>
-            <a:r>
-              <a:t>Kein Druck, keine Eile.</a:t>
-            </a:r>
-          </a:p>
-        </p:txBody>
-      </p:sp>
-      <p:sp>
-        <p:nvSpPr>
-          <p:cNvPr id="24" name="TextBox 23"/>
-          <p:cNvSpPr txBox="1"/>
-          <p:nvPr/>
-        </p:nvSpPr>
-        <p:spPr>
-          <a:xfrm>
-            <a:off x="1005840" y="7269480"/>
-            <a:ext cx="11887200" cy="320040"/>
-          </a:xfrm>
-          <a:prstGeom prst="rect">
-            <a:avLst/>
-          </a:prstGeom>
-          <a:noFill/>
-        </p:spPr>
-        <p:txBody>
-          <a:bodyPr wrap="square" anchor="t">
-            <a:spAutoFit/>
-          </a:bodyPr>
-          <a:lstStyle/>
-          <a:p>
-            <a:pPr algn="l">
-              <a:spcAft>
-                <a:spcPts val="0"/>
-              </a:spcAft>
-              <a:defRPr sz="1200" b="0">
-                <a:solidFill>
-                  <a:srgbClr val="9CA3AF"/>
-                </a:solidFill>
-                <a:latin typeface="Inter"/>
-              </a:defRPr>
-            </a:pPr>
-            <a:r>
-              <a:t>Wenn das Szenario Sinn macht, finden wir den richtigen Anfang. Wenn nicht, war es ein gutes Gespräch.</a:t>
-            </a:r>
-          </a:p>
-        </p:txBody>
-      </p:sp>
-      <p:sp>
-        <p:nvSpPr>
-          <p:cNvPr id="25" name="TextBox 24"/>
-          <p:cNvSpPr txBox="1"/>
-          <p:nvPr/>
-        </p:nvSpPr>
-        <p:spPr>
-          <a:xfrm>
-            <a:off x="9144000" y="6949440"/>
-            <a:ext cx="4572000" cy="640080"/>
-          </a:xfrm>
-          <a:prstGeom prst="rect">
-            <a:avLst/>
-          </a:prstGeom>
-          <a:noFill/>
-        </p:spPr>
-        <p:txBody>
-          <a:bodyPr wrap="square" anchor="t">
-            <a:spAutoFit/>
-          </a:bodyPr>
-          <a:lstStyle/>
-          <a:p>
-            <a:pPr algn="r">
-              <a:spcAft>
-                <a:spcPts val="0"/>
-              </a:spcAft>
-              <a:defRPr sz="1000" b="0">
-                <a:solidFill>
-                  <a:srgbClr val="9CA3AF"/>
-                </a:solidFill>
-                <a:latin typeface="Inter"/>
-              </a:defRPr>
-            </a:pPr>
-            <a:r>
-              <a:t>Viktor Andreas</a:t>
-            </a:r>
-            <a:br/>
-            <a:r>
-              <a:t>viktor@salesteq.com</a:t>
-            </a:r>
-            <a:br/>
-            <a:r>
-              <a:t>salesteq.com</a:t>
-            </a:r>
-          </a:p>
-        </p:txBody>
-      </p:sp>
-      <p:sp>
-        <p:nvSpPr>
-          <p:cNvPr id="26" name="TextBox 25"/>
-          <p:cNvSpPr txBox="1"/>
-          <p:nvPr/>
-        </p:nvSpPr>
-        <p:spPr>
-          <a:xfrm>
-            <a:off x="731520" y="7818120"/>
-            <a:ext cx="7315200" cy="274320"/>
-          </a:xfrm>
-          <a:prstGeom prst="rect">
-            <a:avLst/>
-          </a:prstGeom>
-          <a:noFill/>
-        </p:spPr>
-        <p:txBody>
-          <a:bodyPr wrap="square" anchor="t">
-            <a:spAutoFit/>
-          </a:bodyPr>
-          <a:lstStyle/>
-          <a:p>
-            <a:pPr algn="l">
-              <a:spcAft>
-                <a:spcPts val="0"/>
-              </a:spcAft>
-              <a:defRPr sz="900" b="0">
-                <a:solidFill>
-                  <a:srgbClr val="6B7280"/>
-                </a:solidFill>
-                <a:latin typeface="JetBrains Mono"/>
-              </a:defRPr>
-            </a:pPr>
-            <a:r>
-              <a:t>Vertraulich  ·  Salesteq × Raiffeisen</a:t>
-            </a:r>
-          </a:p>
-        </p:txBody>
-      </p:sp>
-      <p:sp>
-        <p:nvSpPr>
-          <p:cNvPr id="27" name="TextBox 26"/>
-          <p:cNvSpPr txBox="1"/>
-          <p:nvPr/>
-        </p:nvSpPr>
-        <p:spPr>
-          <a:xfrm>
-            <a:off x="12801600" y="7818120"/>
-            <a:ext cx="1097280" cy="274320"/>
-          </a:xfrm>
-          <a:prstGeom prst="rect">
-            <a:avLst/>
-          </a:prstGeom>
-          <a:noFill/>
-        </p:spPr>
-        <p:txBody>
-          <a:bodyPr wrap="square" anchor="t">
-            <a:spAutoFit/>
-          </a:bodyPr>
-          <a:lstStyle/>
-          <a:p>
-            <a:pPr algn="r">
-              <a:spcAft>
-                <a:spcPts val="0"/>
-              </a:spcAft>
-              <a:defRPr sz="900" b="0">
-                <a:solidFill>
-                  <a:srgbClr val="6B7280"/>
-                </a:solidFill>
-                <a:latin typeface="JetBrains Mono"/>
-              </a:defRPr>
-            </a:pPr>
-            <a:r>
-              <a:t>6 / 6</a:t>
+              <a:t>9 / 10</a:t>
             </a:r>
           </a:p>
         </p:txBody>
